--- a/decks/LabMgmt_03_Patient-Safety-Error-Investigation.pptx
+++ b/decks/LabMgmt_03_Patient-Safety-Error-Investigation.pptx
@@ -26,9 +26,13 @@
     <p:sldId id="274" r:id="rId20"/>
     <p:sldId id="275" r:id="rId21"/>
     <p:sldId id="276" r:id="rId22"/>
+    <p:sldId id="277" r:id="rId23"/>
+    <p:sldId id="278" r:id="rId24"/>
+    <p:sldId id="279" r:id="rId25"/>
+    <p:sldId id="280" r:id="rId26"/>
   </p:sldIdLst>
   <p:notesMasterIdLst>
-    <p:notesMasterId r:id="rId23"/>
+    <p:notesMasterId r:id="rId27"/>
   </p:notesMasterIdLst>
   <p:sldSz cx="12191695" cy="6858000"/>
   <p:notesSz cx="6858000" cy="12191695"/>
@@ -1690,6 +1694,358 @@
             <a:fld id="{F7021451-1387-4CA6-816F-3879F97B5CBC}" type="slidenum">
               <a:rPr lang="en-US"/>
               <a:t>21</a:t>
+            </a:fld>
+            <a:endParaRPr lang="en-US"/>
+          </a:p>
+        </p:txBody>
+      </p:sp>
+    </p:spTree>
+    <p:extLst>
+      <p:ext uri="{BB962C8B-B14F-4D97-AF65-F5344CB8AC3E}">
+        <p14:creationId xmlns:p14="http://schemas.microsoft.com/office/powerpoint/2010/main" val="1024086991"/>
+      </p:ext>
+    </p:extLst>
+  </p:cSld>
+  <p:clrMapOvr>
+    <a:masterClrMapping/>
+  </p:clrMapOvr>
+</p:notes>
+</file>
+
+<file path=ppt/notesSlides/notesSlide22.xml><?xml version="1.0" encoding="utf-8"?>
+<p:notes xmlns:a="http://schemas.openxmlformats.org/drawingml/2006/main" xmlns:r="http://schemas.openxmlformats.org/officeDocument/2006/relationships" xmlns:p="http://schemas.openxmlformats.org/presentationml/2006/main">
+  <p:cSld>
+    <p:spTree>
+      <p:nvGrpSpPr>
+        <p:cNvPr id="1" name=""/>
+        <p:cNvGrpSpPr/>
+        <p:nvPr/>
+      </p:nvGrpSpPr>
+      <p:grpSpPr>
+        <a:xfrm>
+          <a:off x="0" y="0"/>
+          <a:ext cx="0" cy="0"/>
+          <a:chOff x="0" y="0"/>
+          <a:chExt cx="0" cy="0"/>
+        </a:xfrm>
+      </p:grpSpPr>
+      <p:sp>
+        <p:nvSpPr>
+          <p:cNvPr id="2" name="Slide Image Placeholder 1"/>
+          <p:cNvSpPr>
+            <a:spLocks noGrp="1" noRot="1" noChangeAspect="1"/>
+          </p:cNvSpPr>
+          <p:nvPr>
+            <p:ph type="sldImg"/>
+          </p:nvPr>
+        </p:nvSpPr>
+        <p:spPr/>
+      </p:sp>
+      <p:sp>
+        <p:nvSpPr>
+          <p:cNvPr id="3" name="Notes Placeholder 2"/>
+          <p:cNvSpPr>
+            <a:spLocks noGrp="1"/>
+          </p:cNvSpPr>
+          <p:nvPr>
+            <p:ph type="body" idx="1"/>
+          </p:nvPr>
+        </p:nvSpPr>
+        <p:spPr/>
+        <p:txBody>
+          <a:bodyPr/>
+          <a:lstStyle/>
+          <a:p>
+            <a:r>
+              <a:rPr lang="en-US" dirty="0"/>
+              <a:t/>
+            </a:r>
+            <a:endParaRPr lang="en-US" dirty="0"/>
+          </a:p>
+        </p:txBody>
+      </p:sp>
+      <p:sp>
+        <p:nvSpPr>
+          <p:cNvPr id="4" name="Slide Number Placeholder 3"/>
+          <p:cNvSpPr>
+            <a:spLocks noGrp="1"/>
+          </p:cNvSpPr>
+          <p:nvPr>
+            <p:ph type="sldNum" sz="quarter" idx="10"/>
+          </p:nvPr>
+        </p:nvSpPr>
+        <p:spPr/>
+        <p:txBody>
+          <a:bodyPr/>
+          <a:lstStyle/>
+          <a:p>
+            <a:fld id="{F7021451-1387-4CA6-816F-3879F97B5CBC}" type="slidenum">
+              <a:rPr lang="en-US"/>
+              <a:t>22</a:t>
+            </a:fld>
+            <a:endParaRPr lang="en-US"/>
+          </a:p>
+        </p:txBody>
+      </p:sp>
+    </p:spTree>
+    <p:extLst>
+      <p:ext uri="{BB962C8B-B14F-4D97-AF65-F5344CB8AC3E}">
+        <p14:creationId xmlns:p14="http://schemas.microsoft.com/office/powerpoint/2010/main" val="1024086991"/>
+      </p:ext>
+    </p:extLst>
+  </p:cSld>
+  <p:clrMapOvr>
+    <a:masterClrMapping/>
+  </p:clrMapOvr>
+</p:notes>
+</file>
+
+<file path=ppt/notesSlides/notesSlide23.xml><?xml version="1.0" encoding="utf-8"?>
+<p:notes xmlns:a="http://schemas.openxmlformats.org/drawingml/2006/main" xmlns:r="http://schemas.openxmlformats.org/officeDocument/2006/relationships" xmlns:p="http://schemas.openxmlformats.org/presentationml/2006/main">
+  <p:cSld>
+    <p:spTree>
+      <p:nvGrpSpPr>
+        <p:cNvPr id="1" name=""/>
+        <p:cNvGrpSpPr/>
+        <p:nvPr/>
+      </p:nvGrpSpPr>
+      <p:grpSpPr>
+        <a:xfrm>
+          <a:off x="0" y="0"/>
+          <a:ext cx="0" cy="0"/>
+          <a:chOff x="0" y="0"/>
+          <a:chExt cx="0" cy="0"/>
+        </a:xfrm>
+      </p:grpSpPr>
+      <p:sp>
+        <p:nvSpPr>
+          <p:cNvPr id="2" name="Slide Image Placeholder 1"/>
+          <p:cNvSpPr>
+            <a:spLocks noGrp="1" noRot="1" noChangeAspect="1"/>
+          </p:cNvSpPr>
+          <p:nvPr>
+            <p:ph type="sldImg"/>
+          </p:nvPr>
+        </p:nvSpPr>
+        <p:spPr/>
+      </p:sp>
+      <p:sp>
+        <p:nvSpPr>
+          <p:cNvPr id="3" name="Notes Placeholder 2"/>
+          <p:cNvSpPr>
+            <a:spLocks noGrp="1"/>
+          </p:cNvSpPr>
+          <p:nvPr>
+            <p:ph type="body" idx="1"/>
+          </p:nvPr>
+        </p:nvSpPr>
+        <p:spPr/>
+        <p:txBody>
+          <a:bodyPr/>
+          <a:lstStyle/>
+          <a:p>
+            <a:r>
+              <a:rPr lang="en-US" dirty="0"/>
+              <a:t/>
+            </a:r>
+            <a:endParaRPr lang="en-US" dirty="0"/>
+          </a:p>
+        </p:txBody>
+      </p:sp>
+      <p:sp>
+        <p:nvSpPr>
+          <p:cNvPr id="4" name="Slide Number Placeholder 3"/>
+          <p:cNvSpPr>
+            <a:spLocks noGrp="1"/>
+          </p:cNvSpPr>
+          <p:nvPr>
+            <p:ph type="sldNum" sz="quarter" idx="10"/>
+          </p:nvPr>
+        </p:nvSpPr>
+        <p:spPr/>
+        <p:txBody>
+          <a:bodyPr/>
+          <a:lstStyle/>
+          <a:p>
+            <a:fld id="{F7021451-1387-4CA6-816F-3879F97B5CBC}" type="slidenum">
+              <a:rPr lang="en-US"/>
+              <a:t>23</a:t>
+            </a:fld>
+            <a:endParaRPr lang="en-US"/>
+          </a:p>
+        </p:txBody>
+      </p:sp>
+    </p:spTree>
+    <p:extLst>
+      <p:ext uri="{BB962C8B-B14F-4D97-AF65-F5344CB8AC3E}">
+        <p14:creationId xmlns:p14="http://schemas.microsoft.com/office/powerpoint/2010/main" val="1024086991"/>
+      </p:ext>
+    </p:extLst>
+  </p:cSld>
+  <p:clrMapOvr>
+    <a:masterClrMapping/>
+  </p:clrMapOvr>
+</p:notes>
+</file>
+
+<file path=ppt/notesSlides/notesSlide24.xml><?xml version="1.0" encoding="utf-8"?>
+<p:notes xmlns:a="http://schemas.openxmlformats.org/drawingml/2006/main" xmlns:r="http://schemas.openxmlformats.org/officeDocument/2006/relationships" xmlns:p="http://schemas.openxmlformats.org/presentationml/2006/main">
+  <p:cSld>
+    <p:spTree>
+      <p:nvGrpSpPr>
+        <p:cNvPr id="1" name=""/>
+        <p:cNvGrpSpPr/>
+        <p:nvPr/>
+      </p:nvGrpSpPr>
+      <p:grpSpPr>
+        <a:xfrm>
+          <a:off x="0" y="0"/>
+          <a:ext cx="0" cy="0"/>
+          <a:chOff x="0" y="0"/>
+          <a:chExt cx="0" cy="0"/>
+        </a:xfrm>
+      </p:grpSpPr>
+      <p:sp>
+        <p:nvSpPr>
+          <p:cNvPr id="2" name="Slide Image Placeholder 1"/>
+          <p:cNvSpPr>
+            <a:spLocks noGrp="1" noRot="1" noChangeAspect="1"/>
+          </p:cNvSpPr>
+          <p:nvPr>
+            <p:ph type="sldImg"/>
+          </p:nvPr>
+        </p:nvSpPr>
+        <p:spPr/>
+      </p:sp>
+      <p:sp>
+        <p:nvSpPr>
+          <p:cNvPr id="3" name="Notes Placeholder 2"/>
+          <p:cNvSpPr>
+            <a:spLocks noGrp="1"/>
+          </p:cNvSpPr>
+          <p:nvPr>
+            <p:ph type="body" idx="1"/>
+          </p:nvPr>
+        </p:nvSpPr>
+        <p:spPr/>
+        <p:txBody>
+          <a:bodyPr/>
+          <a:lstStyle/>
+          <a:p>
+            <a:r>
+              <a:rPr lang="en-US" dirty="0"/>
+              <a:t/>
+            </a:r>
+            <a:endParaRPr lang="en-US" dirty="0"/>
+          </a:p>
+        </p:txBody>
+      </p:sp>
+      <p:sp>
+        <p:nvSpPr>
+          <p:cNvPr id="4" name="Slide Number Placeholder 3"/>
+          <p:cNvSpPr>
+            <a:spLocks noGrp="1"/>
+          </p:cNvSpPr>
+          <p:nvPr>
+            <p:ph type="sldNum" sz="quarter" idx="10"/>
+          </p:nvPr>
+        </p:nvSpPr>
+        <p:spPr/>
+        <p:txBody>
+          <a:bodyPr/>
+          <a:lstStyle/>
+          <a:p>
+            <a:fld id="{F7021451-1387-4CA6-816F-3879F97B5CBC}" type="slidenum">
+              <a:rPr lang="en-US"/>
+              <a:t>24</a:t>
+            </a:fld>
+            <a:endParaRPr lang="en-US"/>
+          </a:p>
+        </p:txBody>
+      </p:sp>
+    </p:spTree>
+    <p:extLst>
+      <p:ext uri="{BB962C8B-B14F-4D97-AF65-F5344CB8AC3E}">
+        <p14:creationId xmlns:p14="http://schemas.microsoft.com/office/powerpoint/2010/main" val="1024086991"/>
+      </p:ext>
+    </p:extLst>
+  </p:cSld>
+  <p:clrMapOvr>
+    <a:masterClrMapping/>
+  </p:clrMapOvr>
+</p:notes>
+</file>
+
+<file path=ppt/notesSlides/notesSlide25.xml><?xml version="1.0" encoding="utf-8"?>
+<p:notes xmlns:a="http://schemas.openxmlformats.org/drawingml/2006/main" xmlns:r="http://schemas.openxmlformats.org/officeDocument/2006/relationships" xmlns:p="http://schemas.openxmlformats.org/presentationml/2006/main">
+  <p:cSld>
+    <p:spTree>
+      <p:nvGrpSpPr>
+        <p:cNvPr id="1" name=""/>
+        <p:cNvGrpSpPr/>
+        <p:nvPr/>
+      </p:nvGrpSpPr>
+      <p:grpSpPr>
+        <a:xfrm>
+          <a:off x="0" y="0"/>
+          <a:ext cx="0" cy="0"/>
+          <a:chOff x="0" y="0"/>
+          <a:chExt cx="0" cy="0"/>
+        </a:xfrm>
+      </p:grpSpPr>
+      <p:sp>
+        <p:nvSpPr>
+          <p:cNvPr id="2" name="Slide Image Placeholder 1"/>
+          <p:cNvSpPr>
+            <a:spLocks noGrp="1" noRot="1" noChangeAspect="1"/>
+          </p:cNvSpPr>
+          <p:nvPr>
+            <p:ph type="sldImg"/>
+          </p:nvPr>
+        </p:nvSpPr>
+        <p:spPr/>
+      </p:sp>
+      <p:sp>
+        <p:nvSpPr>
+          <p:cNvPr id="3" name="Notes Placeholder 2"/>
+          <p:cNvSpPr>
+            <a:spLocks noGrp="1"/>
+          </p:cNvSpPr>
+          <p:nvPr>
+            <p:ph type="body" idx="1"/>
+          </p:nvPr>
+        </p:nvSpPr>
+        <p:spPr/>
+        <p:txBody>
+          <a:bodyPr/>
+          <a:lstStyle/>
+          <a:p>
+            <a:r>
+              <a:rPr lang="en-US" dirty="0"/>
+              <a:t/>
+            </a:r>
+            <a:endParaRPr lang="en-US" dirty="0"/>
+          </a:p>
+        </p:txBody>
+      </p:sp>
+      <p:sp>
+        <p:nvSpPr>
+          <p:cNvPr id="4" name="Slide Number Placeholder 3"/>
+          <p:cNvSpPr>
+            <a:spLocks noGrp="1"/>
+          </p:cNvSpPr>
+          <p:nvPr>
+            <p:ph type="sldNum" sz="quarter" idx="10"/>
+          </p:nvPr>
+        </p:nvSpPr>
+        <p:spPr/>
+        <p:txBody>
+          <a:bodyPr/>
+          <a:lstStyle/>
+          <a:p>
+            <a:fld id="{F7021451-1387-4CA6-816F-3879F97B5CBC}" type="slidenum">
+              <a:rPr lang="en-US"/>
+              <a:t>25</a:t>
             </a:fld>
             <a:endParaRPr lang="en-US"/>
           </a:p>
@@ -2815,7 +3171,7 @@
                 <a:ea typeface="Calibri" pitchFamily="34" charset="-122"/>
                 <a:cs typeface="Calibri" pitchFamily="34" charset="-120"/>
               </a:rPr>
-              <a:t>LAB MANAGEMENT &amp; QUALITY  ·  LECTURE 3 OF 5</a:t>
+              <a:t>LABORATORY MANAGEMENT  ·  LECTURE 3 OF 5</a:t>
             </a:r>
             <a:endParaRPr lang="en-US" sz="1300" dirty="0"/>
           </a:p>
@@ -2893,7 +3249,7 @@
                 <a:ea typeface="Calibri" pitchFamily="34" charset="-122"/>
                 <a:cs typeface="Calibri" pitchFamily="34" charset="-120"/>
               </a:rPr>
-              <a:t>Root-Cause Analysis, Just Culture, and Systems Thinking</a:t>
+              <a:t>Just Culture, Root-Cause Analysis, and Reducing Harm</a:t>
             </a:r>
             <a:endParaRPr lang="en-US" sz="1900" dirty="0"/>
           </a:p>
@@ -3085,7 +3441,7 @@
                 <a:ea typeface="Calibri" pitchFamily="34" charset="-122"/>
                 <a:cs typeface="Calibri" pitchFamily="34" charset="-120"/>
               </a:rPr>
-              <a:t>LAB MANAGEMENT &amp; QUALITY   ·   JUST CULTURE</a:t>
+              <a:t>LAB MANAGEMENT &amp; QUALITY   ·   ROOT CAUSE</a:t>
             </a:r>
             <a:endParaRPr lang="en-US" sz="1100" dirty="0"/>
           </a:p>
@@ -3124,7 +3480,7 @@
                 <a:ea typeface="Calibri" pitchFamily="34" charset="-122"/>
                 <a:cs typeface="Calibri" pitchFamily="34" charset="-120"/>
               </a:rPr>
-              <a:t>Accountability Without Blame</a:t>
+              <a:t>Root-Cause Analysis</a:t>
             </a:r>
             <a:endParaRPr lang="en-US" sz="3000" dirty="0"/>
           </a:p>
@@ -3138,18 +3494,23 @@
         </p:nvSpPr>
         <p:spPr>
           <a:xfrm>
-            <a:off x="566928" y="1517904"/>
-            <a:ext cx="5346040" cy="4114800"/>
+            <a:off x="975208" y="1481328"/>
+            <a:ext cx="10241280" cy="4261104"/>
           </a:xfrm>
           <a:prstGeom prst="roundRect">
             <a:avLst>
-              <a:gd name="adj" fmla="val 2000"/>
+              <a:gd name="adj" fmla="val 1931"/>
             </a:avLst>
           </a:prstGeom>
           <a:solidFill>
-            <a:srgbClr val="ECEFF1"/>
+            <a:srgbClr val="FFFFFF"/>
           </a:solidFill>
-          <a:ln/>
+          <a:ln w="12700">
+            <a:solidFill>
+              <a:srgbClr val="DCE4EC"/>
+            </a:solidFill>
+            <a:prstDash val="solid"/>
+          </a:ln>
           <a:effectLst>
             <a:outerShdw sx="100000" sy="100000" kx="0" ky="0" algn="bl" rotWithShape="0" blurRad="88900" dist="25400" dir="5400000">
               <a:srgbClr val="22303C">
@@ -3159,55 +3520,40 @@
           </a:effectLst>
         </p:spPr>
       </p:sp>
-      <p:sp>
-        <p:nvSpPr>
-          <p:cNvPr id="5" name="Text 3"/>
-          <p:cNvSpPr/>
-          <p:nvPr/>
-        </p:nvSpPr>
-        <p:spPr>
-          <a:xfrm>
-            <a:off x="804672" y="1682496"/>
-            <a:ext cx="4888840" cy="274320"/>
-          </a:xfrm>
-          <a:prstGeom prst="rect">
-            <a:avLst/>
-          </a:prstGeom>
-          <a:noFill/>
-          <a:ln/>
-        </p:spPr>
-        <p:txBody>
-          <a:bodyPr wrap="square" lIns="0" tIns="0" rIns="0" bIns="0" rtlCol="0" anchor="ctr"/>
-          <a:lstStyle/>
-          <a:p>
-            <a:pPr indent="0" marL="0">
-              <a:buNone/>
-            </a:pPr>
-            <a:r>
-              <a:rPr lang="en-US" sz="1200" b="1" spc="100" kern="0" dirty="0">
-                <a:solidFill>
-                  <a:srgbClr val="2C3A41"/>
-                </a:solidFill>
-                <a:latin typeface="Calibri" pitchFamily="34" charset="0"/>
-                <a:ea typeface="Calibri" pitchFamily="34" charset="-122"/>
-                <a:cs typeface="Calibri" pitchFamily="34" charset="-120"/>
-              </a:rPr>
-              <a:t>THE JUST-CULTURE MODEL</a:t>
-            </a:r>
-            <a:endParaRPr lang="en-US" sz="1200" dirty="0"/>
-          </a:p>
-        </p:txBody>
-      </p:sp>
-      <p:sp>
-        <p:nvSpPr>
-          <p:cNvPr id="6" name="Text 4"/>
-          <p:cNvSpPr/>
-          <p:nvPr/>
-        </p:nvSpPr>
-        <p:spPr>
-          <a:xfrm>
-            <a:off x="804672" y="2029968"/>
-            <a:ext cx="4870552" cy="3474720"/>
+      <p:pic>
+        <p:nvPicPr>
+          <p:cNvPr id="5" name="Image 0" descr="/tmp/cp_work2/art/lab_rca.png">    </p:cNvPr>
+          <p:cNvPicPr>
+            <a:picLocks noChangeAspect="1"/>
+          </p:cNvPicPr>
+          <p:nvPr/>
+        </p:nvPicPr>
+        <p:blipFill>
+          <a:blip r:embed="rId1"/>
+          <a:stretch>
+            <a:fillRect/>
+          </a:stretch>
+        </p:blipFill>
+        <p:spPr>
+          <a:xfrm>
+            <a:off x="1103224" y="1609344"/>
+            <a:ext cx="9985248" cy="4005072"/>
+          </a:xfrm>
+          <a:prstGeom prst="rect">
+            <a:avLst/>
+          </a:prstGeom>
+        </p:spPr>
+      </p:pic>
+      <p:sp>
+        <p:nvSpPr>
+          <p:cNvPr id="6" name="Text 3"/>
+          <p:cNvSpPr/>
+          <p:nvPr/>
+        </p:nvSpPr>
+        <p:spPr>
+          <a:xfrm>
+            <a:off x="566928" y="5815584"/>
+            <a:ext cx="11057839" cy="365760"/>
           </a:xfrm>
           <a:prstGeom prst="rect">
             <a:avLst/>
@@ -3219,268 +3565,27 @@
           <a:bodyPr wrap="square" lIns="0" tIns="0" rIns="0" bIns="0" rtlCol="0" anchor="t"/>
           <a:lstStyle/>
           <a:p>
-            <a:pPr algn="l" marL="177800" indent="-177800">
-              <a:spcAft>
-                <a:spcPts val="900"/>
-              </a:spcAft>
-              <a:buSzPct val="100000"/>
-              <a:buChar char="•"/>
-            </a:pPr>
-            <a:r>
-              <a:rPr lang="en-US" sz="1250" b="1" dirty="0">
-                <a:solidFill>
-                  <a:srgbClr val="1B2A38"/>
-                </a:solidFill>
-                <a:latin typeface="Calibri" pitchFamily="34" charset="0"/>
-                <a:ea typeface="Calibri" pitchFamily="34" charset="-122"/>
-                <a:cs typeface="Calibri" pitchFamily="34" charset="-120"/>
-              </a:rPr>
-              <a:t>Distinguish human error (console), at-risk behavior (coach), and reckless behavior (discipline).</a:t>
-            </a:r>
-            <a:endParaRPr lang="en-US" sz="1250" dirty="0"/>
-          </a:p>
-          <a:p>
-            <a:pPr algn="l" marL="177800" indent="-177800">
-              <a:spcAft>
-                <a:spcPts val="900"/>
-              </a:spcAft>
-              <a:buSzPct val="100000"/>
-              <a:buChar char="•"/>
-            </a:pPr>
-            <a:r>
-              <a:rPr lang="en-US" sz="1250" dirty="0">
-                <a:solidFill>
-                  <a:srgbClr val="33444F"/>
-                </a:solidFill>
-                <a:latin typeface="Calibri" pitchFamily="34" charset="0"/>
-                <a:ea typeface="Calibri" pitchFamily="34" charset="-122"/>
-                <a:cs typeface="Calibri" pitchFamily="34" charset="-120"/>
-              </a:rPr>
-              <a:t>Most events are human error or at-risk behavior in flawed systems.</a:t>
-            </a:r>
-            <a:endParaRPr lang="en-US" sz="1250" dirty="0"/>
-          </a:p>
-          <a:p>
-            <a:pPr algn="l" marL="177800" indent="-177800">
-              <a:spcAft>
-                <a:spcPts val="900"/>
-              </a:spcAft>
-              <a:buSzPct val="100000"/>
-              <a:buChar char="•"/>
-            </a:pPr>
-            <a:r>
-              <a:rPr lang="en-US" sz="1250" dirty="0">
-                <a:solidFill>
-                  <a:srgbClr val="33444F"/>
-                </a:solidFill>
-                <a:latin typeface="Calibri" pitchFamily="34" charset="0"/>
-                <a:ea typeface="Calibri" pitchFamily="34" charset="-122"/>
-                <a:cs typeface="Calibri" pitchFamily="34" charset="-120"/>
-              </a:rPr>
-              <a:t>Punishing error drives reporting underground and hides hazards.</a:t>
-            </a:r>
-            <a:endParaRPr lang="en-US" sz="1250" dirty="0"/>
-          </a:p>
-          <a:p>
-            <a:pPr algn="l" marL="177800" indent="-177800">
-              <a:spcAft>
-                <a:spcPts val="900"/>
-              </a:spcAft>
-              <a:buSzPct val="100000"/>
-              <a:buChar char="•"/>
-            </a:pPr>
-            <a:r>
-              <a:rPr lang="en-US" sz="1250" dirty="0">
-                <a:solidFill>
-                  <a:srgbClr val="33444F"/>
-                </a:solidFill>
-                <a:latin typeface="Calibri" pitchFamily="34" charset="0"/>
-                <a:ea typeface="Calibri" pitchFamily="34" charset="-122"/>
-                <a:cs typeface="Calibri" pitchFamily="34" charset="-120"/>
-              </a:rPr>
-              <a:t>Hold the system accountable while addressing genuine recklessness.</a:t>
-            </a:r>
-            <a:endParaRPr lang="en-US" sz="1250" dirty="0"/>
-          </a:p>
-        </p:txBody>
-      </p:sp>
-      <p:sp>
-        <p:nvSpPr>
-          <p:cNvPr id="7" name="Shape 5"/>
-          <p:cNvSpPr/>
-          <p:nvPr/>
-        </p:nvSpPr>
-        <p:spPr>
-          <a:xfrm>
-            <a:off x="6278728" y="1517904"/>
-            <a:ext cx="5346040" cy="4114800"/>
-          </a:xfrm>
-          <a:prstGeom prst="roundRect">
-            <a:avLst>
-              <a:gd name="adj" fmla="val 2000"/>
-            </a:avLst>
-          </a:prstGeom>
-          <a:solidFill>
-            <a:srgbClr val="ECEFF1"/>
-          </a:solidFill>
-          <a:ln/>
-          <a:effectLst>
-            <a:outerShdw sx="100000" sy="100000" kx="0" ky="0" algn="bl" rotWithShape="0" blurRad="88900" dist="25400" dir="5400000">
-              <a:srgbClr val="22303C">
-                <a:alpha val="12000"/>
-              </a:srgbClr>
-            </a:outerShdw>
-          </a:effectLst>
-        </p:spPr>
-      </p:sp>
-      <p:sp>
-        <p:nvSpPr>
-          <p:cNvPr id="8" name="Text 6"/>
-          <p:cNvSpPr/>
-          <p:nvPr/>
-        </p:nvSpPr>
-        <p:spPr>
-          <a:xfrm>
-            <a:off x="6516472" y="1682496"/>
-            <a:ext cx="4888840" cy="274320"/>
-          </a:xfrm>
-          <a:prstGeom prst="rect">
-            <a:avLst/>
-          </a:prstGeom>
-          <a:noFill/>
-          <a:ln/>
-        </p:spPr>
-        <p:txBody>
-          <a:bodyPr wrap="square" lIns="0" tIns="0" rIns="0" bIns="0" rtlCol="0" anchor="ctr"/>
-          <a:lstStyle/>
-          <a:p>
-            <a:pPr indent="0" marL="0">
-              <a:buNone/>
-            </a:pPr>
-            <a:r>
-              <a:rPr lang="en-US" sz="1200" b="1" spc="100" kern="0" dirty="0">
-                <a:solidFill>
-                  <a:srgbClr val="2C3A41"/>
-                </a:solidFill>
-                <a:latin typeface="Calibri" pitchFamily="34" charset="0"/>
-                <a:ea typeface="Calibri" pitchFamily="34" charset="-122"/>
-                <a:cs typeface="Calibri" pitchFamily="34" charset="-120"/>
-              </a:rPr>
-              <a:t>BUILDING THE CULTURE</a:t>
-            </a:r>
-            <a:endParaRPr lang="en-US" sz="1200" dirty="0"/>
-          </a:p>
-        </p:txBody>
-      </p:sp>
-      <p:sp>
-        <p:nvSpPr>
-          <p:cNvPr id="9" name="Text 7"/>
-          <p:cNvSpPr/>
-          <p:nvPr/>
-        </p:nvSpPr>
-        <p:spPr>
-          <a:xfrm>
-            <a:off x="6516472" y="2029968"/>
-            <a:ext cx="4870552" cy="3474720"/>
-          </a:xfrm>
-          <a:prstGeom prst="rect">
-            <a:avLst/>
-          </a:prstGeom>
-          <a:noFill/>
-          <a:ln/>
-        </p:spPr>
-        <p:txBody>
-          <a:bodyPr wrap="square" lIns="0" tIns="0" rIns="0" bIns="0" rtlCol="0" anchor="t"/>
-          <a:lstStyle/>
-          <a:p>
-            <a:pPr algn="l" marL="177800" indent="-177800">
-              <a:spcAft>
-                <a:spcPts val="900"/>
-              </a:spcAft>
-              <a:buSzPct val="100000"/>
-              <a:buChar char="•"/>
-            </a:pPr>
-            <a:r>
-              <a:rPr lang="en-US" sz="1250" b="1" dirty="0">
-                <a:solidFill>
-                  <a:srgbClr val="1B2A38"/>
-                </a:solidFill>
-                <a:latin typeface="Calibri" pitchFamily="34" charset="0"/>
-                <a:ea typeface="Calibri" pitchFamily="34" charset="-122"/>
-                <a:cs typeface="Calibri" pitchFamily="34" charset="-120"/>
-              </a:rPr>
-              <a:t>Make reporting easy, safe, and consequential (it leads to change).</a:t>
-            </a:r>
-            <a:endParaRPr lang="en-US" sz="1250" dirty="0"/>
-          </a:p>
-          <a:p>
-            <a:pPr algn="l" marL="177800" indent="-177800">
-              <a:spcAft>
-                <a:spcPts val="900"/>
-              </a:spcAft>
-              <a:buSzPct val="100000"/>
-              <a:buChar char="•"/>
-            </a:pPr>
-            <a:r>
-              <a:rPr lang="en-US" sz="1250" dirty="0">
-                <a:solidFill>
-                  <a:srgbClr val="33444F"/>
-                </a:solidFill>
-                <a:latin typeface="Calibri" pitchFamily="34" charset="0"/>
-                <a:ea typeface="Calibri" pitchFamily="34" charset="-122"/>
-                <a:cs typeface="Calibri" pitchFamily="34" charset="-120"/>
-              </a:rPr>
-              <a:t>Leaders model curiosity about failure, not blame.</a:t>
-            </a:r>
-            <a:endParaRPr lang="en-US" sz="1250" dirty="0"/>
-          </a:p>
-          <a:p>
-            <a:pPr algn="l" marL="177800" indent="-177800">
-              <a:spcAft>
-                <a:spcPts val="900"/>
-              </a:spcAft>
-              <a:buSzPct val="100000"/>
-              <a:buChar char="•"/>
-            </a:pPr>
-            <a:r>
-              <a:rPr lang="en-US" sz="1250" dirty="0">
-                <a:solidFill>
-                  <a:srgbClr val="33444F"/>
-                </a:solidFill>
-                <a:latin typeface="Calibri" pitchFamily="34" charset="0"/>
-                <a:ea typeface="Calibri" pitchFamily="34" charset="-122"/>
-                <a:cs typeface="Calibri" pitchFamily="34" charset="-120"/>
-              </a:rPr>
-              <a:t>Feed learning back to staff.</a:t>
-            </a:r>
-            <a:endParaRPr lang="en-US" sz="1250" dirty="0"/>
-          </a:p>
-          <a:p>
-            <a:pPr algn="l" marL="177800" indent="-177800">
-              <a:spcAft>
-                <a:spcPts val="900"/>
-              </a:spcAft>
-              <a:buSzPct val="100000"/>
-              <a:buChar char="•"/>
-            </a:pPr>
-            <a:r>
-              <a:rPr lang="en-US" sz="1250" dirty="0">
-                <a:solidFill>
-                  <a:srgbClr val="33444F"/>
-                </a:solidFill>
-                <a:latin typeface="Calibri" pitchFamily="34" charset="0"/>
-                <a:ea typeface="Calibri" pitchFamily="34" charset="-122"/>
-                <a:cs typeface="Calibri" pitchFamily="34" charset="-120"/>
-              </a:rPr>
-              <a:t>Measure safety culture and act on it.</a:t>
-            </a:r>
-            <a:endParaRPr lang="en-US" sz="1250" dirty="0"/>
-          </a:p>
-        </p:txBody>
-      </p:sp>
-      <p:sp>
-        <p:nvSpPr>
-          <p:cNvPr id="10" name="Text 8"/>
+            <a:pPr algn="ctr" indent="0" marL="0">
+              <a:buNone/>
+            </a:pPr>
+            <a:r>
+              <a:rPr lang="en-US" sz="1150" i="1" dirty="0">
+                <a:solidFill>
+                  <a:srgbClr val="6B7B8A"/>
+                </a:solidFill>
+                <a:latin typeface="Calibri" pitchFamily="34" charset="0"/>
+                <a:ea typeface="Calibri" pitchFamily="34" charset="-122"/>
+                <a:cs typeface="Calibri" pitchFamily="34" charset="-120"/>
+              </a:rPr>
+              <a:t>Original schematic. Structured RCA (e.g., the ‘5 Whys’/fishbone) moves from the visible event to the underlying system causes.</a:t>
+            </a:r>
+            <a:endParaRPr lang="en-US" sz="1150" dirty="0"/>
+          </a:p>
+        </p:txBody>
+      </p:sp>
+      <p:sp>
+        <p:nvSpPr>
+          <p:cNvPr id="7" name="Text 4"/>
           <p:cNvSpPr/>
           <p:nvPr/>
         </p:nvSpPr>
@@ -3519,7 +3624,7 @@
       </p:sp>
       <p:sp>
         <p:nvSpPr>
-          <p:cNvPr id="11" name="Text 9"/>
+          <p:cNvPr id="8" name="Text 5"/>
           <p:cNvSpPr/>
           <p:nvPr/>
         </p:nvSpPr>
@@ -3649,7 +3754,7 @@
                 <a:ea typeface="Calibri" pitchFamily="34" charset="-122"/>
                 <a:cs typeface="Calibri" pitchFamily="34" charset="-120"/>
               </a:rPr>
-              <a:t>LAB MANAGEMENT &amp; QUALITY   ·   TRANSFUSION SAFETY</a:t>
+              <a:t>LAB MANAGEMENT &amp; QUALITY   ·   RCA</a:t>
             </a:r>
             <a:endParaRPr lang="en-US" sz="1100" dirty="0"/>
           </a:p>
@@ -3688,7 +3793,7 @@
                 <a:ea typeface="Calibri" pitchFamily="34" charset="-122"/>
                 <a:cs typeface="Calibri" pitchFamily="34" charset="-120"/>
               </a:rPr>
-              <a:t>Haemovigilance and WBIT</a:t>
+              <a:t>Doing RCA Well</a:t>
             </a:r>
             <a:endParaRPr lang="en-US" sz="3000" dirty="0"/>
           </a:p>
@@ -3756,7 +3861,7 @@
                 <a:ea typeface="Calibri" pitchFamily="34" charset="-122"/>
                 <a:cs typeface="Calibri" pitchFamily="34" charset="-120"/>
               </a:rPr>
-              <a:t>TRANSFUSION-SAFETY EVENTS</a:t>
+              <a:t>METHOD</a:t>
             </a:r>
             <a:endParaRPr lang="en-US" sz="1200" dirty="0"/>
           </a:p>
@@ -3799,7 +3904,7 @@
                 <a:ea typeface="Calibri" pitchFamily="34" charset="-122"/>
                 <a:cs typeface="Calibri" pitchFamily="34" charset="-120"/>
               </a:rPr>
-              <a:t>Wrong blood in tube (WBIT) and misidentification are leading causes of preventable harm.</a:t>
+              <a:t>Reconstruct the timeline, then ask ‘why’ repeatedly to reach system causes.</a:t>
             </a:r>
             <a:endParaRPr lang="en-US" sz="1250" dirty="0"/>
           </a:p>
@@ -3820,7 +3925,7 @@
                 <a:ea typeface="Calibri" pitchFamily="34" charset="-122"/>
                 <a:cs typeface="Calibri" pitchFamily="34" charset="-120"/>
               </a:rPr>
-              <a:t>Defenses: positive patient ID, two independent ABO checks, barcoding, electronic crossmatch.</a:t>
+              <a:t>Use fishbone/contributing-factor frameworks.</a:t>
             </a:r>
             <a:endParaRPr lang="en-US" sz="1250" dirty="0"/>
           </a:p>
@@ -3841,7 +3946,7 @@
                 <a:ea typeface="Calibri" pitchFamily="34" charset="-122"/>
                 <a:cs typeface="Calibri" pitchFamily="34" charset="-120"/>
               </a:rPr>
-              <a:t>Investigate every transfusion event; report to haemovigilance.</a:t>
+              <a:t>Involve the frontline staff who do the work.</a:t>
             </a:r>
             <a:endParaRPr lang="en-US" sz="1250" dirty="0"/>
           </a:p>
@@ -3862,7 +3967,7 @@
                 <a:ea typeface="Calibri" pitchFamily="34" charset="-122"/>
                 <a:cs typeface="Calibri" pitchFamily="34" charset="-120"/>
               </a:rPr>
-              <a:t>Track and trend near misses (e.g., mislabeled samples).</a:t>
+              <a:t>Separate the proximate trigger from root causes.</a:t>
             </a:r>
             <a:endParaRPr lang="en-US" sz="1250" dirty="0"/>
           </a:p>
@@ -3885,7 +3990,7 @@
             </a:avLst>
           </a:prstGeom>
           <a:solidFill>
-            <a:srgbClr val="ECEFF1"/>
+            <a:srgbClr val="E6EAED"/>
           </a:solidFill>
           <a:ln/>
           <a:effectLst>
@@ -3930,7 +4035,7 @@
                 <a:ea typeface="Calibri" pitchFamily="34" charset="-122"/>
                 <a:cs typeface="Calibri" pitchFamily="34" charset="-120"/>
               </a:rPr>
-              <a:t>DESIGNING SAFETY IN</a:t>
+              <a:t>COMMON TRAPS</a:t>
             </a:r>
             <a:endParaRPr lang="en-US" sz="1200" dirty="0"/>
           </a:p>
@@ -3973,7 +4078,7 @@
                 <a:ea typeface="Calibri" pitchFamily="34" charset="-122"/>
                 <a:cs typeface="Calibri" pitchFamily="34" charset="-120"/>
               </a:rPr>
-              <a:t>Forcing functions (electronic ID/lockouts) beat reminders.</a:t>
+              <a:t>Stopping at ‘human error’ or ‘retrain the person’ — weak fixes that rarely last.</a:t>
             </a:r>
             <a:endParaRPr lang="en-US" sz="1250" dirty="0"/>
           </a:p>
@@ -3994,7 +4099,7 @@
                 <a:ea typeface="Calibri" pitchFamily="34" charset="-122"/>
                 <a:cs typeface="Calibri" pitchFamily="34" charset="-120"/>
               </a:rPr>
-              <a:t>Standardize labeling at the bedside from the wristband.</a:t>
+              <a:t>Hindsight and outcome bias.</a:t>
             </a:r>
             <a:endParaRPr lang="en-US" sz="1250" dirty="0"/>
           </a:p>
@@ -4015,7 +4120,7 @@
                 <a:ea typeface="Calibri" pitchFamily="34" charset="-122"/>
                 <a:cs typeface="Calibri" pitchFamily="34" charset="-120"/>
               </a:rPr>
-              <a:t>Reject mislabeled samples — no exceptions for blood bank.</a:t>
+              <a:t>Blaming to close the case quickly.</a:t>
             </a:r>
             <a:endParaRPr lang="en-US" sz="1250" dirty="0"/>
           </a:p>
@@ -4036,7 +4141,7 @@
                 <a:ea typeface="Calibri" pitchFamily="34" charset="-122"/>
                 <a:cs typeface="Calibri" pitchFamily="34" charset="-120"/>
               </a:rPr>
-              <a:t>Audit compliance and feed back results.</a:t>
+              <a:t>Failing to verify the fix worked.</a:t>
             </a:r>
             <a:endParaRPr lang="en-US" sz="1250" dirty="0"/>
           </a:p>
@@ -4159,6 +4264,570 @@
 <file path=ppt/slides/slide12.xml><?xml version="1.0" encoding="utf-8"?>
 <p:sld xmlns:a="http://schemas.openxmlformats.org/drawingml/2006/main" xmlns:r="http://schemas.openxmlformats.org/officeDocument/2006/relationships" xmlns:p="http://schemas.openxmlformats.org/presentationml/2006/main">
   <p:cSld name="Slide 12">
+    <p:bg>
+      <p:bgPr>
+        <a:solidFill>
+          <a:srgbClr val="FFFFFF"/>
+        </a:solidFill>
+      </p:bgPr>
+    </p:bg>
+    <p:spTree>
+      <p:nvGrpSpPr>
+        <p:cNvPr id="1" name=""/>
+        <p:cNvGrpSpPr/>
+        <p:nvPr/>
+      </p:nvGrpSpPr>
+      <p:grpSpPr>
+        <a:xfrm>
+          <a:off x="0" y="0"/>
+          <a:ext cx="0" cy="0"/>
+          <a:chOff x="0" y="0"/>
+          <a:chExt cx="0" cy="0"/>
+        </a:xfrm>
+      </p:grpSpPr>
+      <p:sp>
+        <p:nvSpPr>
+          <p:cNvPr id="2" name="Text 0"/>
+          <p:cNvSpPr/>
+          <p:nvPr/>
+        </p:nvSpPr>
+        <p:spPr>
+          <a:xfrm>
+            <a:off x="566928" y="329184"/>
+            <a:ext cx="10515600" cy="310896"/>
+          </a:xfrm>
+          <a:prstGeom prst="rect">
+            <a:avLst/>
+          </a:prstGeom>
+          <a:noFill/>
+          <a:ln/>
+        </p:spPr>
+        <p:txBody>
+          <a:bodyPr wrap="square" lIns="0" tIns="0" rIns="0" bIns="0" rtlCol="0" anchor="ctr"/>
+          <a:lstStyle/>
+          <a:p>
+            <a:pPr algn="l" indent="0" marL="0">
+              <a:buNone/>
+            </a:pPr>
+            <a:r>
+              <a:rPr lang="en-US" sz="1100" b="1" spc="150" kern="0" dirty="0">
+                <a:solidFill>
+                  <a:srgbClr val="455A64"/>
+                </a:solidFill>
+                <a:latin typeface="Calibri" pitchFamily="34" charset="0"/>
+                <a:ea typeface="Calibri" pitchFamily="34" charset="-122"/>
+                <a:cs typeface="Calibri" pitchFamily="34" charset="-120"/>
+              </a:rPr>
+              <a:t>LAB MANAGEMENT &amp; QUALITY   ·   JUST CULTURE</a:t>
+            </a:r>
+            <a:endParaRPr lang="en-US" sz="1100" dirty="0"/>
+          </a:p>
+        </p:txBody>
+      </p:sp>
+      <p:sp>
+        <p:nvSpPr>
+          <p:cNvPr id="3" name="Text 1"/>
+          <p:cNvSpPr/>
+          <p:nvPr/>
+        </p:nvSpPr>
+        <p:spPr>
+          <a:xfrm>
+            <a:off x="566928" y="713232"/>
+            <a:ext cx="11064240" cy="749808"/>
+          </a:xfrm>
+          <a:prstGeom prst="rect">
+            <a:avLst/>
+          </a:prstGeom>
+          <a:noFill/>
+          <a:ln/>
+        </p:spPr>
+        <p:txBody>
+          <a:bodyPr wrap="square" lIns="0" tIns="0" rIns="0" bIns="0" rtlCol="0" anchor="ctr"/>
+          <a:lstStyle/>
+          <a:p>
+            <a:pPr algn="l" indent="0" marL="0">
+              <a:buNone/>
+            </a:pPr>
+            <a:r>
+              <a:rPr lang="en-US" sz="3000" b="1" dirty="0">
+                <a:solidFill>
+                  <a:srgbClr val="0E3A5F"/>
+                </a:solidFill>
+                <a:latin typeface="Calibri" pitchFamily="34" charset="0"/>
+                <a:ea typeface="Calibri" pitchFamily="34" charset="-122"/>
+                <a:cs typeface="Calibri" pitchFamily="34" charset="-120"/>
+              </a:rPr>
+              <a:t>Accountability with Learning</a:t>
+            </a:r>
+            <a:endParaRPr lang="en-US" sz="3000" dirty="0"/>
+          </a:p>
+        </p:txBody>
+      </p:sp>
+      <p:sp>
+        <p:nvSpPr>
+          <p:cNvPr id="4" name="Shape 2"/>
+          <p:cNvSpPr/>
+          <p:nvPr/>
+        </p:nvSpPr>
+        <p:spPr>
+          <a:xfrm>
+            <a:off x="566928" y="1517904"/>
+            <a:ext cx="5346040" cy="4114800"/>
+          </a:xfrm>
+          <a:prstGeom prst="roundRect">
+            <a:avLst>
+              <a:gd name="adj" fmla="val 2000"/>
+            </a:avLst>
+          </a:prstGeom>
+          <a:solidFill>
+            <a:srgbClr val="ECEFF1"/>
+          </a:solidFill>
+          <a:ln/>
+          <a:effectLst>
+            <a:outerShdw sx="100000" sy="100000" kx="0" ky="0" algn="bl" rotWithShape="0" blurRad="88900" dist="25400" dir="5400000">
+              <a:srgbClr val="22303C">
+                <a:alpha val="12000"/>
+              </a:srgbClr>
+            </a:outerShdw>
+          </a:effectLst>
+        </p:spPr>
+      </p:sp>
+      <p:sp>
+        <p:nvSpPr>
+          <p:cNvPr id="5" name="Text 3"/>
+          <p:cNvSpPr/>
+          <p:nvPr/>
+        </p:nvSpPr>
+        <p:spPr>
+          <a:xfrm>
+            <a:off x="804672" y="1682496"/>
+            <a:ext cx="4888840" cy="274320"/>
+          </a:xfrm>
+          <a:prstGeom prst="rect">
+            <a:avLst/>
+          </a:prstGeom>
+          <a:noFill/>
+          <a:ln/>
+        </p:spPr>
+        <p:txBody>
+          <a:bodyPr wrap="square" lIns="0" tIns="0" rIns="0" bIns="0" rtlCol="0" anchor="ctr"/>
+          <a:lstStyle/>
+          <a:p>
+            <a:pPr indent="0" marL="0">
+              <a:buNone/>
+            </a:pPr>
+            <a:r>
+              <a:rPr lang="en-US" sz="1200" b="1" spc="100" kern="0" dirty="0">
+                <a:solidFill>
+                  <a:srgbClr val="2C3A41"/>
+                </a:solidFill>
+                <a:latin typeface="Calibri" pitchFamily="34" charset="0"/>
+                <a:ea typeface="Calibri" pitchFamily="34" charset="-122"/>
+                <a:cs typeface="Calibri" pitchFamily="34" charset="-120"/>
+              </a:rPr>
+              <a:t>JUST-CULTURE DISTINCTIONS</a:t>
+            </a:r>
+            <a:endParaRPr lang="en-US" sz="1200" dirty="0"/>
+          </a:p>
+        </p:txBody>
+      </p:sp>
+      <p:sp>
+        <p:nvSpPr>
+          <p:cNvPr id="6" name="Text 4"/>
+          <p:cNvSpPr/>
+          <p:nvPr/>
+        </p:nvSpPr>
+        <p:spPr>
+          <a:xfrm>
+            <a:off x="804672" y="2029968"/>
+            <a:ext cx="4870552" cy="3474720"/>
+          </a:xfrm>
+          <a:prstGeom prst="rect">
+            <a:avLst/>
+          </a:prstGeom>
+          <a:noFill/>
+          <a:ln/>
+        </p:spPr>
+        <p:txBody>
+          <a:bodyPr wrap="square" lIns="0" tIns="0" rIns="0" bIns="0" rtlCol="0" anchor="t"/>
+          <a:lstStyle/>
+          <a:p>
+            <a:pPr algn="l" marL="177800" indent="-177800">
+              <a:spcAft>
+                <a:spcPts val="900"/>
+              </a:spcAft>
+              <a:buSzPct val="100000"/>
+              <a:buChar char="•"/>
+            </a:pPr>
+            <a:r>
+              <a:rPr lang="en-US" sz="1250" b="1" dirty="0">
+                <a:solidFill>
+                  <a:srgbClr val="1B2A38"/>
+                </a:solidFill>
+                <a:latin typeface="Calibri" pitchFamily="34" charset="0"/>
+                <a:ea typeface="Calibri" pitchFamily="34" charset="-122"/>
+                <a:cs typeface="Calibri" pitchFamily="34" charset="-120"/>
+              </a:rPr>
+              <a:t>Distinguish human error (console), at-risk behavior (coach), and reckless behavior (discipline).</a:t>
+            </a:r>
+            <a:endParaRPr lang="en-US" sz="1250" dirty="0"/>
+          </a:p>
+          <a:p>
+            <a:pPr algn="l" marL="177800" indent="-177800">
+              <a:spcAft>
+                <a:spcPts val="900"/>
+              </a:spcAft>
+              <a:buSzPct val="100000"/>
+              <a:buChar char="•"/>
+            </a:pPr>
+            <a:r>
+              <a:rPr lang="en-US" sz="1250" dirty="0">
+                <a:solidFill>
+                  <a:srgbClr val="33444F"/>
+                </a:solidFill>
+                <a:latin typeface="Calibri" pitchFamily="34" charset="0"/>
+                <a:ea typeface="Calibri" pitchFamily="34" charset="-122"/>
+                <a:cs typeface="Calibri" pitchFamily="34" charset="-120"/>
+              </a:rPr>
+              <a:t>Most events are error or at-risk behavior in flawed systems.</a:t>
+            </a:r>
+            <a:endParaRPr lang="en-US" sz="1250" dirty="0"/>
+          </a:p>
+          <a:p>
+            <a:pPr algn="l" marL="177800" indent="-177800">
+              <a:spcAft>
+                <a:spcPts val="900"/>
+              </a:spcAft>
+              <a:buSzPct val="100000"/>
+              <a:buChar char="•"/>
+            </a:pPr>
+            <a:r>
+              <a:rPr lang="en-US" sz="1250" dirty="0">
+                <a:solidFill>
+                  <a:srgbClr val="33444F"/>
+                </a:solidFill>
+                <a:latin typeface="Calibri" pitchFamily="34" charset="0"/>
+                <a:ea typeface="Calibri" pitchFamily="34" charset="-122"/>
+                <a:cs typeface="Calibri" pitchFamily="34" charset="-120"/>
+              </a:rPr>
+              <a:t>Reserve discipline for true recklessness.</a:t>
+            </a:r>
+            <a:endParaRPr lang="en-US" sz="1250" dirty="0"/>
+          </a:p>
+          <a:p>
+            <a:pPr algn="l" marL="177800" indent="-177800">
+              <a:spcAft>
+                <a:spcPts val="900"/>
+              </a:spcAft>
+              <a:buSzPct val="100000"/>
+              <a:buChar char="•"/>
+            </a:pPr>
+            <a:r>
+              <a:rPr lang="en-US" sz="1250" dirty="0">
+                <a:solidFill>
+                  <a:srgbClr val="33444F"/>
+                </a:solidFill>
+                <a:latin typeface="Calibri" pitchFamily="34" charset="0"/>
+                <a:ea typeface="Calibri" pitchFamily="34" charset="-122"/>
+                <a:cs typeface="Calibri" pitchFamily="34" charset="-120"/>
+              </a:rPr>
+              <a:t>Consistency builds trust and reporting.</a:t>
+            </a:r>
+            <a:endParaRPr lang="en-US" sz="1250" dirty="0"/>
+          </a:p>
+        </p:txBody>
+      </p:sp>
+      <p:sp>
+        <p:nvSpPr>
+          <p:cNvPr id="7" name="Shape 5"/>
+          <p:cNvSpPr/>
+          <p:nvPr/>
+        </p:nvSpPr>
+        <p:spPr>
+          <a:xfrm>
+            <a:off x="6278728" y="1517904"/>
+            <a:ext cx="5346040" cy="4114800"/>
+          </a:xfrm>
+          <a:prstGeom prst="roundRect">
+            <a:avLst>
+              <a:gd name="adj" fmla="val 2000"/>
+            </a:avLst>
+          </a:prstGeom>
+          <a:solidFill>
+            <a:srgbClr val="E6EAED"/>
+          </a:solidFill>
+          <a:ln/>
+          <a:effectLst>
+            <a:outerShdw sx="100000" sy="100000" kx="0" ky="0" algn="bl" rotWithShape="0" blurRad="88900" dist="25400" dir="5400000">
+              <a:srgbClr val="22303C">
+                <a:alpha val="12000"/>
+              </a:srgbClr>
+            </a:outerShdw>
+          </a:effectLst>
+        </p:spPr>
+      </p:sp>
+      <p:sp>
+        <p:nvSpPr>
+          <p:cNvPr id="8" name="Text 6"/>
+          <p:cNvSpPr/>
+          <p:nvPr/>
+        </p:nvSpPr>
+        <p:spPr>
+          <a:xfrm>
+            <a:off x="6516472" y="1682496"/>
+            <a:ext cx="4888840" cy="274320"/>
+          </a:xfrm>
+          <a:prstGeom prst="rect">
+            <a:avLst/>
+          </a:prstGeom>
+          <a:noFill/>
+          <a:ln/>
+        </p:spPr>
+        <p:txBody>
+          <a:bodyPr wrap="square" lIns="0" tIns="0" rIns="0" bIns="0" rtlCol="0" anchor="ctr"/>
+          <a:lstStyle/>
+          <a:p>
+            <a:pPr indent="0" marL="0">
+              <a:buNone/>
+            </a:pPr>
+            <a:r>
+              <a:rPr lang="en-US" sz="1200" b="1" spc="100" kern="0" dirty="0">
+                <a:solidFill>
+                  <a:srgbClr val="2C3A41"/>
+                </a:solidFill>
+                <a:latin typeface="Calibri" pitchFamily="34" charset="0"/>
+                <a:ea typeface="Calibri" pitchFamily="34" charset="-122"/>
+                <a:cs typeface="Calibri" pitchFamily="34" charset="-120"/>
+              </a:rPr>
+              <a:t>STRONG VS WEAK INTERVENTIONS</a:t>
+            </a:r>
+            <a:endParaRPr lang="en-US" sz="1200" dirty="0"/>
+          </a:p>
+        </p:txBody>
+      </p:sp>
+      <p:sp>
+        <p:nvSpPr>
+          <p:cNvPr id="9" name="Text 7"/>
+          <p:cNvSpPr/>
+          <p:nvPr/>
+        </p:nvSpPr>
+        <p:spPr>
+          <a:xfrm>
+            <a:off x="6516472" y="2029968"/>
+            <a:ext cx="4870552" cy="3474720"/>
+          </a:xfrm>
+          <a:prstGeom prst="rect">
+            <a:avLst/>
+          </a:prstGeom>
+          <a:noFill/>
+          <a:ln/>
+        </p:spPr>
+        <p:txBody>
+          <a:bodyPr wrap="square" lIns="0" tIns="0" rIns="0" bIns="0" rtlCol="0" anchor="t"/>
+          <a:lstStyle/>
+          <a:p>
+            <a:pPr algn="l" marL="177800" indent="-177800">
+              <a:spcAft>
+                <a:spcPts val="900"/>
+              </a:spcAft>
+              <a:buSzPct val="100000"/>
+              <a:buChar char="•"/>
+            </a:pPr>
+            <a:r>
+              <a:rPr lang="en-US" sz="1250" b="1" dirty="0">
+                <a:solidFill>
+                  <a:srgbClr val="1B2A38"/>
+                </a:solidFill>
+                <a:latin typeface="Calibri" pitchFamily="34" charset="0"/>
+                <a:ea typeface="Calibri" pitchFamily="34" charset="-122"/>
+                <a:cs typeface="Calibri" pitchFamily="34" charset="-120"/>
+              </a:rPr>
+              <a:t>Strong: forcing functions, automation, standardization, barcoding.</a:t>
+            </a:r>
+            <a:endParaRPr lang="en-US" sz="1250" dirty="0"/>
+          </a:p>
+          <a:p>
+            <a:pPr algn="l" marL="177800" indent="-177800">
+              <a:spcAft>
+                <a:spcPts val="900"/>
+              </a:spcAft>
+              <a:buSzPct val="100000"/>
+              <a:buChar char="•"/>
+            </a:pPr>
+            <a:r>
+              <a:rPr lang="en-US" sz="1250" dirty="0">
+                <a:solidFill>
+                  <a:srgbClr val="33444F"/>
+                </a:solidFill>
+                <a:latin typeface="Calibri" pitchFamily="34" charset="0"/>
+                <a:ea typeface="Calibri" pitchFamily="34" charset="-122"/>
+                <a:cs typeface="Calibri" pitchFamily="34" charset="-120"/>
+              </a:rPr>
+              <a:t>Weak: warnings, reminders, ‘be more careful’, one-off retraining.</a:t>
+            </a:r>
+            <a:endParaRPr lang="en-US" sz="1250" dirty="0"/>
+          </a:p>
+          <a:p>
+            <a:pPr algn="l" marL="177800" indent="-177800">
+              <a:spcAft>
+                <a:spcPts val="900"/>
+              </a:spcAft>
+              <a:buSzPct val="100000"/>
+              <a:buChar char="•"/>
+            </a:pPr>
+            <a:r>
+              <a:rPr lang="en-US" sz="1250" dirty="0">
+                <a:solidFill>
+                  <a:srgbClr val="33444F"/>
+                </a:solidFill>
+                <a:latin typeface="Calibri" pitchFamily="34" charset="0"/>
+                <a:ea typeface="Calibri" pitchFamily="34" charset="-122"/>
+                <a:cs typeface="Calibri" pitchFamily="34" charset="-120"/>
+              </a:rPr>
+              <a:t>Prefer fixes that don’t depend on memory/vigilance.</a:t>
+            </a:r>
+            <a:endParaRPr lang="en-US" sz="1250" dirty="0"/>
+          </a:p>
+          <a:p>
+            <a:pPr algn="l" marL="177800" indent="-177800">
+              <a:spcAft>
+                <a:spcPts val="900"/>
+              </a:spcAft>
+              <a:buSzPct val="100000"/>
+              <a:buChar char="•"/>
+            </a:pPr>
+            <a:r>
+              <a:rPr lang="en-US" sz="1250" dirty="0">
+                <a:solidFill>
+                  <a:srgbClr val="33444F"/>
+                </a:solidFill>
+                <a:latin typeface="Calibri" pitchFamily="34" charset="0"/>
+                <a:ea typeface="Calibri" pitchFamily="34" charset="-122"/>
+                <a:cs typeface="Calibri" pitchFamily="34" charset="-120"/>
+              </a:rPr>
+              <a:t>Verify effectiveness after implementation.</a:t>
+            </a:r>
+            <a:endParaRPr lang="en-US" sz="1250" dirty="0"/>
+          </a:p>
+        </p:txBody>
+      </p:sp>
+      <p:sp>
+        <p:nvSpPr>
+          <p:cNvPr id="10" name="Text 8"/>
+          <p:cNvSpPr/>
+          <p:nvPr/>
+        </p:nvSpPr>
+        <p:spPr>
+          <a:xfrm>
+            <a:off x="566928" y="6473952"/>
+            <a:ext cx="7772400" cy="274320"/>
+          </a:xfrm>
+          <a:prstGeom prst="rect">
+            <a:avLst/>
+          </a:prstGeom>
+          <a:noFill/>
+          <a:ln/>
+        </p:spPr>
+        <p:txBody>
+          <a:bodyPr wrap="square" lIns="0" tIns="0" rIns="0" bIns="0" rtlCol="0" anchor="ctr"/>
+          <a:lstStyle/>
+          <a:p>
+            <a:pPr algn="l" indent="0" marL="0">
+              <a:buNone/>
+            </a:pPr>
+            <a:r>
+              <a:rPr lang="en-US" sz="850" dirty="0">
+                <a:solidFill>
+                  <a:srgbClr val="9AA8B4"/>
+                </a:solidFill>
+                <a:latin typeface="Calibri" pitchFamily="34" charset="0"/>
+                <a:ea typeface="Calibri" pitchFamily="34" charset="-122"/>
+                <a:cs typeface="Calibri" pitchFamily="34" charset="-120"/>
+              </a:rPr>
+              <a:t>Makassed General Hospital  ·  Department of Laboratory Medicine</a:t>
+            </a:r>
+            <a:endParaRPr lang="en-US" sz="850" dirty="0"/>
+          </a:p>
+        </p:txBody>
+      </p:sp>
+      <p:sp>
+        <p:nvSpPr>
+          <p:cNvPr id="11" name="Text 9"/>
+          <p:cNvSpPr/>
+          <p:nvPr/>
+        </p:nvSpPr>
+        <p:spPr>
+          <a:xfrm>
+            <a:off x="9814255" y="6473952"/>
+            <a:ext cx="1828800" cy="274320"/>
+          </a:xfrm>
+          <a:prstGeom prst="rect">
+            <a:avLst/>
+          </a:prstGeom>
+          <a:noFill/>
+          <a:ln/>
+        </p:spPr>
+        <p:txBody>
+          <a:bodyPr wrap="square" lIns="0" tIns="0" rIns="0" bIns="0" rtlCol="0" anchor="ctr"/>
+          <a:lstStyle/>
+          <a:p>
+            <a:pPr algn="r" indent="0" marL="0">
+              <a:buNone/>
+            </a:pPr>
+            <a:r>
+              <a:rPr lang="en-US" sz="850" dirty="0">
+                <a:solidFill>
+                  <a:srgbClr val="9AA8B4"/>
+                </a:solidFill>
+                <a:latin typeface="Calibri" pitchFamily="34" charset="0"/>
+                <a:ea typeface="Calibri" pitchFamily="34" charset="-122"/>
+                <a:cs typeface="Calibri" pitchFamily="34" charset="-120"/>
+              </a:rPr>
+              <a:t>CP Lecture Series</a:t>
+            </a:r>
+            <a:pPr algn="r" indent="0" marL="0">
+              <a:buNone/>
+            </a:pPr>
+            <a:r>
+              <a:rPr lang="en-US" sz="850" dirty="0">
+                <a:solidFill>
+                  <a:srgbClr val="DCE4EC"/>
+                </a:solidFill>
+                <a:latin typeface="Calibri" pitchFamily="34" charset="0"/>
+                <a:ea typeface="Calibri" pitchFamily="34" charset="-122"/>
+                <a:cs typeface="Calibri" pitchFamily="34" charset="-120"/>
+              </a:rPr>
+              <a:t>   ·   </a:t>
+            </a:r>
+            <a:pPr algn="r" indent="0" marL="0">
+              <a:buNone/>
+            </a:pPr>
+            <a:r>
+              <a:rPr lang="en-US" sz="850" b="1" dirty="0">
+                <a:solidFill>
+                  <a:srgbClr val="455A64"/>
+                </a:solidFill>
+                <a:latin typeface="Calibri" pitchFamily="34" charset="0"/>
+                <a:ea typeface="Calibri" pitchFamily="34" charset="-122"/>
+                <a:cs typeface="Calibri" pitchFamily="34" charset="-120"/>
+              </a:rPr>
+              <a:t>10</a:t>
+            </a:r>
+            <a:endParaRPr lang="en-US" sz="850" dirty="0"/>
+          </a:p>
+        </p:txBody>
+      </p:sp>
+    </p:spTree>
+  </p:cSld>
+  <p:clrMapOvr>
+    <a:masterClrMapping/>
+  </p:clrMapOvr>
+</p:sld>
+</file>
+
+<file path=ppt/slides/slide13.xml><?xml version="1.0" encoding="utf-8"?>
+<p:sld xmlns:a="http://schemas.openxmlformats.org/drawingml/2006/main" xmlns:r="http://schemas.openxmlformats.org/officeDocument/2006/relationships" xmlns:p="http://schemas.openxmlformats.org/presentationml/2006/main">
+  <p:cSld name="Slide 13">
     <p:bg>
       <p:bgPr>
         <a:solidFill>
@@ -4338,439 +5007,6 @@
               <a:t>Cases &amp; Board Review</a:t>
             </a:r>
             <a:endParaRPr lang="en-US" sz="3800" dirty="0"/>
-          </a:p>
-        </p:txBody>
-      </p:sp>
-    </p:spTree>
-  </p:cSld>
-  <p:clrMapOvr>
-    <a:masterClrMapping/>
-  </p:clrMapOvr>
-</p:sld>
-</file>
-
-<file path=ppt/slides/slide13.xml><?xml version="1.0" encoding="utf-8"?>
-<p:sld xmlns:a="http://schemas.openxmlformats.org/drawingml/2006/main" xmlns:r="http://schemas.openxmlformats.org/officeDocument/2006/relationships" xmlns:p="http://schemas.openxmlformats.org/presentationml/2006/main">
-  <p:cSld name="Slide 13">
-    <p:bg>
-      <p:bgPr>
-        <a:solidFill>
-          <a:srgbClr val="FFFFFF"/>
-        </a:solidFill>
-      </p:bgPr>
-    </p:bg>
-    <p:spTree>
-      <p:nvGrpSpPr>
-        <p:cNvPr id="1" name=""/>
-        <p:cNvGrpSpPr/>
-        <p:nvPr/>
-      </p:nvGrpSpPr>
-      <p:grpSpPr>
-        <a:xfrm>
-          <a:off x="0" y="0"/>
-          <a:ext cx="0" cy="0"/>
-          <a:chOff x="0" y="0"/>
-          <a:chExt cx="0" cy="0"/>
-        </a:xfrm>
-      </p:grpSpPr>
-      <p:sp>
-        <p:nvSpPr>
-          <p:cNvPr id="2" name="Text 0"/>
-          <p:cNvSpPr/>
-          <p:nvPr/>
-        </p:nvSpPr>
-        <p:spPr>
-          <a:xfrm>
-            <a:off x="566928" y="329184"/>
-            <a:ext cx="10515600" cy="310896"/>
-          </a:xfrm>
-          <a:prstGeom prst="rect">
-            <a:avLst/>
-          </a:prstGeom>
-          <a:noFill/>
-          <a:ln/>
-        </p:spPr>
-        <p:txBody>
-          <a:bodyPr wrap="square" lIns="0" tIns="0" rIns="0" bIns="0" rtlCol="0" anchor="ctr"/>
-          <a:lstStyle/>
-          <a:p>
-            <a:pPr algn="l" indent="0" marL="0">
-              <a:buNone/>
-            </a:pPr>
-            <a:r>
-              <a:rPr lang="en-US" sz="1100" b="1" spc="150" kern="0" dirty="0">
-                <a:solidFill>
-                  <a:srgbClr val="455A64"/>
-                </a:solidFill>
-                <a:latin typeface="Calibri" pitchFamily="34" charset="0"/>
-                <a:ea typeface="Calibri" pitchFamily="34" charset="-122"/>
-                <a:cs typeface="Calibri" pitchFamily="34" charset="-120"/>
-              </a:rPr>
-              <a:t>LAB MANAGEMENT &amp; QUALITY   ·   CASE 1</a:t>
-            </a:r>
-            <a:endParaRPr lang="en-US" sz="1100" dirty="0"/>
-          </a:p>
-        </p:txBody>
-      </p:sp>
-      <p:sp>
-        <p:nvSpPr>
-          <p:cNvPr id="3" name="Text 1"/>
-          <p:cNvSpPr/>
-          <p:nvPr/>
-        </p:nvSpPr>
-        <p:spPr>
-          <a:xfrm>
-            <a:off x="566928" y="713232"/>
-            <a:ext cx="11064240" cy="749808"/>
-          </a:xfrm>
-          <a:prstGeom prst="rect">
-            <a:avLst/>
-          </a:prstGeom>
-          <a:noFill/>
-          <a:ln/>
-        </p:spPr>
-        <p:txBody>
-          <a:bodyPr wrap="square" lIns="0" tIns="0" rIns="0" bIns="0" rtlCol="0" anchor="ctr"/>
-          <a:lstStyle/>
-          <a:p>
-            <a:pPr algn="l" indent="0" marL="0">
-              <a:buNone/>
-            </a:pPr>
-            <a:r>
-              <a:rPr lang="en-US" sz="3000" b="1" dirty="0">
-                <a:solidFill>
-                  <a:srgbClr val="0E3A5F"/>
-                </a:solidFill>
-                <a:latin typeface="Calibri" pitchFamily="34" charset="0"/>
-                <a:ea typeface="Calibri" pitchFamily="34" charset="-122"/>
-                <a:cs typeface="Calibri" pitchFamily="34" charset="-120"/>
-              </a:rPr>
-              <a:t>Case 1</a:t>
-            </a:r>
-            <a:endParaRPr lang="en-US" sz="3000" dirty="0"/>
-          </a:p>
-        </p:txBody>
-      </p:sp>
-      <p:sp>
-        <p:nvSpPr>
-          <p:cNvPr id="4" name="Shape 2"/>
-          <p:cNvSpPr/>
-          <p:nvPr/>
-        </p:nvSpPr>
-        <p:spPr>
-          <a:xfrm>
-            <a:off x="566928" y="1517904"/>
-            <a:ext cx="11057839" cy="2788920"/>
-          </a:xfrm>
-          <a:prstGeom prst="roundRect">
-            <a:avLst>
-              <a:gd name="adj" fmla="val 2951"/>
-            </a:avLst>
-          </a:prstGeom>
-          <a:solidFill>
-            <a:srgbClr val="ECEFF1"/>
-          </a:solidFill>
-          <a:ln/>
-          <a:effectLst>
-            <a:outerShdw sx="100000" sy="100000" kx="0" ky="0" algn="bl" rotWithShape="0" blurRad="88900" dist="25400" dir="5400000">
-              <a:srgbClr val="22303C">
-                <a:alpha val="12000"/>
-              </a:srgbClr>
-            </a:outerShdw>
-          </a:effectLst>
-        </p:spPr>
-      </p:sp>
-      <p:sp>
-        <p:nvSpPr>
-          <p:cNvPr id="5" name="Text 3"/>
-          <p:cNvSpPr/>
-          <p:nvPr/>
-        </p:nvSpPr>
-        <p:spPr>
-          <a:xfrm>
-            <a:off x="841248" y="1700784"/>
-            <a:ext cx="5486400" cy="292608"/>
-          </a:xfrm>
-          <a:prstGeom prst="rect">
-            <a:avLst/>
-          </a:prstGeom>
-          <a:noFill/>
-          <a:ln/>
-        </p:spPr>
-        <p:txBody>
-          <a:bodyPr wrap="square" lIns="0" tIns="0" rIns="0" bIns="0" rtlCol="0" anchor="ctr"/>
-          <a:lstStyle/>
-          <a:p>
-            <a:pPr indent="0" marL="0">
-              <a:buNone/>
-            </a:pPr>
-            <a:r>
-              <a:rPr lang="en-US" sz="1100" b="1" spc="150" kern="0" dirty="0">
-                <a:solidFill>
-                  <a:srgbClr val="455A64"/>
-                </a:solidFill>
-                <a:latin typeface="Calibri" pitchFamily="34" charset="0"/>
-                <a:ea typeface="Calibri" pitchFamily="34" charset="-122"/>
-                <a:cs typeface="Calibri" pitchFamily="34" charset="-120"/>
-              </a:rPr>
-              <a:t>CLINICAL VIGNETTE</a:t>
-            </a:r>
-            <a:endParaRPr lang="en-US" sz="1100" dirty="0"/>
-          </a:p>
-        </p:txBody>
-      </p:sp>
-      <p:sp>
-        <p:nvSpPr>
-          <p:cNvPr id="6" name="Text 4"/>
-          <p:cNvSpPr/>
-          <p:nvPr/>
-        </p:nvSpPr>
-        <p:spPr>
-          <a:xfrm>
-            <a:off x="841248" y="2029968"/>
-            <a:ext cx="10509199" cy="2148840"/>
-          </a:xfrm>
-          <a:prstGeom prst="rect">
-            <a:avLst/>
-          </a:prstGeom>
-          <a:noFill/>
-          <a:ln/>
-        </p:spPr>
-        <p:txBody>
-          <a:bodyPr wrap="square" lIns="0" tIns="0" rIns="0" bIns="0" rtlCol="0" anchor="t"/>
-          <a:lstStyle/>
-          <a:p>
-            <a:pPr algn="l" indent="0" marL="0">
-              <a:lnSpc>
-                <a:spcPct val="108000"/>
-              </a:lnSpc>
-              <a:buNone/>
-            </a:pPr>
-            <a:r>
-              <a:rPr lang="en-US" sz="1450" dirty="0">
-                <a:solidFill>
-                  <a:srgbClr val="33444F"/>
-                </a:solidFill>
-                <a:latin typeface="Calibri" pitchFamily="34" charset="0"/>
-                <a:ea typeface="Calibri" pitchFamily="34" charset="-122"/>
-                <a:cs typeface="Calibri" pitchFamily="34" charset="-120"/>
-              </a:rPr>
-              <a:t>A patient receives an ABO-incompatible unit. Investigation finds a phlebotomist labeled two patients’ tubes at a shared workstation during a busy shift, and a second ABO check was not enforced.</a:t>
-            </a:r>
-            <a:endParaRPr lang="en-US" sz="1450" dirty="0"/>
-          </a:p>
-        </p:txBody>
-      </p:sp>
-      <p:sp>
-        <p:nvSpPr>
-          <p:cNvPr id="7" name="Shape 5"/>
-          <p:cNvSpPr/>
-          <p:nvPr/>
-        </p:nvSpPr>
-        <p:spPr>
-          <a:xfrm>
-            <a:off x="566928" y="4553712"/>
-            <a:ext cx="11057839" cy="1325880"/>
-          </a:xfrm>
-          <a:prstGeom prst="roundRect">
-            <a:avLst>
-              <a:gd name="adj" fmla="val 6207"/>
-            </a:avLst>
-          </a:prstGeom>
-          <a:solidFill>
-            <a:srgbClr val="0E3A5F"/>
-          </a:solidFill>
-          <a:ln/>
-          <a:effectLst>
-            <a:outerShdw sx="100000" sy="100000" kx="0" ky="0" algn="bl" rotWithShape="0" blurRad="88900" dist="25400" dir="5400000">
-              <a:srgbClr val="22303C">
-                <a:alpha val="12000"/>
-              </a:srgbClr>
-            </a:outerShdw>
-          </a:effectLst>
-        </p:spPr>
-      </p:sp>
-      <p:sp>
-        <p:nvSpPr>
-          <p:cNvPr id="8" name="Text 6"/>
-          <p:cNvSpPr/>
-          <p:nvPr/>
-        </p:nvSpPr>
-        <p:spPr>
-          <a:xfrm>
-            <a:off x="822960" y="4681728"/>
-            <a:ext cx="640080" cy="960120"/>
-          </a:xfrm>
-          <a:prstGeom prst="rect">
-            <a:avLst/>
-          </a:prstGeom>
-          <a:noFill/>
-          <a:ln/>
-        </p:spPr>
-        <p:txBody>
-          <a:bodyPr wrap="square" lIns="0" tIns="0" rIns="0" bIns="0" rtlCol="0" anchor="ctr"/>
-          <a:lstStyle/>
-          <a:p>
-            <a:pPr algn="ctr" indent="0" marL="0">
-              <a:buNone/>
-            </a:pPr>
-            <a:r>
-              <a:rPr lang="en-US" sz="4000" b="1" dirty="0">
-                <a:solidFill>
-                  <a:srgbClr val="455A64"/>
-                </a:solidFill>
-                <a:latin typeface="Calibri" pitchFamily="34" charset="0"/>
-                <a:ea typeface="Calibri" pitchFamily="34" charset="-122"/>
-                <a:cs typeface="Calibri" pitchFamily="34" charset="-120"/>
-              </a:rPr>
-              <a:t>?</a:t>
-            </a:r>
-            <a:endParaRPr lang="en-US" sz="4000" dirty="0"/>
-          </a:p>
-        </p:txBody>
-      </p:sp>
-      <p:sp>
-        <p:nvSpPr>
-          <p:cNvPr id="9" name="Text 7"/>
-          <p:cNvSpPr/>
-          <p:nvPr/>
-        </p:nvSpPr>
-        <p:spPr>
-          <a:xfrm>
-            <a:off x="1618488" y="4553712"/>
-            <a:ext cx="9686239" cy="1325880"/>
-          </a:xfrm>
-          <a:prstGeom prst="rect">
-            <a:avLst/>
-          </a:prstGeom>
-          <a:noFill/>
-          <a:ln/>
-        </p:spPr>
-        <p:txBody>
-          <a:bodyPr wrap="square" lIns="0" tIns="0" rIns="0" bIns="0" rtlCol="0" anchor="ctr"/>
-          <a:lstStyle/>
-          <a:p>
-            <a:pPr algn="l" indent="0" marL="0">
-              <a:buNone/>
-            </a:pPr>
-            <a:r>
-              <a:rPr lang="en-US" sz="1500" b="1" dirty="0">
-                <a:solidFill>
-                  <a:srgbClr val="FFFFFF"/>
-                </a:solidFill>
-                <a:latin typeface="Calibri" pitchFamily="34" charset="0"/>
-                <a:ea typeface="Calibri" pitchFamily="34" charset="-122"/>
-                <a:cs typeface="Calibri" pitchFamily="34" charset="-120"/>
-              </a:rPr>
-              <a:t>How should this be investigated and addressed?</a:t>
-            </a:r>
-            <a:endParaRPr lang="en-US" sz="1500" dirty="0"/>
-          </a:p>
-        </p:txBody>
-      </p:sp>
-      <p:sp>
-        <p:nvSpPr>
-          <p:cNvPr id="10" name="Text 8"/>
-          <p:cNvSpPr/>
-          <p:nvPr/>
-        </p:nvSpPr>
-        <p:spPr>
-          <a:xfrm>
-            <a:off x="566928" y="6473952"/>
-            <a:ext cx="7772400" cy="274320"/>
-          </a:xfrm>
-          <a:prstGeom prst="rect">
-            <a:avLst/>
-          </a:prstGeom>
-          <a:noFill/>
-          <a:ln/>
-        </p:spPr>
-        <p:txBody>
-          <a:bodyPr wrap="square" lIns="0" tIns="0" rIns="0" bIns="0" rtlCol="0" anchor="ctr"/>
-          <a:lstStyle/>
-          <a:p>
-            <a:pPr algn="l" indent="0" marL="0">
-              <a:buNone/>
-            </a:pPr>
-            <a:r>
-              <a:rPr lang="en-US" sz="850" dirty="0">
-                <a:solidFill>
-                  <a:srgbClr val="9AA8B4"/>
-                </a:solidFill>
-                <a:latin typeface="Calibri" pitchFamily="34" charset="0"/>
-                <a:ea typeface="Calibri" pitchFamily="34" charset="-122"/>
-                <a:cs typeface="Calibri" pitchFamily="34" charset="-120"/>
-              </a:rPr>
-              <a:t>Makassed General Hospital  ·  Department of Laboratory Medicine</a:t>
-            </a:r>
-            <a:endParaRPr lang="en-US" sz="850" dirty="0"/>
-          </a:p>
-        </p:txBody>
-      </p:sp>
-      <p:sp>
-        <p:nvSpPr>
-          <p:cNvPr id="11" name="Text 9"/>
-          <p:cNvSpPr/>
-          <p:nvPr/>
-        </p:nvSpPr>
-        <p:spPr>
-          <a:xfrm>
-            <a:off x="9814255" y="6473952"/>
-            <a:ext cx="1828800" cy="274320"/>
-          </a:xfrm>
-          <a:prstGeom prst="rect">
-            <a:avLst/>
-          </a:prstGeom>
-          <a:noFill/>
-          <a:ln/>
-        </p:spPr>
-        <p:txBody>
-          <a:bodyPr wrap="square" lIns="0" tIns="0" rIns="0" bIns="0" rtlCol="0" anchor="ctr"/>
-          <a:lstStyle/>
-          <a:p>
-            <a:pPr algn="r" indent="0" marL="0">
-              <a:buNone/>
-            </a:pPr>
-            <a:r>
-              <a:rPr lang="en-US" sz="850" dirty="0">
-                <a:solidFill>
-                  <a:srgbClr val="9AA8B4"/>
-                </a:solidFill>
-                <a:latin typeface="Calibri" pitchFamily="34" charset="0"/>
-                <a:ea typeface="Calibri" pitchFamily="34" charset="-122"/>
-                <a:cs typeface="Calibri" pitchFamily="34" charset="-120"/>
-              </a:rPr>
-              <a:t>CP Lecture Series</a:t>
-            </a:r>
-            <a:pPr algn="r" indent="0" marL="0">
-              <a:buNone/>
-            </a:pPr>
-            <a:r>
-              <a:rPr lang="en-US" sz="850" dirty="0">
-                <a:solidFill>
-                  <a:srgbClr val="DCE4EC"/>
-                </a:solidFill>
-                <a:latin typeface="Calibri" pitchFamily="34" charset="0"/>
-                <a:ea typeface="Calibri" pitchFamily="34" charset="-122"/>
-                <a:cs typeface="Calibri" pitchFamily="34" charset="-120"/>
-              </a:rPr>
-              <a:t>   ·   </a:t>
-            </a:r>
-            <a:pPr algn="r" indent="0" marL="0">
-              <a:buNone/>
-            </a:pPr>
-            <a:r>
-              <a:rPr lang="en-US" sz="850" b="1" dirty="0">
-                <a:solidFill>
-                  <a:srgbClr val="455A64"/>
-                </a:solidFill>
-                <a:latin typeface="Calibri" pitchFamily="34" charset="0"/>
-                <a:ea typeface="Calibri" pitchFamily="34" charset="-122"/>
-                <a:cs typeface="Calibri" pitchFamily="34" charset="-120"/>
-              </a:rPr>
-              <a:t>10</a:t>
-            </a:r>
-            <a:endParaRPr lang="en-US" sz="850" dirty="0"/>
           </a:p>
         </p:txBody>
       </p:sp>
@@ -4839,7 +5075,7 @@
                 <a:ea typeface="Calibri" pitchFamily="34" charset="-122"/>
                 <a:cs typeface="Calibri" pitchFamily="34" charset="-120"/>
               </a:rPr>
-              <a:t>LAB MANAGEMENT &amp; QUALITY   ·   CASE 1  ·  RESOLUTION</a:t>
+              <a:t>LAB MANAGEMENT &amp; QUALITY   ·   CASE 1</a:t>
             </a:r>
             <a:endParaRPr lang="en-US" sz="1100" dirty="0"/>
           </a:p>
@@ -4878,7 +5114,7 @@
                 <a:ea typeface="Calibri" pitchFamily="34" charset="-122"/>
                 <a:cs typeface="Calibri" pitchFamily="34" charset="-120"/>
               </a:rPr>
-              <a:t>Case 1: WBIT — System Redesign</a:t>
+              <a:t>Case 1</a:t>
             </a:r>
             <a:endParaRPr lang="en-US" sz="3000" dirty="0"/>
           </a:p>
@@ -4886,124 +5122,18 @@
       </p:sp>
       <p:sp>
         <p:nvSpPr>
-          <p:cNvPr id="4" name="Text 2"/>
-          <p:cNvSpPr/>
-          <p:nvPr/>
-        </p:nvSpPr>
-        <p:spPr>
-          <a:xfrm>
-            <a:off x="566928" y="1554480"/>
-            <a:ext cx="6413547" cy="4023360"/>
-          </a:xfrm>
-          <a:prstGeom prst="rect">
-            <a:avLst/>
-          </a:prstGeom>
-          <a:noFill/>
-          <a:ln/>
-        </p:spPr>
-        <p:txBody>
-          <a:bodyPr wrap="square" lIns="0" tIns="0" rIns="0" bIns="0" rtlCol="0" anchor="t"/>
-          <a:lstStyle/>
-          <a:p>
-            <a:pPr algn="l" marL="177800" indent="-177800">
-              <a:spcAft>
-                <a:spcPts val="900"/>
-              </a:spcAft>
-              <a:buSzPct val="100000"/>
-              <a:buChar char="•"/>
-            </a:pPr>
-            <a:r>
-              <a:rPr lang="en-US" sz="1400" b="1" dirty="0">
-                <a:solidFill>
-                  <a:srgbClr val="1B2A38"/>
-                </a:solidFill>
-                <a:latin typeface="Calibri" pitchFamily="34" charset="0"/>
-                <a:ea typeface="Calibri" pitchFamily="34" charset="-122"/>
-                <a:cs typeface="Calibri" pitchFamily="34" charset="-120"/>
-              </a:rPr>
-              <a:t>Conduct a blameless root-cause analysis — this is a system failure (shared workstation, no enforced second check).</a:t>
-            </a:r>
-            <a:endParaRPr lang="en-US" sz="1400" dirty="0"/>
-          </a:p>
-          <a:p>
-            <a:pPr algn="l" marL="177800" indent="-177800">
-              <a:spcAft>
-                <a:spcPts val="900"/>
-              </a:spcAft>
-              <a:buSzPct val="100000"/>
-              <a:buChar char="•"/>
-            </a:pPr>
-            <a:r>
-              <a:rPr lang="en-US" sz="1400" dirty="0">
-                <a:solidFill>
-                  <a:srgbClr val="33444F"/>
-                </a:solidFill>
-                <a:latin typeface="Calibri" pitchFamily="34" charset="0"/>
-                <a:ea typeface="Calibri" pitchFamily="34" charset="-122"/>
-                <a:cs typeface="Calibri" pitchFamily="34" charset="-120"/>
-              </a:rPr>
-              <a:t>Identify latent conditions: workflow, workload, and missing forcing functions.</a:t>
-            </a:r>
-            <a:endParaRPr lang="en-US" sz="1400" dirty="0"/>
-          </a:p>
-          <a:p>
-            <a:pPr algn="l" marL="177800" indent="-177800">
-              <a:spcAft>
-                <a:spcPts val="900"/>
-              </a:spcAft>
-              <a:buSzPct val="100000"/>
-              <a:buChar char="•"/>
-            </a:pPr>
-            <a:r>
-              <a:rPr lang="en-US" sz="1400" dirty="0">
-                <a:solidFill>
-                  <a:srgbClr val="33444F"/>
-                </a:solidFill>
-                <a:latin typeface="Calibri" pitchFamily="34" charset="0"/>
-                <a:ea typeface="Calibri" pitchFamily="34" charset="-122"/>
-                <a:cs typeface="Calibri" pitchFamily="34" charset="-120"/>
-              </a:rPr>
-              <a:t>Implement strong CAPA: bedside labeling, barcoded positive ID, and an enforced second independent ABO determination.</a:t>
-            </a:r>
-            <a:endParaRPr lang="en-US" sz="1400" dirty="0"/>
-          </a:p>
-          <a:p>
-            <a:pPr algn="l" marL="177800" indent="-177800">
-              <a:spcAft>
-                <a:spcPts val="900"/>
-              </a:spcAft>
-              <a:buSzPct val="100000"/>
-              <a:buChar char="•"/>
-            </a:pPr>
-            <a:r>
-              <a:rPr lang="en-US" sz="1400" dirty="0">
-                <a:solidFill>
-                  <a:srgbClr val="33444F"/>
-                </a:solidFill>
-                <a:latin typeface="Calibri" pitchFamily="34" charset="0"/>
-                <a:ea typeface="Calibri" pitchFamily="34" charset="-122"/>
-                <a:cs typeface="Calibri" pitchFamily="34" charset="-120"/>
-              </a:rPr>
-              <a:t>Report to haemovigilance and share the learning.</a:t>
-            </a:r>
-            <a:endParaRPr lang="en-US" sz="1400" dirty="0"/>
-          </a:p>
-        </p:txBody>
-      </p:sp>
-      <p:sp>
-        <p:nvSpPr>
-          <p:cNvPr id="5" name="Shape 3"/>
-          <p:cNvSpPr/>
-          <p:nvPr/>
-        </p:nvSpPr>
-        <p:spPr>
-          <a:xfrm>
-            <a:off x="7422788" y="1554480"/>
-            <a:ext cx="4201979" cy="3977640"/>
+          <p:cNvPr id="4" name="Shape 2"/>
+          <p:cNvSpPr/>
+          <p:nvPr/>
+        </p:nvSpPr>
+        <p:spPr>
+          <a:xfrm>
+            <a:off x="566928" y="1517904"/>
+            <a:ext cx="11057839" cy="2788920"/>
           </a:xfrm>
           <a:prstGeom prst="roundRect">
             <a:avLst>
-              <a:gd name="adj" fmla="val 2069"/>
+              <a:gd name="adj" fmla="val 2951"/>
             </a:avLst>
           </a:prstGeom>
           <a:solidFill>
@@ -5021,53 +5151,53 @@
       </p:sp>
       <p:sp>
         <p:nvSpPr>
+          <p:cNvPr id="5" name="Text 3"/>
+          <p:cNvSpPr/>
+          <p:nvPr/>
+        </p:nvSpPr>
+        <p:spPr>
+          <a:xfrm>
+            <a:off x="841248" y="1700784"/>
+            <a:ext cx="5486400" cy="292608"/>
+          </a:xfrm>
+          <a:prstGeom prst="rect">
+            <a:avLst/>
+          </a:prstGeom>
+          <a:noFill/>
+          <a:ln/>
+        </p:spPr>
+        <p:txBody>
+          <a:bodyPr wrap="square" lIns="0" tIns="0" rIns="0" bIns="0" rtlCol="0" anchor="ctr"/>
+          <a:lstStyle/>
+          <a:p>
+            <a:pPr indent="0" marL="0">
+              <a:buNone/>
+            </a:pPr>
+            <a:r>
+              <a:rPr lang="en-US" sz="1100" b="1" spc="150" kern="0" dirty="0">
+                <a:solidFill>
+                  <a:srgbClr val="455A64"/>
+                </a:solidFill>
+                <a:latin typeface="Calibri" pitchFamily="34" charset="0"/>
+                <a:ea typeface="Calibri" pitchFamily="34" charset="-122"/>
+                <a:cs typeface="Calibri" pitchFamily="34" charset="-120"/>
+              </a:rPr>
+              <a:t>CLINICAL VIGNETTE</a:t>
+            </a:r>
+            <a:endParaRPr lang="en-US" sz="1100" dirty="0"/>
+          </a:p>
+        </p:txBody>
+      </p:sp>
+      <p:sp>
+        <p:nvSpPr>
           <p:cNvPr id="6" name="Text 4"/>
           <p:cNvSpPr/>
           <p:nvPr/>
         </p:nvSpPr>
         <p:spPr>
           <a:xfrm>
-            <a:off x="7660532" y="1755648"/>
-            <a:ext cx="3744779" cy="310896"/>
-          </a:xfrm>
-          <a:prstGeom prst="rect">
-            <a:avLst/>
-          </a:prstGeom>
-          <a:noFill/>
-          <a:ln/>
-        </p:spPr>
-        <p:txBody>
-          <a:bodyPr wrap="square" lIns="0" tIns="0" rIns="0" bIns="0" rtlCol="0" anchor="ctr"/>
-          <a:lstStyle/>
-          <a:p>
-            <a:pPr indent="0" marL="0">
-              <a:buNone/>
-            </a:pPr>
-            <a:r>
-              <a:rPr lang="en-US" sz="1100" b="1" spc="140" kern="0" dirty="0">
-                <a:solidFill>
-                  <a:srgbClr val="455A64"/>
-                </a:solidFill>
-                <a:latin typeface="Calibri" pitchFamily="34" charset="0"/>
-                <a:ea typeface="Calibri" pitchFamily="34" charset="-122"/>
-                <a:cs typeface="Calibri" pitchFamily="34" charset="-120"/>
-              </a:rPr>
-              <a:t>TEACHING POINT</a:t>
-            </a:r>
-            <a:endParaRPr lang="en-US" sz="1100" dirty="0"/>
-          </a:p>
-        </p:txBody>
-      </p:sp>
-      <p:sp>
-        <p:nvSpPr>
-          <p:cNvPr id="7" name="Text 5"/>
-          <p:cNvSpPr/>
-          <p:nvPr/>
-        </p:nvSpPr>
-        <p:spPr>
-          <a:xfrm>
-            <a:off x="7660532" y="2121408"/>
-            <a:ext cx="3726491" cy="3291840"/>
+            <a:off x="841248" y="2029968"/>
+            <a:ext cx="10509199" cy="2148840"/>
           </a:xfrm>
           <a:prstGeom prst="rect">
             <a:avLst/>
@@ -5081,12 +5211,12 @@
           <a:p>
             <a:pPr algn="l" indent="0" marL="0">
               <a:lnSpc>
-                <a:spcPct val="110000"/>
+                <a:spcPct val="108000"/>
               </a:lnSpc>
               <a:buNone/>
             </a:pPr>
             <a:r>
-              <a:rPr lang="en-US" sz="1350" dirty="0">
+              <a:rPr lang="en-US" sz="1450" dirty="0">
                 <a:solidFill>
                   <a:srgbClr val="33444F"/>
                 </a:solidFill>
@@ -5094,15 +5224,122 @@
                 <a:ea typeface="Calibri" pitchFamily="34" charset="-122"/>
                 <a:cs typeface="Calibri" pitchFamily="34" charset="-120"/>
               </a:rPr>
-              <a:t>ABO-incompatible transfusion is almost always a system/identification failure — fix the system with forcing functions, not by blaming the phlebotomist.</a:t>
-            </a:r>
-            <a:endParaRPr lang="en-US" sz="1350" dirty="0"/>
-          </a:p>
-        </p:txBody>
+              <a:t>A patient receives a result from a mislabeled specimen. The proposed fix is to ‘remind staff to label carefully’.</a:t>
+            </a:r>
+            <a:endParaRPr lang="en-US" sz="1450" dirty="0"/>
+          </a:p>
+        </p:txBody>
+      </p:sp>
+      <p:sp>
+        <p:nvSpPr>
+          <p:cNvPr id="7" name="Shape 5"/>
+          <p:cNvSpPr/>
+          <p:nvPr/>
+        </p:nvSpPr>
+        <p:spPr>
+          <a:xfrm>
+            <a:off x="566928" y="4553712"/>
+            <a:ext cx="11057839" cy="1325880"/>
+          </a:xfrm>
+          <a:prstGeom prst="roundRect">
+            <a:avLst>
+              <a:gd name="adj" fmla="val 6207"/>
+            </a:avLst>
+          </a:prstGeom>
+          <a:solidFill>
+            <a:srgbClr val="0E3A5F"/>
+          </a:solidFill>
+          <a:ln/>
+          <a:effectLst>
+            <a:outerShdw sx="100000" sy="100000" kx="0" ky="0" algn="bl" rotWithShape="0" blurRad="88900" dist="25400" dir="5400000">
+              <a:srgbClr val="22303C">
+                <a:alpha val="12000"/>
+              </a:srgbClr>
+            </a:outerShdw>
+          </a:effectLst>
+        </p:spPr>
       </p:sp>
       <p:sp>
         <p:nvSpPr>
           <p:cNvPr id="8" name="Text 6"/>
+          <p:cNvSpPr/>
+          <p:nvPr/>
+        </p:nvSpPr>
+        <p:spPr>
+          <a:xfrm>
+            <a:off x="822960" y="4681728"/>
+            <a:ext cx="640080" cy="960120"/>
+          </a:xfrm>
+          <a:prstGeom prst="rect">
+            <a:avLst/>
+          </a:prstGeom>
+          <a:noFill/>
+          <a:ln/>
+        </p:spPr>
+        <p:txBody>
+          <a:bodyPr wrap="square" lIns="0" tIns="0" rIns="0" bIns="0" rtlCol="0" anchor="ctr"/>
+          <a:lstStyle/>
+          <a:p>
+            <a:pPr algn="ctr" indent="0" marL="0">
+              <a:buNone/>
+            </a:pPr>
+            <a:r>
+              <a:rPr lang="en-US" sz="4000" b="1" dirty="0">
+                <a:solidFill>
+                  <a:srgbClr val="455A64"/>
+                </a:solidFill>
+                <a:latin typeface="Calibri" pitchFamily="34" charset="0"/>
+                <a:ea typeface="Calibri" pitchFamily="34" charset="-122"/>
+                <a:cs typeface="Calibri" pitchFamily="34" charset="-120"/>
+              </a:rPr>
+              <a:t>?</a:t>
+            </a:r>
+            <a:endParaRPr lang="en-US" sz="4000" dirty="0"/>
+          </a:p>
+        </p:txBody>
+      </p:sp>
+      <p:sp>
+        <p:nvSpPr>
+          <p:cNvPr id="9" name="Text 7"/>
+          <p:cNvSpPr/>
+          <p:nvPr/>
+        </p:nvSpPr>
+        <p:spPr>
+          <a:xfrm>
+            <a:off x="1618488" y="4553712"/>
+            <a:ext cx="9686239" cy="1325880"/>
+          </a:xfrm>
+          <a:prstGeom prst="rect">
+            <a:avLst/>
+          </a:prstGeom>
+          <a:noFill/>
+          <a:ln/>
+        </p:spPr>
+        <p:txBody>
+          <a:bodyPr wrap="square" lIns="0" tIns="0" rIns="0" bIns="0" rtlCol="0" anchor="ctr"/>
+          <a:lstStyle/>
+          <a:p>
+            <a:pPr algn="l" indent="0" marL="0">
+              <a:buNone/>
+            </a:pPr>
+            <a:r>
+              <a:rPr lang="en-US" sz="1500" b="1" dirty="0">
+                <a:solidFill>
+                  <a:srgbClr val="FFFFFF"/>
+                </a:solidFill>
+                <a:latin typeface="Calibri" pitchFamily="34" charset="0"/>
+                <a:ea typeface="Calibri" pitchFamily="34" charset="-122"/>
+                <a:cs typeface="Calibri" pitchFamily="34" charset="-120"/>
+              </a:rPr>
+              <a:t>Why is this fix weak, and what would be stronger?</a:t>
+            </a:r>
+            <a:endParaRPr lang="en-US" sz="1500" dirty="0"/>
+          </a:p>
+        </p:txBody>
+      </p:sp>
+      <p:sp>
+        <p:nvSpPr>
+          <p:cNvPr id="10" name="Text 8"/>
           <p:cNvSpPr/>
           <p:nvPr/>
         </p:nvSpPr>
@@ -5141,7 +5378,7 @@
       </p:sp>
       <p:sp>
         <p:nvSpPr>
-          <p:cNvPr id="9" name="Text 7"/>
+          <p:cNvPr id="11" name="Text 9"/>
           <p:cNvSpPr/>
           <p:nvPr/>
         </p:nvSpPr>
@@ -5271,7 +5508,7 @@
                 <a:ea typeface="Calibri" pitchFamily="34" charset="-122"/>
                 <a:cs typeface="Calibri" pitchFamily="34" charset="-120"/>
               </a:rPr>
-              <a:t>LAB MANAGEMENT &amp; QUALITY   ·   CASE 2</a:t>
+              <a:t>LAB MANAGEMENT &amp; QUALITY   ·   CASE 1  ·  RESOLUTION</a:t>
             </a:r>
             <a:endParaRPr lang="en-US" sz="1100" dirty="0"/>
           </a:p>
@@ -5310,7 +5547,7 @@
                 <a:ea typeface="Calibri" pitchFamily="34" charset="-122"/>
                 <a:cs typeface="Calibri" pitchFamily="34" charset="-120"/>
               </a:rPr>
-              <a:t>Case 2</a:t>
+              <a:t>Case 1: Weak vs Strong Fix</a:t>
             </a:r>
             <a:endParaRPr lang="en-US" sz="3000" dirty="0"/>
           </a:p>
@@ -5318,18 +5555,124 @@
       </p:sp>
       <p:sp>
         <p:nvSpPr>
-          <p:cNvPr id="4" name="Shape 2"/>
-          <p:cNvSpPr/>
-          <p:nvPr/>
-        </p:nvSpPr>
-        <p:spPr>
-          <a:xfrm>
-            <a:off x="566928" y="1517904"/>
-            <a:ext cx="11057839" cy="2788920"/>
+          <p:cNvPr id="4" name="Text 2"/>
+          <p:cNvSpPr/>
+          <p:nvPr/>
+        </p:nvSpPr>
+        <p:spPr>
+          <a:xfrm>
+            <a:off x="566928" y="1554480"/>
+            <a:ext cx="6413547" cy="4023360"/>
+          </a:xfrm>
+          <a:prstGeom prst="rect">
+            <a:avLst/>
+          </a:prstGeom>
+          <a:noFill/>
+          <a:ln/>
+        </p:spPr>
+        <p:txBody>
+          <a:bodyPr wrap="square" lIns="0" tIns="0" rIns="0" bIns="0" rtlCol="0" anchor="t"/>
+          <a:lstStyle/>
+          <a:p>
+            <a:pPr algn="l" marL="177800" indent="-177800">
+              <a:spcAft>
+                <a:spcPts val="900"/>
+              </a:spcAft>
+              <a:buSzPct val="100000"/>
+              <a:buChar char="•"/>
+            </a:pPr>
+            <a:r>
+              <a:rPr lang="en-US" sz="1400" b="1" dirty="0">
+                <a:solidFill>
+                  <a:srgbClr val="1B2A38"/>
+                </a:solidFill>
+                <a:latin typeface="Calibri" pitchFamily="34" charset="0"/>
+                <a:ea typeface="Calibri" pitchFamily="34" charset="-122"/>
+                <a:cs typeface="Calibri" pitchFamily="34" charset="-120"/>
+              </a:rPr>
+              <a:t>‘Remind staff’ depends on memory and vigilance — a weak intervention.</a:t>
+            </a:r>
+            <a:endParaRPr lang="en-US" sz="1400" dirty="0"/>
+          </a:p>
+          <a:p>
+            <a:pPr algn="l" marL="177800" indent="-177800">
+              <a:spcAft>
+                <a:spcPts val="900"/>
+              </a:spcAft>
+              <a:buSzPct val="100000"/>
+              <a:buChar char="•"/>
+            </a:pPr>
+            <a:r>
+              <a:rPr lang="en-US" sz="1400" dirty="0">
+                <a:solidFill>
+                  <a:srgbClr val="33444F"/>
+                </a:solidFill>
+                <a:latin typeface="Calibri" pitchFamily="34" charset="0"/>
+                <a:ea typeface="Calibri" pitchFamily="34" charset="-122"/>
+                <a:cs typeface="Calibri" pitchFamily="34" charset="-120"/>
+              </a:rPr>
+              <a:t>Stronger fixes: barcoded positive patient ID at the bedside, electronic labeling, forcing functions.</a:t>
+            </a:r>
+            <a:endParaRPr lang="en-US" sz="1400" dirty="0"/>
+          </a:p>
+          <a:p>
+            <a:pPr algn="l" marL="177800" indent="-177800">
+              <a:spcAft>
+                <a:spcPts val="900"/>
+              </a:spcAft>
+              <a:buSzPct val="100000"/>
+              <a:buChar char="•"/>
+            </a:pPr>
+            <a:r>
+              <a:rPr lang="en-US" sz="1400" dirty="0">
+                <a:solidFill>
+                  <a:srgbClr val="33444F"/>
+                </a:solidFill>
+                <a:latin typeface="Calibri" pitchFamily="34" charset="0"/>
+                <a:ea typeface="Calibri" pitchFamily="34" charset="-122"/>
+                <a:cs typeface="Calibri" pitchFamily="34" charset="-120"/>
+              </a:rPr>
+              <a:t>Address the system that allowed mislabeling.</a:t>
+            </a:r>
+            <a:endParaRPr lang="en-US" sz="1400" dirty="0"/>
+          </a:p>
+          <a:p>
+            <a:pPr algn="l" marL="177800" indent="-177800">
+              <a:spcAft>
+                <a:spcPts val="900"/>
+              </a:spcAft>
+              <a:buSzPct val="100000"/>
+              <a:buChar char="•"/>
+            </a:pPr>
+            <a:r>
+              <a:rPr lang="en-US" sz="1400" dirty="0">
+                <a:solidFill>
+                  <a:srgbClr val="33444F"/>
+                </a:solidFill>
+                <a:latin typeface="Calibri" pitchFamily="34" charset="0"/>
+                <a:ea typeface="Calibri" pitchFamily="34" charset="-122"/>
+                <a:cs typeface="Calibri" pitchFamily="34" charset="-120"/>
+              </a:rPr>
+              <a:t>Verify the new process reduces errors.</a:t>
+            </a:r>
+            <a:endParaRPr lang="en-US" sz="1400" dirty="0"/>
+          </a:p>
+        </p:txBody>
+      </p:sp>
+      <p:sp>
+        <p:nvSpPr>
+          <p:cNvPr id="5" name="Shape 3"/>
+          <p:cNvSpPr/>
+          <p:nvPr/>
+        </p:nvSpPr>
+        <p:spPr>
+          <a:xfrm>
+            <a:off x="7422788" y="1554480"/>
+            <a:ext cx="4201979" cy="3977640"/>
           </a:xfrm>
           <a:prstGeom prst="roundRect">
             <a:avLst>
-              <a:gd name="adj" fmla="val 2951"/>
+              <a:gd name="adj" fmla="val 2069"/>
             </a:avLst>
           </a:prstGeom>
           <a:solidFill>
@@ -5347,14 +5690,14 @@
       </p:sp>
       <p:sp>
         <p:nvSpPr>
-          <p:cNvPr id="5" name="Text 3"/>
-          <p:cNvSpPr/>
-          <p:nvPr/>
-        </p:nvSpPr>
-        <p:spPr>
-          <a:xfrm>
-            <a:off x="841248" y="1700784"/>
-            <a:ext cx="5486400" cy="292608"/>
+          <p:cNvPr id="6" name="Text 4"/>
+          <p:cNvSpPr/>
+          <p:nvPr/>
+        </p:nvSpPr>
+        <p:spPr>
+          <a:xfrm>
+            <a:off x="7660532" y="1755648"/>
+            <a:ext cx="3744779" cy="310896"/>
           </a:xfrm>
           <a:prstGeom prst="rect">
             <a:avLst/>
@@ -5370,7 +5713,7 @@
               <a:buNone/>
             </a:pPr>
             <a:r>
-              <a:rPr lang="en-US" sz="1100" b="1" spc="150" kern="0" dirty="0">
+              <a:rPr lang="en-US" sz="1100" b="1" spc="140" kern="0" dirty="0">
                 <a:solidFill>
                   <a:srgbClr val="455A64"/>
                 </a:solidFill>
@@ -5378,7 +5721,7 @@
                 <a:ea typeface="Calibri" pitchFamily="34" charset="-122"/>
                 <a:cs typeface="Calibri" pitchFamily="34" charset="-120"/>
               </a:rPr>
-              <a:t>CLINICAL VIGNETTE</a:t>
+              <a:t>TEACHING POINT</a:t>
             </a:r>
             <a:endParaRPr lang="en-US" sz="1100" dirty="0"/>
           </a:p>
@@ -5386,14 +5729,14 @@
       </p:sp>
       <p:sp>
         <p:nvSpPr>
-          <p:cNvPr id="6" name="Text 4"/>
-          <p:cNvSpPr/>
-          <p:nvPr/>
-        </p:nvSpPr>
-        <p:spPr>
-          <a:xfrm>
-            <a:off x="841248" y="2029968"/>
-            <a:ext cx="10509199" cy="2148840"/>
+          <p:cNvPr id="7" name="Text 5"/>
+          <p:cNvSpPr/>
+          <p:nvPr/>
+        </p:nvSpPr>
+        <p:spPr>
+          <a:xfrm>
+            <a:off x="7660532" y="2121408"/>
+            <a:ext cx="3726491" cy="3291840"/>
           </a:xfrm>
           <a:prstGeom prst="rect">
             <a:avLst/>
@@ -5407,12 +5750,12 @@
           <a:p>
             <a:pPr algn="l" indent="0" marL="0">
               <a:lnSpc>
-                <a:spcPct val="108000"/>
+                <a:spcPct val="110000"/>
               </a:lnSpc>
               <a:buNone/>
             </a:pPr>
             <a:r>
-              <a:rPr lang="en-US" sz="1450" dirty="0">
+              <a:rPr lang="en-US" sz="1350" dirty="0">
                 <a:solidFill>
                   <a:srgbClr val="33444F"/>
                 </a:solidFill>
@@ -5420,122 +5763,15 @@
                 <a:ea typeface="Calibri" pitchFamily="34" charset="-122"/>
                 <a:cs typeface="Calibri" pitchFamily="34" charset="-120"/>
               </a:rPr>
-              <a:t>A technologist reports a near miss: they caught a transposed result before it was released. Leadership must decide how to respond.</a:t>
-            </a:r>
-            <a:endParaRPr lang="en-US" sz="1450" dirty="0"/>
-          </a:p>
-        </p:txBody>
-      </p:sp>
-      <p:sp>
-        <p:nvSpPr>
-          <p:cNvPr id="7" name="Shape 5"/>
-          <p:cNvSpPr/>
-          <p:nvPr/>
-        </p:nvSpPr>
-        <p:spPr>
-          <a:xfrm>
-            <a:off x="566928" y="4553712"/>
-            <a:ext cx="11057839" cy="1325880"/>
-          </a:xfrm>
-          <a:prstGeom prst="roundRect">
-            <a:avLst>
-              <a:gd name="adj" fmla="val 6207"/>
-            </a:avLst>
-          </a:prstGeom>
-          <a:solidFill>
-            <a:srgbClr val="0E3A5F"/>
-          </a:solidFill>
-          <a:ln/>
-          <a:effectLst>
-            <a:outerShdw sx="100000" sy="100000" kx="0" ky="0" algn="bl" rotWithShape="0" blurRad="88900" dist="25400" dir="5400000">
-              <a:srgbClr val="22303C">
-                <a:alpha val="12000"/>
-              </a:srgbClr>
-            </a:outerShdw>
-          </a:effectLst>
-        </p:spPr>
+              <a:t>Favor strong interventions (forcing functions, barcoding) over reminders — fixes that don’t rely on human vigilance last.</a:t>
+            </a:r>
+            <a:endParaRPr lang="en-US" sz="1350" dirty="0"/>
+          </a:p>
+        </p:txBody>
       </p:sp>
       <p:sp>
         <p:nvSpPr>
           <p:cNvPr id="8" name="Text 6"/>
-          <p:cNvSpPr/>
-          <p:nvPr/>
-        </p:nvSpPr>
-        <p:spPr>
-          <a:xfrm>
-            <a:off x="822960" y="4681728"/>
-            <a:ext cx="640080" cy="960120"/>
-          </a:xfrm>
-          <a:prstGeom prst="rect">
-            <a:avLst/>
-          </a:prstGeom>
-          <a:noFill/>
-          <a:ln/>
-        </p:spPr>
-        <p:txBody>
-          <a:bodyPr wrap="square" lIns="0" tIns="0" rIns="0" bIns="0" rtlCol="0" anchor="ctr"/>
-          <a:lstStyle/>
-          <a:p>
-            <a:pPr algn="ctr" indent="0" marL="0">
-              <a:buNone/>
-            </a:pPr>
-            <a:r>
-              <a:rPr lang="en-US" sz="4000" b="1" dirty="0">
-                <a:solidFill>
-                  <a:srgbClr val="455A64"/>
-                </a:solidFill>
-                <a:latin typeface="Calibri" pitchFamily="34" charset="0"/>
-                <a:ea typeface="Calibri" pitchFamily="34" charset="-122"/>
-                <a:cs typeface="Calibri" pitchFamily="34" charset="-120"/>
-              </a:rPr>
-              <a:t>?</a:t>
-            </a:r>
-            <a:endParaRPr lang="en-US" sz="4000" dirty="0"/>
-          </a:p>
-        </p:txBody>
-      </p:sp>
-      <p:sp>
-        <p:nvSpPr>
-          <p:cNvPr id="9" name="Text 7"/>
-          <p:cNvSpPr/>
-          <p:nvPr/>
-        </p:nvSpPr>
-        <p:spPr>
-          <a:xfrm>
-            <a:off x="1618488" y="4553712"/>
-            <a:ext cx="9686239" cy="1325880"/>
-          </a:xfrm>
-          <a:prstGeom prst="rect">
-            <a:avLst/>
-          </a:prstGeom>
-          <a:noFill/>
-          <a:ln/>
-        </p:spPr>
-        <p:txBody>
-          <a:bodyPr wrap="square" lIns="0" tIns="0" rIns="0" bIns="0" rtlCol="0" anchor="ctr"/>
-          <a:lstStyle/>
-          <a:p>
-            <a:pPr algn="l" indent="0" marL="0">
-              <a:buNone/>
-            </a:pPr>
-            <a:r>
-              <a:rPr lang="en-US" sz="1500" b="1" dirty="0">
-                <a:solidFill>
-                  <a:srgbClr val="FFFFFF"/>
-                </a:solidFill>
-                <a:latin typeface="Calibri" pitchFamily="34" charset="0"/>
-                <a:ea typeface="Calibri" pitchFamily="34" charset="-122"/>
-                <a:cs typeface="Calibri" pitchFamily="34" charset="-120"/>
-              </a:rPr>
-              <a:t>What is the just-culture response, and why does it matter?</a:t>
-            </a:r>
-            <a:endParaRPr lang="en-US" sz="1500" dirty="0"/>
-          </a:p>
-        </p:txBody>
-      </p:sp>
-      <p:sp>
-        <p:nvSpPr>
-          <p:cNvPr id="10" name="Text 8"/>
           <p:cNvSpPr/>
           <p:nvPr/>
         </p:nvSpPr>
@@ -5574,7 +5810,7 @@
       </p:sp>
       <p:sp>
         <p:nvSpPr>
-          <p:cNvPr id="11" name="Text 9"/>
+          <p:cNvPr id="9" name="Text 7"/>
           <p:cNvSpPr/>
           <p:nvPr/>
         </p:nvSpPr>
@@ -5704,7 +5940,7 @@
                 <a:ea typeface="Calibri" pitchFamily="34" charset="-122"/>
                 <a:cs typeface="Calibri" pitchFamily="34" charset="-120"/>
               </a:rPr>
-              <a:t>LAB MANAGEMENT &amp; QUALITY   ·   CASE 2  ·  RESOLUTION</a:t>
+              <a:t>LAB MANAGEMENT &amp; QUALITY   ·   CASE 2</a:t>
             </a:r>
             <a:endParaRPr lang="en-US" sz="1100" dirty="0"/>
           </a:p>
@@ -5743,7 +5979,7 @@
                 <a:ea typeface="Calibri" pitchFamily="34" charset="-122"/>
                 <a:cs typeface="Calibri" pitchFamily="34" charset="-120"/>
               </a:rPr>
-              <a:t>Case 2: Rewarding Near-Miss Reporting</a:t>
+              <a:t>Case 2</a:t>
             </a:r>
             <a:endParaRPr lang="en-US" sz="3000" dirty="0"/>
           </a:p>
@@ -5751,124 +5987,18 @@
       </p:sp>
       <p:sp>
         <p:nvSpPr>
-          <p:cNvPr id="4" name="Text 2"/>
-          <p:cNvSpPr/>
-          <p:nvPr/>
-        </p:nvSpPr>
-        <p:spPr>
-          <a:xfrm>
-            <a:off x="566928" y="1554480"/>
-            <a:ext cx="6413547" cy="4023360"/>
-          </a:xfrm>
-          <a:prstGeom prst="rect">
-            <a:avLst/>
-          </a:prstGeom>
-          <a:noFill/>
-          <a:ln/>
-        </p:spPr>
-        <p:txBody>
-          <a:bodyPr wrap="square" lIns="0" tIns="0" rIns="0" bIns="0" rtlCol="0" anchor="t"/>
-          <a:lstStyle/>
-          <a:p>
-            <a:pPr algn="l" marL="177800" indent="-177800">
-              <a:spcAft>
-                <a:spcPts val="900"/>
-              </a:spcAft>
-              <a:buSzPct val="100000"/>
-              <a:buChar char="•"/>
-            </a:pPr>
-            <a:r>
-              <a:rPr lang="en-US" sz="1400" b="1" dirty="0">
-                <a:solidFill>
-                  <a:srgbClr val="1B2A38"/>
-                </a:solidFill>
-                <a:latin typeface="Calibri" pitchFamily="34" charset="0"/>
-                <a:ea typeface="Calibri" pitchFamily="34" charset="-122"/>
-                <a:cs typeface="Calibri" pitchFamily="34" charset="-120"/>
-              </a:rPr>
-              <a:t>Treat the near miss as a free lesson — thank the reporter and analyze the catch.</a:t>
-            </a:r>
-            <a:endParaRPr lang="en-US" sz="1400" dirty="0"/>
-          </a:p>
-          <a:p>
-            <a:pPr algn="l" marL="177800" indent="-177800">
-              <a:spcAft>
-                <a:spcPts val="900"/>
-              </a:spcAft>
-              <a:buSzPct val="100000"/>
-              <a:buChar char="•"/>
-            </a:pPr>
-            <a:r>
-              <a:rPr lang="en-US" sz="1400" dirty="0">
-                <a:solidFill>
-                  <a:srgbClr val="33444F"/>
-                </a:solidFill>
-                <a:latin typeface="Calibri" pitchFamily="34" charset="0"/>
-                <a:ea typeface="Calibri" pitchFamily="34" charset="-122"/>
-                <a:cs typeface="Calibri" pitchFamily="34" charset="-120"/>
-              </a:rPr>
-              <a:t>Determine why the error was possible and strengthen the defense that caught it.</a:t>
-            </a:r>
-            <a:endParaRPr lang="en-US" sz="1400" dirty="0"/>
-          </a:p>
-          <a:p>
-            <a:pPr algn="l" marL="177800" indent="-177800">
-              <a:spcAft>
-                <a:spcPts val="900"/>
-              </a:spcAft>
-              <a:buSzPct val="100000"/>
-              <a:buChar char="•"/>
-            </a:pPr>
-            <a:r>
-              <a:rPr lang="en-US" sz="1400" dirty="0">
-                <a:solidFill>
-                  <a:srgbClr val="33444F"/>
-                </a:solidFill>
-                <a:latin typeface="Calibri" pitchFamily="34" charset="0"/>
-                <a:ea typeface="Calibri" pitchFamily="34" charset="-122"/>
-                <a:cs typeface="Calibri" pitchFamily="34" charset="-120"/>
-              </a:rPr>
-              <a:t>Punishing reporting would suppress future disclosures and hide hazards.</a:t>
-            </a:r>
-            <a:endParaRPr lang="en-US" sz="1400" dirty="0"/>
-          </a:p>
-          <a:p>
-            <a:pPr algn="l" marL="177800" indent="-177800">
-              <a:spcAft>
-                <a:spcPts val="900"/>
-              </a:spcAft>
-              <a:buSzPct val="100000"/>
-              <a:buChar char="•"/>
-            </a:pPr>
-            <a:r>
-              <a:rPr lang="en-US" sz="1400" dirty="0">
-                <a:solidFill>
-                  <a:srgbClr val="33444F"/>
-                </a:solidFill>
-                <a:latin typeface="Calibri" pitchFamily="34" charset="0"/>
-                <a:ea typeface="Calibri" pitchFamily="34" charset="-122"/>
-                <a:cs typeface="Calibri" pitchFamily="34" charset="-120"/>
-              </a:rPr>
-              <a:t>Feed back the improvement to staff.</a:t>
-            </a:r>
-            <a:endParaRPr lang="en-US" sz="1400" dirty="0"/>
-          </a:p>
-        </p:txBody>
-      </p:sp>
-      <p:sp>
-        <p:nvSpPr>
-          <p:cNvPr id="5" name="Shape 3"/>
-          <p:cNvSpPr/>
-          <p:nvPr/>
-        </p:nvSpPr>
-        <p:spPr>
-          <a:xfrm>
-            <a:off x="7422788" y="1554480"/>
-            <a:ext cx="4201979" cy="3977640"/>
+          <p:cNvPr id="4" name="Shape 2"/>
+          <p:cNvSpPr/>
+          <p:nvPr/>
+        </p:nvSpPr>
+        <p:spPr>
+          <a:xfrm>
+            <a:off x="566928" y="1517904"/>
+            <a:ext cx="11057839" cy="2788920"/>
           </a:xfrm>
           <a:prstGeom prst="roundRect">
             <a:avLst>
-              <a:gd name="adj" fmla="val 2069"/>
+              <a:gd name="adj" fmla="val 2951"/>
             </a:avLst>
           </a:prstGeom>
           <a:solidFill>
@@ -5886,53 +6016,53 @@
       </p:sp>
       <p:sp>
         <p:nvSpPr>
+          <p:cNvPr id="5" name="Text 3"/>
+          <p:cNvSpPr/>
+          <p:nvPr/>
+        </p:nvSpPr>
+        <p:spPr>
+          <a:xfrm>
+            <a:off x="841248" y="1700784"/>
+            <a:ext cx="5486400" cy="292608"/>
+          </a:xfrm>
+          <a:prstGeom prst="rect">
+            <a:avLst/>
+          </a:prstGeom>
+          <a:noFill/>
+          <a:ln/>
+        </p:spPr>
+        <p:txBody>
+          <a:bodyPr wrap="square" lIns="0" tIns="0" rIns="0" bIns="0" rtlCol="0" anchor="ctr"/>
+          <a:lstStyle/>
+          <a:p>
+            <a:pPr indent="0" marL="0">
+              <a:buNone/>
+            </a:pPr>
+            <a:r>
+              <a:rPr lang="en-US" sz="1100" b="1" spc="150" kern="0" dirty="0">
+                <a:solidFill>
+                  <a:srgbClr val="455A64"/>
+                </a:solidFill>
+                <a:latin typeface="Calibri" pitchFamily="34" charset="0"/>
+                <a:ea typeface="Calibri" pitchFamily="34" charset="-122"/>
+                <a:cs typeface="Calibri" pitchFamily="34" charset="-120"/>
+              </a:rPr>
+              <a:t>CLINICAL VIGNETTE</a:t>
+            </a:r>
+            <a:endParaRPr lang="en-US" sz="1100" dirty="0"/>
+          </a:p>
+        </p:txBody>
+      </p:sp>
+      <p:sp>
+        <p:nvSpPr>
           <p:cNvPr id="6" name="Text 4"/>
           <p:cNvSpPr/>
           <p:nvPr/>
         </p:nvSpPr>
         <p:spPr>
           <a:xfrm>
-            <a:off x="7660532" y="1755648"/>
-            <a:ext cx="3744779" cy="310896"/>
-          </a:xfrm>
-          <a:prstGeom prst="rect">
-            <a:avLst/>
-          </a:prstGeom>
-          <a:noFill/>
-          <a:ln/>
-        </p:spPr>
-        <p:txBody>
-          <a:bodyPr wrap="square" lIns="0" tIns="0" rIns="0" bIns="0" rtlCol="0" anchor="ctr"/>
-          <a:lstStyle/>
-          <a:p>
-            <a:pPr indent="0" marL="0">
-              <a:buNone/>
-            </a:pPr>
-            <a:r>
-              <a:rPr lang="en-US" sz="1100" b="1" spc="140" kern="0" dirty="0">
-                <a:solidFill>
-                  <a:srgbClr val="455A64"/>
-                </a:solidFill>
-                <a:latin typeface="Calibri" pitchFamily="34" charset="0"/>
-                <a:ea typeface="Calibri" pitchFamily="34" charset="-122"/>
-                <a:cs typeface="Calibri" pitchFamily="34" charset="-120"/>
-              </a:rPr>
-              <a:t>TEACHING POINT</a:t>
-            </a:r>
-            <a:endParaRPr lang="en-US" sz="1100" dirty="0"/>
-          </a:p>
-        </p:txBody>
-      </p:sp>
-      <p:sp>
-        <p:nvSpPr>
-          <p:cNvPr id="7" name="Text 5"/>
-          <p:cNvSpPr/>
-          <p:nvPr/>
-        </p:nvSpPr>
-        <p:spPr>
-          <a:xfrm>
-            <a:off x="7660532" y="2121408"/>
-            <a:ext cx="3726491" cy="3291840"/>
+            <a:off x="841248" y="2029968"/>
+            <a:ext cx="10509199" cy="2148840"/>
           </a:xfrm>
           <a:prstGeom prst="rect">
             <a:avLst/>
@@ -5946,12 +6076,12 @@
           <a:p>
             <a:pPr algn="l" indent="0" marL="0">
               <a:lnSpc>
-                <a:spcPct val="110000"/>
+                <a:spcPct val="108000"/>
               </a:lnSpc>
               <a:buNone/>
             </a:pPr>
             <a:r>
-              <a:rPr lang="en-US" sz="1350" dirty="0">
+              <a:rPr lang="en-US" sz="1450" dirty="0">
                 <a:solidFill>
                   <a:srgbClr val="33444F"/>
                 </a:solidFill>
@@ -5959,15 +6089,122 @@
                 <a:ea typeface="Calibri" pitchFamily="34" charset="-122"/>
                 <a:cs typeface="Calibri" pitchFamily="34" charset="-120"/>
               </a:rPr>
-              <a:t>A healthy safety culture celebrates near-miss reporting and fixes the system; punishment drives errors underground.</a:t>
-            </a:r>
-            <a:endParaRPr lang="en-US" sz="1350" dirty="0"/>
-          </a:p>
-        </p:txBody>
+              <a:t>A near miss is caught when a technologist notices a critical value that doesn’t fit. A manager wants to ‘move on’ since no harm occurred.</a:t>
+            </a:r>
+            <a:endParaRPr lang="en-US" sz="1450" dirty="0"/>
+          </a:p>
+        </p:txBody>
+      </p:sp>
+      <p:sp>
+        <p:nvSpPr>
+          <p:cNvPr id="7" name="Shape 5"/>
+          <p:cNvSpPr/>
+          <p:nvPr/>
+        </p:nvSpPr>
+        <p:spPr>
+          <a:xfrm>
+            <a:off x="566928" y="4553712"/>
+            <a:ext cx="11057839" cy="1325880"/>
+          </a:xfrm>
+          <a:prstGeom prst="roundRect">
+            <a:avLst>
+              <a:gd name="adj" fmla="val 6207"/>
+            </a:avLst>
+          </a:prstGeom>
+          <a:solidFill>
+            <a:srgbClr val="0E3A5F"/>
+          </a:solidFill>
+          <a:ln/>
+          <a:effectLst>
+            <a:outerShdw sx="100000" sy="100000" kx="0" ky="0" algn="bl" rotWithShape="0" blurRad="88900" dist="25400" dir="5400000">
+              <a:srgbClr val="22303C">
+                <a:alpha val="12000"/>
+              </a:srgbClr>
+            </a:outerShdw>
+          </a:effectLst>
+        </p:spPr>
       </p:sp>
       <p:sp>
         <p:nvSpPr>
           <p:cNvPr id="8" name="Text 6"/>
+          <p:cNvSpPr/>
+          <p:nvPr/>
+        </p:nvSpPr>
+        <p:spPr>
+          <a:xfrm>
+            <a:off x="822960" y="4681728"/>
+            <a:ext cx="640080" cy="960120"/>
+          </a:xfrm>
+          <a:prstGeom prst="rect">
+            <a:avLst/>
+          </a:prstGeom>
+          <a:noFill/>
+          <a:ln/>
+        </p:spPr>
+        <p:txBody>
+          <a:bodyPr wrap="square" lIns="0" tIns="0" rIns="0" bIns="0" rtlCol="0" anchor="ctr"/>
+          <a:lstStyle/>
+          <a:p>
+            <a:pPr algn="ctr" indent="0" marL="0">
+              <a:buNone/>
+            </a:pPr>
+            <a:r>
+              <a:rPr lang="en-US" sz="4000" b="1" dirty="0">
+                <a:solidFill>
+                  <a:srgbClr val="455A64"/>
+                </a:solidFill>
+                <a:latin typeface="Calibri" pitchFamily="34" charset="0"/>
+                <a:ea typeface="Calibri" pitchFamily="34" charset="-122"/>
+                <a:cs typeface="Calibri" pitchFamily="34" charset="-120"/>
+              </a:rPr>
+              <a:t>?</a:t>
+            </a:r>
+            <a:endParaRPr lang="en-US" sz="4000" dirty="0"/>
+          </a:p>
+        </p:txBody>
+      </p:sp>
+      <p:sp>
+        <p:nvSpPr>
+          <p:cNvPr id="9" name="Text 7"/>
+          <p:cNvSpPr/>
+          <p:nvPr/>
+        </p:nvSpPr>
+        <p:spPr>
+          <a:xfrm>
+            <a:off x="1618488" y="4553712"/>
+            <a:ext cx="9686239" cy="1325880"/>
+          </a:xfrm>
+          <a:prstGeom prst="rect">
+            <a:avLst/>
+          </a:prstGeom>
+          <a:noFill/>
+          <a:ln/>
+        </p:spPr>
+        <p:txBody>
+          <a:bodyPr wrap="square" lIns="0" tIns="0" rIns="0" bIns="0" rtlCol="0" anchor="ctr"/>
+          <a:lstStyle/>
+          <a:p>
+            <a:pPr algn="l" indent="0" marL="0">
+              <a:buNone/>
+            </a:pPr>
+            <a:r>
+              <a:rPr lang="en-US" sz="1500" b="1" dirty="0">
+                <a:solidFill>
+                  <a:srgbClr val="FFFFFF"/>
+                </a:solidFill>
+                <a:latin typeface="Calibri" pitchFamily="34" charset="0"/>
+                <a:ea typeface="Calibri" pitchFamily="34" charset="-122"/>
+                <a:cs typeface="Calibri" pitchFamily="34" charset="-120"/>
+              </a:rPr>
+              <a:t>How should the laboratory handle this?</a:t>
+            </a:r>
+            <a:endParaRPr lang="en-US" sz="1500" dirty="0"/>
+          </a:p>
+        </p:txBody>
+      </p:sp>
+      <p:sp>
+        <p:nvSpPr>
+          <p:cNvPr id="10" name="Text 8"/>
           <p:cNvSpPr/>
           <p:nvPr/>
         </p:nvSpPr>
@@ -6006,7 +6243,7 @@
       </p:sp>
       <p:sp>
         <p:nvSpPr>
-          <p:cNvPr id="9" name="Text 7"/>
+          <p:cNvPr id="11" name="Text 9"/>
           <p:cNvSpPr/>
           <p:nvPr/>
         </p:nvSpPr>
@@ -6136,7 +6373,7 @@
                 <a:ea typeface="Calibri" pitchFamily="34" charset="-122"/>
                 <a:cs typeface="Calibri" pitchFamily="34" charset="-120"/>
               </a:rPr>
-              <a:t>LAB MANAGEMENT &amp; QUALITY   ·   BOARD REVIEW  ·  Q1</a:t>
+              <a:t>LAB MANAGEMENT &amp; QUALITY   ·   CASE 2  ·  RESOLUTION</a:t>
             </a:r>
             <a:endParaRPr lang="en-US" sz="1100" dirty="0"/>
           </a:p>
@@ -6167,7 +6404,7 @@
               <a:buNone/>
             </a:pPr>
             <a:r>
-              <a:rPr lang="en-US" sz="2600" b="1" dirty="0">
+              <a:rPr lang="en-US" sz="3000" b="1" dirty="0">
                 <a:solidFill>
                   <a:srgbClr val="0E3A5F"/>
                 </a:solidFill>
@@ -6175,9 +6412,9 @@
                 <a:ea typeface="Calibri" pitchFamily="34" charset="-122"/>
                 <a:cs typeface="Calibri" pitchFamily="34" charset="-120"/>
               </a:rPr>
-              <a:t>Board-Style Review</a:t>
-            </a:r>
-            <a:endParaRPr lang="en-US" sz="2600" dirty="0"/>
+              <a:t>Case 2: Value of Near Misses</a:t>
+            </a:r>
+            <a:endParaRPr lang="en-US" sz="3000" dirty="0"/>
           </a:p>
         </p:txBody>
       </p:sp>
@@ -6189,8 +6426,8 @@
         </p:nvSpPr>
         <p:spPr>
           <a:xfrm>
-            <a:off x="566928" y="1417320"/>
-            <a:ext cx="11057839" cy="914400"/>
+            <a:off x="566928" y="1554480"/>
+            <a:ext cx="6413547" cy="4023360"/>
           </a:xfrm>
           <a:prstGeom prst="rect">
             <a:avLst/>
@@ -6202,14 +6439,15 @@
           <a:bodyPr wrap="square" lIns="0" tIns="0" rIns="0" bIns="0" rtlCol="0" anchor="t"/>
           <a:lstStyle/>
           <a:p>
-            <a:pPr algn="l" indent="0" marL="0">
-              <a:lnSpc>
-                <a:spcPct val="105000"/>
-              </a:lnSpc>
-              <a:buNone/>
-            </a:pPr>
-            <a:r>
-              <a:rPr lang="en-US" sz="1450" b="1" dirty="0">
+            <a:pPr algn="l" marL="177800" indent="-177800">
+              <a:spcAft>
+                <a:spcPts val="900"/>
+              </a:spcAft>
+              <a:buSzPct val="100000"/>
+              <a:buChar char="•"/>
+            </a:pPr>
+            <a:r>
+              <a:rPr lang="en-US" sz="1400" b="1" dirty="0">
                 <a:solidFill>
                   <a:srgbClr val="1B2A38"/>
                 </a:solidFill>
@@ -6217,41 +6455,20 @@
                 <a:ea typeface="Calibri" pitchFamily="34" charset="-122"/>
                 <a:cs typeface="Calibri" pitchFamily="34" charset="-120"/>
               </a:rPr>
-              <a:t>In a just-culture framework, an honest slip by a well-trained person in a flawed system is best handled by:</a:t>
-            </a:r>
-            <a:endParaRPr lang="en-US" sz="1450" dirty="0"/>
-          </a:p>
-        </p:txBody>
-      </p:sp>
-      <p:sp>
-        <p:nvSpPr>
-          <p:cNvPr id="5" name="Text 3"/>
-          <p:cNvSpPr/>
-          <p:nvPr/>
-        </p:nvSpPr>
-        <p:spPr>
-          <a:xfrm>
-            <a:off x="658368" y="2395728"/>
-            <a:ext cx="6192390" cy="3017520"/>
-          </a:xfrm>
-          <a:prstGeom prst="rect">
-            <a:avLst/>
-          </a:prstGeom>
-          <a:noFill/>
-          <a:ln/>
-        </p:spPr>
-        <p:txBody>
-          <a:bodyPr wrap="square" lIns="0" tIns="0" rIns="0" bIns="0" rtlCol="0" anchor="t"/>
-          <a:lstStyle/>
-          <a:p>
-            <a:pPr algn="l" indent="0" marL="0">
+              <a:t>Near misses reveal system weaknesses without harm — they should be reported and analyzed.</a:t>
+            </a:r>
+            <a:endParaRPr lang="en-US" sz="1400" dirty="0"/>
+          </a:p>
+          <a:p>
+            <a:pPr algn="l" marL="177800" indent="-177800">
               <a:spcAft>
-                <a:spcPts val="600"/>
+                <a:spcPts val="900"/>
               </a:spcAft>
-              <a:buNone/>
-            </a:pPr>
-            <a:r>
-              <a:rPr lang="en-US" sz="1350" dirty="0">
+              <a:buSzPct val="100000"/>
+              <a:buChar char="•"/>
+            </a:pPr>
+            <a:r>
+              <a:rPr lang="en-US" sz="1400" dirty="0">
                 <a:solidFill>
                   <a:srgbClr val="33444F"/>
                 </a:solidFill>
@@ -6259,39 +6476,41 @@
                 <a:ea typeface="Calibri" pitchFamily="34" charset="-122"/>
                 <a:cs typeface="Calibri" pitchFamily="34" charset="-120"/>
               </a:rPr>
-              <a:t>A. Disciplinary action</a:t>
-            </a:r>
-            <a:endParaRPr lang="en-US" sz="1350" dirty="0"/>
-          </a:p>
-          <a:p>
-            <a:pPr algn="l" indent="0" marL="0">
+              <a:t>They are frequent and offer rich, low-cost learning.</a:t>
+            </a:r>
+            <a:endParaRPr lang="en-US" sz="1400" dirty="0"/>
+          </a:p>
+          <a:p>
+            <a:pPr algn="l" marL="177800" indent="-177800">
               <a:spcAft>
-                <a:spcPts val="600"/>
+                <a:spcPts val="900"/>
               </a:spcAft>
-              <a:buNone/>
-            </a:pPr>
-            <a:r>
-              <a:rPr lang="en-US" sz="1350" b="1" dirty="0">
-                <a:solidFill>
-                  <a:srgbClr val="2C3A41"/>
-                </a:solidFill>
-                <a:latin typeface="Calibri" pitchFamily="34" charset="0"/>
-                <a:ea typeface="Calibri" pitchFamily="34" charset="-122"/>
-                <a:cs typeface="Calibri" pitchFamily="34" charset="-120"/>
-              </a:rPr>
-              <a:t>B. Consoling the individual and fixing the system</a:t>
-            </a:r>
-            <a:endParaRPr lang="en-US" sz="1350" dirty="0"/>
-          </a:p>
-          <a:p>
-            <a:pPr algn="l" indent="0" marL="0">
+              <a:buSzPct val="100000"/>
+              <a:buChar char="•"/>
+            </a:pPr>
+            <a:r>
+              <a:rPr lang="en-US" sz="1400" dirty="0">
+                <a:solidFill>
+                  <a:srgbClr val="33444F"/>
+                </a:solidFill>
+                <a:latin typeface="Calibri" pitchFamily="34" charset="0"/>
+                <a:ea typeface="Calibri" pitchFamily="34" charset="-122"/>
+                <a:cs typeface="Calibri" pitchFamily="34" charset="-120"/>
+              </a:rPr>
+              <a:t>A non-punitive culture surfaces them.</a:t>
+            </a:r>
+            <a:endParaRPr lang="en-US" sz="1400" dirty="0"/>
+          </a:p>
+          <a:p>
+            <a:pPr algn="l" marL="177800" indent="-177800">
               <a:spcAft>
-                <a:spcPts val="600"/>
+                <a:spcPts val="900"/>
               </a:spcAft>
-              <a:buNone/>
-            </a:pPr>
-            <a:r>
-              <a:rPr lang="en-US" sz="1350" dirty="0">
+              <a:buSzPct val="100000"/>
+              <a:buChar char="•"/>
+            </a:pPr>
+            <a:r>
+              <a:rPr lang="en-US" sz="1400" dirty="0">
                 <a:solidFill>
                   <a:srgbClr val="33444F"/>
                 </a:solidFill>
@@ -6299,66 +6518,26 @@
                 <a:ea typeface="Calibri" pitchFamily="34" charset="-122"/>
                 <a:cs typeface="Calibri" pitchFamily="34" charset="-120"/>
               </a:rPr>
-              <a:t>C. Termination</a:t>
-            </a:r>
-            <a:endParaRPr lang="en-US" sz="1350" dirty="0"/>
-          </a:p>
-          <a:p>
-            <a:pPr algn="l" indent="0" marL="0">
-              <a:spcAft>
-                <a:spcPts val="600"/>
-              </a:spcAft>
-              <a:buNone/>
-            </a:pPr>
-            <a:r>
-              <a:rPr lang="en-US" sz="1350" dirty="0">
-                <a:solidFill>
-                  <a:srgbClr val="33444F"/>
-                </a:solidFill>
-                <a:latin typeface="Calibri" pitchFamily="34" charset="0"/>
-                <a:ea typeface="Calibri" pitchFamily="34" charset="-122"/>
-                <a:cs typeface="Calibri" pitchFamily="34" charset="-120"/>
-              </a:rPr>
-              <a:t>D. Ignoring it</a:t>
-            </a:r>
-            <a:endParaRPr lang="en-US" sz="1350" dirty="0"/>
-          </a:p>
-          <a:p>
-            <a:pPr algn="l" indent="0" marL="0">
-              <a:spcAft>
-                <a:spcPts val="600"/>
-              </a:spcAft>
-              <a:buNone/>
-            </a:pPr>
-            <a:r>
-              <a:rPr lang="en-US" sz="1350" dirty="0">
-                <a:solidFill>
-                  <a:srgbClr val="33444F"/>
-                </a:solidFill>
-                <a:latin typeface="Calibri" pitchFamily="34" charset="0"/>
-                <a:ea typeface="Calibri" pitchFamily="34" charset="-122"/>
-                <a:cs typeface="Calibri" pitchFamily="34" charset="-120"/>
-              </a:rPr>
-              <a:t>E. Public reprimand</a:t>
-            </a:r>
-            <a:endParaRPr lang="en-US" sz="1350" dirty="0"/>
-          </a:p>
-        </p:txBody>
-      </p:sp>
-      <p:sp>
-        <p:nvSpPr>
-          <p:cNvPr id="6" name="Shape 4"/>
-          <p:cNvSpPr/>
-          <p:nvPr/>
-        </p:nvSpPr>
-        <p:spPr>
-          <a:xfrm>
-            <a:off x="7201632" y="2395728"/>
-            <a:ext cx="4423136" cy="3246120"/>
+              <a:t>Act on trends before harm occurs.</a:t>
+            </a:r>
+            <a:endParaRPr lang="en-US" sz="1400" dirty="0"/>
+          </a:p>
+        </p:txBody>
+      </p:sp>
+      <p:sp>
+        <p:nvSpPr>
+          <p:cNvPr id="5" name="Shape 3"/>
+          <p:cNvSpPr/>
+          <p:nvPr/>
+        </p:nvSpPr>
+        <p:spPr>
+          <a:xfrm>
+            <a:off x="7422788" y="1554480"/>
+            <a:ext cx="4201979" cy="3977640"/>
           </a:xfrm>
           <a:prstGeom prst="roundRect">
             <a:avLst>
-              <a:gd name="adj" fmla="val 2535"/>
+              <a:gd name="adj" fmla="val 2069"/>
             </a:avLst>
           </a:prstGeom>
           <a:solidFill>
@@ -6376,67 +6555,53 @@
       </p:sp>
       <p:sp>
         <p:nvSpPr>
+          <p:cNvPr id="6" name="Text 4"/>
+          <p:cNvSpPr/>
+          <p:nvPr/>
+        </p:nvSpPr>
+        <p:spPr>
+          <a:xfrm>
+            <a:off x="7660532" y="1755648"/>
+            <a:ext cx="3744779" cy="310896"/>
+          </a:xfrm>
+          <a:prstGeom prst="rect">
+            <a:avLst/>
+          </a:prstGeom>
+          <a:noFill/>
+          <a:ln/>
+        </p:spPr>
+        <p:txBody>
+          <a:bodyPr wrap="square" lIns="0" tIns="0" rIns="0" bIns="0" rtlCol="0" anchor="ctr"/>
+          <a:lstStyle/>
+          <a:p>
+            <a:pPr indent="0" marL="0">
+              <a:buNone/>
+            </a:pPr>
+            <a:r>
+              <a:rPr lang="en-US" sz="1100" b="1" spc="140" kern="0" dirty="0">
+                <a:solidFill>
+                  <a:srgbClr val="455A64"/>
+                </a:solidFill>
+                <a:latin typeface="Calibri" pitchFamily="34" charset="0"/>
+                <a:ea typeface="Calibri" pitchFamily="34" charset="-122"/>
+                <a:cs typeface="Calibri" pitchFamily="34" charset="-120"/>
+              </a:rPr>
+              <a:t>TEACHING POINT</a:t>
+            </a:r>
+            <a:endParaRPr lang="en-US" sz="1100" dirty="0"/>
+          </a:p>
+        </p:txBody>
+      </p:sp>
+      <p:sp>
+        <p:nvSpPr>
           <p:cNvPr id="7" name="Text 5"/>
           <p:cNvSpPr/>
           <p:nvPr/>
         </p:nvSpPr>
         <p:spPr>
           <a:xfrm>
-            <a:off x="7439376" y="2578608"/>
-            <a:ext cx="3965936" cy="457200"/>
-          </a:xfrm>
-          <a:prstGeom prst="rect">
-            <a:avLst/>
-          </a:prstGeom>
-          <a:noFill/>
-          <a:ln/>
-        </p:spPr>
-        <p:txBody>
-          <a:bodyPr wrap="square" lIns="0" tIns="0" rIns="0" bIns="0" rtlCol="0" anchor="ctr"/>
-          <a:lstStyle/>
-          <a:p>
-            <a:pPr indent="0" marL="0">
-              <a:buNone/>
-            </a:pPr>
-            <a:r>
-              <a:rPr lang="en-US" sz="1500" b="1" dirty="0">
-                <a:solidFill>
-                  <a:srgbClr val="455A64"/>
-                </a:solidFill>
-                <a:latin typeface="Calibri" pitchFamily="34" charset="0"/>
-                <a:ea typeface="Calibri" pitchFamily="34" charset="-122"/>
-                <a:cs typeface="Calibri" pitchFamily="34" charset="-120"/>
-              </a:rPr>
-              <a:t>ANSWER  </a:t>
-            </a:r>
-            <a:pPr indent="0" marL="0">
-              <a:buNone/>
-            </a:pPr>
-            <a:r>
-              <a:rPr lang="en-US" sz="1500" b="1" dirty="0">
-                <a:solidFill>
-                  <a:srgbClr val="1B2A38"/>
-                </a:solidFill>
-                <a:latin typeface="Calibri" pitchFamily="34" charset="0"/>
-                <a:ea typeface="Calibri" pitchFamily="34" charset="-122"/>
-                <a:cs typeface="Calibri" pitchFamily="34" charset="-120"/>
-              </a:rPr>
-              <a:t>B — Console the person; fix the system</a:t>
-            </a:r>
-            <a:endParaRPr lang="en-US" sz="1500" dirty="0"/>
-          </a:p>
-        </p:txBody>
-      </p:sp>
-      <p:sp>
-        <p:nvSpPr>
-          <p:cNvPr id="8" name="Text 6"/>
-          <p:cNvSpPr/>
-          <p:nvPr/>
-        </p:nvSpPr>
-        <p:spPr>
-          <a:xfrm>
-            <a:off x="7439376" y="3127248"/>
-            <a:ext cx="3947648" cy="2377440"/>
+            <a:off x="7660532" y="2121408"/>
+            <a:ext cx="3726491" cy="3291840"/>
           </a:xfrm>
           <a:prstGeom prst="rect">
             <a:avLst/>
@@ -6450,12 +6615,12 @@
           <a:p>
             <a:pPr algn="l" indent="0" marL="0">
               <a:lnSpc>
-                <a:spcPct val="108000"/>
+                <a:spcPct val="110000"/>
               </a:lnSpc>
               <a:buNone/>
             </a:pPr>
             <a:r>
-              <a:rPr lang="en-US" sz="1250" dirty="0">
+              <a:rPr lang="en-US" sz="1350" dirty="0">
                 <a:solidFill>
                   <a:srgbClr val="33444F"/>
                 </a:solidFill>
@@ -6463,15 +6628,15 @@
                 <a:ea typeface="Calibri" pitchFamily="34" charset="-122"/>
                 <a:cs typeface="Calibri" pitchFamily="34" charset="-120"/>
               </a:rPr>
-              <a:t>Just culture distinguishes human error (console + system fix) from at-risk behavior (coach) and reckless behavior (discipline).</a:t>
-            </a:r>
-            <a:endParaRPr lang="en-US" sz="1250" dirty="0"/>
-          </a:p>
-        </p:txBody>
-      </p:sp>
-      <p:sp>
-        <p:nvSpPr>
-          <p:cNvPr id="9" name="Text 7"/>
+              <a:t>Treat near misses as free lessons — investigate them with the same rigor as harmful events to prevent the next one.</a:t>
+            </a:r>
+            <a:endParaRPr lang="en-US" sz="1350" dirty="0"/>
+          </a:p>
+        </p:txBody>
+      </p:sp>
+      <p:sp>
+        <p:nvSpPr>
+          <p:cNvPr id="8" name="Text 6"/>
           <p:cNvSpPr/>
           <p:nvPr/>
         </p:nvSpPr>
@@ -6510,7 +6675,7 @@
       </p:sp>
       <p:sp>
         <p:nvSpPr>
-          <p:cNvPr id="10" name="Text 8"/>
+          <p:cNvPr id="9" name="Text 7"/>
           <p:cNvSpPr/>
           <p:nvPr/>
         </p:nvSpPr>
@@ -6640,7 +6805,7 @@
                 <a:ea typeface="Calibri" pitchFamily="34" charset="-122"/>
                 <a:cs typeface="Calibri" pitchFamily="34" charset="-120"/>
               </a:rPr>
-              <a:t>LAB MANAGEMENT &amp; QUALITY   ·   BOARD REVIEW  ·  Q2</a:t>
+              <a:t>LAB MANAGEMENT &amp; QUALITY   ·   CASE 3</a:t>
             </a:r>
             <a:endParaRPr lang="en-US" sz="1100" dirty="0"/>
           </a:p>
@@ -6671,7 +6836,7 @@
               <a:buNone/>
             </a:pPr>
             <a:r>
-              <a:rPr lang="en-US" sz="2600" b="1" dirty="0">
+              <a:rPr lang="en-US" sz="3000" b="1" dirty="0">
                 <a:solidFill>
                   <a:srgbClr val="0E3A5F"/>
                 </a:solidFill>
@@ -6679,190 +6844,26 @@
                 <a:ea typeface="Calibri" pitchFamily="34" charset="-122"/>
                 <a:cs typeface="Calibri" pitchFamily="34" charset="-120"/>
               </a:rPr>
-              <a:t>Board-Style Review</a:t>
-            </a:r>
-            <a:endParaRPr lang="en-US" sz="2600" dirty="0"/>
-          </a:p>
-        </p:txBody>
-      </p:sp>
-      <p:sp>
-        <p:nvSpPr>
-          <p:cNvPr id="4" name="Text 2"/>
-          <p:cNvSpPr/>
-          <p:nvPr/>
-        </p:nvSpPr>
-        <p:spPr>
-          <a:xfrm>
-            <a:off x="566928" y="1417320"/>
-            <a:ext cx="11057839" cy="914400"/>
-          </a:xfrm>
-          <a:prstGeom prst="rect">
-            <a:avLst/>
-          </a:prstGeom>
-          <a:noFill/>
-          <a:ln/>
-        </p:spPr>
-        <p:txBody>
-          <a:bodyPr wrap="square" lIns="0" tIns="0" rIns="0" bIns="0" rtlCol="0" anchor="t"/>
-          <a:lstStyle/>
-          <a:p>
-            <a:pPr algn="l" indent="0" marL="0">
-              <a:lnSpc>
-                <a:spcPct val="105000"/>
-              </a:lnSpc>
-              <a:buNone/>
-            </a:pPr>
-            <a:r>
-              <a:rPr lang="en-US" sz="1450" b="1" dirty="0">
-                <a:solidFill>
-                  <a:srgbClr val="1B2A38"/>
-                </a:solidFill>
-                <a:latin typeface="Calibri" pitchFamily="34" charset="0"/>
-                <a:ea typeface="Calibri" pitchFamily="34" charset="-122"/>
-                <a:cs typeface="Calibri" pitchFamily="34" charset="-120"/>
-              </a:rPr>
-              <a:t>Which corrective action is the STRONGEST for preventing wrong-blood-in-tube events?</a:t>
-            </a:r>
-            <a:endParaRPr lang="en-US" sz="1450" dirty="0"/>
-          </a:p>
-        </p:txBody>
-      </p:sp>
-      <p:sp>
-        <p:nvSpPr>
-          <p:cNvPr id="5" name="Text 3"/>
-          <p:cNvSpPr/>
-          <p:nvPr/>
-        </p:nvSpPr>
-        <p:spPr>
-          <a:xfrm>
-            <a:off x="658368" y="2395728"/>
-            <a:ext cx="6192390" cy="3017520"/>
-          </a:xfrm>
-          <a:prstGeom prst="rect">
-            <a:avLst/>
-          </a:prstGeom>
-          <a:noFill/>
-          <a:ln/>
-        </p:spPr>
-        <p:txBody>
-          <a:bodyPr wrap="square" lIns="0" tIns="0" rIns="0" bIns="0" rtlCol="0" anchor="t"/>
-          <a:lstStyle/>
-          <a:p>
-            <a:pPr algn="l" indent="0" marL="0">
-              <a:spcAft>
-                <a:spcPts val="600"/>
-              </a:spcAft>
-              <a:buNone/>
-            </a:pPr>
-            <a:r>
-              <a:rPr lang="en-US" sz="1350" dirty="0">
-                <a:solidFill>
-                  <a:srgbClr val="33444F"/>
-                </a:solidFill>
-                <a:latin typeface="Calibri" pitchFamily="34" charset="0"/>
-                <a:ea typeface="Calibri" pitchFamily="34" charset="-122"/>
-                <a:cs typeface="Calibri" pitchFamily="34" charset="-120"/>
-              </a:rPr>
-              <a:t>A. Reminder emails</a:t>
-            </a:r>
-            <a:endParaRPr lang="en-US" sz="1350" dirty="0"/>
-          </a:p>
-          <a:p>
-            <a:pPr algn="l" indent="0" marL="0">
-              <a:spcAft>
-                <a:spcPts val="600"/>
-              </a:spcAft>
-              <a:buNone/>
-            </a:pPr>
-            <a:r>
-              <a:rPr lang="en-US" sz="1350" dirty="0">
-                <a:solidFill>
-                  <a:srgbClr val="33444F"/>
-                </a:solidFill>
-                <a:latin typeface="Calibri" pitchFamily="34" charset="0"/>
-                <a:ea typeface="Calibri" pitchFamily="34" charset="-122"/>
-                <a:cs typeface="Calibri" pitchFamily="34" charset="-120"/>
-              </a:rPr>
-              <a:t>B. Staff education alone</a:t>
-            </a:r>
-            <a:endParaRPr lang="en-US" sz="1350" dirty="0"/>
-          </a:p>
-          <a:p>
-            <a:pPr algn="l" indent="0" marL="0">
-              <a:spcAft>
-                <a:spcPts val="600"/>
-              </a:spcAft>
-              <a:buNone/>
-            </a:pPr>
-            <a:r>
-              <a:rPr lang="en-US" sz="1350" b="1" dirty="0">
-                <a:solidFill>
-                  <a:srgbClr val="2C3A41"/>
-                </a:solidFill>
-                <a:latin typeface="Calibri" pitchFamily="34" charset="0"/>
-                <a:ea typeface="Calibri" pitchFamily="34" charset="-122"/>
-                <a:cs typeface="Calibri" pitchFamily="34" charset="-120"/>
-              </a:rPr>
-              <a:t>C. A forcing function: barcoded positive patient identification with electronic lockout</a:t>
-            </a:r>
-            <a:endParaRPr lang="en-US" sz="1350" dirty="0"/>
-          </a:p>
-          <a:p>
-            <a:pPr algn="l" indent="0" marL="0">
-              <a:spcAft>
-                <a:spcPts val="600"/>
-              </a:spcAft>
-              <a:buNone/>
-            </a:pPr>
-            <a:r>
-              <a:rPr lang="en-US" sz="1350" dirty="0">
-                <a:solidFill>
-                  <a:srgbClr val="33444F"/>
-                </a:solidFill>
-                <a:latin typeface="Calibri" pitchFamily="34" charset="0"/>
-                <a:ea typeface="Calibri" pitchFamily="34" charset="-122"/>
-                <a:cs typeface="Calibri" pitchFamily="34" charset="-120"/>
-              </a:rPr>
-              <a:t>D. A new policy document</a:t>
-            </a:r>
-            <a:endParaRPr lang="en-US" sz="1350" dirty="0"/>
-          </a:p>
-          <a:p>
-            <a:pPr algn="l" indent="0" marL="0">
-              <a:spcAft>
-                <a:spcPts val="600"/>
-              </a:spcAft>
-              <a:buNone/>
-            </a:pPr>
-            <a:r>
-              <a:rPr lang="en-US" sz="1350" dirty="0">
-                <a:solidFill>
-                  <a:srgbClr val="33444F"/>
-                </a:solidFill>
-                <a:latin typeface="Calibri" pitchFamily="34" charset="0"/>
-                <a:ea typeface="Calibri" pitchFamily="34" charset="-122"/>
-                <a:cs typeface="Calibri" pitchFamily="34" charset="-120"/>
-              </a:rPr>
-              <a:t>E. Counseling the phlebotomist</a:t>
-            </a:r>
-            <a:endParaRPr lang="en-US" sz="1350" dirty="0"/>
-          </a:p>
-        </p:txBody>
-      </p:sp>
-      <p:sp>
-        <p:nvSpPr>
-          <p:cNvPr id="6" name="Shape 4"/>
-          <p:cNvSpPr/>
-          <p:nvPr/>
-        </p:nvSpPr>
-        <p:spPr>
-          <a:xfrm>
-            <a:off x="7201632" y="2395728"/>
-            <a:ext cx="4423136" cy="3246120"/>
+              <a:t>Case 3</a:t>
+            </a:r>
+            <a:endParaRPr lang="en-US" sz="3000" dirty="0"/>
+          </a:p>
+        </p:txBody>
+      </p:sp>
+      <p:sp>
+        <p:nvSpPr>
+          <p:cNvPr id="4" name="Shape 2"/>
+          <p:cNvSpPr/>
+          <p:nvPr/>
+        </p:nvSpPr>
+        <p:spPr>
+          <a:xfrm>
+            <a:off x="566928" y="1517904"/>
+            <a:ext cx="11057839" cy="2788920"/>
           </a:xfrm>
           <a:prstGeom prst="roundRect">
             <a:avLst>
-              <a:gd name="adj" fmla="val 2535"/>
+              <a:gd name="adj" fmla="val 2951"/>
             </a:avLst>
           </a:prstGeom>
           <a:solidFill>
@@ -6880,14 +6881,14 @@
       </p:sp>
       <p:sp>
         <p:nvSpPr>
-          <p:cNvPr id="7" name="Text 5"/>
-          <p:cNvSpPr/>
-          <p:nvPr/>
-        </p:nvSpPr>
-        <p:spPr>
-          <a:xfrm>
-            <a:off x="7439376" y="2578608"/>
-            <a:ext cx="3965936" cy="457200"/>
+          <p:cNvPr id="5" name="Text 3"/>
+          <p:cNvSpPr/>
+          <p:nvPr/>
+        </p:nvSpPr>
+        <p:spPr>
+          <a:xfrm>
+            <a:off x="841248" y="1700784"/>
+            <a:ext cx="5486400" cy="292608"/>
           </a:xfrm>
           <a:prstGeom prst="rect">
             <a:avLst/>
@@ -6903,7 +6904,7 @@
               <a:buNone/>
             </a:pPr>
             <a:r>
-              <a:rPr lang="en-US" sz="1500" b="1" dirty="0">
+              <a:rPr lang="en-US" sz="1100" b="1" spc="150" kern="0" dirty="0">
                 <a:solidFill>
                   <a:srgbClr val="455A64"/>
                 </a:solidFill>
@@ -6911,36 +6912,22 @@
                 <a:ea typeface="Calibri" pitchFamily="34" charset="-122"/>
                 <a:cs typeface="Calibri" pitchFamily="34" charset="-120"/>
               </a:rPr>
-              <a:t>ANSWER  </a:t>
-            </a:r>
-            <a:pPr indent="0" marL="0">
-              <a:buNone/>
-            </a:pPr>
-            <a:r>
-              <a:rPr lang="en-US" sz="1500" b="1" dirty="0">
-                <a:solidFill>
-                  <a:srgbClr val="1B2A38"/>
-                </a:solidFill>
-                <a:latin typeface="Calibri" pitchFamily="34" charset="0"/>
-                <a:ea typeface="Calibri" pitchFamily="34" charset="-122"/>
-                <a:cs typeface="Calibri" pitchFamily="34" charset="-120"/>
-              </a:rPr>
-              <a:t>C — Barcoded positive ID with lockout</a:t>
-            </a:r>
-            <a:endParaRPr lang="en-US" sz="1500" dirty="0"/>
-          </a:p>
-        </p:txBody>
-      </p:sp>
-      <p:sp>
-        <p:nvSpPr>
-          <p:cNvPr id="8" name="Text 6"/>
-          <p:cNvSpPr/>
-          <p:nvPr/>
-        </p:nvSpPr>
-        <p:spPr>
-          <a:xfrm>
-            <a:off x="7439376" y="3127248"/>
-            <a:ext cx="3947648" cy="2377440"/>
+              <a:t>CLINICAL VIGNETTE</a:t>
+            </a:r>
+            <a:endParaRPr lang="en-US" sz="1100" dirty="0"/>
+          </a:p>
+        </p:txBody>
+      </p:sp>
+      <p:sp>
+        <p:nvSpPr>
+          <p:cNvPr id="6" name="Text 4"/>
+          <p:cNvSpPr/>
+          <p:nvPr/>
+        </p:nvSpPr>
+        <p:spPr>
+          <a:xfrm>
+            <a:off x="841248" y="2029968"/>
+            <a:ext cx="10509199" cy="2148840"/>
           </a:xfrm>
           <a:prstGeom prst="rect">
             <a:avLst/>
@@ -6959,7 +6946,7 @@
               <a:buNone/>
             </a:pPr>
             <a:r>
-              <a:rPr lang="en-US" sz="1250" dirty="0">
+              <a:rPr lang="en-US" sz="1450" dirty="0">
                 <a:solidFill>
                   <a:srgbClr val="33444F"/>
                 </a:solidFill>
@@ -6967,15 +6954,122 @@
                 <a:ea typeface="Calibri" pitchFamily="34" charset="-122"/>
                 <a:cs typeface="Calibri" pitchFamily="34" charset="-120"/>
               </a:rPr>
-              <a:t>Forcing functions/automation are the strongest interventions; reminders and education alone are weak and rely on vigilance.</a:t>
-            </a:r>
-            <a:endParaRPr lang="en-US" sz="1250" dirty="0"/>
+              <a:t>During RCA, a competent technologist made an error while using a confusing, poorly designed interface under heavy workload.</a:t>
+            </a:r>
+            <a:endParaRPr lang="en-US" sz="1450" dirty="0"/>
+          </a:p>
+        </p:txBody>
+      </p:sp>
+      <p:sp>
+        <p:nvSpPr>
+          <p:cNvPr id="7" name="Shape 5"/>
+          <p:cNvSpPr/>
+          <p:nvPr/>
+        </p:nvSpPr>
+        <p:spPr>
+          <a:xfrm>
+            <a:off x="566928" y="4553712"/>
+            <a:ext cx="11057839" cy="1325880"/>
+          </a:xfrm>
+          <a:prstGeom prst="roundRect">
+            <a:avLst>
+              <a:gd name="adj" fmla="val 6207"/>
+            </a:avLst>
+          </a:prstGeom>
+          <a:solidFill>
+            <a:srgbClr val="0E3A5F"/>
+          </a:solidFill>
+          <a:ln/>
+          <a:effectLst>
+            <a:outerShdw sx="100000" sy="100000" kx="0" ky="0" algn="bl" rotWithShape="0" blurRad="88900" dist="25400" dir="5400000">
+              <a:srgbClr val="22303C">
+                <a:alpha val="12000"/>
+              </a:srgbClr>
+            </a:outerShdw>
+          </a:effectLst>
+        </p:spPr>
+      </p:sp>
+      <p:sp>
+        <p:nvSpPr>
+          <p:cNvPr id="8" name="Text 6"/>
+          <p:cNvSpPr/>
+          <p:nvPr/>
+        </p:nvSpPr>
+        <p:spPr>
+          <a:xfrm>
+            <a:off x="822960" y="4681728"/>
+            <a:ext cx="640080" cy="960120"/>
+          </a:xfrm>
+          <a:prstGeom prst="rect">
+            <a:avLst/>
+          </a:prstGeom>
+          <a:noFill/>
+          <a:ln/>
+        </p:spPr>
+        <p:txBody>
+          <a:bodyPr wrap="square" lIns="0" tIns="0" rIns="0" bIns="0" rtlCol="0" anchor="ctr"/>
+          <a:lstStyle/>
+          <a:p>
+            <a:pPr algn="ctr" indent="0" marL="0">
+              <a:buNone/>
+            </a:pPr>
+            <a:r>
+              <a:rPr lang="en-US" sz="4000" b="1" dirty="0">
+                <a:solidFill>
+                  <a:srgbClr val="455A64"/>
+                </a:solidFill>
+                <a:latin typeface="Calibri" pitchFamily="34" charset="0"/>
+                <a:ea typeface="Calibri" pitchFamily="34" charset="-122"/>
+                <a:cs typeface="Calibri" pitchFamily="34" charset="-120"/>
+              </a:rPr>
+              <a:t>?</a:t>
+            </a:r>
+            <a:endParaRPr lang="en-US" sz="4000" dirty="0"/>
           </a:p>
         </p:txBody>
       </p:sp>
       <p:sp>
         <p:nvSpPr>
           <p:cNvPr id="9" name="Text 7"/>
+          <p:cNvSpPr/>
+          <p:nvPr/>
+        </p:nvSpPr>
+        <p:spPr>
+          <a:xfrm>
+            <a:off x="1618488" y="4553712"/>
+            <a:ext cx="9686239" cy="1325880"/>
+          </a:xfrm>
+          <a:prstGeom prst="rect">
+            <a:avLst/>
+          </a:prstGeom>
+          <a:noFill/>
+          <a:ln/>
+        </p:spPr>
+        <p:txBody>
+          <a:bodyPr wrap="square" lIns="0" tIns="0" rIns="0" bIns="0" rtlCol="0" anchor="ctr"/>
+          <a:lstStyle/>
+          <a:p>
+            <a:pPr algn="l" indent="0" marL="0">
+              <a:buNone/>
+            </a:pPr>
+            <a:r>
+              <a:rPr lang="en-US" sz="1500" b="1" dirty="0">
+                <a:solidFill>
+                  <a:srgbClr val="FFFFFF"/>
+                </a:solidFill>
+                <a:latin typeface="Calibri" pitchFamily="34" charset="0"/>
+                <a:ea typeface="Calibri" pitchFamily="34" charset="-122"/>
+                <a:cs typeface="Calibri" pitchFamily="34" charset="-120"/>
+              </a:rPr>
+              <a:t>How does just culture guide the response?</a:t>
+            </a:r>
+            <a:endParaRPr lang="en-US" sz="1500" dirty="0"/>
+          </a:p>
+        </p:txBody>
+      </p:sp>
+      <p:sp>
+        <p:nvSpPr>
+          <p:cNvPr id="10" name="Text 8"/>
           <p:cNvSpPr/>
           <p:nvPr/>
         </p:nvSpPr>
@@ -7014,7 +7108,7 @@
       </p:sp>
       <p:sp>
         <p:nvSpPr>
-          <p:cNvPr id="10" name="Text 8"/>
+          <p:cNvPr id="11" name="Text 9"/>
           <p:cNvSpPr/>
           <p:nvPr/>
         </p:nvSpPr>
@@ -7144,7 +7238,7 @@
                 <a:ea typeface="Calibri" pitchFamily="34" charset="-122"/>
                 <a:cs typeface="Calibri" pitchFamily="34" charset="-120"/>
               </a:rPr>
-              <a:t>LAB MANAGEMENT &amp; QUALITY   ·   BOARD REVIEW  ·  Q3</a:t>
+              <a:t>LAB MANAGEMENT &amp; QUALITY   ·   CASE 3  ·  RESOLUTION</a:t>
             </a:r>
             <a:endParaRPr lang="en-US" sz="1100" dirty="0"/>
           </a:p>
@@ -7175,7 +7269,7 @@
               <a:buNone/>
             </a:pPr>
             <a:r>
-              <a:rPr lang="en-US" sz="2600" b="1" dirty="0">
+              <a:rPr lang="en-US" sz="3000" b="1" dirty="0">
                 <a:solidFill>
                   <a:srgbClr val="0E3A5F"/>
                 </a:solidFill>
@@ -7183,9 +7277,9 @@
                 <a:ea typeface="Calibri" pitchFamily="34" charset="-122"/>
                 <a:cs typeface="Calibri" pitchFamily="34" charset="-120"/>
               </a:rPr>
-              <a:t>Board-Style Review</a:t>
-            </a:r>
-            <a:endParaRPr lang="en-US" sz="2600" dirty="0"/>
+              <a:t>Case 3: Just-Culture Response</a:t>
+            </a:r>
+            <a:endParaRPr lang="en-US" sz="3000" dirty="0"/>
           </a:p>
         </p:txBody>
       </p:sp>
@@ -7197,8 +7291,8 @@
         </p:nvSpPr>
         <p:spPr>
           <a:xfrm>
-            <a:off x="566928" y="1417320"/>
-            <a:ext cx="11057839" cy="914400"/>
+            <a:off x="566928" y="1554480"/>
+            <a:ext cx="6413547" cy="4023360"/>
           </a:xfrm>
           <a:prstGeom prst="rect">
             <a:avLst/>
@@ -7210,14 +7304,15 @@
           <a:bodyPr wrap="square" lIns="0" tIns="0" rIns="0" bIns="0" rtlCol="0" anchor="t"/>
           <a:lstStyle/>
           <a:p>
-            <a:pPr algn="l" indent="0" marL="0">
-              <a:lnSpc>
-                <a:spcPct val="105000"/>
-              </a:lnSpc>
-              <a:buNone/>
-            </a:pPr>
-            <a:r>
-              <a:rPr lang="en-US" sz="1450" b="1" dirty="0">
+            <a:pPr algn="l" marL="177800" indent="-177800">
+              <a:spcAft>
+                <a:spcPts val="900"/>
+              </a:spcAft>
+              <a:buSzPct val="100000"/>
+              <a:buChar char="•"/>
+            </a:pPr>
+            <a:r>
+              <a:rPr lang="en-US" sz="1400" b="1" dirty="0">
                 <a:solidFill>
                   <a:srgbClr val="1B2A38"/>
                 </a:solidFill>
@@ -7225,41 +7320,20 @@
                 <a:ea typeface="Calibri" pitchFamily="34" charset="-122"/>
                 <a:cs typeface="Calibri" pitchFamily="34" charset="-120"/>
               </a:rPr>
-              <a:t>A near miss differs from an adverse event in that it:</a:t>
-            </a:r>
-            <a:endParaRPr lang="en-US" sz="1450" dirty="0"/>
-          </a:p>
-        </p:txBody>
-      </p:sp>
-      <p:sp>
-        <p:nvSpPr>
-          <p:cNvPr id="5" name="Text 3"/>
-          <p:cNvSpPr/>
-          <p:nvPr/>
-        </p:nvSpPr>
-        <p:spPr>
-          <a:xfrm>
-            <a:off x="658368" y="2395728"/>
-            <a:ext cx="6192390" cy="3017520"/>
-          </a:xfrm>
-          <a:prstGeom prst="rect">
-            <a:avLst/>
-          </a:prstGeom>
-          <a:noFill/>
-          <a:ln/>
-        </p:spPr>
-        <p:txBody>
-          <a:bodyPr wrap="square" lIns="0" tIns="0" rIns="0" bIns="0" rtlCol="0" anchor="t"/>
-          <a:lstStyle/>
-          <a:p>
-            <a:pPr algn="l" indent="0" marL="0">
+              <a:t>This is human error/at-risk behavior in a flawed system — console and coach, and fix the system, rather than punish.</a:t>
+            </a:r>
+            <a:endParaRPr lang="en-US" sz="1400" dirty="0"/>
+          </a:p>
+          <a:p>
+            <a:pPr algn="l" marL="177800" indent="-177800">
               <a:spcAft>
-                <a:spcPts val="600"/>
+                <a:spcPts val="900"/>
               </a:spcAft>
-              <a:buNone/>
-            </a:pPr>
-            <a:r>
-              <a:rPr lang="en-US" sz="1350" dirty="0">
+              <a:buSzPct val="100000"/>
+              <a:buChar char="•"/>
+            </a:pPr>
+            <a:r>
+              <a:rPr lang="en-US" sz="1400" dirty="0">
                 <a:solidFill>
                   <a:srgbClr val="33444F"/>
                 </a:solidFill>
@@ -7267,39 +7341,41 @@
                 <a:ea typeface="Calibri" pitchFamily="34" charset="-122"/>
                 <a:cs typeface="Calibri" pitchFamily="34" charset="-120"/>
               </a:rPr>
-              <a:t>A. Always causes harm</a:t>
-            </a:r>
-            <a:endParaRPr lang="en-US" sz="1350" dirty="0"/>
-          </a:p>
-          <a:p>
-            <a:pPr algn="l" indent="0" marL="0">
+              <a:t>Redesign the interface and address workload.</a:t>
+            </a:r>
+            <a:endParaRPr lang="en-US" sz="1400" dirty="0"/>
+          </a:p>
+          <a:p>
+            <a:pPr algn="l" marL="177800" indent="-177800">
               <a:spcAft>
-                <a:spcPts val="600"/>
+                <a:spcPts val="900"/>
               </a:spcAft>
-              <a:buNone/>
-            </a:pPr>
-            <a:r>
-              <a:rPr lang="en-US" sz="1350" b="1" dirty="0">
-                <a:solidFill>
-                  <a:srgbClr val="2C3A41"/>
-                </a:solidFill>
-                <a:latin typeface="Calibri" pitchFamily="34" charset="0"/>
-                <a:ea typeface="Calibri" pitchFamily="34" charset="-122"/>
-                <a:cs typeface="Calibri" pitchFamily="34" charset="-120"/>
-              </a:rPr>
-              <a:t>B. Is caught before reaching the patient</a:t>
-            </a:r>
-            <a:endParaRPr lang="en-US" sz="1350" dirty="0"/>
-          </a:p>
-          <a:p>
-            <a:pPr algn="l" indent="0" marL="0">
+              <a:buSzPct val="100000"/>
+              <a:buChar char="•"/>
+            </a:pPr>
+            <a:r>
+              <a:rPr lang="en-US" sz="1400" dirty="0">
+                <a:solidFill>
+                  <a:srgbClr val="33444F"/>
+                </a:solidFill>
+                <a:latin typeface="Calibri" pitchFamily="34" charset="0"/>
+                <a:ea typeface="Calibri" pitchFamily="34" charset="-122"/>
+                <a:cs typeface="Calibri" pitchFamily="34" charset="-120"/>
+              </a:rPr>
+              <a:t>Reserve discipline for reckless behavior.</a:t>
+            </a:r>
+            <a:endParaRPr lang="en-US" sz="1400" dirty="0"/>
+          </a:p>
+          <a:p>
+            <a:pPr algn="l" marL="177800" indent="-177800">
               <a:spcAft>
-                <a:spcPts val="600"/>
+                <a:spcPts val="900"/>
               </a:spcAft>
-              <a:buNone/>
-            </a:pPr>
-            <a:r>
-              <a:rPr lang="en-US" sz="1350" dirty="0">
+              <a:buSzPct val="100000"/>
+              <a:buChar char="•"/>
+            </a:pPr>
+            <a:r>
+              <a:rPr lang="en-US" sz="1400" dirty="0">
                 <a:solidFill>
                   <a:srgbClr val="33444F"/>
                 </a:solidFill>
@@ -7307,66 +7383,26 @@
                 <a:ea typeface="Calibri" pitchFamily="34" charset="-122"/>
                 <a:cs typeface="Calibri" pitchFamily="34" charset="-120"/>
               </a:rPr>
-              <a:t>C. Requires no reporting</a:t>
-            </a:r>
-            <a:endParaRPr lang="en-US" sz="1350" dirty="0"/>
-          </a:p>
-          <a:p>
-            <a:pPr algn="l" indent="0" marL="0">
-              <a:spcAft>
-                <a:spcPts val="600"/>
-              </a:spcAft>
-              <a:buNone/>
-            </a:pPr>
-            <a:r>
-              <a:rPr lang="en-US" sz="1350" dirty="0">
-                <a:solidFill>
-                  <a:srgbClr val="33444F"/>
-                </a:solidFill>
-                <a:latin typeface="Calibri" pitchFamily="34" charset="0"/>
-                <a:ea typeface="Calibri" pitchFamily="34" charset="-122"/>
-                <a:cs typeface="Calibri" pitchFamily="34" charset="-120"/>
-              </a:rPr>
-              <a:t>D. Is less informative</a:t>
-            </a:r>
-            <a:endParaRPr lang="en-US" sz="1350" dirty="0"/>
-          </a:p>
-          <a:p>
-            <a:pPr algn="l" indent="0" marL="0">
-              <a:spcAft>
-                <a:spcPts val="600"/>
-              </a:spcAft>
-              <a:buNone/>
-            </a:pPr>
-            <a:r>
-              <a:rPr lang="en-US" sz="1350" dirty="0">
-                <a:solidFill>
-                  <a:srgbClr val="33444F"/>
-                </a:solidFill>
-                <a:latin typeface="Calibri" pitchFamily="34" charset="0"/>
-                <a:ea typeface="Calibri" pitchFamily="34" charset="-122"/>
-                <a:cs typeface="Calibri" pitchFamily="34" charset="-120"/>
-              </a:rPr>
-              <a:t>E. Only occurs in transfusion</a:t>
-            </a:r>
-            <a:endParaRPr lang="en-US" sz="1350" dirty="0"/>
-          </a:p>
-        </p:txBody>
-      </p:sp>
-      <p:sp>
-        <p:nvSpPr>
-          <p:cNvPr id="6" name="Shape 4"/>
-          <p:cNvSpPr/>
-          <p:nvPr/>
-        </p:nvSpPr>
-        <p:spPr>
-          <a:xfrm>
-            <a:off x="7201632" y="2395728"/>
-            <a:ext cx="4423136" cy="3246120"/>
+              <a:t>Consistency preserves a reporting culture.</a:t>
+            </a:r>
+            <a:endParaRPr lang="en-US" sz="1400" dirty="0"/>
+          </a:p>
+        </p:txBody>
+      </p:sp>
+      <p:sp>
+        <p:nvSpPr>
+          <p:cNvPr id="5" name="Shape 3"/>
+          <p:cNvSpPr/>
+          <p:nvPr/>
+        </p:nvSpPr>
+        <p:spPr>
+          <a:xfrm>
+            <a:off x="7422788" y="1554480"/>
+            <a:ext cx="4201979" cy="3977640"/>
           </a:xfrm>
           <a:prstGeom prst="roundRect">
             <a:avLst>
-              <a:gd name="adj" fmla="val 2535"/>
+              <a:gd name="adj" fmla="val 2069"/>
             </a:avLst>
           </a:prstGeom>
           <a:solidFill>
@@ -7384,67 +7420,53 @@
       </p:sp>
       <p:sp>
         <p:nvSpPr>
+          <p:cNvPr id="6" name="Text 4"/>
+          <p:cNvSpPr/>
+          <p:nvPr/>
+        </p:nvSpPr>
+        <p:spPr>
+          <a:xfrm>
+            <a:off x="7660532" y="1755648"/>
+            <a:ext cx="3744779" cy="310896"/>
+          </a:xfrm>
+          <a:prstGeom prst="rect">
+            <a:avLst/>
+          </a:prstGeom>
+          <a:noFill/>
+          <a:ln/>
+        </p:spPr>
+        <p:txBody>
+          <a:bodyPr wrap="square" lIns="0" tIns="0" rIns="0" bIns="0" rtlCol="0" anchor="ctr"/>
+          <a:lstStyle/>
+          <a:p>
+            <a:pPr indent="0" marL="0">
+              <a:buNone/>
+            </a:pPr>
+            <a:r>
+              <a:rPr lang="en-US" sz="1100" b="1" spc="140" kern="0" dirty="0">
+                <a:solidFill>
+                  <a:srgbClr val="455A64"/>
+                </a:solidFill>
+                <a:latin typeface="Calibri" pitchFamily="34" charset="0"/>
+                <a:ea typeface="Calibri" pitchFamily="34" charset="-122"/>
+                <a:cs typeface="Calibri" pitchFamily="34" charset="-120"/>
+              </a:rPr>
+              <a:t>TEACHING POINT</a:t>
+            </a:r>
+            <a:endParaRPr lang="en-US" sz="1100" dirty="0"/>
+          </a:p>
+        </p:txBody>
+      </p:sp>
+      <p:sp>
+        <p:nvSpPr>
           <p:cNvPr id="7" name="Text 5"/>
           <p:cNvSpPr/>
           <p:nvPr/>
         </p:nvSpPr>
         <p:spPr>
           <a:xfrm>
-            <a:off x="7439376" y="2578608"/>
-            <a:ext cx="3965936" cy="457200"/>
-          </a:xfrm>
-          <a:prstGeom prst="rect">
-            <a:avLst/>
-          </a:prstGeom>
-          <a:noFill/>
-          <a:ln/>
-        </p:spPr>
-        <p:txBody>
-          <a:bodyPr wrap="square" lIns="0" tIns="0" rIns="0" bIns="0" rtlCol="0" anchor="ctr"/>
-          <a:lstStyle/>
-          <a:p>
-            <a:pPr indent="0" marL="0">
-              <a:buNone/>
-            </a:pPr>
-            <a:r>
-              <a:rPr lang="en-US" sz="1500" b="1" dirty="0">
-                <a:solidFill>
-                  <a:srgbClr val="455A64"/>
-                </a:solidFill>
-                <a:latin typeface="Calibri" pitchFamily="34" charset="0"/>
-                <a:ea typeface="Calibri" pitchFamily="34" charset="-122"/>
-                <a:cs typeface="Calibri" pitchFamily="34" charset="-120"/>
-              </a:rPr>
-              <a:t>ANSWER  </a:t>
-            </a:r>
-            <a:pPr indent="0" marL="0">
-              <a:buNone/>
-            </a:pPr>
-            <a:r>
-              <a:rPr lang="en-US" sz="1500" b="1" dirty="0">
-                <a:solidFill>
-                  <a:srgbClr val="1B2A38"/>
-                </a:solidFill>
-                <a:latin typeface="Calibri" pitchFamily="34" charset="0"/>
-                <a:ea typeface="Calibri" pitchFamily="34" charset="-122"/>
-                <a:cs typeface="Calibri" pitchFamily="34" charset="-120"/>
-              </a:rPr>
-              <a:t>B — Caught before reaching the patient</a:t>
-            </a:r>
-            <a:endParaRPr lang="en-US" sz="1500" dirty="0"/>
-          </a:p>
-        </p:txBody>
-      </p:sp>
-      <p:sp>
-        <p:nvSpPr>
-          <p:cNvPr id="8" name="Text 6"/>
-          <p:cNvSpPr/>
-          <p:nvPr/>
-        </p:nvSpPr>
-        <p:spPr>
-          <a:xfrm>
-            <a:off x="7439376" y="3127248"/>
-            <a:ext cx="3947648" cy="2377440"/>
+            <a:off x="7660532" y="2121408"/>
+            <a:ext cx="3726491" cy="3291840"/>
           </a:xfrm>
           <a:prstGeom prst="rect">
             <a:avLst/>
@@ -7458,12 +7480,12 @@
           <a:p>
             <a:pPr algn="l" indent="0" marL="0">
               <a:lnSpc>
-                <a:spcPct val="108000"/>
+                <a:spcPct val="110000"/>
               </a:lnSpc>
               <a:buNone/>
             </a:pPr>
             <a:r>
-              <a:rPr lang="en-US" sz="1250" dirty="0">
+              <a:rPr lang="en-US" sz="1350" dirty="0">
                 <a:solidFill>
                   <a:srgbClr val="33444F"/>
                 </a:solidFill>
@@ -7471,15 +7493,15 @@
                 <a:ea typeface="Calibri" pitchFamily="34" charset="-122"/>
                 <a:cs typeface="Calibri" pitchFamily="34" charset="-120"/>
               </a:rPr>
-              <a:t>Near misses are intercepted before harm; they are valuable, low-cost learning opportunities and should be reported and analyzed.</a:t>
-            </a:r>
-            <a:endParaRPr lang="en-US" sz="1250" dirty="0"/>
-          </a:p>
-        </p:txBody>
-      </p:sp>
-      <p:sp>
-        <p:nvSpPr>
-          <p:cNvPr id="9" name="Text 7"/>
+              <a:t>Just culture matches the response to the behavior: console error, coach at-risk behavior, discipline recklessness — and fix the system.</a:t>
+            </a:r>
+            <a:endParaRPr lang="en-US" sz="1350" dirty="0"/>
+          </a:p>
+        </p:txBody>
+      </p:sp>
+      <p:sp>
+        <p:nvSpPr>
+          <p:cNvPr id="8" name="Text 6"/>
           <p:cNvSpPr/>
           <p:nvPr/>
         </p:nvSpPr>
@@ -7518,7 +7540,7 @@
       </p:sp>
       <p:sp>
         <p:nvSpPr>
-          <p:cNvPr id="10" name="Text 8"/>
+          <p:cNvPr id="9" name="Text 7"/>
           <p:cNvSpPr/>
           <p:nvPr/>
         </p:nvSpPr>
@@ -7755,7 +7777,7 @@
                 <a:ea typeface="Calibri" pitchFamily="34" charset="-122"/>
                 <a:cs typeface="Calibri" pitchFamily="34" charset="-120"/>
               </a:rPr>
-              <a:t>System</a:t>
+              <a:t>Systems</a:t>
             </a:r>
             <a:endParaRPr lang="en-US" sz="3600" dirty="0"/>
           </a:p>
@@ -7794,7 +7816,7 @@
                 <a:ea typeface="Calibri" pitchFamily="34" charset="-122"/>
                 <a:cs typeface="Calibri" pitchFamily="34" charset="-120"/>
               </a:rPr>
-              <a:t>Most errors are system failures, not individual carelessness</a:t>
+              <a:t>Most errors are system failures, not bad people</a:t>
             </a:r>
             <a:endParaRPr lang="en-US" sz="1150" dirty="0"/>
           </a:p>
@@ -7862,7 +7884,7 @@
                 <a:ea typeface="Calibri" pitchFamily="34" charset="-122"/>
                 <a:cs typeface="Calibri" pitchFamily="34" charset="-120"/>
               </a:rPr>
-              <a:t>Near miss</a:t>
+              <a:t>RCA</a:t>
             </a:r>
             <a:endParaRPr lang="en-US" sz="3600" dirty="0"/>
           </a:p>
@@ -7901,7 +7923,7 @@
                 <a:ea typeface="Calibri" pitchFamily="34" charset="-122"/>
                 <a:cs typeface="Calibri" pitchFamily="34" charset="-120"/>
               </a:rPr>
-              <a:t>Free lessons — if you capture and act on them</a:t>
+              <a:t>Find the real cause, not a convenient one</a:t>
             </a:r>
             <a:endParaRPr lang="en-US" sz="1150" dirty="0"/>
           </a:p>
@@ -7969,7 +7991,7 @@
                 <a:ea typeface="Calibri" pitchFamily="34" charset="-122"/>
                 <a:cs typeface="Calibri" pitchFamily="34" charset="-120"/>
               </a:rPr>
-              <a:t>WBIT</a:t>
+              <a:t>Just culture</a:t>
             </a:r>
             <a:endParaRPr lang="en-US" sz="3600" dirty="0"/>
           </a:p>
@@ -8008,7 +8030,7 @@
                 <a:ea typeface="Calibri" pitchFamily="34" charset="-122"/>
                 <a:cs typeface="Calibri" pitchFamily="34" charset="-120"/>
               </a:rPr>
-              <a:t>Misidentification is the deadliest, most preventable lab error</a:t>
+              <a:t>Balance accountability with learning</a:t>
             </a:r>
             <a:endParaRPr lang="en-US" sz="1150" dirty="0"/>
           </a:p>
@@ -8079,7 +8101,7 @@
                 <a:ea typeface="Calibri" pitchFamily="34" charset="-122"/>
                 <a:cs typeface="Calibri" pitchFamily="34" charset="-120"/>
               </a:rPr>
-              <a:t>Patient safety in the laboratory is about designing systems that make errors hard to commit and easy to catch. Root-cause analysis, just culture, and human-factors thinking turn events into improvements.</a:t>
+              <a:t>Patient safety reframes error from blame to systems: most mistakes reflect process and design failures. Structured investigation and a just culture turn events into durable improvements.</a:t>
             </a:r>
             <a:endParaRPr lang="en-US" sz="1450" dirty="0"/>
           </a:p>
@@ -8122,7 +8144,7 @@
                 <a:ea typeface="Calibri" pitchFamily="34" charset="-122"/>
                 <a:cs typeface="Calibri" pitchFamily="34" charset="-120"/>
               </a:rPr>
-              <a:t>Blaming individuals fixes nothing; redesigning the system that allowed the error prevents the next one.</a:t>
+              <a:t>Ask ‘what in the system allowed this?’ before ‘who did this?’ — durable fixes target processes, not people.</a:t>
             </a:r>
             <a:endParaRPr lang="en-US" sz="1300" dirty="0"/>
           </a:p>
@@ -8248,7 +8270,7 @@
     <p:bg>
       <p:bgPr>
         <a:solidFill>
-          <a:srgbClr val="0A2A45"/>
+          <a:srgbClr val="FFFFFF"/>
         </a:solidFill>
       </p:bgPr>
     </p:bg>
@@ -8275,7 +8297,7 @@
         <p:spPr>
           <a:xfrm>
             <a:off x="566928" y="329184"/>
-            <a:ext cx="10058400" cy="310896"/>
+            <a:ext cx="10515600" cy="310896"/>
           </a:xfrm>
           <a:prstGeom prst="rect">
             <a:avLst/>
@@ -8287,7 +8309,7 @@
           <a:bodyPr wrap="square" lIns="0" tIns="0" rIns="0" bIns="0" rtlCol="0" anchor="ctr"/>
           <a:lstStyle/>
           <a:p>
-            <a:pPr indent="0" marL="0">
+            <a:pPr algn="l" indent="0" marL="0">
               <a:buNone/>
             </a:pPr>
             <a:r>
@@ -8299,7 +8321,7 @@
                 <a:ea typeface="Calibri" pitchFamily="34" charset="-122"/>
                 <a:cs typeface="Calibri" pitchFamily="34" charset="-120"/>
               </a:rPr>
-              <a:t>LAB MANAGEMENT &amp; QUALITY</a:t>
+              <a:t>LAB MANAGEMENT &amp; QUALITY   ·   BOARD REVIEW  ·  Q1</a:t>
             </a:r>
             <a:endParaRPr lang="en-US" sz="1100" dirty="0"/>
           </a:p>
@@ -8313,8 +8335,8 @@
         </p:nvSpPr>
         <p:spPr>
           <a:xfrm>
-            <a:off x="566928" y="676656"/>
-            <a:ext cx="10972800" cy="749808"/>
+            <a:off x="566928" y="713232"/>
+            <a:ext cx="11064240" cy="749808"/>
           </a:xfrm>
           <a:prstGeom prst="rect">
             <a:avLst/>
@@ -8326,62 +8348,206 @@
           <a:bodyPr wrap="square" lIns="0" tIns="0" rIns="0" bIns="0" rtlCol="0" anchor="ctr"/>
           <a:lstStyle/>
           <a:p>
-            <a:pPr indent="0" marL="0">
-              <a:buNone/>
-            </a:pPr>
-            <a:r>
-              <a:rPr lang="en-US" sz="3000" b="1" dirty="0">
-                <a:solidFill>
-                  <a:srgbClr val="FFFFFF"/>
-                </a:solidFill>
-                <a:latin typeface="Calibri" pitchFamily="34" charset="0"/>
-                <a:ea typeface="Calibri" pitchFamily="34" charset="-122"/>
-                <a:cs typeface="Calibri" pitchFamily="34" charset="-120"/>
-              </a:rPr>
-              <a:t>Key Take-Home Points</a:t>
-            </a:r>
-            <a:endParaRPr lang="en-US" sz="3000" dirty="0"/>
-          </a:p>
-        </p:txBody>
-      </p:sp>
-      <p:sp>
-        <p:nvSpPr>
-          <p:cNvPr id="4" name="Shape 2"/>
-          <p:cNvSpPr/>
-          <p:nvPr/>
-        </p:nvSpPr>
-        <p:spPr>
-          <a:xfrm>
-            <a:off x="566928" y="1517904"/>
-            <a:ext cx="11057839" cy="841248"/>
+            <a:pPr algn="l" indent="0" marL="0">
+              <a:buNone/>
+            </a:pPr>
+            <a:r>
+              <a:rPr lang="en-US" sz="2600" b="1" dirty="0">
+                <a:solidFill>
+                  <a:srgbClr val="0E3A5F"/>
+                </a:solidFill>
+                <a:latin typeface="Calibri" pitchFamily="34" charset="0"/>
+                <a:ea typeface="Calibri" pitchFamily="34" charset="-122"/>
+                <a:cs typeface="Calibri" pitchFamily="34" charset="-120"/>
+              </a:rPr>
+              <a:t>Board-Style Review</a:t>
+            </a:r>
+            <a:endParaRPr lang="en-US" sz="2600" dirty="0"/>
+          </a:p>
+        </p:txBody>
+      </p:sp>
+      <p:sp>
+        <p:nvSpPr>
+          <p:cNvPr id="4" name="Text 2"/>
+          <p:cNvSpPr/>
+          <p:nvPr/>
+        </p:nvSpPr>
+        <p:spPr>
+          <a:xfrm>
+            <a:off x="566928" y="1417320"/>
+            <a:ext cx="11057839" cy="914400"/>
+          </a:xfrm>
+          <a:prstGeom prst="rect">
+            <a:avLst/>
+          </a:prstGeom>
+          <a:noFill/>
+          <a:ln/>
+        </p:spPr>
+        <p:txBody>
+          <a:bodyPr wrap="square" lIns="0" tIns="0" rIns="0" bIns="0" rtlCol="0" anchor="t"/>
+          <a:lstStyle/>
+          <a:p>
+            <a:pPr algn="l" indent="0" marL="0">
+              <a:lnSpc>
+                <a:spcPct val="105000"/>
+              </a:lnSpc>
+              <a:buNone/>
+            </a:pPr>
+            <a:r>
+              <a:rPr lang="en-US" sz="1450" b="1" dirty="0">
+                <a:solidFill>
+                  <a:srgbClr val="1B2A38"/>
+                </a:solidFill>
+                <a:latin typeface="Calibri" pitchFamily="34" charset="0"/>
+                <a:ea typeface="Calibri" pitchFamily="34" charset="-122"/>
+                <a:cs typeface="Calibri" pitchFamily="34" charset="-120"/>
+              </a:rPr>
+              <a:t>The Swiss-cheese model of error emphasizes that harm results from:</a:t>
+            </a:r>
+            <a:endParaRPr lang="en-US" sz="1450" dirty="0"/>
+          </a:p>
+        </p:txBody>
+      </p:sp>
+      <p:sp>
+        <p:nvSpPr>
+          <p:cNvPr id="5" name="Text 3"/>
+          <p:cNvSpPr/>
+          <p:nvPr/>
+        </p:nvSpPr>
+        <p:spPr>
+          <a:xfrm>
+            <a:off x="658368" y="2395728"/>
+            <a:ext cx="6192390" cy="3017520"/>
+          </a:xfrm>
+          <a:prstGeom prst="rect">
+            <a:avLst/>
+          </a:prstGeom>
+          <a:noFill/>
+          <a:ln/>
+        </p:spPr>
+        <p:txBody>
+          <a:bodyPr wrap="square" lIns="0" tIns="0" rIns="0" bIns="0" rtlCol="0" anchor="t"/>
+          <a:lstStyle/>
+          <a:p>
+            <a:pPr algn="l" indent="0" marL="0">
+              <a:spcAft>
+                <a:spcPts val="600"/>
+              </a:spcAft>
+              <a:buNone/>
+            </a:pPr>
+            <a:r>
+              <a:rPr lang="en-US" sz="1350" dirty="0">
+                <a:solidFill>
+                  <a:srgbClr val="33444F"/>
+                </a:solidFill>
+                <a:latin typeface="Calibri" pitchFamily="34" charset="0"/>
+                <a:ea typeface="Calibri" pitchFamily="34" charset="-122"/>
+                <a:cs typeface="Calibri" pitchFamily="34" charset="-120"/>
+              </a:rPr>
+              <a:t>A. A single careless person</a:t>
+            </a:r>
+            <a:endParaRPr lang="en-US" sz="1350" dirty="0"/>
+          </a:p>
+          <a:p>
+            <a:pPr algn="l" indent="0" marL="0">
+              <a:spcAft>
+                <a:spcPts val="600"/>
+              </a:spcAft>
+              <a:buNone/>
+            </a:pPr>
+            <a:r>
+              <a:rPr lang="en-US" sz="1350" b="1" dirty="0">
+                <a:solidFill>
+                  <a:srgbClr val="2C3A41"/>
+                </a:solidFill>
+                <a:latin typeface="Calibri" pitchFamily="34" charset="0"/>
+                <a:ea typeface="Calibri" pitchFamily="34" charset="-122"/>
+                <a:cs typeface="Calibri" pitchFamily="34" charset="-120"/>
+              </a:rPr>
+              <a:t>B. Alignment of multiple failed defenses</a:t>
+            </a:r>
+            <a:endParaRPr lang="en-US" sz="1350" dirty="0"/>
+          </a:p>
+          <a:p>
+            <a:pPr algn="l" indent="0" marL="0">
+              <a:spcAft>
+                <a:spcPts val="600"/>
+              </a:spcAft>
+              <a:buNone/>
+            </a:pPr>
+            <a:r>
+              <a:rPr lang="en-US" sz="1350" dirty="0">
+                <a:solidFill>
+                  <a:srgbClr val="33444F"/>
+                </a:solidFill>
+                <a:latin typeface="Calibri" pitchFamily="34" charset="0"/>
+                <a:ea typeface="Calibri" pitchFamily="34" charset="-122"/>
+                <a:cs typeface="Calibri" pitchFamily="34" charset="-120"/>
+              </a:rPr>
+              <a:t>C. Only analytic errors</a:t>
+            </a:r>
+            <a:endParaRPr lang="en-US" sz="1350" dirty="0"/>
+          </a:p>
+          <a:p>
+            <a:pPr algn="l" indent="0" marL="0">
+              <a:spcAft>
+                <a:spcPts val="600"/>
+              </a:spcAft>
+              <a:buNone/>
+            </a:pPr>
+            <a:r>
+              <a:rPr lang="en-US" sz="1350" dirty="0">
+                <a:solidFill>
+                  <a:srgbClr val="33444F"/>
+                </a:solidFill>
+                <a:latin typeface="Calibri" pitchFamily="34" charset="0"/>
+                <a:ea typeface="Calibri" pitchFamily="34" charset="-122"/>
+                <a:cs typeface="Calibri" pitchFamily="34" charset="-120"/>
+              </a:rPr>
+              <a:t>D. Random chance alone</a:t>
+            </a:r>
+            <a:endParaRPr lang="en-US" sz="1350" dirty="0"/>
+          </a:p>
+          <a:p>
+            <a:pPr algn="l" indent="0" marL="0">
+              <a:spcAft>
+                <a:spcPts val="600"/>
+              </a:spcAft>
+              <a:buNone/>
+            </a:pPr>
+            <a:r>
+              <a:rPr lang="en-US" sz="1350" dirty="0">
+                <a:solidFill>
+                  <a:srgbClr val="33444F"/>
+                </a:solidFill>
+                <a:latin typeface="Calibri" pitchFamily="34" charset="0"/>
+                <a:ea typeface="Calibri" pitchFamily="34" charset="-122"/>
+                <a:cs typeface="Calibri" pitchFamily="34" charset="-120"/>
+              </a:rPr>
+              <a:t>E. Inadequate discipline</a:t>
+            </a:r>
+            <a:endParaRPr lang="en-US" sz="1350" dirty="0"/>
+          </a:p>
+        </p:txBody>
+      </p:sp>
+      <p:sp>
+        <p:nvSpPr>
+          <p:cNvPr id="6" name="Shape 4"/>
+          <p:cNvSpPr/>
+          <p:nvPr/>
+        </p:nvSpPr>
+        <p:spPr>
+          <a:xfrm>
+            <a:off x="7201632" y="2395728"/>
+            <a:ext cx="4423136" cy="3246120"/>
           </a:xfrm>
           <a:prstGeom prst="roundRect">
             <a:avLst>
-              <a:gd name="adj" fmla="val 7609"/>
+              <a:gd name="adj" fmla="val 2535"/>
             </a:avLst>
           </a:prstGeom>
           <a:solidFill>
-            <a:srgbClr val="143651"/>
-          </a:solidFill>
-          <a:ln/>
-        </p:spPr>
-      </p:sp>
-      <p:sp>
-        <p:nvSpPr>
-          <p:cNvPr id="5" name="Shape 3"/>
-          <p:cNvSpPr/>
-          <p:nvPr/>
-        </p:nvSpPr>
-        <p:spPr>
-          <a:xfrm>
-            <a:off x="749808" y="1755648"/>
-            <a:ext cx="365760" cy="365760"/>
-          </a:xfrm>
-          <a:prstGeom prst="ellipse">
-            <a:avLst/>
-          </a:prstGeom>
-          <a:solidFill>
-            <a:srgbClr val="455A64"/>
+            <a:srgbClr val="ECEFF1"/>
           </a:solidFill>
           <a:ln/>
           <a:effectLst>
@@ -8395,14 +8561,14 @@
       </p:sp>
       <p:sp>
         <p:nvSpPr>
-          <p:cNvPr id="6" name="Text 4"/>
-          <p:cNvSpPr/>
-          <p:nvPr/>
-        </p:nvSpPr>
-        <p:spPr>
-          <a:xfrm>
-            <a:off x="749808" y="1755648"/>
-            <a:ext cx="365760" cy="365760"/>
+          <p:cNvPr id="7" name="Text 5"/>
+          <p:cNvSpPr/>
+          <p:nvPr/>
+        </p:nvSpPr>
+        <p:spPr>
+          <a:xfrm>
+            <a:off x="7439376" y="2578608"/>
+            <a:ext cx="3965936" cy="457200"/>
           </a:xfrm>
           <a:prstGeom prst="rect">
             <a:avLst/>
@@ -8414,19 +8580,33 @@
           <a:bodyPr wrap="square" lIns="0" tIns="0" rIns="0" bIns="0" rtlCol="0" anchor="ctr"/>
           <a:lstStyle/>
           <a:p>
-            <a:pPr algn="ctr" indent="0" marL="0">
+            <a:pPr indent="0" marL="0">
               <a:buNone/>
             </a:pPr>
             <a:r>
               <a:rPr lang="en-US" sz="1500" b="1" dirty="0">
                 <a:solidFill>
-                  <a:srgbClr val="FFFFFF"/>
-                </a:solidFill>
-                <a:latin typeface="Calibri" pitchFamily="34" charset="0"/>
-                <a:ea typeface="Calibri" pitchFamily="34" charset="-122"/>
-                <a:cs typeface="Calibri" pitchFamily="34" charset="-120"/>
-              </a:rPr>
-              <a:t>1</a:t>
+                  <a:srgbClr val="455A64"/>
+                </a:solidFill>
+                <a:latin typeface="Calibri" pitchFamily="34" charset="0"/>
+                <a:ea typeface="Calibri" pitchFamily="34" charset="-122"/>
+                <a:cs typeface="Calibri" pitchFamily="34" charset="-120"/>
+              </a:rPr>
+              <a:t>ANSWER  </a:t>
+            </a:r>
+            <a:pPr indent="0" marL="0">
+              <a:buNone/>
+            </a:pPr>
+            <a:r>
+              <a:rPr lang="en-US" sz="1500" b="1" dirty="0">
+                <a:solidFill>
+                  <a:srgbClr val="1B2A38"/>
+                </a:solidFill>
+                <a:latin typeface="Calibri" pitchFamily="34" charset="0"/>
+                <a:ea typeface="Calibri" pitchFamily="34" charset="-122"/>
+                <a:cs typeface="Calibri" pitchFamily="34" charset="-120"/>
+              </a:rPr>
+              <a:t>B — Multiple failed defenses</a:t>
             </a:r>
             <a:endParaRPr lang="en-US" sz="1500" dirty="0"/>
           </a:p>
@@ -8434,14 +8614,56 @@
       </p:sp>
       <p:sp>
         <p:nvSpPr>
-          <p:cNvPr id="7" name="Text 5"/>
-          <p:cNvSpPr/>
-          <p:nvPr/>
-        </p:nvSpPr>
-        <p:spPr>
-          <a:xfrm>
-            <a:off x="1280160" y="1517904"/>
-            <a:ext cx="10143439" cy="841248"/>
+          <p:cNvPr id="8" name="Text 6"/>
+          <p:cNvSpPr/>
+          <p:nvPr/>
+        </p:nvSpPr>
+        <p:spPr>
+          <a:xfrm>
+            <a:off x="7439376" y="3127248"/>
+            <a:ext cx="3947648" cy="2377440"/>
+          </a:xfrm>
+          <a:prstGeom prst="rect">
+            <a:avLst/>
+          </a:prstGeom>
+          <a:noFill/>
+          <a:ln/>
+        </p:spPr>
+        <p:txBody>
+          <a:bodyPr wrap="square" lIns="0" tIns="0" rIns="0" bIns="0" rtlCol="0" anchor="t"/>
+          <a:lstStyle/>
+          <a:p>
+            <a:pPr algn="l" indent="0" marL="0">
+              <a:lnSpc>
+                <a:spcPct val="108000"/>
+              </a:lnSpc>
+              <a:buNone/>
+            </a:pPr>
+            <a:r>
+              <a:rPr lang="en-US" sz="1250" dirty="0">
+                <a:solidFill>
+                  <a:srgbClr val="33444F"/>
+                </a:solidFill>
+                <a:latin typeface="Calibri" pitchFamily="34" charset="0"/>
+                <a:ea typeface="Calibri" pitchFamily="34" charset="-122"/>
+                <a:cs typeface="Calibri" pitchFamily="34" charset="-120"/>
+              </a:rPr>
+              <a:t>Harm occurs when latent and active failures line up through several weakened barriers.</a:t>
+            </a:r>
+            <a:endParaRPr lang="en-US" sz="1250" dirty="0"/>
+          </a:p>
+        </p:txBody>
+      </p:sp>
+      <p:sp>
+        <p:nvSpPr>
+          <p:cNvPr id="9" name="Text 7"/>
+          <p:cNvSpPr/>
+          <p:nvPr/>
+        </p:nvSpPr>
+        <p:spPr>
+          <a:xfrm>
+            <a:off x="566928" y="6473952"/>
+            <a:ext cx="7772400" cy="274320"/>
           </a:xfrm>
           <a:prstGeom prst="rect">
             <a:avLst/>
@@ -8457,68 +8679,19 @@
               <a:buNone/>
             </a:pPr>
             <a:r>
-              <a:rPr lang="en-US" sz="1350" dirty="0">
-                <a:solidFill>
-                  <a:srgbClr val="E7EEF4"/>
-                </a:solidFill>
-                <a:latin typeface="Calibri" pitchFamily="34" charset="0"/>
-                <a:ea typeface="Calibri" pitchFamily="34" charset="-122"/>
-                <a:cs typeface="Calibri" pitchFamily="34" charset="-120"/>
-              </a:rPr>
-              <a:t>Most laboratory errors are system failures — analyze conditions, not just individuals (Swiss-cheese / active vs latent failures).</a:t>
-            </a:r>
-            <a:endParaRPr lang="en-US" sz="1350" dirty="0"/>
-          </a:p>
-        </p:txBody>
-      </p:sp>
-      <p:sp>
-        <p:nvSpPr>
-          <p:cNvPr id="8" name="Shape 6"/>
-          <p:cNvSpPr/>
-          <p:nvPr/>
-        </p:nvSpPr>
-        <p:spPr>
-          <a:xfrm>
-            <a:off x="566928" y="2505456"/>
-            <a:ext cx="11057839" cy="841248"/>
-          </a:xfrm>
-          <a:prstGeom prst="roundRect">
-            <a:avLst>
-              <a:gd name="adj" fmla="val 7609"/>
-            </a:avLst>
-          </a:prstGeom>
-          <a:solidFill>
-            <a:srgbClr val="143651"/>
-          </a:solidFill>
-          <a:ln/>
-        </p:spPr>
-      </p:sp>
-      <p:sp>
-        <p:nvSpPr>
-          <p:cNvPr id="9" name="Shape 7"/>
-          <p:cNvSpPr/>
-          <p:nvPr/>
-        </p:nvSpPr>
-        <p:spPr>
-          <a:xfrm>
-            <a:off x="749808" y="2743200"/>
-            <a:ext cx="365760" cy="365760"/>
-          </a:xfrm>
-          <a:prstGeom prst="ellipse">
-            <a:avLst/>
-          </a:prstGeom>
-          <a:solidFill>
-            <a:srgbClr val="455A64"/>
-          </a:solidFill>
-          <a:ln/>
-          <a:effectLst>
-            <a:outerShdw sx="100000" sy="100000" kx="0" ky="0" algn="bl" rotWithShape="0" blurRad="88900" dist="25400" dir="5400000">
-              <a:srgbClr val="22303C">
-                <a:alpha val="12000"/>
-              </a:srgbClr>
-            </a:outerShdw>
-          </a:effectLst>
-        </p:spPr>
+              <a:rPr lang="en-US" sz="850" dirty="0">
+                <a:solidFill>
+                  <a:srgbClr val="9AA8B4"/>
+                </a:solidFill>
+                <a:latin typeface="Calibri" pitchFamily="34" charset="0"/>
+                <a:ea typeface="Calibri" pitchFamily="34" charset="-122"/>
+                <a:cs typeface="Calibri" pitchFamily="34" charset="-120"/>
+              </a:rPr>
+              <a:t>Makassed General Hospital  ·  Department of Laboratory Medicine</a:t>
+            </a:r>
+            <a:endParaRPr lang="en-US" sz="850" dirty="0"/>
+          </a:p>
+        </p:txBody>
       </p:sp>
       <p:sp>
         <p:nvSpPr>
@@ -8528,8 +8701,8 @@
         </p:nvSpPr>
         <p:spPr>
           <a:xfrm>
-            <a:off x="749808" y="2743200"/>
-            <a:ext cx="365760" cy="365760"/>
+            <a:off x="9814255" y="6473952"/>
+            <a:ext cx="1828800" cy="274320"/>
           </a:xfrm>
           <a:prstGeom prst="rect">
             <a:avLst/>
@@ -8541,504 +8714,34 @@
           <a:bodyPr wrap="square" lIns="0" tIns="0" rIns="0" bIns="0" rtlCol="0" anchor="ctr"/>
           <a:lstStyle/>
           <a:p>
-            <a:pPr algn="ctr" indent="0" marL="0">
-              <a:buNone/>
-            </a:pPr>
-            <a:r>
-              <a:rPr lang="en-US" sz="1500" b="1" dirty="0">
-                <a:solidFill>
-                  <a:srgbClr val="FFFFFF"/>
-                </a:solidFill>
-                <a:latin typeface="Calibri" pitchFamily="34" charset="0"/>
-                <a:ea typeface="Calibri" pitchFamily="34" charset="-122"/>
-                <a:cs typeface="Calibri" pitchFamily="34" charset="-120"/>
-              </a:rPr>
-              <a:t>2</a:t>
-            </a:r>
-            <a:endParaRPr lang="en-US" sz="1500" dirty="0"/>
-          </a:p>
-        </p:txBody>
-      </p:sp>
-      <p:sp>
-        <p:nvSpPr>
-          <p:cNvPr id="11" name="Text 9"/>
-          <p:cNvSpPr/>
-          <p:nvPr/>
-        </p:nvSpPr>
-        <p:spPr>
-          <a:xfrm>
-            <a:off x="1280160" y="2505456"/>
-            <a:ext cx="10143439" cy="841248"/>
-          </a:xfrm>
-          <a:prstGeom prst="rect">
-            <a:avLst/>
-          </a:prstGeom>
-          <a:noFill/>
-          <a:ln/>
-        </p:spPr>
-        <p:txBody>
-          <a:bodyPr wrap="square" lIns="0" tIns="0" rIns="0" bIns="0" rtlCol="0" anchor="ctr"/>
-          <a:lstStyle/>
-          <a:p>
-            <a:pPr algn="l" indent="0" marL="0">
-              <a:buNone/>
-            </a:pPr>
-            <a:r>
-              <a:rPr lang="en-US" sz="1350" dirty="0">
-                <a:solidFill>
-                  <a:srgbClr val="E7EEF4"/>
-                </a:solidFill>
-                <a:latin typeface="Calibri" pitchFamily="34" charset="0"/>
-                <a:ea typeface="Calibri" pitchFamily="34" charset="-122"/>
-                <a:cs typeface="Calibri" pitchFamily="34" charset="-120"/>
-              </a:rPr>
-              <a:t>Root-cause analysis (fishbone + 5-Whys) drives to system causes; choose strong CAPA (forcing functions) over reminders/education alone.</a:t>
-            </a:r>
-            <a:endParaRPr lang="en-US" sz="1350" dirty="0"/>
-          </a:p>
-        </p:txBody>
-      </p:sp>
-      <p:sp>
-        <p:nvSpPr>
-          <p:cNvPr id="12" name="Shape 10"/>
-          <p:cNvSpPr/>
-          <p:nvPr/>
-        </p:nvSpPr>
-        <p:spPr>
-          <a:xfrm>
-            <a:off x="566928" y="3493008"/>
-            <a:ext cx="11057839" cy="841248"/>
-          </a:xfrm>
-          <a:prstGeom prst="roundRect">
-            <a:avLst>
-              <a:gd name="adj" fmla="val 7609"/>
-            </a:avLst>
-          </a:prstGeom>
-          <a:solidFill>
-            <a:srgbClr val="143651"/>
-          </a:solidFill>
-          <a:ln/>
-        </p:spPr>
-      </p:sp>
-      <p:sp>
-        <p:nvSpPr>
-          <p:cNvPr id="13" name="Shape 11"/>
-          <p:cNvSpPr/>
-          <p:nvPr/>
-        </p:nvSpPr>
-        <p:spPr>
-          <a:xfrm>
-            <a:off x="749808" y="3730752"/>
-            <a:ext cx="365760" cy="365760"/>
-          </a:xfrm>
-          <a:prstGeom prst="ellipse">
-            <a:avLst/>
-          </a:prstGeom>
-          <a:solidFill>
-            <a:srgbClr val="455A64"/>
-          </a:solidFill>
-          <a:ln/>
-          <a:effectLst>
-            <a:outerShdw sx="100000" sy="100000" kx="0" ky="0" algn="bl" rotWithShape="0" blurRad="88900" dist="25400" dir="5400000">
-              <a:srgbClr val="22303C">
-                <a:alpha val="12000"/>
-              </a:srgbClr>
-            </a:outerShdw>
-          </a:effectLst>
-        </p:spPr>
-      </p:sp>
-      <p:sp>
-        <p:nvSpPr>
-          <p:cNvPr id="14" name="Text 12"/>
-          <p:cNvSpPr/>
-          <p:nvPr/>
-        </p:nvSpPr>
-        <p:spPr>
-          <a:xfrm>
-            <a:off x="749808" y="3730752"/>
-            <a:ext cx="365760" cy="365760"/>
-          </a:xfrm>
-          <a:prstGeom prst="rect">
-            <a:avLst/>
-          </a:prstGeom>
-          <a:noFill/>
-          <a:ln/>
-        </p:spPr>
-        <p:txBody>
-          <a:bodyPr wrap="square" lIns="0" tIns="0" rIns="0" bIns="0" rtlCol="0" anchor="ctr"/>
-          <a:lstStyle/>
-          <a:p>
-            <a:pPr algn="ctr" indent="0" marL="0">
-              <a:buNone/>
-            </a:pPr>
-            <a:r>
-              <a:rPr lang="en-US" sz="1500" b="1" dirty="0">
-                <a:solidFill>
-                  <a:srgbClr val="FFFFFF"/>
-                </a:solidFill>
-                <a:latin typeface="Calibri" pitchFamily="34" charset="0"/>
-                <a:ea typeface="Calibri" pitchFamily="34" charset="-122"/>
-                <a:cs typeface="Calibri" pitchFamily="34" charset="-120"/>
-              </a:rPr>
-              <a:t>3</a:t>
-            </a:r>
-            <a:endParaRPr lang="en-US" sz="1500" dirty="0"/>
-          </a:p>
-        </p:txBody>
-      </p:sp>
-      <p:sp>
-        <p:nvSpPr>
-          <p:cNvPr id="15" name="Text 13"/>
-          <p:cNvSpPr/>
-          <p:nvPr/>
-        </p:nvSpPr>
-        <p:spPr>
-          <a:xfrm>
-            <a:off x="1280160" y="3493008"/>
-            <a:ext cx="10143439" cy="841248"/>
-          </a:xfrm>
-          <a:prstGeom prst="rect">
-            <a:avLst/>
-          </a:prstGeom>
-          <a:noFill/>
-          <a:ln/>
-        </p:spPr>
-        <p:txBody>
-          <a:bodyPr wrap="square" lIns="0" tIns="0" rIns="0" bIns="0" rtlCol="0" anchor="ctr"/>
-          <a:lstStyle/>
-          <a:p>
-            <a:pPr algn="l" indent="0" marL="0">
-              <a:buNone/>
-            </a:pPr>
-            <a:r>
-              <a:rPr lang="en-US" sz="1350" dirty="0">
-                <a:solidFill>
-                  <a:srgbClr val="E7EEF4"/>
-                </a:solidFill>
-                <a:latin typeface="Calibri" pitchFamily="34" charset="0"/>
-                <a:ea typeface="Calibri" pitchFamily="34" charset="-122"/>
-                <a:cs typeface="Calibri" pitchFamily="34" charset="-120"/>
-              </a:rPr>
-              <a:t>Just culture: console human error, coach at-risk behavior, discipline recklessness — and keep reporting safe.</a:t>
-            </a:r>
-            <a:endParaRPr lang="en-US" sz="1350" dirty="0"/>
-          </a:p>
-        </p:txBody>
-      </p:sp>
-      <p:sp>
-        <p:nvSpPr>
-          <p:cNvPr id="16" name="Shape 14"/>
-          <p:cNvSpPr/>
-          <p:nvPr/>
-        </p:nvSpPr>
-        <p:spPr>
-          <a:xfrm>
-            <a:off x="566928" y="4480560"/>
-            <a:ext cx="11057839" cy="841248"/>
-          </a:xfrm>
-          <a:prstGeom prst="roundRect">
-            <a:avLst>
-              <a:gd name="adj" fmla="val 7609"/>
-            </a:avLst>
-          </a:prstGeom>
-          <a:solidFill>
-            <a:srgbClr val="143651"/>
-          </a:solidFill>
-          <a:ln/>
-        </p:spPr>
-      </p:sp>
-      <p:sp>
-        <p:nvSpPr>
-          <p:cNvPr id="17" name="Shape 15"/>
-          <p:cNvSpPr/>
-          <p:nvPr/>
-        </p:nvSpPr>
-        <p:spPr>
-          <a:xfrm>
-            <a:off x="749808" y="4718304"/>
-            <a:ext cx="365760" cy="365760"/>
-          </a:xfrm>
-          <a:prstGeom prst="ellipse">
-            <a:avLst/>
-          </a:prstGeom>
-          <a:solidFill>
-            <a:srgbClr val="455A64"/>
-          </a:solidFill>
-          <a:ln/>
-          <a:effectLst>
-            <a:outerShdw sx="100000" sy="100000" kx="0" ky="0" algn="bl" rotWithShape="0" blurRad="88900" dist="25400" dir="5400000">
-              <a:srgbClr val="22303C">
-                <a:alpha val="12000"/>
-              </a:srgbClr>
-            </a:outerShdw>
-          </a:effectLst>
-        </p:spPr>
-      </p:sp>
-      <p:sp>
-        <p:nvSpPr>
-          <p:cNvPr id="18" name="Text 16"/>
-          <p:cNvSpPr/>
-          <p:nvPr/>
-        </p:nvSpPr>
-        <p:spPr>
-          <a:xfrm>
-            <a:off x="749808" y="4718304"/>
-            <a:ext cx="365760" cy="365760"/>
-          </a:xfrm>
-          <a:prstGeom prst="rect">
-            <a:avLst/>
-          </a:prstGeom>
-          <a:noFill/>
-          <a:ln/>
-        </p:spPr>
-        <p:txBody>
-          <a:bodyPr wrap="square" lIns="0" tIns="0" rIns="0" bIns="0" rtlCol="0" anchor="ctr"/>
-          <a:lstStyle/>
-          <a:p>
-            <a:pPr algn="ctr" indent="0" marL="0">
-              <a:buNone/>
-            </a:pPr>
-            <a:r>
-              <a:rPr lang="en-US" sz="1500" b="1" dirty="0">
-                <a:solidFill>
-                  <a:srgbClr val="FFFFFF"/>
-                </a:solidFill>
-                <a:latin typeface="Calibri" pitchFamily="34" charset="0"/>
-                <a:ea typeface="Calibri" pitchFamily="34" charset="-122"/>
-                <a:cs typeface="Calibri" pitchFamily="34" charset="-120"/>
-              </a:rPr>
-              <a:t>4</a:t>
-            </a:r>
-            <a:endParaRPr lang="en-US" sz="1500" dirty="0"/>
-          </a:p>
-        </p:txBody>
-      </p:sp>
-      <p:sp>
-        <p:nvSpPr>
-          <p:cNvPr id="19" name="Text 17"/>
-          <p:cNvSpPr/>
-          <p:nvPr/>
-        </p:nvSpPr>
-        <p:spPr>
-          <a:xfrm>
-            <a:off x="1280160" y="4480560"/>
-            <a:ext cx="10143439" cy="841248"/>
-          </a:xfrm>
-          <a:prstGeom prst="rect">
-            <a:avLst/>
-          </a:prstGeom>
-          <a:noFill/>
-          <a:ln/>
-        </p:spPr>
-        <p:txBody>
-          <a:bodyPr wrap="square" lIns="0" tIns="0" rIns="0" bIns="0" rtlCol="0" anchor="ctr"/>
-          <a:lstStyle/>
-          <a:p>
-            <a:pPr algn="l" indent="0" marL="0">
-              <a:buNone/>
-            </a:pPr>
-            <a:r>
-              <a:rPr lang="en-US" sz="1350" dirty="0">
-                <a:solidFill>
-                  <a:srgbClr val="E7EEF4"/>
-                </a:solidFill>
-                <a:latin typeface="Calibri" pitchFamily="34" charset="0"/>
-                <a:ea typeface="Calibri" pitchFamily="34" charset="-122"/>
-                <a:cs typeface="Calibri" pitchFamily="34" charset="-120"/>
-              </a:rPr>
-              <a:t>Capture and act on near misses — high near-miss reporting signals a healthy safety culture.</a:t>
-            </a:r>
-            <a:endParaRPr lang="en-US" sz="1350" dirty="0"/>
-          </a:p>
-        </p:txBody>
-      </p:sp>
-      <p:sp>
-        <p:nvSpPr>
-          <p:cNvPr id="20" name="Shape 18"/>
-          <p:cNvSpPr/>
-          <p:nvPr/>
-        </p:nvSpPr>
-        <p:spPr>
-          <a:xfrm>
-            <a:off x="566928" y="5468112"/>
-            <a:ext cx="11057839" cy="841248"/>
-          </a:xfrm>
-          <a:prstGeom prst="roundRect">
-            <a:avLst>
-              <a:gd name="adj" fmla="val 7609"/>
-            </a:avLst>
-          </a:prstGeom>
-          <a:solidFill>
-            <a:srgbClr val="143651"/>
-          </a:solidFill>
-          <a:ln/>
-        </p:spPr>
-      </p:sp>
-      <p:sp>
-        <p:nvSpPr>
-          <p:cNvPr id="21" name="Shape 19"/>
-          <p:cNvSpPr/>
-          <p:nvPr/>
-        </p:nvSpPr>
-        <p:spPr>
-          <a:xfrm>
-            <a:off x="749808" y="5705856"/>
-            <a:ext cx="365760" cy="365760"/>
-          </a:xfrm>
-          <a:prstGeom prst="ellipse">
-            <a:avLst/>
-          </a:prstGeom>
-          <a:solidFill>
-            <a:srgbClr val="455A64"/>
-          </a:solidFill>
-          <a:ln/>
-          <a:effectLst>
-            <a:outerShdw sx="100000" sy="100000" kx="0" ky="0" algn="bl" rotWithShape="0" blurRad="88900" dist="25400" dir="5400000">
-              <a:srgbClr val="22303C">
-                <a:alpha val="12000"/>
-              </a:srgbClr>
-            </a:outerShdw>
-          </a:effectLst>
-        </p:spPr>
-      </p:sp>
-      <p:sp>
-        <p:nvSpPr>
-          <p:cNvPr id="22" name="Text 20"/>
-          <p:cNvSpPr/>
-          <p:nvPr/>
-        </p:nvSpPr>
-        <p:spPr>
-          <a:xfrm>
-            <a:off x="749808" y="5705856"/>
-            <a:ext cx="365760" cy="365760"/>
-          </a:xfrm>
-          <a:prstGeom prst="rect">
-            <a:avLst/>
-          </a:prstGeom>
-          <a:noFill/>
-          <a:ln/>
-        </p:spPr>
-        <p:txBody>
-          <a:bodyPr wrap="square" lIns="0" tIns="0" rIns="0" bIns="0" rtlCol="0" anchor="ctr"/>
-          <a:lstStyle/>
-          <a:p>
-            <a:pPr algn="ctr" indent="0" marL="0">
-              <a:buNone/>
-            </a:pPr>
-            <a:r>
-              <a:rPr lang="en-US" sz="1500" b="1" dirty="0">
-                <a:solidFill>
-                  <a:srgbClr val="FFFFFF"/>
-                </a:solidFill>
-                <a:latin typeface="Calibri" pitchFamily="34" charset="0"/>
-                <a:ea typeface="Calibri" pitchFamily="34" charset="-122"/>
-                <a:cs typeface="Calibri" pitchFamily="34" charset="-120"/>
-              </a:rPr>
-              <a:t>5</a:t>
-            </a:r>
-            <a:endParaRPr lang="en-US" sz="1500" dirty="0"/>
-          </a:p>
-        </p:txBody>
-      </p:sp>
-      <p:sp>
-        <p:nvSpPr>
-          <p:cNvPr id="23" name="Text 21"/>
-          <p:cNvSpPr/>
-          <p:nvPr/>
-        </p:nvSpPr>
-        <p:spPr>
-          <a:xfrm>
-            <a:off x="1280160" y="5468112"/>
-            <a:ext cx="10143439" cy="841248"/>
-          </a:xfrm>
-          <a:prstGeom prst="rect">
-            <a:avLst/>
-          </a:prstGeom>
-          <a:noFill/>
-          <a:ln/>
-        </p:spPr>
-        <p:txBody>
-          <a:bodyPr wrap="square" lIns="0" tIns="0" rIns="0" bIns="0" rtlCol="0" anchor="ctr"/>
-          <a:lstStyle/>
-          <a:p>
-            <a:pPr algn="l" indent="0" marL="0">
-              <a:buNone/>
-            </a:pPr>
-            <a:r>
-              <a:rPr lang="en-US" sz="1350" dirty="0">
-                <a:solidFill>
-                  <a:srgbClr val="E7EEF4"/>
-                </a:solidFill>
-                <a:latin typeface="Calibri" pitchFamily="34" charset="0"/>
-                <a:ea typeface="Calibri" pitchFamily="34" charset="-122"/>
-                <a:cs typeface="Calibri" pitchFamily="34" charset="-120"/>
-              </a:rPr>
-              <a:t>Wrong blood in tube is the deadliest preventable error; defend with positive ID, second ABO checks, and barcoding; report to haemovigilance.</a:t>
-            </a:r>
-            <a:endParaRPr lang="en-US" sz="1350" dirty="0"/>
-          </a:p>
-        </p:txBody>
-      </p:sp>
-      <p:sp>
-        <p:nvSpPr>
-          <p:cNvPr id="24" name="Text 22"/>
-          <p:cNvSpPr/>
-          <p:nvPr/>
-        </p:nvSpPr>
-        <p:spPr>
-          <a:xfrm>
-            <a:off x="566928" y="6473952"/>
-            <a:ext cx="8229600" cy="274320"/>
-          </a:xfrm>
-          <a:prstGeom prst="rect">
-            <a:avLst/>
-          </a:prstGeom>
-          <a:noFill/>
-          <a:ln/>
-        </p:spPr>
-        <p:txBody>
-          <a:bodyPr wrap="square" lIns="0" tIns="0" rIns="0" bIns="0" rtlCol="0" anchor="ctr"/>
-          <a:lstStyle/>
-          <a:p>
-            <a:pPr indent="0" marL="0">
+            <a:pPr algn="r" indent="0" marL="0">
               <a:buNone/>
             </a:pPr>
             <a:r>
               <a:rPr lang="en-US" sz="850" dirty="0">
                 <a:solidFill>
-                  <a:srgbClr val="5E7488"/>
-                </a:solidFill>
-                <a:latin typeface="Calibri" pitchFamily="34" charset="0"/>
-                <a:ea typeface="Calibri" pitchFamily="34" charset="-122"/>
-                <a:cs typeface="Calibri" pitchFamily="34" charset="-120"/>
-              </a:rPr>
-              <a:t>Makassed General Hospital  ·  Department of Laboratory Medicine</a:t>
-            </a:r>
-            <a:endParaRPr lang="en-US" sz="850" dirty="0"/>
-          </a:p>
-        </p:txBody>
-      </p:sp>
-      <p:sp>
-        <p:nvSpPr>
-          <p:cNvPr id="25" name="Text 23"/>
-          <p:cNvSpPr/>
-          <p:nvPr/>
-        </p:nvSpPr>
-        <p:spPr>
-          <a:xfrm>
-            <a:off x="11002975" y="6473952"/>
-            <a:ext cx="640080" cy="274320"/>
-          </a:xfrm>
-          <a:prstGeom prst="rect">
-            <a:avLst/>
-          </a:prstGeom>
-          <a:noFill/>
-          <a:ln/>
-        </p:spPr>
-        <p:txBody>
-          <a:bodyPr wrap="square" lIns="0" tIns="0" rIns="0" bIns="0" rtlCol="0" anchor="ctr"/>
-          <a:lstStyle/>
-          <a:p>
+                  <a:srgbClr val="9AA8B4"/>
+                </a:solidFill>
+                <a:latin typeface="Calibri" pitchFamily="34" charset="0"/>
+                <a:ea typeface="Calibri" pitchFamily="34" charset="-122"/>
+                <a:cs typeface="Calibri" pitchFamily="34" charset="-120"/>
+              </a:rPr>
+              <a:t>CP Lecture Series</a:t>
+            </a:r>
+            <a:pPr algn="r" indent="0" marL="0">
+              <a:buNone/>
+            </a:pPr>
+            <a:r>
+              <a:rPr lang="en-US" sz="850" dirty="0">
+                <a:solidFill>
+                  <a:srgbClr val="DCE4EC"/>
+                </a:solidFill>
+                <a:latin typeface="Calibri" pitchFamily="34" charset="0"/>
+                <a:ea typeface="Calibri" pitchFamily="34" charset="-122"/>
+                <a:cs typeface="Calibri" pitchFamily="34" charset="-120"/>
+              </a:rPr>
+              <a:t>   ·   </a:t>
+            </a:r>
             <a:pPr algn="r" indent="0" marL="0">
               <a:buNone/>
             </a:pPr>
@@ -9122,6 +8825,2341 @@
                 <a:ea typeface="Calibri" pitchFamily="34" charset="-122"/>
                 <a:cs typeface="Calibri" pitchFamily="34" charset="-120"/>
               </a:rPr>
+              <a:t>LAB MANAGEMENT &amp; QUALITY   ·   BOARD REVIEW  ·  Q2</a:t>
+            </a:r>
+            <a:endParaRPr lang="en-US" sz="1100" dirty="0"/>
+          </a:p>
+        </p:txBody>
+      </p:sp>
+      <p:sp>
+        <p:nvSpPr>
+          <p:cNvPr id="3" name="Text 1"/>
+          <p:cNvSpPr/>
+          <p:nvPr/>
+        </p:nvSpPr>
+        <p:spPr>
+          <a:xfrm>
+            <a:off x="566928" y="713232"/>
+            <a:ext cx="11064240" cy="749808"/>
+          </a:xfrm>
+          <a:prstGeom prst="rect">
+            <a:avLst/>
+          </a:prstGeom>
+          <a:noFill/>
+          <a:ln/>
+        </p:spPr>
+        <p:txBody>
+          <a:bodyPr wrap="square" lIns="0" tIns="0" rIns="0" bIns="0" rtlCol="0" anchor="ctr"/>
+          <a:lstStyle/>
+          <a:p>
+            <a:pPr algn="l" indent="0" marL="0">
+              <a:buNone/>
+            </a:pPr>
+            <a:r>
+              <a:rPr lang="en-US" sz="2600" b="1" dirty="0">
+                <a:solidFill>
+                  <a:srgbClr val="0E3A5F"/>
+                </a:solidFill>
+                <a:latin typeface="Calibri" pitchFamily="34" charset="0"/>
+                <a:ea typeface="Calibri" pitchFamily="34" charset="-122"/>
+                <a:cs typeface="Calibri" pitchFamily="34" charset="-120"/>
+              </a:rPr>
+              <a:t>Board-Style Review</a:t>
+            </a:r>
+            <a:endParaRPr lang="en-US" sz="2600" dirty="0"/>
+          </a:p>
+        </p:txBody>
+      </p:sp>
+      <p:sp>
+        <p:nvSpPr>
+          <p:cNvPr id="4" name="Text 2"/>
+          <p:cNvSpPr/>
+          <p:nvPr/>
+        </p:nvSpPr>
+        <p:spPr>
+          <a:xfrm>
+            <a:off x="566928" y="1417320"/>
+            <a:ext cx="11057839" cy="914400"/>
+          </a:xfrm>
+          <a:prstGeom prst="rect">
+            <a:avLst/>
+          </a:prstGeom>
+          <a:noFill/>
+          <a:ln/>
+        </p:spPr>
+        <p:txBody>
+          <a:bodyPr wrap="square" lIns="0" tIns="0" rIns="0" bIns="0" rtlCol="0" anchor="t"/>
+          <a:lstStyle/>
+          <a:p>
+            <a:pPr algn="l" indent="0" marL="0">
+              <a:lnSpc>
+                <a:spcPct val="105000"/>
+              </a:lnSpc>
+              <a:buNone/>
+            </a:pPr>
+            <a:r>
+              <a:rPr lang="en-US" sz="1450" b="1" dirty="0">
+                <a:solidFill>
+                  <a:srgbClr val="1B2A38"/>
+                </a:solidFill>
+                <a:latin typeface="Calibri" pitchFamily="34" charset="0"/>
+                <a:ea typeface="Calibri" pitchFamily="34" charset="-122"/>
+                <a:cs typeface="Calibri" pitchFamily="34" charset="-120"/>
+              </a:rPr>
+              <a:t>Which is the STRONGEST type of corrective action?</a:t>
+            </a:r>
+            <a:endParaRPr lang="en-US" sz="1450" dirty="0"/>
+          </a:p>
+        </p:txBody>
+      </p:sp>
+      <p:sp>
+        <p:nvSpPr>
+          <p:cNvPr id="5" name="Text 3"/>
+          <p:cNvSpPr/>
+          <p:nvPr/>
+        </p:nvSpPr>
+        <p:spPr>
+          <a:xfrm>
+            <a:off x="658368" y="2395728"/>
+            <a:ext cx="6192390" cy="3017520"/>
+          </a:xfrm>
+          <a:prstGeom prst="rect">
+            <a:avLst/>
+          </a:prstGeom>
+          <a:noFill/>
+          <a:ln/>
+        </p:spPr>
+        <p:txBody>
+          <a:bodyPr wrap="square" lIns="0" tIns="0" rIns="0" bIns="0" rtlCol="0" anchor="t"/>
+          <a:lstStyle/>
+          <a:p>
+            <a:pPr algn="l" indent="0" marL="0">
+              <a:spcAft>
+                <a:spcPts val="600"/>
+              </a:spcAft>
+              <a:buNone/>
+            </a:pPr>
+            <a:r>
+              <a:rPr lang="en-US" sz="1350" dirty="0">
+                <a:solidFill>
+                  <a:srgbClr val="33444F"/>
+                </a:solidFill>
+                <a:latin typeface="Calibri" pitchFamily="34" charset="0"/>
+                <a:ea typeface="Calibri" pitchFamily="34" charset="-122"/>
+                <a:cs typeface="Calibri" pitchFamily="34" charset="-120"/>
+              </a:rPr>
+              <a:t>A. Staff reminder</a:t>
+            </a:r>
+            <a:endParaRPr lang="en-US" sz="1350" dirty="0"/>
+          </a:p>
+          <a:p>
+            <a:pPr algn="l" indent="0" marL="0">
+              <a:spcAft>
+                <a:spcPts val="600"/>
+              </a:spcAft>
+              <a:buNone/>
+            </a:pPr>
+            <a:r>
+              <a:rPr lang="en-US" sz="1350" dirty="0">
+                <a:solidFill>
+                  <a:srgbClr val="33444F"/>
+                </a:solidFill>
+                <a:latin typeface="Calibri" pitchFamily="34" charset="0"/>
+                <a:ea typeface="Calibri" pitchFamily="34" charset="-122"/>
+                <a:cs typeface="Calibri" pitchFamily="34" charset="-120"/>
+              </a:rPr>
+              <a:t>B. Additional training</a:t>
+            </a:r>
+            <a:endParaRPr lang="en-US" sz="1350" dirty="0"/>
+          </a:p>
+          <a:p>
+            <a:pPr algn="l" indent="0" marL="0">
+              <a:spcAft>
+                <a:spcPts val="600"/>
+              </a:spcAft>
+              <a:buNone/>
+            </a:pPr>
+            <a:r>
+              <a:rPr lang="en-US" sz="1350" b="1" dirty="0">
+                <a:solidFill>
+                  <a:srgbClr val="2C3A41"/>
+                </a:solidFill>
+                <a:latin typeface="Calibri" pitchFamily="34" charset="0"/>
+                <a:ea typeface="Calibri" pitchFamily="34" charset="-122"/>
+                <a:cs typeface="Calibri" pitchFamily="34" charset="-120"/>
+              </a:rPr>
+              <a:t>C. A forcing function / automation</a:t>
+            </a:r>
+            <a:endParaRPr lang="en-US" sz="1350" dirty="0"/>
+          </a:p>
+          <a:p>
+            <a:pPr algn="l" indent="0" marL="0">
+              <a:spcAft>
+                <a:spcPts val="600"/>
+              </a:spcAft>
+              <a:buNone/>
+            </a:pPr>
+            <a:r>
+              <a:rPr lang="en-US" sz="1350" dirty="0">
+                <a:solidFill>
+                  <a:srgbClr val="33444F"/>
+                </a:solidFill>
+                <a:latin typeface="Calibri" pitchFamily="34" charset="0"/>
+                <a:ea typeface="Calibri" pitchFamily="34" charset="-122"/>
+                <a:cs typeface="Calibri" pitchFamily="34" charset="-120"/>
+              </a:rPr>
+              <a:t>D. A new policy memo</a:t>
+            </a:r>
+            <a:endParaRPr lang="en-US" sz="1350" dirty="0"/>
+          </a:p>
+          <a:p>
+            <a:pPr algn="l" indent="0" marL="0">
+              <a:spcAft>
+                <a:spcPts val="600"/>
+              </a:spcAft>
+              <a:buNone/>
+            </a:pPr>
+            <a:r>
+              <a:rPr lang="en-US" sz="1350" dirty="0">
+                <a:solidFill>
+                  <a:srgbClr val="33444F"/>
+                </a:solidFill>
+                <a:latin typeface="Calibri" pitchFamily="34" charset="0"/>
+                <a:ea typeface="Calibri" pitchFamily="34" charset="-122"/>
+                <a:cs typeface="Calibri" pitchFamily="34" charset="-120"/>
+              </a:rPr>
+              <a:t>E. Increased vigilance</a:t>
+            </a:r>
+            <a:endParaRPr lang="en-US" sz="1350" dirty="0"/>
+          </a:p>
+        </p:txBody>
+      </p:sp>
+      <p:sp>
+        <p:nvSpPr>
+          <p:cNvPr id="6" name="Shape 4"/>
+          <p:cNvSpPr/>
+          <p:nvPr/>
+        </p:nvSpPr>
+        <p:spPr>
+          <a:xfrm>
+            <a:off x="7201632" y="2395728"/>
+            <a:ext cx="4423136" cy="3246120"/>
+          </a:xfrm>
+          <a:prstGeom prst="roundRect">
+            <a:avLst>
+              <a:gd name="adj" fmla="val 2535"/>
+            </a:avLst>
+          </a:prstGeom>
+          <a:solidFill>
+            <a:srgbClr val="ECEFF1"/>
+          </a:solidFill>
+          <a:ln/>
+          <a:effectLst>
+            <a:outerShdw sx="100000" sy="100000" kx="0" ky="0" algn="bl" rotWithShape="0" blurRad="88900" dist="25400" dir="5400000">
+              <a:srgbClr val="22303C">
+                <a:alpha val="12000"/>
+              </a:srgbClr>
+            </a:outerShdw>
+          </a:effectLst>
+        </p:spPr>
+      </p:sp>
+      <p:sp>
+        <p:nvSpPr>
+          <p:cNvPr id="7" name="Text 5"/>
+          <p:cNvSpPr/>
+          <p:nvPr/>
+        </p:nvSpPr>
+        <p:spPr>
+          <a:xfrm>
+            <a:off x="7439376" y="2578608"/>
+            <a:ext cx="3965936" cy="457200"/>
+          </a:xfrm>
+          <a:prstGeom prst="rect">
+            <a:avLst/>
+          </a:prstGeom>
+          <a:noFill/>
+          <a:ln/>
+        </p:spPr>
+        <p:txBody>
+          <a:bodyPr wrap="square" lIns="0" tIns="0" rIns="0" bIns="0" rtlCol="0" anchor="ctr"/>
+          <a:lstStyle/>
+          <a:p>
+            <a:pPr indent="0" marL="0">
+              <a:buNone/>
+            </a:pPr>
+            <a:r>
+              <a:rPr lang="en-US" sz="1500" b="1" dirty="0">
+                <a:solidFill>
+                  <a:srgbClr val="455A64"/>
+                </a:solidFill>
+                <a:latin typeface="Calibri" pitchFamily="34" charset="0"/>
+                <a:ea typeface="Calibri" pitchFamily="34" charset="-122"/>
+                <a:cs typeface="Calibri" pitchFamily="34" charset="-120"/>
+              </a:rPr>
+              <a:t>ANSWER  </a:t>
+            </a:r>
+            <a:pPr indent="0" marL="0">
+              <a:buNone/>
+            </a:pPr>
+            <a:r>
+              <a:rPr lang="en-US" sz="1500" b="1" dirty="0">
+                <a:solidFill>
+                  <a:srgbClr val="1B2A38"/>
+                </a:solidFill>
+                <a:latin typeface="Calibri" pitchFamily="34" charset="0"/>
+                <a:ea typeface="Calibri" pitchFamily="34" charset="-122"/>
+                <a:cs typeface="Calibri" pitchFamily="34" charset="-120"/>
+              </a:rPr>
+              <a:t>C — Forcing function/automation</a:t>
+            </a:r>
+            <a:endParaRPr lang="en-US" sz="1500" dirty="0"/>
+          </a:p>
+        </p:txBody>
+      </p:sp>
+      <p:sp>
+        <p:nvSpPr>
+          <p:cNvPr id="8" name="Text 6"/>
+          <p:cNvSpPr/>
+          <p:nvPr/>
+        </p:nvSpPr>
+        <p:spPr>
+          <a:xfrm>
+            <a:off x="7439376" y="3127248"/>
+            <a:ext cx="3947648" cy="2377440"/>
+          </a:xfrm>
+          <a:prstGeom prst="rect">
+            <a:avLst/>
+          </a:prstGeom>
+          <a:noFill/>
+          <a:ln/>
+        </p:spPr>
+        <p:txBody>
+          <a:bodyPr wrap="square" lIns="0" tIns="0" rIns="0" bIns="0" rtlCol="0" anchor="t"/>
+          <a:lstStyle/>
+          <a:p>
+            <a:pPr algn="l" indent="0" marL="0">
+              <a:lnSpc>
+                <a:spcPct val="108000"/>
+              </a:lnSpc>
+              <a:buNone/>
+            </a:pPr>
+            <a:r>
+              <a:rPr lang="en-US" sz="1250" dirty="0">
+                <a:solidFill>
+                  <a:srgbClr val="33444F"/>
+                </a:solidFill>
+                <a:latin typeface="Calibri" pitchFamily="34" charset="0"/>
+                <a:ea typeface="Calibri" pitchFamily="34" charset="-122"/>
+                <a:cs typeface="Calibri" pitchFamily="34" charset="-120"/>
+              </a:rPr>
+              <a:t>Strong interventions remove reliance on memory and vigilance; reminders and training are weak by comparison.</a:t>
+            </a:r>
+            <a:endParaRPr lang="en-US" sz="1250" dirty="0"/>
+          </a:p>
+        </p:txBody>
+      </p:sp>
+      <p:sp>
+        <p:nvSpPr>
+          <p:cNvPr id="9" name="Text 7"/>
+          <p:cNvSpPr/>
+          <p:nvPr/>
+        </p:nvSpPr>
+        <p:spPr>
+          <a:xfrm>
+            <a:off x="566928" y="6473952"/>
+            <a:ext cx="7772400" cy="274320"/>
+          </a:xfrm>
+          <a:prstGeom prst="rect">
+            <a:avLst/>
+          </a:prstGeom>
+          <a:noFill/>
+          <a:ln/>
+        </p:spPr>
+        <p:txBody>
+          <a:bodyPr wrap="square" lIns="0" tIns="0" rIns="0" bIns="0" rtlCol="0" anchor="ctr"/>
+          <a:lstStyle/>
+          <a:p>
+            <a:pPr algn="l" indent="0" marL="0">
+              <a:buNone/>
+            </a:pPr>
+            <a:r>
+              <a:rPr lang="en-US" sz="850" dirty="0">
+                <a:solidFill>
+                  <a:srgbClr val="9AA8B4"/>
+                </a:solidFill>
+                <a:latin typeface="Calibri" pitchFamily="34" charset="0"/>
+                <a:ea typeface="Calibri" pitchFamily="34" charset="-122"/>
+                <a:cs typeface="Calibri" pitchFamily="34" charset="-120"/>
+              </a:rPr>
+              <a:t>Makassed General Hospital  ·  Department of Laboratory Medicine</a:t>
+            </a:r>
+            <a:endParaRPr lang="en-US" sz="850" dirty="0"/>
+          </a:p>
+        </p:txBody>
+      </p:sp>
+      <p:sp>
+        <p:nvSpPr>
+          <p:cNvPr id="10" name="Text 8"/>
+          <p:cNvSpPr/>
+          <p:nvPr/>
+        </p:nvSpPr>
+        <p:spPr>
+          <a:xfrm>
+            <a:off x="9814255" y="6473952"/>
+            <a:ext cx="1828800" cy="274320"/>
+          </a:xfrm>
+          <a:prstGeom prst="rect">
+            <a:avLst/>
+          </a:prstGeom>
+          <a:noFill/>
+          <a:ln/>
+        </p:spPr>
+        <p:txBody>
+          <a:bodyPr wrap="square" lIns="0" tIns="0" rIns="0" bIns="0" rtlCol="0" anchor="ctr"/>
+          <a:lstStyle/>
+          <a:p>
+            <a:pPr algn="r" indent="0" marL="0">
+              <a:buNone/>
+            </a:pPr>
+            <a:r>
+              <a:rPr lang="en-US" sz="850" dirty="0">
+                <a:solidFill>
+                  <a:srgbClr val="9AA8B4"/>
+                </a:solidFill>
+                <a:latin typeface="Calibri" pitchFamily="34" charset="0"/>
+                <a:ea typeface="Calibri" pitchFamily="34" charset="-122"/>
+                <a:cs typeface="Calibri" pitchFamily="34" charset="-120"/>
+              </a:rPr>
+              <a:t>CP Lecture Series</a:t>
+            </a:r>
+            <a:pPr algn="r" indent="0" marL="0">
+              <a:buNone/>
+            </a:pPr>
+            <a:r>
+              <a:rPr lang="en-US" sz="850" dirty="0">
+                <a:solidFill>
+                  <a:srgbClr val="DCE4EC"/>
+                </a:solidFill>
+                <a:latin typeface="Calibri" pitchFamily="34" charset="0"/>
+                <a:ea typeface="Calibri" pitchFamily="34" charset="-122"/>
+                <a:cs typeface="Calibri" pitchFamily="34" charset="-120"/>
+              </a:rPr>
+              <a:t>   ·   </a:t>
+            </a:r>
+            <a:pPr algn="r" indent="0" marL="0">
+              <a:buNone/>
+            </a:pPr>
+            <a:r>
+              <a:rPr lang="en-US" sz="850" b="1" dirty="0">
+                <a:solidFill>
+                  <a:srgbClr val="455A64"/>
+                </a:solidFill>
+                <a:latin typeface="Calibri" pitchFamily="34" charset="0"/>
+                <a:ea typeface="Calibri" pitchFamily="34" charset="-122"/>
+                <a:cs typeface="Calibri" pitchFamily="34" charset="-120"/>
+              </a:rPr>
+              <a:t>18</a:t>
+            </a:r>
+            <a:endParaRPr lang="en-US" sz="850" dirty="0"/>
+          </a:p>
+        </p:txBody>
+      </p:sp>
+    </p:spTree>
+  </p:cSld>
+  <p:clrMapOvr>
+    <a:masterClrMapping/>
+  </p:clrMapOvr>
+</p:sld>
+</file>
+
+<file path=ppt/slides/slide22.xml><?xml version="1.0" encoding="utf-8"?>
+<p:sld xmlns:a="http://schemas.openxmlformats.org/drawingml/2006/main" xmlns:r="http://schemas.openxmlformats.org/officeDocument/2006/relationships" xmlns:p="http://schemas.openxmlformats.org/presentationml/2006/main">
+  <p:cSld name="Slide 22">
+    <p:bg>
+      <p:bgPr>
+        <a:solidFill>
+          <a:srgbClr val="FFFFFF"/>
+        </a:solidFill>
+      </p:bgPr>
+    </p:bg>
+    <p:spTree>
+      <p:nvGrpSpPr>
+        <p:cNvPr id="1" name=""/>
+        <p:cNvGrpSpPr/>
+        <p:nvPr/>
+      </p:nvGrpSpPr>
+      <p:grpSpPr>
+        <a:xfrm>
+          <a:off x="0" y="0"/>
+          <a:ext cx="0" cy="0"/>
+          <a:chOff x="0" y="0"/>
+          <a:chExt cx="0" cy="0"/>
+        </a:xfrm>
+      </p:grpSpPr>
+      <p:sp>
+        <p:nvSpPr>
+          <p:cNvPr id="2" name="Text 0"/>
+          <p:cNvSpPr/>
+          <p:nvPr/>
+        </p:nvSpPr>
+        <p:spPr>
+          <a:xfrm>
+            <a:off x="566928" y="329184"/>
+            <a:ext cx="10515600" cy="310896"/>
+          </a:xfrm>
+          <a:prstGeom prst="rect">
+            <a:avLst/>
+          </a:prstGeom>
+          <a:noFill/>
+          <a:ln/>
+        </p:spPr>
+        <p:txBody>
+          <a:bodyPr wrap="square" lIns="0" tIns="0" rIns="0" bIns="0" rtlCol="0" anchor="ctr"/>
+          <a:lstStyle/>
+          <a:p>
+            <a:pPr algn="l" indent="0" marL="0">
+              <a:buNone/>
+            </a:pPr>
+            <a:r>
+              <a:rPr lang="en-US" sz="1100" b="1" spc="150" kern="0" dirty="0">
+                <a:solidFill>
+                  <a:srgbClr val="455A64"/>
+                </a:solidFill>
+                <a:latin typeface="Calibri" pitchFamily="34" charset="0"/>
+                <a:ea typeface="Calibri" pitchFamily="34" charset="-122"/>
+                <a:cs typeface="Calibri" pitchFamily="34" charset="-120"/>
+              </a:rPr>
+              <a:t>LAB MANAGEMENT &amp; QUALITY   ·   BOARD REVIEW  ·  Q3</a:t>
+            </a:r>
+            <a:endParaRPr lang="en-US" sz="1100" dirty="0"/>
+          </a:p>
+        </p:txBody>
+      </p:sp>
+      <p:sp>
+        <p:nvSpPr>
+          <p:cNvPr id="3" name="Text 1"/>
+          <p:cNvSpPr/>
+          <p:nvPr/>
+        </p:nvSpPr>
+        <p:spPr>
+          <a:xfrm>
+            <a:off x="566928" y="713232"/>
+            <a:ext cx="11064240" cy="749808"/>
+          </a:xfrm>
+          <a:prstGeom prst="rect">
+            <a:avLst/>
+          </a:prstGeom>
+          <a:noFill/>
+          <a:ln/>
+        </p:spPr>
+        <p:txBody>
+          <a:bodyPr wrap="square" lIns="0" tIns="0" rIns="0" bIns="0" rtlCol="0" anchor="ctr"/>
+          <a:lstStyle/>
+          <a:p>
+            <a:pPr algn="l" indent="0" marL="0">
+              <a:buNone/>
+            </a:pPr>
+            <a:r>
+              <a:rPr lang="en-US" sz="2600" b="1" dirty="0">
+                <a:solidFill>
+                  <a:srgbClr val="0E3A5F"/>
+                </a:solidFill>
+                <a:latin typeface="Calibri" pitchFamily="34" charset="0"/>
+                <a:ea typeface="Calibri" pitchFamily="34" charset="-122"/>
+                <a:cs typeface="Calibri" pitchFamily="34" charset="-120"/>
+              </a:rPr>
+              <a:t>Board-Style Review</a:t>
+            </a:r>
+            <a:endParaRPr lang="en-US" sz="2600" dirty="0"/>
+          </a:p>
+        </p:txBody>
+      </p:sp>
+      <p:sp>
+        <p:nvSpPr>
+          <p:cNvPr id="4" name="Text 2"/>
+          <p:cNvSpPr/>
+          <p:nvPr/>
+        </p:nvSpPr>
+        <p:spPr>
+          <a:xfrm>
+            <a:off x="566928" y="1417320"/>
+            <a:ext cx="11057839" cy="914400"/>
+          </a:xfrm>
+          <a:prstGeom prst="rect">
+            <a:avLst/>
+          </a:prstGeom>
+          <a:noFill/>
+          <a:ln/>
+        </p:spPr>
+        <p:txBody>
+          <a:bodyPr wrap="square" lIns="0" tIns="0" rIns="0" bIns="0" rtlCol="0" anchor="t"/>
+          <a:lstStyle/>
+          <a:p>
+            <a:pPr algn="l" indent="0" marL="0">
+              <a:lnSpc>
+                <a:spcPct val="105000"/>
+              </a:lnSpc>
+              <a:buNone/>
+            </a:pPr>
+            <a:r>
+              <a:rPr lang="en-US" sz="1450" b="1" dirty="0">
+                <a:solidFill>
+                  <a:srgbClr val="1B2A38"/>
+                </a:solidFill>
+                <a:latin typeface="Calibri" pitchFamily="34" charset="0"/>
+                <a:ea typeface="Calibri" pitchFamily="34" charset="-122"/>
+                <a:cs typeface="Calibri" pitchFamily="34" charset="-120"/>
+              </a:rPr>
+              <a:t>Under just culture, an honest mistake by a competent person in a flawed system warrants:</a:t>
+            </a:r>
+            <a:endParaRPr lang="en-US" sz="1450" dirty="0"/>
+          </a:p>
+        </p:txBody>
+      </p:sp>
+      <p:sp>
+        <p:nvSpPr>
+          <p:cNvPr id="5" name="Text 3"/>
+          <p:cNvSpPr/>
+          <p:nvPr/>
+        </p:nvSpPr>
+        <p:spPr>
+          <a:xfrm>
+            <a:off x="658368" y="2395728"/>
+            <a:ext cx="6192390" cy="3017520"/>
+          </a:xfrm>
+          <a:prstGeom prst="rect">
+            <a:avLst/>
+          </a:prstGeom>
+          <a:noFill/>
+          <a:ln/>
+        </p:spPr>
+        <p:txBody>
+          <a:bodyPr wrap="square" lIns="0" tIns="0" rIns="0" bIns="0" rtlCol="0" anchor="t"/>
+          <a:lstStyle/>
+          <a:p>
+            <a:pPr algn="l" indent="0" marL="0">
+              <a:spcAft>
+                <a:spcPts val="600"/>
+              </a:spcAft>
+              <a:buNone/>
+            </a:pPr>
+            <a:r>
+              <a:rPr lang="en-US" sz="1350" dirty="0">
+                <a:solidFill>
+                  <a:srgbClr val="33444F"/>
+                </a:solidFill>
+                <a:latin typeface="Calibri" pitchFamily="34" charset="0"/>
+                <a:ea typeface="Calibri" pitchFamily="34" charset="-122"/>
+                <a:cs typeface="Calibri" pitchFamily="34" charset="-120"/>
+              </a:rPr>
+              <a:t>A. Discipline</a:t>
+            </a:r>
+            <a:endParaRPr lang="en-US" sz="1350" dirty="0"/>
+          </a:p>
+          <a:p>
+            <a:pPr algn="l" indent="0" marL="0">
+              <a:spcAft>
+                <a:spcPts val="600"/>
+              </a:spcAft>
+              <a:buNone/>
+            </a:pPr>
+            <a:r>
+              <a:rPr lang="en-US" sz="1350" b="1" dirty="0">
+                <a:solidFill>
+                  <a:srgbClr val="2C3A41"/>
+                </a:solidFill>
+                <a:latin typeface="Calibri" pitchFamily="34" charset="0"/>
+                <a:ea typeface="Calibri" pitchFamily="34" charset="-122"/>
+                <a:cs typeface="Calibri" pitchFamily="34" charset="-120"/>
+              </a:rPr>
+              <a:t>B. Consoling the individual and fixing the system</a:t>
+            </a:r>
+            <a:endParaRPr lang="en-US" sz="1350" dirty="0"/>
+          </a:p>
+          <a:p>
+            <a:pPr algn="l" indent="0" marL="0">
+              <a:spcAft>
+                <a:spcPts val="600"/>
+              </a:spcAft>
+              <a:buNone/>
+            </a:pPr>
+            <a:r>
+              <a:rPr lang="en-US" sz="1350" dirty="0">
+                <a:solidFill>
+                  <a:srgbClr val="33444F"/>
+                </a:solidFill>
+                <a:latin typeface="Calibri" pitchFamily="34" charset="0"/>
+                <a:ea typeface="Calibri" pitchFamily="34" charset="-122"/>
+                <a:cs typeface="Calibri" pitchFamily="34" charset="-120"/>
+              </a:rPr>
+              <a:t>C. Termination</a:t>
+            </a:r>
+            <a:endParaRPr lang="en-US" sz="1350" dirty="0"/>
+          </a:p>
+          <a:p>
+            <a:pPr algn="l" indent="0" marL="0">
+              <a:spcAft>
+                <a:spcPts val="600"/>
+              </a:spcAft>
+              <a:buNone/>
+            </a:pPr>
+            <a:r>
+              <a:rPr lang="en-US" sz="1350" dirty="0">
+                <a:solidFill>
+                  <a:srgbClr val="33444F"/>
+                </a:solidFill>
+                <a:latin typeface="Calibri" pitchFamily="34" charset="0"/>
+                <a:ea typeface="Calibri" pitchFamily="34" charset="-122"/>
+                <a:cs typeface="Calibri" pitchFamily="34" charset="-120"/>
+              </a:rPr>
+              <a:t>D. Ignoring it</a:t>
+            </a:r>
+            <a:endParaRPr lang="en-US" sz="1350" dirty="0"/>
+          </a:p>
+          <a:p>
+            <a:pPr algn="l" indent="0" marL="0">
+              <a:spcAft>
+                <a:spcPts val="600"/>
+              </a:spcAft>
+              <a:buNone/>
+            </a:pPr>
+            <a:r>
+              <a:rPr lang="en-US" sz="1350" dirty="0">
+                <a:solidFill>
+                  <a:srgbClr val="33444F"/>
+                </a:solidFill>
+                <a:latin typeface="Calibri" pitchFamily="34" charset="0"/>
+                <a:ea typeface="Calibri" pitchFamily="34" charset="-122"/>
+                <a:cs typeface="Calibri" pitchFamily="34" charset="-120"/>
+              </a:rPr>
+              <a:t>E. A public warning</a:t>
+            </a:r>
+            <a:endParaRPr lang="en-US" sz="1350" dirty="0"/>
+          </a:p>
+        </p:txBody>
+      </p:sp>
+      <p:sp>
+        <p:nvSpPr>
+          <p:cNvPr id="6" name="Shape 4"/>
+          <p:cNvSpPr/>
+          <p:nvPr/>
+        </p:nvSpPr>
+        <p:spPr>
+          <a:xfrm>
+            <a:off x="7201632" y="2395728"/>
+            <a:ext cx="4423136" cy="3246120"/>
+          </a:xfrm>
+          <a:prstGeom prst="roundRect">
+            <a:avLst>
+              <a:gd name="adj" fmla="val 2535"/>
+            </a:avLst>
+          </a:prstGeom>
+          <a:solidFill>
+            <a:srgbClr val="ECEFF1"/>
+          </a:solidFill>
+          <a:ln/>
+          <a:effectLst>
+            <a:outerShdw sx="100000" sy="100000" kx="0" ky="0" algn="bl" rotWithShape="0" blurRad="88900" dist="25400" dir="5400000">
+              <a:srgbClr val="22303C">
+                <a:alpha val="12000"/>
+              </a:srgbClr>
+            </a:outerShdw>
+          </a:effectLst>
+        </p:spPr>
+      </p:sp>
+      <p:sp>
+        <p:nvSpPr>
+          <p:cNvPr id="7" name="Text 5"/>
+          <p:cNvSpPr/>
+          <p:nvPr/>
+        </p:nvSpPr>
+        <p:spPr>
+          <a:xfrm>
+            <a:off x="7439376" y="2578608"/>
+            <a:ext cx="3965936" cy="457200"/>
+          </a:xfrm>
+          <a:prstGeom prst="rect">
+            <a:avLst/>
+          </a:prstGeom>
+          <a:noFill/>
+          <a:ln/>
+        </p:spPr>
+        <p:txBody>
+          <a:bodyPr wrap="square" lIns="0" tIns="0" rIns="0" bIns="0" rtlCol="0" anchor="ctr"/>
+          <a:lstStyle/>
+          <a:p>
+            <a:pPr indent="0" marL="0">
+              <a:buNone/>
+            </a:pPr>
+            <a:r>
+              <a:rPr lang="en-US" sz="1500" b="1" dirty="0">
+                <a:solidFill>
+                  <a:srgbClr val="455A64"/>
+                </a:solidFill>
+                <a:latin typeface="Calibri" pitchFamily="34" charset="0"/>
+                <a:ea typeface="Calibri" pitchFamily="34" charset="-122"/>
+                <a:cs typeface="Calibri" pitchFamily="34" charset="-120"/>
+              </a:rPr>
+              <a:t>ANSWER  </a:t>
+            </a:r>
+            <a:pPr indent="0" marL="0">
+              <a:buNone/>
+            </a:pPr>
+            <a:r>
+              <a:rPr lang="en-US" sz="1500" b="1" dirty="0">
+                <a:solidFill>
+                  <a:srgbClr val="1B2A38"/>
+                </a:solidFill>
+                <a:latin typeface="Calibri" pitchFamily="34" charset="0"/>
+                <a:ea typeface="Calibri" pitchFamily="34" charset="-122"/>
+                <a:cs typeface="Calibri" pitchFamily="34" charset="-120"/>
+              </a:rPr>
+              <a:t>B — Console + fix the system</a:t>
+            </a:r>
+            <a:endParaRPr lang="en-US" sz="1500" dirty="0"/>
+          </a:p>
+        </p:txBody>
+      </p:sp>
+      <p:sp>
+        <p:nvSpPr>
+          <p:cNvPr id="8" name="Text 6"/>
+          <p:cNvSpPr/>
+          <p:nvPr/>
+        </p:nvSpPr>
+        <p:spPr>
+          <a:xfrm>
+            <a:off x="7439376" y="3127248"/>
+            <a:ext cx="3947648" cy="2377440"/>
+          </a:xfrm>
+          <a:prstGeom prst="rect">
+            <a:avLst/>
+          </a:prstGeom>
+          <a:noFill/>
+          <a:ln/>
+        </p:spPr>
+        <p:txBody>
+          <a:bodyPr wrap="square" lIns="0" tIns="0" rIns="0" bIns="0" rtlCol="0" anchor="t"/>
+          <a:lstStyle/>
+          <a:p>
+            <a:pPr algn="l" indent="0" marL="0">
+              <a:lnSpc>
+                <a:spcPct val="108000"/>
+              </a:lnSpc>
+              <a:buNone/>
+            </a:pPr>
+            <a:r>
+              <a:rPr lang="en-US" sz="1250" dirty="0">
+                <a:solidFill>
+                  <a:srgbClr val="33444F"/>
+                </a:solidFill>
+                <a:latin typeface="Calibri" pitchFamily="34" charset="0"/>
+                <a:ea typeface="Calibri" pitchFamily="34" charset="-122"/>
+                <a:cs typeface="Calibri" pitchFamily="34" charset="-120"/>
+              </a:rPr>
+              <a:t>Just culture consoles human error, coaches at-risk behavior, and reserves discipline for recklessness.</a:t>
+            </a:r>
+            <a:endParaRPr lang="en-US" sz="1250" dirty="0"/>
+          </a:p>
+        </p:txBody>
+      </p:sp>
+      <p:sp>
+        <p:nvSpPr>
+          <p:cNvPr id="9" name="Text 7"/>
+          <p:cNvSpPr/>
+          <p:nvPr/>
+        </p:nvSpPr>
+        <p:spPr>
+          <a:xfrm>
+            <a:off x="566928" y="6473952"/>
+            <a:ext cx="7772400" cy="274320"/>
+          </a:xfrm>
+          <a:prstGeom prst="rect">
+            <a:avLst/>
+          </a:prstGeom>
+          <a:noFill/>
+          <a:ln/>
+        </p:spPr>
+        <p:txBody>
+          <a:bodyPr wrap="square" lIns="0" tIns="0" rIns="0" bIns="0" rtlCol="0" anchor="ctr"/>
+          <a:lstStyle/>
+          <a:p>
+            <a:pPr algn="l" indent="0" marL="0">
+              <a:buNone/>
+            </a:pPr>
+            <a:r>
+              <a:rPr lang="en-US" sz="850" dirty="0">
+                <a:solidFill>
+                  <a:srgbClr val="9AA8B4"/>
+                </a:solidFill>
+                <a:latin typeface="Calibri" pitchFamily="34" charset="0"/>
+                <a:ea typeface="Calibri" pitchFamily="34" charset="-122"/>
+                <a:cs typeface="Calibri" pitchFamily="34" charset="-120"/>
+              </a:rPr>
+              <a:t>Makassed General Hospital  ·  Department of Laboratory Medicine</a:t>
+            </a:r>
+            <a:endParaRPr lang="en-US" sz="850" dirty="0"/>
+          </a:p>
+        </p:txBody>
+      </p:sp>
+      <p:sp>
+        <p:nvSpPr>
+          <p:cNvPr id="10" name="Text 8"/>
+          <p:cNvSpPr/>
+          <p:nvPr/>
+        </p:nvSpPr>
+        <p:spPr>
+          <a:xfrm>
+            <a:off x="9814255" y="6473952"/>
+            <a:ext cx="1828800" cy="274320"/>
+          </a:xfrm>
+          <a:prstGeom prst="rect">
+            <a:avLst/>
+          </a:prstGeom>
+          <a:noFill/>
+          <a:ln/>
+        </p:spPr>
+        <p:txBody>
+          <a:bodyPr wrap="square" lIns="0" tIns="0" rIns="0" bIns="0" rtlCol="0" anchor="ctr"/>
+          <a:lstStyle/>
+          <a:p>
+            <a:pPr algn="r" indent="0" marL="0">
+              <a:buNone/>
+            </a:pPr>
+            <a:r>
+              <a:rPr lang="en-US" sz="850" dirty="0">
+                <a:solidFill>
+                  <a:srgbClr val="9AA8B4"/>
+                </a:solidFill>
+                <a:latin typeface="Calibri" pitchFamily="34" charset="0"/>
+                <a:ea typeface="Calibri" pitchFamily="34" charset="-122"/>
+                <a:cs typeface="Calibri" pitchFamily="34" charset="-120"/>
+              </a:rPr>
+              <a:t>CP Lecture Series</a:t>
+            </a:r>
+            <a:pPr algn="r" indent="0" marL="0">
+              <a:buNone/>
+            </a:pPr>
+            <a:r>
+              <a:rPr lang="en-US" sz="850" dirty="0">
+                <a:solidFill>
+                  <a:srgbClr val="DCE4EC"/>
+                </a:solidFill>
+                <a:latin typeface="Calibri" pitchFamily="34" charset="0"/>
+                <a:ea typeface="Calibri" pitchFamily="34" charset="-122"/>
+                <a:cs typeface="Calibri" pitchFamily="34" charset="-120"/>
+              </a:rPr>
+              <a:t>   ·   </a:t>
+            </a:r>
+            <a:pPr algn="r" indent="0" marL="0">
+              <a:buNone/>
+            </a:pPr>
+            <a:r>
+              <a:rPr lang="en-US" sz="850" b="1" dirty="0">
+                <a:solidFill>
+                  <a:srgbClr val="455A64"/>
+                </a:solidFill>
+                <a:latin typeface="Calibri" pitchFamily="34" charset="0"/>
+                <a:ea typeface="Calibri" pitchFamily="34" charset="-122"/>
+                <a:cs typeface="Calibri" pitchFamily="34" charset="-120"/>
+              </a:rPr>
+              <a:t>19</a:t>
+            </a:r>
+            <a:endParaRPr lang="en-US" sz="850" dirty="0"/>
+          </a:p>
+        </p:txBody>
+      </p:sp>
+    </p:spTree>
+  </p:cSld>
+  <p:clrMapOvr>
+    <a:masterClrMapping/>
+  </p:clrMapOvr>
+</p:sld>
+</file>
+
+<file path=ppt/slides/slide23.xml><?xml version="1.0" encoding="utf-8"?>
+<p:sld xmlns:a="http://schemas.openxmlformats.org/drawingml/2006/main" xmlns:r="http://schemas.openxmlformats.org/officeDocument/2006/relationships" xmlns:p="http://schemas.openxmlformats.org/presentationml/2006/main">
+  <p:cSld name="Slide 23">
+    <p:bg>
+      <p:bgPr>
+        <a:solidFill>
+          <a:srgbClr val="FFFFFF"/>
+        </a:solidFill>
+      </p:bgPr>
+    </p:bg>
+    <p:spTree>
+      <p:nvGrpSpPr>
+        <p:cNvPr id="1" name=""/>
+        <p:cNvGrpSpPr/>
+        <p:nvPr/>
+      </p:nvGrpSpPr>
+      <p:grpSpPr>
+        <a:xfrm>
+          <a:off x="0" y="0"/>
+          <a:ext cx="0" cy="0"/>
+          <a:chOff x="0" y="0"/>
+          <a:chExt cx="0" cy="0"/>
+        </a:xfrm>
+      </p:grpSpPr>
+      <p:sp>
+        <p:nvSpPr>
+          <p:cNvPr id="2" name="Text 0"/>
+          <p:cNvSpPr/>
+          <p:nvPr/>
+        </p:nvSpPr>
+        <p:spPr>
+          <a:xfrm>
+            <a:off x="566928" y="329184"/>
+            <a:ext cx="10515600" cy="310896"/>
+          </a:xfrm>
+          <a:prstGeom prst="rect">
+            <a:avLst/>
+          </a:prstGeom>
+          <a:noFill/>
+          <a:ln/>
+        </p:spPr>
+        <p:txBody>
+          <a:bodyPr wrap="square" lIns="0" tIns="0" rIns="0" bIns="0" rtlCol="0" anchor="ctr"/>
+          <a:lstStyle/>
+          <a:p>
+            <a:pPr algn="l" indent="0" marL="0">
+              <a:buNone/>
+            </a:pPr>
+            <a:r>
+              <a:rPr lang="en-US" sz="1100" b="1" spc="150" kern="0" dirty="0">
+                <a:solidFill>
+                  <a:srgbClr val="455A64"/>
+                </a:solidFill>
+                <a:latin typeface="Calibri" pitchFamily="34" charset="0"/>
+                <a:ea typeface="Calibri" pitchFamily="34" charset="-122"/>
+                <a:cs typeface="Calibri" pitchFamily="34" charset="-120"/>
+              </a:rPr>
+              <a:t>LAB MANAGEMENT &amp; QUALITY   ·   BOARD REVIEW  ·  Q4</a:t>
+            </a:r>
+            <a:endParaRPr lang="en-US" sz="1100" dirty="0"/>
+          </a:p>
+        </p:txBody>
+      </p:sp>
+      <p:sp>
+        <p:nvSpPr>
+          <p:cNvPr id="3" name="Text 1"/>
+          <p:cNvSpPr/>
+          <p:nvPr/>
+        </p:nvSpPr>
+        <p:spPr>
+          <a:xfrm>
+            <a:off x="566928" y="713232"/>
+            <a:ext cx="11064240" cy="749808"/>
+          </a:xfrm>
+          <a:prstGeom prst="rect">
+            <a:avLst/>
+          </a:prstGeom>
+          <a:noFill/>
+          <a:ln/>
+        </p:spPr>
+        <p:txBody>
+          <a:bodyPr wrap="square" lIns="0" tIns="0" rIns="0" bIns="0" rtlCol="0" anchor="ctr"/>
+          <a:lstStyle/>
+          <a:p>
+            <a:pPr algn="l" indent="0" marL="0">
+              <a:buNone/>
+            </a:pPr>
+            <a:r>
+              <a:rPr lang="en-US" sz="2600" b="1" dirty="0">
+                <a:solidFill>
+                  <a:srgbClr val="0E3A5F"/>
+                </a:solidFill>
+                <a:latin typeface="Calibri" pitchFamily="34" charset="0"/>
+                <a:ea typeface="Calibri" pitchFamily="34" charset="-122"/>
+                <a:cs typeface="Calibri" pitchFamily="34" charset="-120"/>
+              </a:rPr>
+              <a:t>Board-Style Review</a:t>
+            </a:r>
+            <a:endParaRPr lang="en-US" sz="2600" dirty="0"/>
+          </a:p>
+        </p:txBody>
+      </p:sp>
+      <p:sp>
+        <p:nvSpPr>
+          <p:cNvPr id="4" name="Text 2"/>
+          <p:cNvSpPr/>
+          <p:nvPr/>
+        </p:nvSpPr>
+        <p:spPr>
+          <a:xfrm>
+            <a:off x="566928" y="1417320"/>
+            <a:ext cx="11057839" cy="914400"/>
+          </a:xfrm>
+          <a:prstGeom prst="rect">
+            <a:avLst/>
+          </a:prstGeom>
+          <a:noFill/>
+          <a:ln/>
+        </p:spPr>
+        <p:txBody>
+          <a:bodyPr wrap="square" lIns="0" tIns="0" rIns="0" bIns="0" rtlCol="0" anchor="t"/>
+          <a:lstStyle/>
+          <a:p>
+            <a:pPr algn="l" indent="0" marL="0">
+              <a:lnSpc>
+                <a:spcPct val="105000"/>
+              </a:lnSpc>
+              <a:buNone/>
+            </a:pPr>
+            <a:r>
+              <a:rPr lang="en-US" sz="1450" b="1" dirty="0">
+                <a:solidFill>
+                  <a:srgbClr val="1B2A38"/>
+                </a:solidFill>
+                <a:latin typeface="Calibri" pitchFamily="34" charset="0"/>
+                <a:ea typeface="Calibri" pitchFamily="34" charset="-122"/>
+                <a:cs typeface="Calibri" pitchFamily="34" charset="-120"/>
+              </a:rPr>
+              <a:t>Near-miss reporting is valuable primarily because it:</a:t>
+            </a:r>
+            <a:endParaRPr lang="en-US" sz="1450" dirty="0"/>
+          </a:p>
+        </p:txBody>
+      </p:sp>
+      <p:sp>
+        <p:nvSpPr>
+          <p:cNvPr id="5" name="Text 3"/>
+          <p:cNvSpPr/>
+          <p:nvPr/>
+        </p:nvSpPr>
+        <p:spPr>
+          <a:xfrm>
+            <a:off x="658368" y="2395728"/>
+            <a:ext cx="6192390" cy="3017520"/>
+          </a:xfrm>
+          <a:prstGeom prst="rect">
+            <a:avLst/>
+          </a:prstGeom>
+          <a:noFill/>
+          <a:ln/>
+        </p:spPr>
+        <p:txBody>
+          <a:bodyPr wrap="square" lIns="0" tIns="0" rIns="0" bIns="0" rtlCol="0" anchor="t"/>
+          <a:lstStyle/>
+          <a:p>
+            <a:pPr algn="l" indent="0" marL="0">
+              <a:spcAft>
+                <a:spcPts val="600"/>
+              </a:spcAft>
+              <a:buNone/>
+            </a:pPr>
+            <a:r>
+              <a:rPr lang="en-US" sz="1350" dirty="0">
+                <a:solidFill>
+                  <a:srgbClr val="33444F"/>
+                </a:solidFill>
+                <a:latin typeface="Calibri" pitchFamily="34" charset="0"/>
+                <a:ea typeface="Calibri" pitchFamily="34" charset="-122"/>
+                <a:cs typeface="Calibri" pitchFamily="34" charset="-120"/>
+              </a:rPr>
+              <a:t>A. Assigns blame efficiently</a:t>
+            </a:r>
+            <a:endParaRPr lang="en-US" sz="1350" dirty="0"/>
+          </a:p>
+          <a:p>
+            <a:pPr algn="l" indent="0" marL="0">
+              <a:spcAft>
+                <a:spcPts val="600"/>
+              </a:spcAft>
+              <a:buNone/>
+            </a:pPr>
+            <a:r>
+              <a:rPr lang="en-US" sz="1350" b="1" dirty="0">
+                <a:solidFill>
+                  <a:srgbClr val="2C3A41"/>
+                </a:solidFill>
+                <a:latin typeface="Calibri" pitchFamily="34" charset="0"/>
+                <a:ea typeface="Calibri" pitchFamily="34" charset="-122"/>
+                <a:cs typeface="Calibri" pitchFamily="34" charset="-120"/>
+              </a:rPr>
+              <a:t>B. Reveals system weaknesses without patient harm</a:t>
+            </a:r>
+            <a:endParaRPr lang="en-US" sz="1350" dirty="0"/>
+          </a:p>
+          <a:p>
+            <a:pPr algn="l" indent="0" marL="0">
+              <a:spcAft>
+                <a:spcPts val="600"/>
+              </a:spcAft>
+              <a:buNone/>
+            </a:pPr>
+            <a:r>
+              <a:rPr lang="en-US" sz="1350" dirty="0">
+                <a:solidFill>
+                  <a:srgbClr val="33444F"/>
+                </a:solidFill>
+                <a:latin typeface="Calibri" pitchFamily="34" charset="0"/>
+                <a:ea typeface="Calibri" pitchFamily="34" charset="-122"/>
+                <a:cs typeface="Calibri" pitchFamily="34" charset="-120"/>
+              </a:rPr>
+              <a:t>C. Replaces root-cause analysis</a:t>
+            </a:r>
+            <a:endParaRPr lang="en-US" sz="1350" dirty="0"/>
+          </a:p>
+          <a:p>
+            <a:pPr algn="l" indent="0" marL="0">
+              <a:spcAft>
+                <a:spcPts val="600"/>
+              </a:spcAft>
+              <a:buNone/>
+            </a:pPr>
+            <a:r>
+              <a:rPr lang="en-US" sz="1350" dirty="0">
+                <a:solidFill>
+                  <a:srgbClr val="33444F"/>
+                </a:solidFill>
+                <a:latin typeface="Calibri" pitchFamily="34" charset="0"/>
+                <a:ea typeface="Calibri" pitchFamily="34" charset="-122"/>
+                <a:cs typeface="Calibri" pitchFamily="34" charset="-120"/>
+              </a:rPr>
+              <a:t>D. Reduces documentation</a:t>
+            </a:r>
+            <a:endParaRPr lang="en-US" sz="1350" dirty="0"/>
+          </a:p>
+          <a:p>
+            <a:pPr algn="l" indent="0" marL="0">
+              <a:spcAft>
+                <a:spcPts val="600"/>
+              </a:spcAft>
+              <a:buNone/>
+            </a:pPr>
+            <a:r>
+              <a:rPr lang="en-US" sz="1350" dirty="0">
+                <a:solidFill>
+                  <a:srgbClr val="33444F"/>
+                </a:solidFill>
+                <a:latin typeface="Calibri" pitchFamily="34" charset="0"/>
+                <a:ea typeface="Calibri" pitchFamily="34" charset="-122"/>
+                <a:cs typeface="Calibri" pitchFamily="34" charset="-120"/>
+              </a:rPr>
+              <a:t>E. Avoids corrective action</a:t>
+            </a:r>
+            <a:endParaRPr lang="en-US" sz="1350" dirty="0"/>
+          </a:p>
+        </p:txBody>
+      </p:sp>
+      <p:sp>
+        <p:nvSpPr>
+          <p:cNvPr id="6" name="Shape 4"/>
+          <p:cNvSpPr/>
+          <p:nvPr/>
+        </p:nvSpPr>
+        <p:spPr>
+          <a:xfrm>
+            <a:off x="7201632" y="2395728"/>
+            <a:ext cx="4423136" cy="3246120"/>
+          </a:xfrm>
+          <a:prstGeom prst="roundRect">
+            <a:avLst>
+              <a:gd name="adj" fmla="val 2535"/>
+            </a:avLst>
+          </a:prstGeom>
+          <a:solidFill>
+            <a:srgbClr val="ECEFF1"/>
+          </a:solidFill>
+          <a:ln/>
+          <a:effectLst>
+            <a:outerShdw sx="100000" sy="100000" kx="0" ky="0" algn="bl" rotWithShape="0" blurRad="88900" dist="25400" dir="5400000">
+              <a:srgbClr val="22303C">
+                <a:alpha val="12000"/>
+              </a:srgbClr>
+            </a:outerShdw>
+          </a:effectLst>
+        </p:spPr>
+      </p:sp>
+      <p:sp>
+        <p:nvSpPr>
+          <p:cNvPr id="7" name="Text 5"/>
+          <p:cNvSpPr/>
+          <p:nvPr/>
+        </p:nvSpPr>
+        <p:spPr>
+          <a:xfrm>
+            <a:off x="7439376" y="2578608"/>
+            <a:ext cx="3965936" cy="457200"/>
+          </a:xfrm>
+          <a:prstGeom prst="rect">
+            <a:avLst/>
+          </a:prstGeom>
+          <a:noFill/>
+          <a:ln/>
+        </p:spPr>
+        <p:txBody>
+          <a:bodyPr wrap="square" lIns="0" tIns="0" rIns="0" bIns="0" rtlCol="0" anchor="ctr"/>
+          <a:lstStyle/>
+          <a:p>
+            <a:pPr indent="0" marL="0">
+              <a:buNone/>
+            </a:pPr>
+            <a:r>
+              <a:rPr lang="en-US" sz="1500" b="1" dirty="0">
+                <a:solidFill>
+                  <a:srgbClr val="455A64"/>
+                </a:solidFill>
+                <a:latin typeface="Calibri" pitchFamily="34" charset="0"/>
+                <a:ea typeface="Calibri" pitchFamily="34" charset="-122"/>
+                <a:cs typeface="Calibri" pitchFamily="34" charset="-120"/>
+              </a:rPr>
+              <a:t>ANSWER  </a:t>
+            </a:r>
+            <a:pPr indent="0" marL="0">
+              <a:buNone/>
+            </a:pPr>
+            <a:r>
+              <a:rPr lang="en-US" sz="1500" b="1" dirty="0">
+                <a:solidFill>
+                  <a:srgbClr val="1B2A38"/>
+                </a:solidFill>
+                <a:latin typeface="Calibri" pitchFamily="34" charset="0"/>
+                <a:ea typeface="Calibri" pitchFamily="34" charset="-122"/>
+                <a:cs typeface="Calibri" pitchFamily="34" charset="-120"/>
+              </a:rPr>
+              <a:t>B — Reveals weaknesses without harm</a:t>
+            </a:r>
+            <a:endParaRPr lang="en-US" sz="1500" dirty="0"/>
+          </a:p>
+        </p:txBody>
+      </p:sp>
+      <p:sp>
+        <p:nvSpPr>
+          <p:cNvPr id="8" name="Text 6"/>
+          <p:cNvSpPr/>
+          <p:nvPr/>
+        </p:nvSpPr>
+        <p:spPr>
+          <a:xfrm>
+            <a:off x="7439376" y="3127248"/>
+            <a:ext cx="3947648" cy="2377440"/>
+          </a:xfrm>
+          <a:prstGeom prst="rect">
+            <a:avLst/>
+          </a:prstGeom>
+          <a:noFill/>
+          <a:ln/>
+        </p:spPr>
+        <p:txBody>
+          <a:bodyPr wrap="square" lIns="0" tIns="0" rIns="0" bIns="0" rtlCol="0" anchor="t"/>
+          <a:lstStyle/>
+          <a:p>
+            <a:pPr algn="l" indent="0" marL="0">
+              <a:lnSpc>
+                <a:spcPct val="108000"/>
+              </a:lnSpc>
+              <a:buNone/>
+            </a:pPr>
+            <a:r>
+              <a:rPr lang="en-US" sz="1250" dirty="0">
+                <a:solidFill>
+                  <a:srgbClr val="33444F"/>
+                </a:solidFill>
+                <a:latin typeface="Calibri" pitchFamily="34" charset="0"/>
+                <a:ea typeface="Calibri" pitchFamily="34" charset="-122"/>
+                <a:cs typeface="Calibri" pitchFamily="34" charset="-120"/>
+              </a:rPr>
+              <a:t>Near misses expose the same latent failures as adverse events but without harm, enabling proactive improvement.</a:t>
+            </a:r>
+            <a:endParaRPr lang="en-US" sz="1250" dirty="0"/>
+          </a:p>
+        </p:txBody>
+      </p:sp>
+      <p:sp>
+        <p:nvSpPr>
+          <p:cNvPr id="9" name="Text 7"/>
+          <p:cNvSpPr/>
+          <p:nvPr/>
+        </p:nvSpPr>
+        <p:spPr>
+          <a:xfrm>
+            <a:off x="566928" y="6473952"/>
+            <a:ext cx="7772400" cy="274320"/>
+          </a:xfrm>
+          <a:prstGeom prst="rect">
+            <a:avLst/>
+          </a:prstGeom>
+          <a:noFill/>
+          <a:ln/>
+        </p:spPr>
+        <p:txBody>
+          <a:bodyPr wrap="square" lIns="0" tIns="0" rIns="0" bIns="0" rtlCol="0" anchor="ctr"/>
+          <a:lstStyle/>
+          <a:p>
+            <a:pPr algn="l" indent="0" marL="0">
+              <a:buNone/>
+            </a:pPr>
+            <a:r>
+              <a:rPr lang="en-US" sz="850" dirty="0">
+                <a:solidFill>
+                  <a:srgbClr val="9AA8B4"/>
+                </a:solidFill>
+                <a:latin typeface="Calibri" pitchFamily="34" charset="0"/>
+                <a:ea typeface="Calibri" pitchFamily="34" charset="-122"/>
+                <a:cs typeface="Calibri" pitchFamily="34" charset="-120"/>
+              </a:rPr>
+              <a:t>Makassed General Hospital  ·  Department of Laboratory Medicine</a:t>
+            </a:r>
+            <a:endParaRPr lang="en-US" sz="850" dirty="0"/>
+          </a:p>
+        </p:txBody>
+      </p:sp>
+      <p:sp>
+        <p:nvSpPr>
+          <p:cNvPr id="10" name="Text 8"/>
+          <p:cNvSpPr/>
+          <p:nvPr/>
+        </p:nvSpPr>
+        <p:spPr>
+          <a:xfrm>
+            <a:off x="9814255" y="6473952"/>
+            <a:ext cx="1828800" cy="274320"/>
+          </a:xfrm>
+          <a:prstGeom prst="rect">
+            <a:avLst/>
+          </a:prstGeom>
+          <a:noFill/>
+          <a:ln/>
+        </p:spPr>
+        <p:txBody>
+          <a:bodyPr wrap="square" lIns="0" tIns="0" rIns="0" bIns="0" rtlCol="0" anchor="ctr"/>
+          <a:lstStyle/>
+          <a:p>
+            <a:pPr algn="r" indent="0" marL="0">
+              <a:buNone/>
+            </a:pPr>
+            <a:r>
+              <a:rPr lang="en-US" sz="850" dirty="0">
+                <a:solidFill>
+                  <a:srgbClr val="9AA8B4"/>
+                </a:solidFill>
+                <a:latin typeface="Calibri" pitchFamily="34" charset="0"/>
+                <a:ea typeface="Calibri" pitchFamily="34" charset="-122"/>
+                <a:cs typeface="Calibri" pitchFamily="34" charset="-120"/>
+              </a:rPr>
+              <a:t>CP Lecture Series</a:t>
+            </a:r>
+            <a:pPr algn="r" indent="0" marL="0">
+              <a:buNone/>
+            </a:pPr>
+            <a:r>
+              <a:rPr lang="en-US" sz="850" dirty="0">
+                <a:solidFill>
+                  <a:srgbClr val="DCE4EC"/>
+                </a:solidFill>
+                <a:latin typeface="Calibri" pitchFamily="34" charset="0"/>
+                <a:ea typeface="Calibri" pitchFamily="34" charset="-122"/>
+                <a:cs typeface="Calibri" pitchFamily="34" charset="-120"/>
+              </a:rPr>
+              <a:t>   ·   </a:t>
+            </a:r>
+            <a:pPr algn="r" indent="0" marL="0">
+              <a:buNone/>
+            </a:pPr>
+            <a:r>
+              <a:rPr lang="en-US" sz="850" b="1" dirty="0">
+                <a:solidFill>
+                  <a:srgbClr val="455A64"/>
+                </a:solidFill>
+                <a:latin typeface="Calibri" pitchFamily="34" charset="0"/>
+                <a:ea typeface="Calibri" pitchFamily="34" charset="-122"/>
+                <a:cs typeface="Calibri" pitchFamily="34" charset="-120"/>
+              </a:rPr>
+              <a:t>20</a:t>
+            </a:r>
+            <a:endParaRPr lang="en-US" sz="850" dirty="0"/>
+          </a:p>
+        </p:txBody>
+      </p:sp>
+    </p:spTree>
+  </p:cSld>
+  <p:clrMapOvr>
+    <a:masterClrMapping/>
+  </p:clrMapOvr>
+</p:sld>
+</file>
+
+<file path=ppt/slides/slide24.xml><?xml version="1.0" encoding="utf-8"?>
+<p:sld xmlns:a="http://schemas.openxmlformats.org/drawingml/2006/main" xmlns:r="http://schemas.openxmlformats.org/officeDocument/2006/relationships" xmlns:p="http://schemas.openxmlformats.org/presentationml/2006/main">
+  <p:cSld name="Slide 24">
+    <p:bg>
+      <p:bgPr>
+        <a:solidFill>
+          <a:srgbClr val="0A2A45"/>
+        </a:solidFill>
+      </p:bgPr>
+    </p:bg>
+    <p:spTree>
+      <p:nvGrpSpPr>
+        <p:cNvPr id="1" name=""/>
+        <p:cNvGrpSpPr/>
+        <p:nvPr/>
+      </p:nvGrpSpPr>
+      <p:grpSpPr>
+        <a:xfrm>
+          <a:off x="0" y="0"/>
+          <a:ext cx="0" cy="0"/>
+          <a:chOff x="0" y="0"/>
+          <a:chExt cx="0" cy="0"/>
+        </a:xfrm>
+      </p:grpSpPr>
+      <p:sp>
+        <p:nvSpPr>
+          <p:cNvPr id="2" name="Text 0"/>
+          <p:cNvSpPr/>
+          <p:nvPr/>
+        </p:nvSpPr>
+        <p:spPr>
+          <a:xfrm>
+            <a:off x="566928" y="329184"/>
+            <a:ext cx="10058400" cy="310896"/>
+          </a:xfrm>
+          <a:prstGeom prst="rect">
+            <a:avLst/>
+          </a:prstGeom>
+          <a:noFill/>
+          <a:ln/>
+        </p:spPr>
+        <p:txBody>
+          <a:bodyPr wrap="square" lIns="0" tIns="0" rIns="0" bIns="0" rtlCol="0" anchor="ctr"/>
+          <a:lstStyle/>
+          <a:p>
+            <a:pPr indent="0" marL="0">
+              <a:buNone/>
+            </a:pPr>
+            <a:r>
+              <a:rPr lang="en-US" sz="1100" b="1" spc="150" kern="0" dirty="0">
+                <a:solidFill>
+                  <a:srgbClr val="455A64"/>
+                </a:solidFill>
+                <a:latin typeface="Calibri" pitchFamily="34" charset="0"/>
+                <a:ea typeface="Calibri" pitchFamily="34" charset="-122"/>
+                <a:cs typeface="Calibri" pitchFamily="34" charset="-120"/>
+              </a:rPr>
+              <a:t>LAB MANAGEMENT &amp; QUALITY</a:t>
+            </a:r>
+            <a:endParaRPr lang="en-US" sz="1100" dirty="0"/>
+          </a:p>
+        </p:txBody>
+      </p:sp>
+      <p:sp>
+        <p:nvSpPr>
+          <p:cNvPr id="3" name="Text 1"/>
+          <p:cNvSpPr/>
+          <p:nvPr/>
+        </p:nvSpPr>
+        <p:spPr>
+          <a:xfrm>
+            <a:off x="566928" y="676656"/>
+            <a:ext cx="10972800" cy="749808"/>
+          </a:xfrm>
+          <a:prstGeom prst="rect">
+            <a:avLst/>
+          </a:prstGeom>
+          <a:noFill/>
+          <a:ln/>
+        </p:spPr>
+        <p:txBody>
+          <a:bodyPr wrap="square" lIns="0" tIns="0" rIns="0" bIns="0" rtlCol="0" anchor="ctr"/>
+          <a:lstStyle/>
+          <a:p>
+            <a:pPr indent="0" marL="0">
+              <a:buNone/>
+            </a:pPr>
+            <a:r>
+              <a:rPr lang="en-US" sz="3000" b="1" dirty="0">
+                <a:solidFill>
+                  <a:srgbClr val="FFFFFF"/>
+                </a:solidFill>
+                <a:latin typeface="Calibri" pitchFamily="34" charset="0"/>
+                <a:ea typeface="Calibri" pitchFamily="34" charset="-122"/>
+                <a:cs typeface="Calibri" pitchFamily="34" charset="-120"/>
+              </a:rPr>
+              <a:t>Key Take-Home Points</a:t>
+            </a:r>
+            <a:endParaRPr lang="en-US" sz="3000" dirty="0"/>
+          </a:p>
+        </p:txBody>
+      </p:sp>
+      <p:sp>
+        <p:nvSpPr>
+          <p:cNvPr id="4" name="Shape 2"/>
+          <p:cNvSpPr/>
+          <p:nvPr/>
+        </p:nvSpPr>
+        <p:spPr>
+          <a:xfrm>
+            <a:off x="566928" y="1517904"/>
+            <a:ext cx="11057839" cy="841248"/>
+          </a:xfrm>
+          <a:prstGeom prst="roundRect">
+            <a:avLst>
+              <a:gd name="adj" fmla="val 7609"/>
+            </a:avLst>
+          </a:prstGeom>
+          <a:solidFill>
+            <a:srgbClr val="143651"/>
+          </a:solidFill>
+          <a:ln/>
+        </p:spPr>
+      </p:sp>
+      <p:sp>
+        <p:nvSpPr>
+          <p:cNvPr id="5" name="Shape 3"/>
+          <p:cNvSpPr/>
+          <p:nvPr/>
+        </p:nvSpPr>
+        <p:spPr>
+          <a:xfrm>
+            <a:off x="749808" y="1755648"/>
+            <a:ext cx="365760" cy="365760"/>
+          </a:xfrm>
+          <a:prstGeom prst="ellipse">
+            <a:avLst/>
+          </a:prstGeom>
+          <a:solidFill>
+            <a:srgbClr val="455A64"/>
+          </a:solidFill>
+          <a:ln/>
+          <a:effectLst>
+            <a:outerShdw sx="100000" sy="100000" kx="0" ky="0" algn="bl" rotWithShape="0" blurRad="88900" dist="25400" dir="5400000">
+              <a:srgbClr val="22303C">
+                <a:alpha val="12000"/>
+              </a:srgbClr>
+            </a:outerShdw>
+          </a:effectLst>
+        </p:spPr>
+      </p:sp>
+      <p:sp>
+        <p:nvSpPr>
+          <p:cNvPr id="6" name="Text 4"/>
+          <p:cNvSpPr/>
+          <p:nvPr/>
+        </p:nvSpPr>
+        <p:spPr>
+          <a:xfrm>
+            <a:off x="749808" y="1755648"/>
+            <a:ext cx="365760" cy="365760"/>
+          </a:xfrm>
+          <a:prstGeom prst="rect">
+            <a:avLst/>
+          </a:prstGeom>
+          <a:noFill/>
+          <a:ln/>
+        </p:spPr>
+        <p:txBody>
+          <a:bodyPr wrap="square" lIns="0" tIns="0" rIns="0" bIns="0" rtlCol="0" anchor="ctr"/>
+          <a:lstStyle/>
+          <a:p>
+            <a:pPr algn="ctr" indent="0" marL="0">
+              <a:buNone/>
+            </a:pPr>
+            <a:r>
+              <a:rPr lang="en-US" sz="1500" b="1" dirty="0">
+                <a:solidFill>
+                  <a:srgbClr val="FFFFFF"/>
+                </a:solidFill>
+                <a:latin typeface="Calibri" pitchFamily="34" charset="0"/>
+                <a:ea typeface="Calibri" pitchFamily="34" charset="-122"/>
+                <a:cs typeface="Calibri" pitchFamily="34" charset="-120"/>
+              </a:rPr>
+              <a:t>1</a:t>
+            </a:r>
+            <a:endParaRPr lang="en-US" sz="1500" dirty="0"/>
+          </a:p>
+        </p:txBody>
+      </p:sp>
+      <p:sp>
+        <p:nvSpPr>
+          <p:cNvPr id="7" name="Text 5"/>
+          <p:cNvSpPr/>
+          <p:nvPr/>
+        </p:nvSpPr>
+        <p:spPr>
+          <a:xfrm>
+            <a:off x="1280160" y="1517904"/>
+            <a:ext cx="10143439" cy="841248"/>
+          </a:xfrm>
+          <a:prstGeom prst="rect">
+            <a:avLst/>
+          </a:prstGeom>
+          <a:noFill/>
+          <a:ln/>
+        </p:spPr>
+        <p:txBody>
+          <a:bodyPr wrap="square" lIns="0" tIns="0" rIns="0" bIns="0" rtlCol="0" anchor="ctr"/>
+          <a:lstStyle/>
+          <a:p>
+            <a:pPr algn="l" indent="0" marL="0">
+              <a:buNone/>
+            </a:pPr>
+            <a:r>
+              <a:rPr lang="en-US" sz="1350" dirty="0">
+                <a:solidFill>
+                  <a:srgbClr val="E7EEF4"/>
+                </a:solidFill>
+                <a:latin typeface="Calibri" pitchFamily="34" charset="0"/>
+                <a:ea typeface="Calibri" pitchFamily="34" charset="-122"/>
+                <a:cs typeface="Calibri" pitchFamily="34" charset="-120"/>
+              </a:rPr>
+              <a:t>Take a systems view: most errors are latent system failures, and harm requires multiple defenses to fail (Swiss-cheese model).</a:t>
+            </a:r>
+            <a:endParaRPr lang="en-US" sz="1350" dirty="0"/>
+          </a:p>
+        </p:txBody>
+      </p:sp>
+      <p:sp>
+        <p:nvSpPr>
+          <p:cNvPr id="8" name="Shape 6"/>
+          <p:cNvSpPr/>
+          <p:nvPr/>
+        </p:nvSpPr>
+        <p:spPr>
+          <a:xfrm>
+            <a:off x="566928" y="2505456"/>
+            <a:ext cx="11057839" cy="841248"/>
+          </a:xfrm>
+          <a:prstGeom prst="roundRect">
+            <a:avLst>
+              <a:gd name="adj" fmla="val 7609"/>
+            </a:avLst>
+          </a:prstGeom>
+          <a:solidFill>
+            <a:srgbClr val="143651"/>
+          </a:solidFill>
+          <a:ln/>
+        </p:spPr>
+      </p:sp>
+      <p:sp>
+        <p:nvSpPr>
+          <p:cNvPr id="9" name="Shape 7"/>
+          <p:cNvSpPr/>
+          <p:nvPr/>
+        </p:nvSpPr>
+        <p:spPr>
+          <a:xfrm>
+            <a:off x="749808" y="2743200"/>
+            <a:ext cx="365760" cy="365760"/>
+          </a:xfrm>
+          <a:prstGeom prst="ellipse">
+            <a:avLst/>
+          </a:prstGeom>
+          <a:solidFill>
+            <a:srgbClr val="455A64"/>
+          </a:solidFill>
+          <a:ln/>
+          <a:effectLst>
+            <a:outerShdw sx="100000" sy="100000" kx="0" ky="0" algn="bl" rotWithShape="0" blurRad="88900" dist="25400" dir="5400000">
+              <a:srgbClr val="22303C">
+                <a:alpha val="12000"/>
+              </a:srgbClr>
+            </a:outerShdw>
+          </a:effectLst>
+        </p:spPr>
+      </p:sp>
+      <p:sp>
+        <p:nvSpPr>
+          <p:cNvPr id="10" name="Text 8"/>
+          <p:cNvSpPr/>
+          <p:nvPr/>
+        </p:nvSpPr>
+        <p:spPr>
+          <a:xfrm>
+            <a:off x="749808" y="2743200"/>
+            <a:ext cx="365760" cy="365760"/>
+          </a:xfrm>
+          <a:prstGeom prst="rect">
+            <a:avLst/>
+          </a:prstGeom>
+          <a:noFill/>
+          <a:ln/>
+        </p:spPr>
+        <p:txBody>
+          <a:bodyPr wrap="square" lIns="0" tIns="0" rIns="0" bIns="0" rtlCol="0" anchor="ctr"/>
+          <a:lstStyle/>
+          <a:p>
+            <a:pPr algn="ctr" indent="0" marL="0">
+              <a:buNone/>
+            </a:pPr>
+            <a:r>
+              <a:rPr lang="en-US" sz="1500" b="1" dirty="0">
+                <a:solidFill>
+                  <a:srgbClr val="FFFFFF"/>
+                </a:solidFill>
+                <a:latin typeface="Calibri" pitchFamily="34" charset="0"/>
+                <a:ea typeface="Calibri" pitchFamily="34" charset="-122"/>
+                <a:cs typeface="Calibri" pitchFamily="34" charset="-120"/>
+              </a:rPr>
+              <a:t>2</a:t>
+            </a:r>
+            <a:endParaRPr lang="en-US" sz="1500" dirty="0"/>
+          </a:p>
+        </p:txBody>
+      </p:sp>
+      <p:sp>
+        <p:nvSpPr>
+          <p:cNvPr id="11" name="Text 9"/>
+          <p:cNvSpPr/>
+          <p:nvPr/>
+        </p:nvSpPr>
+        <p:spPr>
+          <a:xfrm>
+            <a:off x="1280160" y="2505456"/>
+            <a:ext cx="10143439" cy="841248"/>
+          </a:xfrm>
+          <a:prstGeom prst="rect">
+            <a:avLst/>
+          </a:prstGeom>
+          <a:noFill/>
+          <a:ln/>
+        </p:spPr>
+        <p:txBody>
+          <a:bodyPr wrap="square" lIns="0" tIns="0" rIns="0" bIns="0" rtlCol="0" anchor="ctr"/>
+          <a:lstStyle/>
+          <a:p>
+            <a:pPr algn="l" indent="0" marL="0">
+              <a:buNone/>
+            </a:pPr>
+            <a:r>
+              <a:rPr lang="en-US" sz="1350" dirty="0">
+                <a:solidFill>
+                  <a:srgbClr val="E7EEF4"/>
+                </a:solidFill>
+                <a:latin typeface="Calibri" pitchFamily="34" charset="0"/>
+                <a:ea typeface="Calibri" pitchFamily="34" charset="-122"/>
+                <a:cs typeface="Calibri" pitchFamily="34" charset="-120"/>
+              </a:rPr>
+              <a:t>Most laboratory errors are pre- and post-analytic — safety work must span the total testing process.</a:t>
+            </a:r>
+            <a:endParaRPr lang="en-US" sz="1350" dirty="0"/>
+          </a:p>
+        </p:txBody>
+      </p:sp>
+      <p:sp>
+        <p:nvSpPr>
+          <p:cNvPr id="12" name="Shape 10"/>
+          <p:cNvSpPr/>
+          <p:nvPr/>
+        </p:nvSpPr>
+        <p:spPr>
+          <a:xfrm>
+            <a:off x="566928" y="3493008"/>
+            <a:ext cx="11057839" cy="841248"/>
+          </a:xfrm>
+          <a:prstGeom prst="roundRect">
+            <a:avLst>
+              <a:gd name="adj" fmla="val 7609"/>
+            </a:avLst>
+          </a:prstGeom>
+          <a:solidFill>
+            <a:srgbClr val="143651"/>
+          </a:solidFill>
+          <a:ln/>
+        </p:spPr>
+      </p:sp>
+      <p:sp>
+        <p:nvSpPr>
+          <p:cNvPr id="13" name="Shape 11"/>
+          <p:cNvSpPr/>
+          <p:nvPr/>
+        </p:nvSpPr>
+        <p:spPr>
+          <a:xfrm>
+            <a:off x="749808" y="3730752"/>
+            <a:ext cx="365760" cy="365760"/>
+          </a:xfrm>
+          <a:prstGeom prst="ellipse">
+            <a:avLst/>
+          </a:prstGeom>
+          <a:solidFill>
+            <a:srgbClr val="455A64"/>
+          </a:solidFill>
+          <a:ln/>
+          <a:effectLst>
+            <a:outerShdw sx="100000" sy="100000" kx="0" ky="0" algn="bl" rotWithShape="0" blurRad="88900" dist="25400" dir="5400000">
+              <a:srgbClr val="22303C">
+                <a:alpha val="12000"/>
+              </a:srgbClr>
+            </a:outerShdw>
+          </a:effectLst>
+        </p:spPr>
+      </p:sp>
+      <p:sp>
+        <p:nvSpPr>
+          <p:cNvPr id="14" name="Text 12"/>
+          <p:cNvSpPr/>
+          <p:nvPr/>
+        </p:nvSpPr>
+        <p:spPr>
+          <a:xfrm>
+            <a:off x="749808" y="3730752"/>
+            <a:ext cx="365760" cy="365760"/>
+          </a:xfrm>
+          <a:prstGeom prst="rect">
+            <a:avLst/>
+          </a:prstGeom>
+          <a:noFill/>
+          <a:ln/>
+        </p:spPr>
+        <p:txBody>
+          <a:bodyPr wrap="square" lIns="0" tIns="0" rIns="0" bIns="0" rtlCol="0" anchor="ctr"/>
+          <a:lstStyle/>
+          <a:p>
+            <a:pPr algn="ctr" indent="0" marL="0">
+              <a:buNone/>
+            </a:pPr>
+            <a:r>
+              <a:rPr lang="en-US" sz="1500" b="1" dirty="0">
+                <a:solidFill>
+                  <a:srgbClr val="FFFFFF"/>
+                </a:solidFill>
+                <a:latin typeface="Calibri" pitchFamily="34" charset="0"/>
+                <a:ea typeface="Calibri" pitchFamily="34" charset="-122"/>
+                <a:cs typeface="Calibri" pitchFamily="34" charset="-120"/>
+              </a:rPr>
+              <a:t>3</a:t>
+            </a:r>
+            <a:endParaRPr lang="en-US" sz="1500" dirty="0"/>
+          </a:p>
+        </p:txBody>
+      </p:sp>
+      <p:sp>
+        <p:nvSpPr>
+          <p:cNvPr id="15" name="Text 13"/>
+          <p:cNvSpPr/>
+          <p:nvPr/>
+        </p:nvSpPr>
+        <p:spPr>
+          <a:xfrm>
+            <a:off x="1280160" y="3493008"/>
+            <a:ext cx="10143439" cy="841248"/>
+          </a:xfrm>
+          <a:prstGeom prst="rect">
+            <a:avLst/>
+          </a:prstGeom>
+          <a:noFill/>
+          <a:ln/>
+        </p:spPr>
+        <p:txBody>
+          <a:bodyPr wrap="square" lIns="0" tIns="0" rIns="0" bIns="0" rtlCol="0" anchor="ctr"/>
+          <a:lstStyle/>
+          <a:p>
+            <a:pPr algn="l" indent="0" marL="0">
+              <a:buNone/>
+            </a:pPr>
+            <a:r>
+              <a:rPr lang="en-US" sz="1350" dirty="0">
+                <a:solidFill>
+                  <a:srgbClr val="E7EEF4"/>
+                </a:solidFill>
+                <a:latin typeface="Calibri" pitchFamily="34" charset="0"/>
+                <a:ea typeface="Calibri" pitchFamily="34" charset="-122"/>
+                <a:cs typeface="Calibri" pitchFamily="34" charset="-120"/>
+              </a:rPr>
+              <a:t>Do RCA properly: reach system causes, avoid stopping at ‘human error’ or one-off retraining.</a:t>
+            </a:r>
+            <a:endParaRPr lang="en-US" sz="1350" dirty="0"/>
+          </a:p>
+        </p:txBody>
+      </p:sp>
+      <p:sp>
+        <p:nvSpPr>
+          <p:cNvPr id="16" name="Shape 14"/>
+          <p:cNvSpPr/>
+          <p:nvPr/>
+        </p:nvSpPr>
+        <p:spPr>
+          <a:xfrm>
+            <a:off x="566928" y="4480560"/>
+            <a:ext cx="11057839" cy="841248"/>
+          </a:xfrm>
+          <a:prstGeom prst="roundRect">
+            <a:avLst>
+              <a:gd name="adj" fmla="val 7609"/>
+            </a:avLst>
+          </a:prstGeom>
+          <a:solidFill>
+            <a:srgbClr val="143651"/>
+          </a:solidFill>
+          <a:ln/>
+        </p:spPr>
+      </p:sp>
+      <p:sp>
+        <p:nvSpPr>
+          <p:cNvPr id="17" name="Shape 15"/>
+          <p:cNvSpPr/>
+          <p:nvPr/>
+        </p:nvSpPr>
+        <p:spPr>
+          <a:xfrm>
+            <a:off x="749808" y="4718304"/>
+            <a:ext cx="365760" cy="365760"/>
+          </a:xfrm>
+          <a:prstGeom prst="ellipse">
+            <a:avLst/>
+          </a:prstGeom>
+          <a:solidFill>
+            <a:srgbClr val="455A64"/>
+          </a:solidFill>
+          <a:ln/>
+          <a:effectLst>
+            <a:outerShdw sx="100000" sy="100000" kx="0" ky="0" algn="bl" rotWithShape="0" blurRad="88900" dist="25400" dir="5400000">
+              <a:srgbClr val="22303C">
+                <a:alpha val="12000"/>
+              </a:srgbClr>
+            </a:outerShdw>
+          </a:effectLst>
+        </p:spPr>
+      </p:sp>
+      <p:sp>
+        <p:nvSpPr>
+          <p:cNvPr id="18" name="Text 16"/>
+          <p:cNvSpPr/>
+          <p:nvPr/>
+        </p:nvSpPr>
+        <p:spPr>
+          <a:xfrm>
+            <a:off x="749808" y="4718304"/>
+            <a:ext cx="365760" cy="365760"/>
+          </a:xfrm>
+          <a:prstGeom prst="rect">
+            <a:avLst/>
+          </a:prstGeom>
+          <a:noFill/>
+          <a:ln/>
+        </p:spPr>
+        <p:txBody>
+          <a:bodyPr wrap="square" lIns="0" tIns="0" rIns="0" bIns="0" rtlCol="0" anchor="ctr"/>
+          <a:lstStyle/>
+          <a:p>
+            <a:pPr algn="ctr" indent="0" marL="0">
+              <a:buNone/>
+            </a:pPr>
+            <a:r>
+              <a:rPr lang="en-US" sz="1500" b="1" dirty="0">
+                <a:solidFill>
+                  <a:srgbClr val="FFFFFF"/>
+                </a:solidFill>
+                <a:latin typeface="Calibri" pitchFamily="34" charset="0"/>
+                <a:ea typeface="Calibri" pitchFamily="34" charset="-122"/>
+                <a:cs typeface="Calibri" pitchFamily="34" charset="-120"/>
+              </a:rPr>
+              <a:t>4</a:t>
+            </a:r>
+            <a:endParaRPr lang="en-US" sz="1500" dirty="0"/>
+          </a:p>
+        </p:txBody>
+      </p:sp>
+      <p:sp>
+        <p:nvSpPr>
+          <p:cNvPr id="19" name="Text 17"/>
+          <p:cNvSpPr/>
+          <p:nvPr/>
+        </p:nvSpPr>
+        <p:spPr>
+          <a:xfrm>
+            <a:off x="1280160" y="4480560"/>
+            <a:ext cx="10143439" cy="841248"/>
+          </a:xfrm>
+          <a:prstGeom prst="rect">
+            <a:avLst/>
+          </a:prstGeom>
+          <a:noFill/>
+          <a:ln/>
+        </p:spPr>
+        <p:txBody>
+          <a:bodyPr wrap="square" lIns="0" tIns="0" rIns="0" bIns="0" rtlCol="0" anchor="ctr"/>
+          <a:lstStyle/>
+          <a:p>
+            <a:pPr algn="l" indent="0" marL="0">
+              <a:buNone/>
+            </a:pPr>
+            <a:r>
+              <a:rPr lang="en-US" sz="1350" dirty="0">
+                <a:solidFill>
+                  <a:srgbClr val="E7EEF4"/>
+                </a:solidFill>
+                <a:latin typeface="Calibri" pitchFamily="34" charset="0"/>
+                <a:ea typeface="Calibri" pitchFamily="34" charset="-122"/>
+                <a:cs typeface="Calibri" pitchFamily="34" charset="-120"/>
+              </a:rPr>
+              <a:t>Apply just culture: console human error, coach at-risk behavior, discipline recklessness — consistently.</a:t>
+            </a:r>
+            <a:endParaRPr lang="en-US" sz="1350" dirty="0"/>
+          </a:p>
+        </p:txBody>
+      </p:sp>
+      <p:sp>
+        <p:nvSpPr>
+          <p:cNvPr id="20" name="Shape 18"/>
+          <p:cNvSpPr/>
+          <p:nvPr/>
+        </p:nvSpPr>
+        <p:spPr>
+          <a:xfrm>
+            <a:off x="566928" y="5468112"/>
+            <a:ext cx="11057839" cy="841248"/>
+          </a:xfrm>
+          <a:prstGeom prst="roundRect">
+            <a:avLst>
+              <a:gd name="adj" fmla="val 7609"/>
+            </a:avLst>
+          </a:prstGeom>
+          <a:solidFill>
+            <a:srgbClr val="143651"/>
+          </a:solidFill>
+          <a:ln/>
+        </p:spPr>
+      </p:sp>
+      <p:sp>
+        <p:nvSpPr>
+          <p:cNvPr id="21" name="Shape 19"/>
+          <p:cNvSpPr/>
+          <p:nvPr/>
+        </p:nvSpPr>
+        <p:spPr>
+          <a:xfrm>
+            <a:off x="749808" y="5705856"/>
+            <a:ext cx="365760" cy="365760"/>
+          </a:xfrm>
+          <a:prstGeom prst="ellipse">
+            <a:avLst/>
+          </a:prstGeom>
+          <a:solidFill>
+            <a:srgbClr val="455A64"/>
+          </a:solidFill>
+          <a:ln/>
+          <a:effectLst>
+            <a:outerShdw sx="100000" sy="100000" kx="0" ky="0" algn="bl" rotWithShape="0" blurRad="88900" dist="25400" dir="5400000">
+              <a:srgbClr val="22303C">
+                <a:alpha val="12000"/>
+              </a:srgbClr>
+            </a:outerShdw>
+          </a:effectLst>
+        </p:spPr>
+      </p:sp>
+      <p:sp>
+        <p:nvSpPr>
+          <p:cNvPr id="22" name="Text 20"/>
+          <p:cNvSpPr/>
+          <p:nvPr/>
+        </p:nvSpPr>
+        <p:spPr>
+          <a:xfrm>
+            <a:off x="749808" y="5705856"/>
+            <a:ext cx="365760" cy="365760"/>
+          </a:xfrm>
+          <a:prstGeom prst="rect">
+            <a:avLst/>
+          </a:prstGeom>
+          <a:noFill/>
+          <a:ln/>
+        </p:spPr>
+        <p:txBody>
+          <a:bodyPr wrap="square" lIns="0" tIns="0" rIns="0" bIns="0" rtlCol="0" anchor="ctr"/>
+          <a:lstStyle/>
+          <a:p>
+            <a:pPr algn="ctr" indent="0" marL="0">
+              <a:buNone/>
+            </a:pPr>
+            <a:r>
+              <a:rPr lang="en-US" sz="1500" b="1" dirty="0">
+                <a:solidFill>
+                  <a:srgbClr val="FFFFFF"/>
+                </a:solidFill>
+                <a:latin typeface="Calibri" pitchFamily="34" charset="0"/>
+                <a:ea typeface="Calibri" pitchFamily="34" charset="-122"/>
+                <a:cs typeface="Calibri" pitchFamily="34" charset="-120"/>
+              </a:rPr>
+              <a:t>5</a:t>
+            </a:r>
+            <a:endParaRPr lang="en-US" sz="1500" dirty="0"/>
+          </a:p>
+        </p:txBody>
+      </p:sp>
+      <p:sp>
+        <p:nvSpPr>
+          <p:cNvPr id="23" name="Text 21"/>
+          <p:cNvSpPr/>
+          <p:nvPr/>
+        </p:nvSpPr>
+        <p:spPr>
+          <a:xfrm>
+            <a:off x="1280160" y="5468112"/>
+            <a:ext cx="10143439" cy="841248"/>
+          </a:xfrm>
+          <a:prstGeom prst="rect">
+            <a:avLst/>
+          </a:prstGeom>
+          <a:noFill/>
+          <a:ln/>
+        </p:spPr>
+        <p:txBody>
+          <a:bodyPr wrap="square" lIns="0" tIns="0" rIns="0" bIns="0" rtlCol="0" anchor="ctr"/>
+          <a:lstStyle/>
+          <a:p>
+            <a:pPr algn="l" indent="0" marL="0">
+              <a:buNone/>
+            </a:pPr>
+            <a:r>
+              <a:rPr lang="en-US" sz="1350" dirty="0">
+                <a:solidFill>
+                  <a:srgbClr val="E7EEF4"/>
+                </a:solidFill>
+                <a:latin typeface="Calibri" pitchFamily="34" charset="0"/>
+                <a:ea typeface="Calibri" pitchFamily="34" charset="-122"/>
+                <a:cs typeface="Calibri" pitchFamily="34" charset="-120"/>
+              </a:rPr>
+              <a:t>Choose strong interventions (forcing functions, automation, barcoding) over weak ones; report and learn from near misses.</a:t>
+            </a:r>
+            <a:endParaRPr lang="en-US" sz="1350" dirty="0"/>
+          </a:p>
+        </p:txBody>
+      </p:sp>
+      <p:sp>
+        <p:nvSpPr>
+          <p:cNvPr id="24" name="Text 22"/>
+          <p:cNvSpPr/>
+          <p:nvPr/>
+        </p:nvSpPr>
+        <p:spPr>
+          <a:xfrm>
+            <a:off x="566928" y="6473952"/>
+            <a:ext cx="8229600" cy="274320"/>
+          </a:xfrm>
+          <a:prstGeom prst="rect">
+            <a:avLst/>
+          </a:prstGeom>
+          <a:noFill/>
+          <a:ln/>
+        </p:spPr>
+        <p:txBody>
+          <a:bodyPr wrap="square" lIns="0" tIns="0" rIns="0" bIns="0" rtlCol="0" anchor="ctr"/>
+          <a:lstStyle/>
+          <a:p>
+            <a:pPr indent="0" marL="0">
+              <a:buNone/>
+            </a:pPr>
+            <a:r>
+              <a:rPr lang="en-US" sz="850" dirty="0">
+                <a:solidFill>
+                  <a:srgbClr val="5E7488"/>
+                </a:solidFill>
+                <a:latin typeface="Calibri" pitchFamily="34" charset="0"/>
+                <a:ea typeface="Calibri" pitchFamily="34" charset="-122"/>
+                <a:cs typeface="Calibri" pitchFamily="34" charset="-120"/>
+              </a:rPr>
+              <a:t>Makassed General Hospital  ·  Department of Laboratory Medicine</a:t>
+            </a:r>
+            <a:endParaRPr lang="en-US" sz="850" dirty="0"/>
+          </a:p>
+        </p:txBody>
+      </p:sp>
+      <p:sp>
+        <p:nvSpPr>
+          <p:cNvPr id="25" name="Text 23"/>
+          <p:cNvSpPr/>
+          <p:nvPr/>
+        </p:nvSpPr>
+        <p:spPr>
+          <a:xfrm>
+            <a:off x="11002975" y="6473952"/>
+            <a:ext cx="640080" cy="274320"/>
+          </a:xfrm>
+          <a:prstGeom prst="rect">
+            <a:avLst/>
+          </a:prstGeom>
+          <a:noFill/>
+          <a:ln/>
+        </p:spPr>
+        <p:txBody>
+          <a:bodyPr wrap="square" lIns="0" tIns="0" rIns="0" bIns="0" rtlCol="0" anchor="ctr"/>
+          <a:lstStyle/>
+          <a:p>
+            <a:pPr algn="r" indent="0" marL="0">
+              <a:buNone/>
+            </a:pPr>
+            <a:r>
+              <a:rPr lang="en-US" sz="850" b="1" dirty="0">
+                <a:solidFill>
+                  <a:srgbClr val="455A64"/>
+                </a:solidFill>
+                <a:latin typeface="Calibri" pitchFamily="34" charset="0"/>
+                <a:ea typeface="Calibri" pitchFamily="34" charset="-122"/>
+                <a:cs typeface="Calibri" pitchFamily="34" charset="-120"/>
+              </a:rPr>
+              <a:t>21</a:t>
+            </a:r>
+            <a:endParaRPr lang="en-US" sz="850" dirty="0"/>
+          </a:p>
+        </p:txBody>
+      </p:sp>
+    </p:spTree>
+  </p:cSld>
+  <p:clrMapOvr>
+    <a:masterClrMapping/>
+  </p:clrMapOvr>
+</p:sld>
+</file>
+
+<file path=ppt/slides/slide25.xml><?xml version="1.0" encoding="utf-8"?>
+<p:sld xmlns:a="http://schemas.openxmlformats.org/drawingml/2006/main" xmlns:r="http://schemas.openxmlformats.org/officeDocument/2006/relationships" xmlns:p="http://schemas.openxmlformats.org/presentationml/2006/main">
+  <p:cSld name="Slide 25">
+    <p:bg>
+      <p:bgPr>
+        <a:solidFill>
+          <a:srgbClr val="FFFFFF"/>
+        </a:solidFill>
+      </p:bgPr>
+    </p:bg>
+    <p:spTree>
+      <p:nvGrpSpPr>
+        <p:cNvPr id="1" name=""/>
+        <p:cNvGrpSpPr/>
+        <p:nvPr/>
+      </p:nvGrpSpPr>
+      <p:grpSpPr>
+        <a:xfrm>
+          <a:off x="0" y="0"/>
+          <a:ext cx="0" cy="0"/>
+          <a:chOff x="0" y="0"/>
+          <a:chExt cx="0" cy="0"/>
+        </a:xfrm>
+      </p:grpSpPr>
+      <p:sp>
+        <p:nvSpPr>
+          <p:cNvPr id="2" name="Text 0"/>
+          <p:cNvSpPr/>
+          <p:nvPr/>
+        </p:nvSpPr>
+        <p:spPr>
+          <a:xfrm>
+            <a:off x="566928" y="329184"/>
+            <a:ext cx="10515600" cy="310896"/>
+          </a:xfrm>
+          <a:prstGeom prst="rect">
+            <a:avLst/>
+          </a:prstGeom>
+          <a:noFill/>
+          <a:ln/>
+        </p:spPr>
+        <p:txBody>
+          <a:bodyPr wrap="square" lIns="0" tIns="0" rIns="0" bIns="0" rtlCol="0" anchor="ctr"/>
+          <a:lstStyle/>
+          <a:p>
+            <a:pPr algn="l" indent="0" marL="0">
+              <a:buNone/>
+            </a:pPr>
+            <a:r>
+              <a:rPr lang="en-US" sz="1100" b="1" spc="150" kern="0" dirty="0">
+                <a:solidFill>
+                  <a:srgbClr val="455A64"/>
+                </a:solidFill>
+                <a:latin typeface="Calibri" pitchFamily="34" charset="0"/>
+                <a:ea typeface="Calibri" pitchFamily="34" charset="-122"/>
+                <a:cs typeface="Calibri" pitchFamily="34" charset="-120"/>
+              </a:rPr>
               <a:t>LAB MANAGEMENT &amp; QUALITY   ·   REFERENCES &amp; FURTHER READING</a:t>
             </a:r>
             <a:endParaRPr lang="en-US" sz="1100" dirty="0"/>
@@ -9203,7 +11241,7 @@
                 <a:ea typeface="Calibri" pitchFamily="34" charset="-122"/>
                 <a:cs typeface="Calibri" pitchFamily="34" charset="-120"/>
               </a:rPr>
-              <a:t>1.   Institute of Medicine. To Err Is Human: Building a Safer Health System. 2000.</a:t>
+              <a:t>1.   Institute of Medicine. To Err Is Human: Building a Safer Health System.</a:t>
             </a:r>
             <a:endParaRPr lang="en-US" sz="1150" dirty="0"/>
           </a:p>
@@ -9223,7 +11261,7 @@
                 <a:ea typeface="Calibri" pitchFamily="34" charset="-122"/>
                 <a:cs typeface="Calibri" pitchFamily="34" charset="-120"/>
               </a:rPr>
-              <a:t>2.   Reason J. Human error: models and management. BMJ. 2000;320:768-770.</a:t>
+              <a:t>2.   Reason J. Human error and the Swiss-cheese model. BMJ.</a:t>
             </a:r>
             <a:endParaRPr lang="en-US" sz="1150" dirty="0"/>
           </a:p>
@@ -9243,7 +11281,7 @@
                 <a:ea typeface="Calibri" pitchFamily="34" charset="-122"/>
                 <a:cs typeface="Calibri" pitchFamily="34" charset="-120"/>
               </a:rPr>
-              <a:t>3.   Marx D. Patient Safety and the Just Culture.</a:t>
+              <a:t>3.   Marx D. Patient Safety and the ‘Just Culture’.</a:t>
             </a:r>
             <a:endParaRPr lang="en-US" sz="1150" dirty="0"/>
           </a:p>
@@ -9263,7 +11301,7 @@
                 <a:ea typeface="Calibri" pitchFamily="34" charset="-122"/>
                 <a:cs typeface="Calibri" pitchFamily="34" charset="-120"/>
               </a:rPr>
-              <a:t>4.   AABB / SHOT haemovigilance reports (wrong blood in tube).</a:t>
+              <a:t>4.   CLSI QMS11: Management of Nonconforming Events.</a:t>
             </a:r>
             <a:endParaRPr lang="en-US" sz="1150" dirty="0"/>
           </a:p>
@@ -9369,7 +11407,7 @@
                 <a:ea typeface="Calibri" pitchFamily="34" charset="-122"/>
                 <a:cs typeface="Calibri" pitchFamily="34" charset="-120"/>
               </a:rPr>
-              <a:t>18</a:t>
+              <a:t>22</a:t>
             </a:r>
             <a:endParaRPr lang="en-US" sz="850" dirty="0"/>
           </a:p>
@@ -9613,7 +11651,7 @@
                 <a:ea typeface="Calibri" pitchFamily="34" charset="-122"/>
                 <a:cs typeface="Calibri" pitchFamily="34" charset="-120"/>
               </a:rPr>
-              <a:t>Conduct a structured root-cause analysis.</a:t>
+              <a:t>Apply a systems view of error and the Swiss-cheese model.</a:t>
             </a:r>
             <a:endParaRPr lang="en-US" sz="1350" dirty="0"/>
           </a:p>
@@ -9747,7 +11785,7 @@
                 <a:ea typeface="Calibri" pitchFamily="34" charset="-122"/>
                 <a:cs typeface="Calibri" pitchFamily="34" charset="-120"/>
               </a:rPr>
-              <a:t>Distinguish near misses from adverse events.</a:t>
+              <a:t>Conduct root-cause analysis and build effective corrective actions.</a:t>
             </a:r>
             <a:endParaRPr lang="en-US" sz="1350" dirty="0"/>
           </a:p>
@@ -9881,7 +11919,7 @@
                 <a:ea typeface="Calibri" pitchFamily="34" charset="-122"/>
                 <a:cs typeface="Calibri" pitchFamily="34" charset="-120"/>
               </a:rPr>
-              <a:t>Investigate transfusion-safety and other laboratory events.</a:t>
+              <a:t>Apply just-culture principles to events.</a:t>
             </a:r>
             <a:endParaRPr lang="en-US" sz="1350" dirty="0"/>
           </a:p>
@@ -10015,7 +12053,7 @@
                 <a:ea typeface="Calibri" pitchFamily="34" charset="-122"/>
                 <a:cs typeface="Calibri" pitchFamily="34" charset="-120"/>
               </a:rPr>
-              <a:t>Apply systems thinking and human-factors design.</a:t>
+              <a:t>Use the error hierarchy to choose strong interventions.</a:t>
             </a:r>
             <a:endParaRPr lang="en-US" sz="1350" dirty="0"/>
           </a:p>
@@ -10149,7 +12187,7 @@
                 <a:ea typeface="Calibri" pitchFamily="34" charset="-122"/>
                 <a:cs typeface="Calibri" pitchFamily="34" charset="-120"/>
               </a:rPr>
-              <a:t>Build a just-culture approach.</a:t>
+              <a:t>Classify events (near miss, adverse event, sentinel event).</a:t>
             </a:r>
             <a:endParaRPr lang="en-US" sz="1350" dirty="0"/>
           </a:p>
@@ -10283,7 +12321,7 @@
                 <a:ea typeface="Calibri" pitchFamily="34" charset="-122"/>
                 <a:cs typeface="Calibri" pitchFamily="34" charset="-120"/>
               </a:rPr>
-              <a:t>Define corrective and preventive action.</a:t>
+              <a:t>Connect error investigation to the total testing process.</a:t>
             </a:r>
             <a:endParaRPr lang="en-US" sz="1350" dirty="0"/>
           </a:p>
@@ -10633,7 +12671,7 @@
                 <a:ea typeface="Calibri" pitchFamily="34" charset="-122"/>
                 <a:cs typeface="Calibri" pitchFamily="34" charset="-120"/>
               </a:rPr>
-              <a:t>Errors &amp; systems thinking</a:t>
+              <a:t>Systems view</a:t>
             </a:r>
             <a:pPr algn="l" indent="0" marL="0">
               <a:buNone/>
@@ -10647,7 +12685,7 @@
                 <a:ea typeface="Calibri" pitchFamily="34" charset="-122"/>
                 <a:cs typeface="Calibri" pitchFamily="34" charset="-120"/>
               </a:rPr>
-              <a:t>   —  why good people err</a:t>
+              <a:t>   —  latent vs active failures</a:t>
             </a:r>
             <a:endParaRPr lang="en-US" sz="1400" dirty="0"/>
           </a:p>
@@ -10788,7 +12826,7 @@
                 <a:ea typeface="Calibri" pitchFamily="34" charset="-122"/>
                 <a:cs typeface="Calibri" pitchFamily="34" charset="-120"/>
               </a:rPr>
-              <a:t>   —  finding system causes</a:t>
+              <a:t>   —  finding the real cause</a:t>
             </a:r>
             <a:endParaRPr lang="en-US" sz="1400" dirty="0"/>
           </a:p>
@@ -10936,7 +12974,7 @@
                 <a:ea typeface="Calibri" pitchFamily="34" charset="-122"/>
                 <a:cs typeface="Calibri" pitchFamily="34" charset="-120"/>
               </a:rPr>
-              <a:t>   —  accountability without blame</a:t>
+              <a:t>   —  accountability + learning</a:t>
             </a:r>
             <a:endParaRPr lang="en-US" sz="1400" dirty="0"/>
           </a:p>
@@ -11063,7 +13101,7 @@
                 <a:ea typeface="Calibri" pitchFamily="34" charset="-122"/>
                 <a:cs typeface="Calibri" pitchFamily="34" charset="-120"/>
               </a:rPr>
-              <a:t>Transfusion safety</a:t>
+              <a:t>Strong interventions</a:t>
             </a:r>
             <a:pPr algn="l" indent="0" marL="0">
               <a:buNone/>
@@ -11077,7 +13115,7 @@
                 <a:ea typeface="Calibri" pitchFamily="34" charset="-122"/>
                 <a:cs typeface="Calibri" pitchFamily="34" charset="-120"/>
               </a:rPr>
-              <a:t>   —  haemovigilance and WBIT</a:t>
+              <a:t>   —  the action hierarchy</a:t>
             </a:r>
             <a:endParaRPr lang="en-US" sz="1400" dirty="0"/>
           </a:p>
@@ -11211,7 +13249,7 @@
                 <a:ea typeface="Calibri" pitchFamily="34" charset="-122"/>
                 <a:cs typeface="Calibri" pitchFamily="34" charset="-120"/>
               </a:rPr>
-              <a:t>Cases &amp; board</a:t>
+              <a:t>Cases &amp; board review</a:t>
             </a:r>
             <a:endParaRPr lang="en-US" sz="1400" dirty="0"/>
           </a:p>
@@ -11510,7 +13548,7 @@
                 <a:ea typeface="Calibri" pitchFamily="34" charset="-122"/>
                 <a:cs typeface="Calibri" pitchFamily="34" charset="-120"/>
               </a:rPr>
-              <a:t>Systems Thinking &amp; Root-Cause Analysis</a:t>
+              <a:t>A Systems View of Error</a:t>
             </a:r>
             <a:endParaRPr lang="en-US" sz="3800" dirty="0"/>
           </a:p>
@@ -11581,7 +13619,7 @@
                 <a:ea typeface="Calibri" pitchFamily="34" charset="-122"/>
                 <a:cs typeface="Calibri" pitchFamily="34" charset="-120"/>
               </a:rPr>
-              <a:t>LAB MANAGEMENT &amp; QUALITY   ·   SYSTEMS</a:t>
+              <a:t>LAB MANAGEMENT &amp; QUALITY   ·   WHERE ERRORS OCCUR</a:t>
             </a:r>
             <a:endParaRPr lang="en-US" sz="1100" dirty="0"/>
           </a:p>
@@ -11620,7 +13658,7 @@
                 <a:ea typeface="Calibri" pitchFamily="34" charset="-122"/>
                 <a:cs typeface="Calibri" pitchFamily="34" charset="-120"/>
               </a:rPr>
-              <a:t>Why Errors Happen</a:t>
+              <a:t>Errors Across the Total Testing Process</a:t>
             </a:r>
             <a:endParaRPr lang="en-US" sz="3000" dirty="0"/>
           </a:p>
@@ -11634,18 +13672,23 @@
         </p:nvSpPr>
         <p:spPr>
           <a:xfrm>
-            <a:off x="566928" y="1517904"/>
-            <a:ext cx="5346040" cy="4114800"/>
+            <a:off x="792328" y="1481328"/>
+            <a:ext cx="10607040" cy="4498848"/>
           </a:xfrm>
           <a:prstGeom prst="roundRect">
             <a:avLst>
-              <a:gd name="adj" fmla="val 2000"/>
+              <a:gd name="adj" fmla="val 1829"/>
             </a:avLst>
           </a:prstGeom>
           <a:solidFill>
-            <a:srgbClr val="ECEFF1"/>
+            <a:srgbClr val="FFFFFF"/>
           </a:solidFill>
-          <a:ln/>
+          <a:ln w="12700">
+            <a:solidFill>
+              <a:srgbClr val="DCE4EC"/>
+            </a:solidFill>
+            <a:prstDash val="solid"/>
+          </a:ln>
           <a:effectLst>
             <a:outerShdw sx="100000" sy="100000" kx="0" ky="0" algn="bl" rotWithShape="0" blurRad="88900" dist="25400" dir="5400000">
               <a:srgbClr val="22303C">
@@ -11655,55 +13698,40 @@
           </a:effectLst>
         </p:spPr>
       </p:sp>
-      <p:sp>
-        <p:nvSpPr>
-          <p:cNvPr id="5" name="Text 3"/>
-          <p:cNvSpPr/>
-          <p:nvPr/>
-        </p:nvSpPr>
-        <p:spPr>
-          <a:xfrm>
-            <a:off x="804672" y="1682496"/>
-            <a:ext cx="4888840" cy="274320"/>
-          </a:xfrm>
-          <a:prstGeom prst="rect">
-            <a:avLst/>
-          </a:prstGeom>
-          <a:noFill/>
-          <a:ln/>
-        </p:spPr>
-        <p:txBody>
-          <a:bodyPr wrap="square" lIns="0" tIns="0" rIns="0" bIns="0" rtlCol="0" anchor="ctr"/>
-          <a:lstStyle/>
-          <a:p>
-            <a:pPr indent="0" marL="0">
-              <a:buNone/>
-            </a:pPr>
-            <a:r>
-              <a:rPr lang="en-US" sz="1200" b="1" spc="100" kern="0" dirty="0">
-                <a:solidFill>
-                  <a:srgbClr val="2C3A41"/>
-                </a:solidFill>
-                <a:latin typeface="Calibri" pitchFamily="34" charset="0"/>
-                <a:ea typeface="Calibri" pitchFamily="34" charset="-122"/>
-                <a:cs typeface="Calibri" pitchFamily="34" charset="-120"/>
-              </a:rPr>
-              <a:t>ACTIVE VS LATENT FAILURES</a:t>
-            </a:r>
-            <a:endParaRPr lang="en-US" sz="1200" dirty="0"/>
-          </a:p>
-        </p:txBody>
-      </p:sp>
-      <p:sp>
-        <p:nvSpPr>
-          <p:cNvPr id="6" name="Text 4"/>
-          <p:cNvSpPr/>
-          <p:nvPr/>
-        </p:nvSpPr>
-        <p:spPr>
-          <a:xfrm>
-            <a:off x="804672" y="2029968"/>
-            <a:ext cx="4870552" cy="3474720"/>
+      <p:pic>
+        <p:nvPicPr>
+          <p:cNvPr id="5" name="Image 0" descr="/tmp/cp_work2/art/lab_ttp.png">    </p:cNvPr>
+          <p:cNvPicPr>
+            <a:picLocks noChangeAspect="1"/>
+          </p:cNvPicPr>
+          <p:nvPr/>
+        </p:nvPicPr>
+        <p:blipFill>
+          <a:blip r:embed="rId1"/>
+          <a:stretch>
+            <a:fillRect/>
+          </a:stretch>
+        </p:blipFill>
+        <p:spPr>
+          <a:xfrm>
+            <a:off x="920344" y="1609344"/>
+            <a:ext cx="10351008" cy="4242816"/>
+          </a:xfrm>
+          <a:prstGeom prst="rect">
+            <a:avLst/>
+          </a:prstGeom>
+        </p:spPr>
+      </p:pic>
+      <p:sp>
+        <p:nvSpPr>
+          <p:cNvPr id="6" name="Text 3"/>
+          <p:cNvSpPr/>
+          <p:nvPr/>
+        </p:nvSpPr>
+        <p:spPr>
+          <a:xfrm>
+            <a:off x="566928" y="6053328"/>
+            <a:ext cx="11057839" cy="365760"/>
           </a:xfrm>
           <a:prstGeom prst="rect">
             <a:avLst/>
@@ -11715,268 +13743,27 @@
           <a:bodyPr wrap="square" lIns="0" tIns="0" rIns="0" bIns="0" rtlCol="0" anchor="t"/>
           <a:lstStyle/>
           <a:p>
-            <a:pPr algn="l" marL="177800" indent="-177800">
-              <a:spcAft>
-                <a:spcPts val="900"/>
-              </a:spcAft>
-              <a:buSzPct val="100000"/>
-              <a:buChar char="•"/>
-            </a:pPr>
-            <a:r>
-              <a:rPr lang="en-US" sz="1250" b="1" dirty="0">
-                <a:solidFill>
-                  <a:srgbClr val="1B2A38"/>
-                </a:solidFill>
-                <a:latin typeface="Calibri" pitchFamily="34" charset="0"/>
-                <a:ea typeface="Calibri" pitchFamily="34" charset="-122"/>
-                <a:cs typeface="Calibri" pitchFamily="34" charset="-120"/>
-              </a:rPr>
-              <a:t>Active failures: the sharp-end slip/mistake (e.g., mislabeling a tube).</a:t>
-            </a:r>
-            <a:endParaRPr lang="en-US" sz="1250" dirty="0"/>
-          </a:p>
-          <a:p>
-            <a:pPr algn="l" marL="177800" indent="-177800">
-              <a:spcAft>
-                <a:spcPts val="900"/>
-              </a:spcAft>
-              <a:buSzPct val="100000"/>
-              <a:buChar char="•"/>
-            </a:pPr>
-            <a:r>
-              <a:rPr lang="en-US" sz="1250" dirty="0">
-                <a:solidFill>
-                  <a:srgbClr val="33444F"/>
-                </a:solidFill>
-                <a:latin typeface="Calibri" pitchFamily="34" charset="0"/>
-                <a:ea typeface="Calibri" pitchFamily="34" charset="-122"/>
-                <a:cs typeface="Calibri" pitchFamily="34" charset="-120"/>
-              </a:rPr>
-              <a:t>Latent conditions: the system weaknesses that allowed it (staffing, design, workload).</a:t>
-            </a:r>
-            <a:endParaRPr lang="en-US" sz="1250" dirty="0"/>
-          </a:p>
-          <a:p>
-            <a:pPr algn="l" marL="177800" indent="-177800">
-              <a:spcAft>
-                <a:spcPts val="900"/>
-              </a:spcAft>
-              <a:buSzPct val="100000"/>
-              <a:buChar char="•"/>
-            </a:pPr>
-            <a:r>
-              <a:rPr lang="en-US" sz="1250" dirty="0">
-                <a:solidFill>
-                  <a:srgbClr val="33444F"/>
-                </a:solidFill>
-                <a:latin typeface="Calibri" pitchFamily="34" charset="0"/>
-                <a:ea typeface="Calibri" pitchFamily="34" charset="-122"/>
-                <a:cs typeface="Calibri" pitchFamily="34" charset="-120"/>
-              </a:rPr>
-              <a:t>The Swiss-cheese model: events occur when holes in successive defenses line up.</a:t>
-            </a:r>
-            <a:endParaRPr lang="en-US" sz="1250" dirty="0"/>
-          </a:p>
-          <a:p>
-            <a:pPr algn="l" marL="177800" indent="-177800">
-              <a:spcAft>
-                <a:spcPts val="900"/>
-              </a:spcAft>
-              <a:buSzPct val="100000"/>
-              <a:buChar char="•"/>
-            </a:pPr>
-            <a:r>
-              <a:rPr lang="en-US" sz="1250" dirty="0">
-                <a:solidFill>
-                  <a:srgbClr val="33444F"/>
-                </a:solidFill>
-                <a:latin typeface="Calibri" pitchFamily="34" charset="0"/>
-                <a:ea typeface="Calibri" pitchFamily="34" charset="-122"/>
-                <a:cs typeface="Calibri" pitchFamily="34" charset="-120"/>
-              </a:rPr>
-              <a:t>Human-factors design reduces reliance on memory and vigilance.</a:t>
-            </a:r>
-            <a:endParaRPr lang="en-US" sz="1250" dirty="0"/>
-          </a:p>
-        </p:txBody>
-      </p:sp>
-      <p:sp>
-        <p:nvSpPr>
-          <p:cNvPr id="7" name="Shape 5"/>
-          <p:cNvSpPr/>
-          <p:nvPr/>
-        </p:nvSpPr>
-        <p:spPr>
-          <a:xfrm>
-            <a:off x="6278728" y="1517904"/>
-            <a:ext cx="5346040" cy="4114800"/>
-          </a:xfrm>
-          <a:prstGeom prst="roundRect">
-            <a:avLst>
-              <a:gd name="adj" fmla="val 2000"/>
-            </a:avLst>
-          </a:prstGeom>
-          <a:solidFill>
-            <a:srgbClr val="ECEFF1"/>
-          </a:solidFill>
-          <a:ln/>
-          <a:effectLst>
-            <a:outerShdw sx="100000" sy="100000" kx="0" ky="0" algn="bl" rotWithShape="0" blurRad="88900" dist="25400" dir="5400000">
-              <a:srgbClr val="22303C">
-                <a:alpha val="12000"/>
-              </a:srgbClr>
-            </a:outerShdw>
-          </a:effectLst>
-        </p:spPr>
-      </p:sp>
-      <p:sp>
-        <p:nvSpPr>
-          <p:cNvPr id="8" name="Text 6"/>
-          <p:cNvSpPr/>
-          <p:nvPr/>
-        </p:nvSpPr>
-        <p:spPr>
-          <a:xfrm>
-            <a:off x="6516472" y="1682496"/>
-            <a:ext cx="4888840" cy="274320"/>
-          </a:xfrm>
-          <a:prstGeom prst="rect">
-            <a:avLst/>
-          </a:prstGeom>
-          <a:noFill/>
-          <a:ln/>
-        </p:spPr>
-        <p:txBody>
-          <a:bodyPr wrap="square" lIns="0" tIns="0" rIns="0" bIns="0" rtlCol="0" anchor="ctr"/>
-          <a:lstStyle/>
-          <a:p>
-            <a:pPr indent="0" marL="0">
-              <a:buNone/>
-            </a:pPr>
-            <a:r>
-              <a:rPr lang="en-US" sz="1200" b="1" spc="100" kern="0" dirty="0">
-                <a:solidFill>
-                  <a:srgbClr val="2C3A41"/>
-                </a:solidFill>
-                <a:latin typeface="Calibri" pitchFamily="34" charset="0"/>
-                <a:ea typeface="Calibri" pitchFamily="34" charset="-122"/>
-                <a:cs typeface="Calibri" pitchFamily="34" charset="-120"/>
-              </a:rPr>
-              <a:t>NEAR MISS VS ADVERSE EVENT</a:t>
-            </a:r>
-            <a:endParaRPr lang="en-US" sz="1200" dirty="0"/>
-          </a:p>
-        </p:txBody>
-      </p:sp>
-      <p:sp>
-        <p:nvSpPr>
-          <p:cNvPr id="9" name="Text 7"/>
-          <p:cNvSpPr/>
-          <p:nvPr/>
-        </p:nvSpPr>
-        <p:spPr>
-          <a:xfrm>
-            <a:off x="6516472" y="2029968"/>
-            <a:ext cx="4870552" cy="3474720"/>
-          </a:xfrm>
-          <a:prstGeom prst="rect">
-            <a:avLst/>
-          </a:prstGeom>
-          <a:noFill/>
-          <a:ln/>
-        </p:spPr>
-        <p:txBody>
-          <a:bodyPr wrap="square" lIns="0" tIns="0" rIns="0" bIns="0" rtlCol="0" anchor="t"/>
-          <a:lstStyle/>
-          <a:p>
-            <a:pPr algn="l" marL="177800" indent="-177800">
-              <a:spcAft>
-                <a:spcPts val="900"/>
-              </a:spcAft>
-              <a:buSzPct val="100000"/>
-              <a:buChar char="•"/>
-            </a:pPr>
-            <a:r>
-              <a:rPr lang="en-US" sz="1250" b="1" dirty="0">
-                <a:solidFill>
-                  <a:srgbClr val="1B2A38"/>
-                </a:solidFill>
-                <a:latin typeface="Calibri" pitchFamily="34" charset="0"/>
-                <a:ea typeface="Calibri" pitchFamily="34" charset="-122"/>
-                <a:cs typeface="Calibri" pitchFamily="34" charset="-120"/>
-              </a:rPr>
-              <a:t>A near miss is caught before reaching the patient — a free lesson.</a:t>
-            </a:r>
-            <a:endParaRPr lang="en-US" sz="1250" dirty="0"/>
-          </a:p>
-          <a:p>
-            <a:pPr algn="l" marL="177800" indent="-177800">
-              <a:spcAft>
-                <a:spcPts val="900"/>
-              </a:spcAft>
-              <a:buSzPct val="100000"/>
-              <a:buChar char="•"/>
-            </a:pPr>
-            <a:r>
-              <a:rPr lang="en-US" sz="1250" dirty="0">
-                <a:solidFill>
-                  <a:srgbClr val="33444F"/>
-                </a:solidFill>
-                <a:latin typeface="Calibri" pitchFamily="34" charset="0"/>
-                <a:ea typeface="Calibri" pitchFamily="34" charset="-122"/>
-                <a:cs typeface="Calibri" pitchFamily="34" charset="-120"/>
-              </a:rPr>
-              <a:t>An adverse event reaches the patient and may cause harm.</a:t>
-            </a:r>
-            <a:endParaRPr lang="en-US" sz="1250" dirty="0"/>
-          </a:p>
-          <a:p>
-            <a:pPr algn="l" marL="177800" indent="-177800">
-              <a:spcAft>
-                <a:spcPts val="900"/>
-              </a:spcAft>
-              <a:buSzPct val="100000"/>
-              <a:buChar char="•"/>
-            </a:pPr>
-            <a:r>
-              <a:rPr lang="en-US" sz="1250" dirty="0">
-                <a:solidFill>
-                  <a:srgbClr val="33444F"/>
-                </a:solidFill>
-                <a:latin typeface="Calibri" pitchFamily="34" charset="0"/>
-                <a:ea typeface="Calibri" pitchFamily="34" charset="-122"/>
-                <a:cs typeface="Calibri" pitchFamily="34" charset="-120"/>
-              </a:rPr>
-              <a:t>Both should be reported and analyzed.</a:t>
-            </a:r>
-            <a:endParaRPr lang="en-US" sz="1250" dirty="0"/>
-          </a:p>
-          <a:p>
-            <a:pPr algn="l" marL="177800" indent="-177800">
-              <a:spcAft>
-                <a:spcPts val="900"/>
-              </a:spcAft>
-              <a:buSzPct val="100000"/>
-              <a:buChar char="•"/>
-            </a:pPr>
-            <a:r>
-              <a:rPr lang="en-US" sz="1250" dirty="0">
-                <a:solidFill>
-                  <a:srgbClr val="33444F"/>
-                </a:solidFill>
-                <a:latin typeface="Calibri" pitchFamily="34" charset="0"/>
-                <a:ea typeface="Calibri" pitchFamily="34" charset="-122"/>
-                <a:cs typeface="Calibri" pitchFamily="34" charset="-120"/>
-              </a:rPr>
-              <a:t>High near-miss reporting signals a healthy safety culture.</a:t>
-            </a:r>
-            <a:endParaRPr lang="en-US" sz="1250" dirty="0"/>
-          </a:p>
-        </p:txBody>
-      </p:sp>
-      <p:sp>
-        <p:nvSpPr>
-          <p:cNvPr id="10" name="Text 8"/>
+            <a:pPr algn="ctr" indent="0" marL="0">
+              <a:buNone/>
+            </a:pPr>
+            <a:r>
+              <a:rPr lang="en-US" sz="1150" i="1" dirty="0">
+                <a:solidFill>
+                  <a:srgbClr val="6B7B8A"/>
+                </a:solidFill>
+                <a:latin typeface="Calibri" pitchFamily="34" charset="0"/>
+                <a:ea typeface="Calibri" pitchFamily="34" charset="-122"/>
+                <a:cs typeface="Calibri" pitchFamily="34" charset="-120"/>
+              </a:rPr>
+              <a:t>Original schematic. Most laboratory errors are pre- and post-analytic; safety work must address the whole process.</a:t>
+            </a:r>
+            <a:endParaRPr lang="en-US" sz="1150" dirty="0"/>
+          </a:p>
+        </p:txBody>
+      </p:sp>
+      <p:sp>
+        <p:nvSpPr>
+          <p:cNvPr id="7" name="Text 4"/>
           <p:cNvSpPr/>
           <p:nvPr/>
         </p:nvSpPr>
@@ -12015,7 +13802,7 @@
       </p:sp>
       <p:sp>
         <p:nvSpPr>
-          <p:cNvPr id="11" name="Text 9"/>
+          <p:cNvPr id="8" name="Text 5"/>
           <p:cNvSpPr/>
           <p:nvPr/>
         </p:nvSpPr>
@@ -12145,7 +13932,7 @@
                 <a:ea typeface="Calibri" pitchFamily="34" charset="-122"/>
                 <a:cs typeface="Calibri" pitchFamily="34" charset="-120"/>
               </a:rPr>
-              <a:t>LAB MANAGEMENT &amp; QUALITY   ·   RCA</a:t>
+              <a:t>LAB MANAGEMENT &amp; QUALITY   ·   SYSTEMS</a:t>
             </a:r>
             <a:endParaRPr lang="en-US" sz="1100" dirty="0"/>
           </a:p>
@@ -12184,7 +13971,7 @@
                 <a:ea typeface="Calibri" pitchFamily="34" charset="-122"/>
                 <a:cs typeface="Calibri" pitchFamily="34" charset="-120"/>
               </a:rPr>
-              <a:t>Root-Cause Analysis</a:t>
+              <a:t>Latent vs Active Failures</a:t>
             </a:r>
             <a:endParaRPr lang="en-US" sz="3000" dirty="0"/>
           </a:p>
@@ -12198,23 +13985,18 @@
         </p:nvSpPr>
         <p:spPr>
           <a:xfrm>
-            <a:off x="1066648" y="1481328"/>
-            <a:ext cx="10058400" cy="4160520"/>
+            <a:off x="566928" y="1517904"/>
+            <a:ext cx="5346040" cy="4114800"/>
           </a:xfrm>
           <a:prstGeom prst="roundRect">
             <a:avLst>
-              <a:gd name="adj" fmla="val 1978"/>
+              <a:gd name="adj" fmla="val 2000"/>
             </a:avLst>
           </a:prstGeom>
           <a:solidFill>
-            <a:srgbClr val="FFFFFF"/>
+            <a:srgbClr val="ECEFF1"/>
           </a:solidFill>
-          <a:ln w="12700">
-            <a:solidFill>
-              <a:srgbClr val="DCE4EC"/>
-            </a:solidFill>
-            <a:prstDash val="solid"/>
-          </a:ln>
+          <a:ln/>
           <a:effectLst>
             <a:outerShdw sx="100000" sy="100000" kx="0" ky="0" algn="bl" rotWithShape="0" blurRad="88900" dist="25400" dir="5400000">
               <a:srgbClr val="22303C">
@@ -12224,40 +14006,55 @@
           </a:effectLst>
         </p:spPr>
       </p:sp>
-      <p:pic>
-        <p:nvPicPr>
-          <p:cNvPr id="5" name="Image 0" descr="/tmp/cp_work2/art/lab_rca.png">    </p:cNvPr>
-          <p:cNvPicPr>
-            <a:picLocks noChangeAspect="1"/>
-          </p:cNvPicPr>
-          <p:nvPr/>
-        </p:nvPicPr>
-        <p:blipFill>
-          <a:blip r:embed="rId1"/>
-          <a:stretch>
-            <a:fillRect/>
-          </a:stretch>
-        </p:blipFill>
-        <p:spPr>
-          <a:xfrm>
-            <a:off x="1194664" y="1609344"/>
-            <a:ext cx="9802368" cy="3904488"/>
-          </a:xfrm>
-          <a:prstGeom prst="rect">
-            <a:avLst/>
-          </a:prstGeom>
-        </p:spPr>
-      </p:pic>
-      <p:sp>
-        <p:nvSpPr>
-          <p:cNvPr id="6" name="Text 3"/>
-          <p:cNvSpPr/>
-          <p:nvPr/>
-        </p:nvSpPr>
-        <p:spPr>
-          <a:xfrm>
-            <a:off x="566928" y="5715000"/>
-            <a:ext cx="11057839" cy="365760"/>
+      <p:sp>
+        <p:nvSpPr>
+          <p:cNvPr id="5" name="Text 3"/>
+          <p:cNvSpPr/>
+          <p:nvPr/>
+        </p:nvSpPr>
+        <p:spPr>
+          <a:xfrm>
+            <a:off x="804672" y="1682496"/>
+            <a:ext cx="4888840" cy="274320"/>
+          </a:xfrm>
+          <a:prstGeom prst="rect">
+            <a:avLst/>
+          </a:prstGeom>
+          <a:noFill/>
+          <a:ln/>
+        </p:spPr>
+        <p:txBody>
+          <a:bodyPr wrap="square" lIns="0" tIns="0" rIns="0" bIns="0" rtlCol="0" anchor="ctr"/>
+          <a:lstStyle/>
+          <a:p>
+            <a:pPr indent="0" marL="0">
+              <a:buNone/>
+            </a:pPr>
+            <a:r>
+              <a:rPr lang="en-US" sz="1200" b="1" spc="100" kern="0" dirty="0">
+                <a:solidFill>
+                  <a:srgbClr val="2C3A41"/>
+                </a:solidFill>
+                <a:latin typeface="Calibri" pitchFamily="34" charset="0"/>
+                <a:ea typeface="Calibri" pitchFamily="34" charset="-122"/>
+                <a:cs typeface="Calibri" pitchFamily="34" charset="-120"/>
+              </a:rPr>
+              <a:t>THE SWISS-CHEESE MODEL</a:t>
+            </a:r>
+            <a:endParaRPr lang="en-US" sz="1200" dirty="0"/>
+          </a:p>
+        </p:txBody>
+      </p:sp>
+      <p:sp>
+        <p:nvSpPr>
+          <p:cNvPr id="6" name="Text 4"/>
+          <p:cNvSpPr/>
+          <p:nvPr/>
+        </p:nvSpPr>
+        <p:spPr>
+          <a:xfrm>
+            <a:off x="804672" y="2029968"/>
+            <a:ext cx="4870552" cy="3474720"/>
           </a:xfrm>
           <a:prstGeom prst="rect">
             <a:avLst/>
@@ -12269,27 +14066,268 @@
           <a:bodyPr wrap="square" lIns="0" tIns="0" rIns="0" bIns="0" rtlCol="0" anchor="t"/>
           <a:lstStyle/>
           <a:p>
-            <a:pPr algn="ctr" indent="0" marL="0">
-              <a:buNone/>
-            </a:pPr>
-            <a:r>
-              <a:rPr lang="en-US" sz="1150" i="1" dirty="0">
-                <a:solidFill>
-                  <a:srgbClr val="6B7B8A"/>
-                </a:solidFill>
-                <a:latin typeface="Calibri" pitchFamily="34" charset="0"/>
-                <a:ea typeface="Calibri" pitchFamily="34" charset="-122"/>
-                <a:cs typeface="Calibri" pitchFamily="34" charset="-120"/>
-              </a:rPr>
-              <a:t>Original schematic. A fishbone organizes contributing categories; repeated 'why' questions drive to system causes for CAPA.</a:t>
-            </a:r>
-            <a:endParaRPr lang="en-US" sz="1150" dirty="0"/>
-          </a:p>
-        </p:txBody>
-      </p:sp>
-      <p:sp>
-        <p:nvSpPr>
-          <p:cNvPr id="7" name="Text 4"/>
+            <a:pPr algn="l" marL="177800" indent="-177800">
+              <a:spcAft>
+                <a:spcPts val="900"/>
+              </a:spcAft>
+              <a:buSzPct val="100000"/>
+              <a:buChar char="•"/>
+            </a:pPr>
+            <a:r>
+              <a:rPr lang="en-US" sz="1250" b="1" dirty="0">
+                <a:solidFill>
+                  <a:srgbClr val="1B2A38"/>
+                </a:solidFill>
+                <a:latin typeface="Calibri" pitchFamily="34" charset="0"/>
+                <a:ea typeface="Calibri" pitchFamily="34" charset="-122"/>
+                <a:cs typeface="Calibri" pitchFamily="34" charset="-120"/>
+              </a:rPr>
+              <a:t>Harm occurs when multiple layered defenses fail together.</a:t>
+            </a:r>
+            <a:endParaRPr lang="en-US" sz="1250" dirty="0"/>
+          </a:p>
+          <a:p>
+            <a:pPr algn="l" marL="177800" indent="-177800">
+              <a:spcAft>
+                <a:spcPts val="900"/>
+              </a:spcAft>
+              <a:buSzPct val="100000"/>
+              <a:buChar char="•"/>
+            </a:pPr>
+            <a:r>
+              <a:rPr lang="en-US" sz="1250" dirty="0">
+                <a:solidFill>
+                  <a:srgbClr val="33444F"/>
+                </a:solidFill>
+                <a:latin typeface="Calibri" pitchFamily="34" charset="0"/>
+                <a:ea typeface="Calibri" pitchFamily="34" charset="-122"/>
+                <a:cs typeface="Calibri" pitchFamily="34" charset="-120"/>
+              </a:rPr>
+              <a:t>Active failures: errors at the sharp end (the person acting).</a:t>
+            </a:r>
+            <a:endParaRPr lang="en-US" sz="1250" dirty="0"/>
+          </a:p>
+          <a:p>
+            <a:pPr algn="l" marL="177800" indent="-177800">
+              <a:spcAft>
+                <a:spcPts val="900"/>
+              </a:spcAft>
+              <a:buSzPct val="100000"/>
+              <a:buChar char="•"/>
+            </a:pPr>
+            <a:r>
+              <a:rPr lang="en-US" sz="1250" dirty="0">
+                <a:solidFill>
+                  <a:srgbClr val="33444F"/>
+                </a:solidFill>
+                <a:latin typeface="Calibri" pitchFamily="34" charset="0"/>
+                <a:ea typeface="Calibri" pitchFamily="34" charset="-122"/>
+                <a:cs typeface="Calibri" pitchFamily="34" charset="-120"/>
+              </a:rPr>
+              <a:t>Latent failures: upstream design/process weaknesses.</a:t>
+            </a:r>
+            <a:endParaRPr lang="en-US" sz="1250" dirty="0"/>
+          </a:p>
+          <a:p>
+            <a:pPr algn="l" marL="177800" indent="-177800">
+              <a:spcAft>
+                <a:spcPts val="900"/>
+              </a:spcAft>
+              <a:buSzPct val="100000"/>
+              <a:buChar char="•"/>
+            </a:pPr>
+            <a:r>
+              <a:rPr lang="en-US" sz="1250" dirty="0">
+                <a:solidFill>
+                  <a:srgbClr val="33444F"/>
+                </a:solidFill>
+                <a:latin typeface="Calibri" pitchFamily="34" charset="0"/>
+                <a:ea typeface="Calibri" pitchFamily="34" charset="-122"/>
+                <a:cs typeface="Calibri" pitchFamily="34" charset="-120"/>
+              </a:rPr>
+              <a:t>Strengthen multiple barriers, not just one.</a:t>
+            </a:r>
+            <a:endParaRPr lang="en-US" sz="1250" dirty="0"/>
+          </a:p>
+        </p:txBody>
+      </p:sp>
+      <p:sp>
+        <p:nvSpPr>
+          <p:cNvPr id="7" name="Shape 5"/>
+          <p:cNvSpPr/>
+          <p:nvPr/>
+        </p:nvSpPr>
+        <p:spPr>
+          <a:xfrm>
+            <a:off x="6278728" y="1517904"/>
+            <a:ext cx="5346040" cy="4114800"/>
+          </a:xfrm>
+          <a:prstGeom prst="roundRect">
+            <a:avLst>
+              <a:gd name="adj" fmla="val 2000"/>
+            </a:avLst>
+          </a:prstGeom>
+          <a:solidFill>
+            <a:srgbClr val="E6EAED"/>
+          </a:solidFill>
+          <a:ln/>
+          <a:effectLst>
+            <a:outerShdw sx="100000" sy="100000" kx="0" ky="0" algn="bl" rotWithShape="0" blurRad="88900" dist="25400" dir="5400000">
+              <a:srgbClr val="22303C">
+                <a:alpha val="12000"/>
+              </a:srgbClr>
+            </a:outerShdw>
+          </a:effectLst>
+        </p:spPr>
+      </p:sp>
+      <p:sp>
+        <p:nvSpPr>
+          <p:cNvPr id="8" name="Text 6"/>
+          <p:cNvSpPr/>
+          <p:nvPr/>
+        </p:nvSpPr>
+        <p:spPr>
+          <a:xfrm>
+            <a:off x="6516472" y="1682496"/>
+            <a:ext cx="4888840" cy="274320"/>
+          </a:xfrm>
+          <a:prstGeom prst="rect">
+            <a:avLst/>
+          </a:prstGeom>
+          <a:noFill/>
+          <a:ln/>
+        </p:spPr>
+        <p:txBody>
+          <a:bodyPr wrap="square" lIns="0" tIns="0" rIns="0" bIns="0" rtlCol="0" anchor="ctr"/>
+          <a:lstStyle/>
+          <a:p>
+            <a:pPr indent="0" marL="0">
+              <a:buNone/>
+            </a:pPr>
+            <a:r>
+              <a:rPr lang="en-US" sz="1200" b="1" spc="100" kern="0" dirty="0">
+                <a:solidFill>
+                  <a:srgbClr val="2C3A41"/>
+                </a:solidFill>
+                <a:latin typeface="Calibri" pitchFamily="34" charset="0"/>
+                <a:ea typeface="Calibri" pitchFamily="34" charset="-122"/>
+                <a:cs typeface="Calibri" pitchFamily="34" charset="-120"/>
+              </a:rPr>
+              <a:t>WHY BLAME FAILS</a:t>
+            </a:r>
+            <a:endParaRPr lang="en-US" sz="1200" dirty="0"/>
+          </a:p>
+        </p:txBody>
+      </p:sp>
+      <p:sp>
+        <p:nvSpPr>
+          <p:cNvPr id="9" name="Text 7"/>
+          <p:cNvSpPr/>
+          <p:nvPr/>
+        </p:nvSpPr>
+        <p:spPr>
+          <a:xfrm>
+            <a:off x="6516472" y="2029968"/>
+            <a:ext cx="4870552" cy="3474720"/>
+          </a:xfrm>
+          <a:prstGeom prst="rect">
+            <a:avLst/>
+          </a:prstGeom>
+          <a:noFill/>
+          <a:ln/>
+        </p:spPr>
+        <p:txBody>
+          <a:bodyPr wrap="square" lIns="0" tIns="0" rIns="0" bIns="0" rtlCol="0" anchor="t"/>
+          <a:lstStyle/>
+          <a:p>
+            <a:pPr algn="l" marL="177800" indent="-177800">
+              <a:spcAft>
+                <a:spcPts val="900"/>
+              </a:spcAft>
+              <a:buSzPct val="100000"/>
+              <a:buChar char="•"/>
+            </a:pPr>
+            <a:r>
+              <a:rPr lang="en-US" sz="1250" b="1" dirty="0">
+                <a:solidFill>
+                  <a:srgbClr val="1B2A38"/>
+                </a:solidFill>
+                <a:latin typeface="Calibri" pitchFamily="34" charset="0"/>
+                <a:ea typeface="Calibri" pitchFamily="34" charset="-122"/>
+                <a:cs typeface="Calibri" pitchFamily="34" charset="-120"/>
+              </a:rPr>
+              <a:t>Blaming individuals hides the system causes and suppresses reporting.</a:t>
+            </a:r>
+            <a:endParaRPr lang="en-US" sz="1250" dirty="0"/>
+          </a:p>
+          <a:p>
+            <a:pPr algn="l" marL="177800" indent="-177800">
+              <a:spcAft>
+                <a:spcPts val="900"/>
+              </a:spcAft>
+              <a:buSzPct val="100000"/>
+              <a:buChar char="•"/>
+            </a:pPr>
+            <a:r>
+              <a:rPr lang="en-US" sz="1250" dirty="0">
+                <a:solidFill>
+                  <a:srgbClr val="33444F"/>
+                </a:solidFill>
+                <a:latin typeface="Calibri" pitchFamily="34" charset="0"/>
+                <a:ea typeface="Calibri" pitchFamily="34" charset="-122"/>
+                <a:cs typeface="Calibri" pitchFamily="34" charset="-120"/>
+              </a:rPr>
+              <a:t>Most competent people err in flawed systems.</a:t>
+            </a:r>
+            <a:endParaRPr lang="en-US" sz="1250" dirty="0"/>
+          </a:p>
+          <a:p>
+            <a:pPr algn="l" marL="177800" indent="-177800">
+              <a:spcAft>
+                <a:spcPts val="900"/>
+              </a:spcAft>
+              <a:buSzPct val="100000"/>
+              <a:buChar char="•"/>
+            </a:pPr>
+            <a:r>
+              <a:rPr lang="en-US" sz="1250" dirty="0">
+                <a:solidFill>
+                  <a:srgbClr val="33444F"/>
+                </a:solidFill>
+                <a:latin typeface="Calibri" pitchFamily="34" charset="0"/>
+                <a:ea typeface="Calibri" pitchFamily="34" charset="-122"/>
+                <a:cs typeface="Calibri" pitchFamily="34" charset="-120"/>
+              </a:rPr>
+              <a:t>Fear reduces the reporting needed to learn.</a:t>
+            </a:r>
+            <a:endParaRPr lang="en-US" sz="1250" dirty="0"/>
+          </a:p>
+          <a:p>
+            <a:pPr algn="l" marL="177800" indent="-177800">
+              <a:spcAft>
+                <a:spcPts val="900"/>
+              </a:spcAft>
+              <a:buSzPct val="100000"/>
+              <a:buChar char="•"/>
+            </a:pPr>
+            <a:r>
+              <a:rPr lang="en-US" sz="1250" dirty="0">
+                <a:solidFill>
+                  <a:srgbClr val="33444F"/>
+                </a:solidFill>
+                <a:latin typeface="Calibri" pitchFamily="34" charset="0"/>
+                <a:ea typeface="Calibri" pitchFamily="34" charset="-122"/>
+                <a:cs typeface="Calibri" pitchFamily="34" charset="-120"/>
+              </a:rPr>
+              <a:t>Design for error tolerance.</a:t>
+            </a:r>
+            <a:endParaRPr lang="en-US" sz="1250" dirty="0"/>
+          </a:p>
+        </p:txBody>
+      </p:sp>
+      <p:sp>
+        <p:nvSpPr>
+          <p:cNvPr id="10" name="Text 8"/>
           <p:cNvSpPr/>
           <p:nvPr/>
         </p:nvSpPr>
@@ -12328,7 +14366,7 @@
       </p:sp>
       <p:sp>
         <p:nvSpPr>
-          <p:cNvPr id="8" name="Text 5"/>
+          <p:cNvPr id="11" name="Text 9"/>
           <p:cNvSpPr/>
           <p:nvPr/>
         </p:nvSpPr>
@@ -12458,7 +14496,7 @@
                 <a:ea typeface="Calibri" pitchFamily="34" charset="-122"/>
                 <a:cs typeface="Calibri" pitchFamily="34" charset="-120"/>
               </a:rPr>
-              <a:t>LAB MANAGEMENT &amp; QUALITY   ·   RCA</a:t>
+              <a:t>LAB MANAGEMENT &amp; QUALITY   ·   CLASSIFY</a:t>
             </a:r>
             <a:endParaRPr lang="en-US" sz="1100" dirty="0"/>
           </a:p>
@@ -12497,7 +14535,7 @@
                 <a:ea typeface="Calibri" pitchFamily="34" charset="-122"/>
                 <a:cs typeface="Calibri" pitchFamily="34" charset="-120"/>
               </a:rPr>
-              <a:t>Running an Effective RCA</a:t>
+              <a:t>Classifying Events</a:t>
             </a:r>
             <a:endParaRPr lang="en-US" sz="3000" dirty="0"/>
           </a:p>
@@ -12565,7 +14603,7 @@
                 <a:ea typeface="Calibri" pitchFamily="34" charset="-122"/>
                 <a:cs typeface="Calibri" pitchFamily="34" charset="-120"/>
               </a:rPr>
-              <a:t>METHOD</a:t>
+              <a:t>EVENT TYPES</a:t>
             </a:r>
             <a:endParaRPr lang="en-US" sz="1200" dirty="0"/>
           </a:p>
@@ -12608,7 +14646,7 @@
                 <a:ea typeface="Calibri" pitchFamily="34" charset="-122"/>
                 <a:cs typeface="Calibri" pitchFamily="34" charset="-120"/>
               </a:rPr>
-              <a:t>Assemble a multidisciplinary team soon after the event; gather facts and timeline.</a:t>
+              <a:t>Near miss: caught before reaching the patient — a free lesson.</a:t>
             </a:r>
             <a:endParaRPr lang="en-US" sz="1250" dirty="0"/>
           </a:p>
@@ -12629,7 +14667,7 @@
                 <a:ea typeface="Calibri" pitchFamily="34" charset="-122"/>
                 <a:cs typeface="Calibri" pitchFamily="34" charset="-120"/>
               </a:rPr>
-              <a:t>Use fishbone and 5-Whys to move from symptom to system cause.</a:t>
+              <a:t>Adverse event: reaches the patient, may cause harm.</a:t>
             </a:r>
             <a:endParaRPr lang="en-US" sz="1250" dirty="0"/>
           </a:p>
@@ -12650,7 +14688,7 @@
                 <a:ea typeface="Calibri" pitchFamily="34" charset="-122"/>
                 <a:cs typeface="Calibri" pitchFamily="34" charset="-120"/>
               </a:rPr>
-              <a:t>Focus on processes and conditions, not individuals.</a:t>
+              <a:t>Sentinel event: serious harm requiring intensive review.</a:t>
             </a:r>
             <a:endParaRPr lang="en-US" sz="1250" dirty="0"/>
           </a:p>
@@ -12671,7 +14709,7 @@
                 <a:ea typeface="Calibri" pitchFamily="34" charset="-122"/>
                 <a:cs typeface="Calibri" pitchFamily="34" charset="-120"/>
               </a:rPr>
-              <a:t>Identify contributing factors across people, process, equipment, environment.</a:t>
+              <a:t>Report all, including near misses.</a:t>
             </a:r>
             <a:endParaRPr lang="en-US" sz="1250" dirty="0"/>
           </a:p>
@@ -12694,7 +14732,7 @@
             </a:avLst>
           </a:prstGeom>
           <a:solidFill>
-            <a:srgbClr val="ECEFF1"/>
+            <a:srgbClr val="E6EAED"/>
           </a:solidFill>
           <a:ln/>
           <a:effectLst>
@@ -12739,7 +14777,7 @@
                 <a:ea typeface="Calibri" pitchFamily="34" charset="-122"/>
                 <a:cs typeface="Calibri" pitchFamily="34" charset="-120"/>
               </a:rPr>
-              <a:t>FROM ANALYSIS TO ACTION</a:t>
+              <a:t>WHY NEAR MISSES MATTER</a:t>
             </a:r>
             <a:endParaRPr lang="en-US" sz="1200" dirty="0"/>
           </a:p>
@@ -12782,7 +14820,7 @@
                 <a:ea typeface="Calibri" pitchFamily="34" charset="-122"/>
                 <a:cs typeface="Calibri" pitchFamily="34" charset="-120"/>
               </a:rPr>
-              <a:t>Design corrective AND preventive actions targeting the system (CAPA).</a:t>
+              <a:t>Near misses reveal the same system flaws without the harm.</a:t>
             </a:r>
             <a:endParaRPr lang="en-US" sz="1250" dirty="0"/>
           </a:p>
@@ -12803,7 +14841,7 @@
                 <a:ea typeface="Calibri" pitchFamily="34" charset="-122"/>
                 <a:cs typeface="Calibri" pitchFamily="34" charset="-120"/>
               </a:rPr>
-              <a:t>Prefer strong fixes (forcing functions, automation) over weak ones (reminders, education alone).</a:t>
+              <a:t>They are more frequent — richer learning.</a:t>
             </a:r>
             <a:endParaRPr lang="en-US" sz="1250" dirty="0"/>
           </a:p>
@@ -12824,7 +14862,7 @@
                 <a:ea typeface="Calibri" pitchFamily="34" charset="-122"/>
                 <a:cs typeface="Calibri" pitchFamily="34" charset="-120"/>
               </a:rPr>
-              <a:t>Assign owners and timelines; verify effectiveness.</a:t>
+              <a:t>A non-punitive system surfaces them.</a:t>
             </a:r>
             <a:endParaRPr lang="en-US" sz="1250" dirty="0"/>
           </a:p>
@@ -12845,7 +14883,7 @@
                 <a:ea typeface="Calibri" pitchFamily="34" charset="-122"/>
                 <a:cs typeface="Calibri" pitchFamily="34" charset="-120"/>
               </a:rPr>
-              <a:t>Share learning across the organization.</a:t>
+              <a:t>Track and act on trends.</a:t>
             </a:r>
             <a:endParaRPr lang="en-US" sz="1250" dirty="0"/>
           </a:p>
@@ -13144,7 +15182,7 @@
                 <a:ea typeface="Calibri" pitchFamily="34" charset="-122"/>
                 <a:cs typeface="Calibri" pitchFamily="34" charset="-120"/>
               </a:rPr>
-              <a:t>Just Culture &amp; Transfusion Safety</a:t>
+              <a:t>Investigation, Just Culture &amp; Strong Fixes</a:t>
             </a:r>
             <a:endParaRPr lang="en-US" sz="3800" dirty="0"/>
           </a:p>

--- a/decks/LabMgmt_03_Patient-Safety-Error-Investigation.pptx
+++ b/decks/LabMgmt_03_Patient-Safety-Error-Investigation.pptx
@@ -25,9 +25,13 @@
     <p:sldId id="273" r:id="rId19"/>
     <p:sldId id="274" r:id="rId20"/>
     <p:sldId id="275" r:id="rId21"/>
+    <p:sldId id="284" r:id="rId35"/>
     <p:sldId id="276" r:id="rId22"/>
+    <p:sldId id="283" r:id="rId34"/>
     <p:sldId id="277" r:id="rId23"/>
+    <p:sldId id="282" r:id="rId33"/>
     <p:sldId id="278" r:id="rId24"/>
+    <p:sldId id="281" r:id="rId32"/>
     <p:sldId id="279" r:id="rId25"/>
     <p:sldId id="280" r:id="rId26"/>
   </p:sldIdLst>
@@ -3032,6 +3036,10 @@
           </a:solidFill>
           <a:ln/>
         </p:spPr>
+        <p:txBody>
+          <a:bodyPr/>
+          <a:p/>
+        </p:txBody>
       </p:sp>
       <p:sp>
         <p:nvSpPr>
@@ -3054,6 +3062,10 @@
           </a:solidFill>
           <a:ln/>
         </p:spPr>
+        <p:txBody>
+          <a:bodyPr/>
+          <a:p/>
+        </p:txBody>
       </p:sp>
       <p:sp>
         <p:nvSpPr>
@@ -3076,6 +3088,10 @@
           </a:solidFill>
           <a:ln/>
         </p:spPr>
+        <p:txBody>
+          <a:bodyPr/>
+          <a:p/>
+        </p:txBody>
       </p:sp>
       <p:sp>
         <p:nvSpPr>
@@ -3098,6 +3114,10 @@
           </a:solidFill>
           <a:ln/>
         </p:spPr>
+        <p:txBody>
+          <a:bodyPr/>
+          <a:p/>
+        </p:txBody>
       </p:sp>
       <p:sp>
         <p:nvSpPr>
@@ -3519,6 +3539,10 @@
             </a:outerShdw>
           </a:effectLst>
         </p:spPr>
+        <p:txBody>
+          <a:bodyPr/>
+          <a:p/>
+        </p:txBody>
       </p:sp>
       <p:pic>
         <p:nvPicPr>
@@ -3827,6 +3851,10 @@
             </a:outerShdw>
           </a:effectLst>
         </p:spPr>
+        <p:txBody>
+          <a:bodyPr/>
+          <a:p/>
+        </p:txBody>
       </p:sp>
       <p:sp>
         <p:nvSpPr>
@@ -4001,6 +4029,10 @@
             </a:outerShdw>
           </a:effectLst>
         </p:spPr>
+        <p:txBody>
+          <a:bodyPr/>
+          <a:p/>
+        </p:txBody>
       </p:sp>
       <p:sp>
         <p:nvSpPr>
@@ -4391,6 +4423,10 @@
             </a:outerShdw>
           </a:effectLst>
         </p:spPr>
+        <p:txBody>
+          <a:bodyPr/>
+          <a:p/>
+        </p:txBody>
       </p:sp>
       <p:sp>
         <p:nvSpPr>
@@ -4565,6 +4601,10 @@
             </a:outerShdw>
           </a:effectLst>
         </p:spPr>
+        <p:txBody>
+          <a:bodyPr/>
+          <a:p/>
+        </p:txBody>
       </p:sp>
       <p:sp>
         <p:nvSpPr>
@@ -4870,6 +4910,10 @@
           </a:solidFill>
           <a:ln/>
         </p:spPr>
+        <p:txBody>
+          <a:bodyPr/>
+          <a:p/>
+        </p:txBody>
       </p:sp>
       <p:sp>
         <p:nvSpPr>
@@ -4892,6 +4936,10 @@
           </a:solidFill>
           <a:ln/>
         </p:spPr>
+        <p:txBody>
+          <a:bodyPr/>
+          <a:p/>
+        </p:txBody>
       </p:sp>
       <p:sp>
         <p:nvSpPr>
@@ -5148,6 +5196,10 @@
             </a:outerShdw>
           </a:effectLst>
         </p:spPr>
+        <p:txBody>
+          <a:bodyPr/>
+          <a:p/>
+        </p:txBody>
       </p:sp>
       <p:sp>
         <p:nvSpPr>
@@ -5258,6 +5310,10 @@
             </a:outerShdw>
           </a:effectLst>
         </p:spPr>
+        <p:txBody>
+          <a:bodyPr/>
+          <a:p/>
+        </p:txBody>
       </p:sp>
       <p:sp>
         <p:nvSpPr>
@@ -5687,6 +5743,10 @@
             </a:outerShdw>
           </a:effectLst>
         </p:spPr>
+        <p:txBody>
+          <a:bodyPr/>
+          <a:p/>
+        </p:txBody>
       </p:sp>
       <p:sp>
         <p:nvSpPr>
@@ -6013,6 +6073,10 @@
             </a:outerShdw>
           </a:effectLst>
         </p:spPr>
+        <p:txBody>
+          <a:bodyPr/>
+          <a:p/>
+        </p:txBody>
       </p:sp>
       <p:sp>
         <p:nvSpPr>
@@ -6123,6 +6187,10 @@
             </a:outerShdw>
           </a:effectLst>
         </p:spPr>
+        <p:txBody>
+          <a:bodyPr/>
+          <a:p/>
+        </p:txBody>
       </p:sp>
       <p:sp>
         <p:nvSpPr>
@@ -6552,6 +6620,10 @@
             </a:outerShdw>
           </a:effectLst>
         </p:spPr>
+        <p:txBody>
+          <a:bodyPr/>
+          <a:p/>
+        </p:txBody>
       </p:sp>
       <p:sp>
         <p:nvSpPr>
@@ -6878,6 +6950,10 @@
             </a:outerShdw>
           </a:effectLst>
         </p:spPr>
+        <p:txBody>
+          <a:bodyPr/>
+          <a:p/>
+        </p:txBody>
       </p:sp>
       <p:sp>
         <p:nvSpPr>
@@ -6988,6 +7064,10 @@
             </a:outerShdw>
           </a:effectLst>
         </p:spPr>
+        <p:txBody>
+          <a:bodyPr/>
+          <a:p/>
+        </p:txBody>
       </p:sp>
       <p:sp>
         <p:nvSpPr>
@@ -7417,6 +7497,10 @@
             </a:outerShdw>
           </a:effectLst>
         </p:spPr>
+        <p:txBody>
+          <a:bodyPr/>
+          <a:p/>
+        </p:txBody>
       </p:sp>
       <p:sp>
         <p:nvSpPr>
@@ -7743,6 +7827,10 @@
             </a:outerShdw>
           </a:effectLst>
         </p:spPr>
+        <p:txBody>
+          <a:bodyPr/>
+          <a:p/>
+        </p:txBody>
       </p:sp>
       <p:sp>
         <p:nvSpPr>
@@ -7850,6 +7938,10 @@
             </a:outerShdw>
           </a:effectLst>
         </p:spPr>
+        <p:txBody>
+          <a:bodyPr/>
+          <a:p/>
+        </p:txBody>
       </p:sp>
       <p:sp>
         <p:nvSpPr>
@@ -7957,6 +8049,10 @@
             </a:outerShdw>
           </a:effectLst>
         </p:spPr>
+        <p:txBody>
+          <a:bodyPr/>
+          <a:p/>
+        </p:txBody>
       </p:sp>
       <p:sp>
         <p:nvSpPr>
@@ -8064,6 +8160,10 @@
             </a:outerShdw>
           </a:effectLst>
         </p:spPr>
+        <p:txBody>
+          <a:bodyPr/>
+          <a:p/>
+        </p:txBody>
       </p:sp>
       <p:sp>
         <p:nvSpPr>
@@ -8456,9 +8556,9 @@
               <a:buNone/>
             </a:pPr>
             <a:r>
-              <a:rPr lang="en-US" sz="1350" b="1" dirty="0">
-                <a:solidFill>
-                  <a:srgbClr val="2C3A41"/>
+              <a:rPr lang="en-US" sz="1350" b="0" dirty="0">
+                <a:solidFill>
+                  <a:srgbClr val="33444F"/>
                 </a:solidFill>
                 <a:latin typeface="Calibri" pitchFamily="34" charset="0"/>
                 <a:ea typeface="Calibri" pitchFamily="34" charset="-122"/>
@@ -8527,130 +8627,6 @@
               <a:t>E. Inadequate discipline</a:t>
             </a:r>
             <a:endParaRPr lang="en-US" sz="1350" dirty="0"/>
-          </a:p>
-        </p:txBody>
-      </p:sp>
-      <p:sp>
-        <p:nvSpPr>
-          <p:cNvPr id="6" name="Shape 4"/>
-          <p:cNvSpPr/>
-          <p:nvPr/>
-        </p:nvSpPr>
-        <p:spPr>
-          <a:xfrm>
-            <a:off x="7201632" y="2395728"/>
-            <a:ext cx="4423136" cy="3246120"/>
-          </a:xfrm>
-          <a:prstGeom prst="roundRect">
-            <a:avLst>
-              <a:gd name="adj" fmla="val 2535"/>
-            </a:avLst>
-          </a:prstGeom>
-          <a:solidFill>
-            <a:srgbClr val="ECEFF1"/>
-          </a:solidFill>
-          <a:ln/>
-          <a:effectLst>
-            <a:outerShdw sx="100000" sy="100000" kx="0" ky="0" algn="bl" rotWithShape="0" blurRad="88900" dist="25400" dir="5400000">
-              <a:srgbClr val="22303C">
-                <a:alpha val="12000"/>
-              </a:srgbClr>
-            </a:outerShdw>
-          </a:effectLst>
-        </p:spPr>
-      </p:sp>
-      <p:sp>
-        <p:nvSpPr>
-          <p:cNvPr id="7" name="Text 5"/>
-          <p:cNvSpPr/>
-          <p:nvPr/>
-        </p:nvSpPr>
-        <p:spPr>
-          <a:xfrm>
-            <a:off x="7439376" y="2578608"/>
-            <a:ext cx="3965936" cy="457200"/>
-          </a:xfrm>
-          <a:prstGeom prst="rect">
-            <a:avLst/>
-          </a:prstGeom>
-          <a:noFill/>
-          <a:ln/>
-        </p:spPr>
-        <p:txBody>
-          <a:bodyPr wrap="square" lIns="0" tIns="0" rIns="0" bIns="0" rtlCol="0" anchor="ctr"/>
-          <a:lstStyle/>
-          <a:p>
-            <a:pPr indent="0" marL="0">
-              <a:buNone/>
-            </a:pPr>
-            <a:r>
-              <a:rPr lang="en-US" sz="1500" b="1" dirty="0">
-                <a:solidFill>
-                  <a:srgbClr val="455A64"/>
-                </a:solidFill>
-                <a:latin typeface="Calibri" pitchFamily="34" charset="0"/>
-                <a:ea typeface="Calibri" pitchFamily="34" charset="-122"/>
-                <a:cs typeface="Calibri" pitchFamily="34" charset="-120"/>
-              </a:rPr>
-              <a:t>ANSWER  </a:t>
-            </a:r>
-            <a:pPr indent="0" marL="0">
-              <a:buNone/>
-            </a:pPr>
-            <a:r>
-              <a:rPr lang="en-US" sz="1500" b="1" dirty="0">
-                <a:solidFill>
-                  <a:srgbClr val="1B2A38"/>
-                </a:solidFill>
-                <a:latin typeface="Calibri" pitchFamily="34" charset="0"/>
-                <a:ea typeface="Calibri" pitchFamily="34" charset="-122"/>
-                <a:cs typeface="Calibri" pitchFamily="34" charset="-120"/>
-              </a:rPr>
-              <a:t>B — Multiple failed defenses</a:t>
-            </a:r>
-            <a:endParaRPr lang="en-US" sz="1500" dirty="0"/>
-          </a:p>
-        </p:txBody>
-      </p:sp>
-      <p:sp>
-        <p:nvSpPr>
-          <p:cNvPr id="8" name="Text 6"/>
-          <p:cNvSpPr/>
-          <p:nvPr/>
-        </p:nvSpPr>
-        <p:spPr>
-          <a:xfrm>
-            <a:off x="7439376" y="3127248"/>
-            <a:ext cx="3947648" cy="2377440"/>
-          </a:xfrm>
-          <a:prstGeom prst="rect">
-            <a:avLst/>
-          </a:prstGeom>
-          <a:noFill/>
-          <a:ln/>
-        </p:spPr>
-        <p:txBody>
-          <a:bodyPr wrap="square" lIns="0" tIns="0" rIns="0" bIns="0" rtlCol="0" anchor="t"/>
-          <a:lstStyle/>
-          <a:p>
-            <a:pPr algn="l" indent="0" marL="0">
-              <a:lnSpc>
-                <a:spcPct val="108000"/>
-              </a:lnSpc>
-              <a:buNone/>
-            </a:pPr>
-            <a:r>
-              <a:rPr lang="en-US" sz="1250" dirty="0">
-                <a:solidFill>
-                  <a:srgbClr val="33444F"/>
-                </a:solidFill>
-                <a:latin typeface="Calibri" pitchFamily="34" charset="0"/>
-                <a:ea typeface="Calibri" pitchFamily="34" charset="-122"/>
-                <a:cs typeface="Calibri" pitchFamily="34" charset="-120"/>
-              </a:rPr>
-              <a:t>Harm occurs when latent and active failures line up through several weakened barriers.</a:t>
-            </a:r>
-            <a:endParaRPr lang="en-US" sz="1250" dirty="0"/>
           </a:p>
         </p:txBody>
       </p:sp>
@@ -8980,9 +8956,9 @@
               <a:buNone/>
             </a:pPr>
             <a:r>
-              <a:rPr lang="en-US" sz="1350" b="1" dirty="0">
-                <a:solidFill>
-                  <a:srgbClr val="2C3A41"/>
+              <a:rPr lang="en-US" sz="1350" b="0" dirty="0">
+                <a:solidFill>
+                  <a:srgbClr val="33444F"/>
                 </a:solidFill>
                 <a:latin typeface="Calibri" pitchFamily="34" charset="0"/>
                 <a:ea typeface="Calibri" pitchFamily="34" charset="-122"/>
@@ -9031,130 +9007,6 @@
               <a:t>E. Increased vigilance</a:t>
             </a:r>
             <a:endParaRPr lang="en-US" sz="1350" dirty="0"/>
-          </a:p>
-        </p:txBody>
-      </p:sp>
-      <p:sp>
-        <p:nvSpPr>
-          <p:cNvPr id="6" name="Shape 4"/>
-          <p:cNvSpPr/>
-          <p:nvPr/>
-        </p:nvSpPr>
-        <p:spPr>
-          <a:xfrm>
-            <a:off x="7201632" y="2395728"/>
-            <a:ext cx="4423136" cy="3246120"/>
-          </a:xfrm>
-          <a:prstGeom prst="roundRect">
-            <a:avLst>
-              <a:gd name="adj" fmla="val 2535"/>
-            </a:avLst>
-          </a:prstGeom>
-          <a:solidFill>
-            <a:srgbClr val="ECEFF1"/>
-          </a:solidFill>
-          <a:ln/>
-          <a:effectLst>
-            <a:outerShdw sx="100000" sy="100000" kx="0" ky="0" algn="bl" rotWithShape="0" blurRad="88900" dist="25400" dir="5400000">
-              <a:srgbClr val="22303C">
-                <a:alpha val="12000"/>
-              </a:srgbClr>
-            </a:outerShdw>
-          </a:effectLst>
-        </p:spPr>
-      </p:sp>
-      <p:sp>
-        <p:nvSpPr>
-          <p:cNvPr id="7" name="Text 5"/>
-          <p:cNvSpPr/>
-          <p:nvPr/>
-        </p:nvSpPr>
-        <p:spPr>
-          <a:xfrm>
-            <a:off x="7439376" y="2578608"/>
-            <a:ext cx="3965936" cy="457200"/>
-          </a:xfrm>
-          <a:prstGeom prst="rect">
-            <a:avLst/>
-          </a:prstGeom>
-          <a:noFill/>
-          <a:ln/>
-        </p:spPr>
-        <p:txBody>
-          <a:bodyPr wrap="square" lIns="0" tIns="0" rIns="0" bIns="0" rtlCol="0" anchor="ctr"/>
-          <a:lstStyle/>
-          <a:p>
-            <a:pPr indent="0" marL="0">
-              <a:buNone/>
-            </a:pPr>
-            <a:r>
-              <a:rPr lang="en-US" sz="1500" b="1" dirty="0">
-                <a:solidFill>
-                  <a:srgbClr val="455A64"/>
-                </a:solidFill>
-                <a:latin typeface="Calibri" pitchFamily="34" charset="0"/>
-                <a:ea typeface="Calibri" pitchFamily="34" charset="-122"/>
-                <a:cs typeface="Calibri" pitchFamily="34" charset="-120"/>
-              </a:rPr>
-              <a:t>ANSWER  </a:t>
-            </a:r>
-            <a:pPr indent="0" marL="0">
-              <a:buNone/>
-            </a:pPr>
-            <a:r>
-              <a:rPr lang="en-US" sz="1500" b="1" dirty="0">
-                <a:solidFill>
-                  <a:srgbClr val="1B2A38"/>
-                </a:solidFill>
-                <a:latin typeface="Calibri" pitchFamily="34" charset="0"/>
-                <a:ea typeface="Calibri" pitchFamily="34" charset="-122"/>
-                <a:cs typeface="Calibri" pitchFamily="34" charset="-120"/>
-              </a:rPr>
-              <a:t>C — Forcing function/automation</a:t>
-            </a:r>
-            <a:endParaRPr lang="en-US" sz="1500" dirty="0"/>
-          </a:p>
-        </p:txBody>
-      </p:sp>
-      <p:sp>
-        <p:nvSpPr>
-          <p:cNvPr id="8" name="Text 6"/>
-          <p:cNvSpPr/>
-          <p:nvPr/>
-        </p:nvSpPr>
-        <p:spPr>
-          <a:xfrm>
-            <a:off x="7439376" y="3127248"/>
-            <a:ext cx="3947648" cy="2377440"/>
-          </a:xfrm>
-          <a:prstGeom prst="rect">
-            <a:avLst/>
-          </a:prstGeom>
-          <a:noFill/>
-          <a:ln/>
-        </p:spPr>
-        <p:txBody>
-          <a:bodyPr wrap="square" lIns="0" tIns="0" rIns="0" bIns="0" rtlCol="0" anchor="t"/>
-          <a:lstStyle/>
-          <a:p>
-            <a:pPr algn="l" indent="0" marL="0">
-              <a:lnSpc>
-                <a:spcPct val="108000"/>
-              </a:lnSpc>
-              <a:buNone/>
-            </a:pPr>
-            <a:r>
-              <a:rPr lang="en-US" sz="1250" dirty="0">
-                <a:solidFill>
-                  <a:srgbClr val="33444F"/>
-                </a:solidFill>
-                <a:latin typeface="Calibri" pitchFamily="34" charset="0"/>
-                <a:ea typeface="Calibri" pitchFamily="34" charset="-122"/>
-                <a:cs typeface="Calibri" pitchFamily="34" charset="-120"/>
-              </a:rPr>
-              <a:t>Strong interventions remove reliance on memory and vigilance; reminders and training are weak by comparison.</a:t>
-            </a:r>
-            <a:endParaRPr lang="en-US" sz="1250" dirty="0"/>
           </a:p>
         </p:txBody>
       </p:sp>
@@ -9464,9 +9316,9 @@
               <a:buNone/>
             </a:pPr>
             <a:r>
-              <a:rPr lang="en-US" sz="1350" b="1" dirty="0">
-                <a:solidFill>
-                  <a:srgbClr val="2C3A41"/>
+              <a:rPr lang="en-US" sz="1350" b="0" dirty="0">
+                <a:solidFill>
+                  <a:srgbClr val="33444F"/>
                 </a:solidFill>
                 <a:latin typeface="Calibri" pitchFamily="34" charset="0"/>
                 <a:ea typeface="Calibri" pitchFamily="34" charset="-122"/>
@@ -9535,130 +9387,6 @@
               <a:t>E. A public warning</a:t>
             </a:r>
             <a:endParaRPr lang="en-US" sz="1350" dirty="0"/>
-          </a:p>
-        </p:txBody>
-      </p:sp>
-      <p:sp>
-        <p:nvSpPr>
-          <p:cNvPr id="6" name="Shape 4"/>
-          <p:cNvSpPr/>
-          <p:nvPr/>
-        </p:nvSpPr>
-        <p:spPr>
-          <a:xfrm>
-            <a:off x="7201632" y="2395728"/>
-            <a:ext cx="4423136" cy="3246120"/>
-          </a:xfrm>
-          <a:prstGeom prst="roundRect">
-            <a:avLst>
-              <a:gd name="adj" fmla="val 2535"/>
-            </a:avLst>
-          </a:prstGeom>
-          <a:solidFill>
-            <a:srgbClr val="ECEFF1"/>
-          </a:solidFill>
-          <a:ln/>
-          <a:effectLst>
-            <a:outerShdw sx="100000" sy="100000" kx="0" ky="0" algn="bl" rotWithShape="0" blurRad="88900" dist="25400" dir="5400000">
-              <a:srgbClr val="22303C">
-                <a:alpha val="12000"/>
-              </a:srgbClr>
-            </a:outerShdw>
-          </a:effectLst>
-        </p:spPr>
-      </p:sp>
-      <p:sp>
-        <p:nvSpPr>
-          <p:cNvPr id="7" name="Text 5"/>
-          <p:cNvSpPr/>
-          <p:nvPr/>
-        </p:nvSpPr>
-        <p:spPr>
-          <a:xfrm>
-            <a:off x="7439376" y="2578608"/>
-            <a:ext cx="3965936" cy="457200"/>
-          </a:xfrm>
-          <a:prstGeom prst="rect">
-            <a:avLst/>
-          </a:prstGeom>
-          <a:noFill/>
-          <a:ln/>
-        </p:spPr>
-        <p:txBody>
-          <a:bodyPr wrap="square" lIns="0" tIns="0" rIns="0" bIns="0" rtlCol="0" anchor="ctr"/>
-          <a:lstStyle/>
-          <a:p>
-            <a:pPr indent="0" marL="0">
-              <a:buNone/>
-            </a:pPr>
-            <a:r>
-              <a:rPr lang="en-US" sz="1500" b="1" dirty="0">
-                <a:solidFill>
-                  <a:srgbClr val="455A64"/>
-                </a:solidFill>
-                <a:latin typeface="Calibri" pitchFamily="34" charset="0"/>
-                <a:ea typeface="Calibri" pitchFamily="34" charset="-122"/>
-                <a:cs typeface="Calibri" pitchFamily="34" charset="-120"/>
-              </a:rPr>
-              <a:t>ANSWER  </a:t>
-            </a:r>
-            <a:pPr indent="0" marL="0">
-              <a:buNone/>
-            </a:pPr>
-            <a:r>
-              <a:rPr lang="en-US" sz="1500" b="1" dirty="0">
-                <a:solidFill>
-                  <a:srgbClr val="1B2A38"/>
-                </a:solidFill>
-                <a:latin typeface="Calibri" pitchFamily="34" charset="0"/>
-                <a:ea typeface="Calibri" pitchFamily="34" charset="-122"/>
-                <a:cs typeface="Calibri" pitchFamily="34" charset="-120"/>
-              </a:rPr>
-              <a:t>B — Console + fix the system</a:t>
-            </a:r>
-            <a:endParaRPr lang="en-US" sz="1500" dirty="0"/>
-          </a:p>
-        </p:txBody>
-      </p:sp>
-      <p:sp>
-        <p:nvSpPr>
-          <p:cNvPr id="8" name="Text 6"/>
-          <p:cNvSpPr/>
-          <p:nvPr/>
-        </p:nvSpPr>
-        <p:spPr>
-          <a:xfrm>
-            <a:off x="7439376" y="3127248"/>
-            <a:ext cx="3947648" cy="2377440"/>
-          </a:xfrm>
-          <a:prstGeom prst="rect">
-            <a:avLst/>
-          </a:prstGeom>
-          <a:noFill/>
-          <a:ln/>
-        </p:spPr>
-        <p:txBody>
-          <a:bodyPr wrap="square" lIns="0" tIns="0" rIns="0" bIns="0" rtlCol="0" anchor="t"/>
-          <a:lstStyle/>
-          <a:p>
-            <a:pPr algn="l" indent="0" marL="0">
-              <a:lnSpc>
-                <a:spcPct val="108000"/>
-              </a:lnSpc>
-              <a:buNone/>
-            </a:pPr>
-            <a:r>
-              <a:rPr lang="en-US" sz="1250" dirty="0">
-                <a:solidFill>
-                  <a:srgbClr val="33444F"/>
-                </a:solidFill>
-                <a:latin typeface="Calibri" pitchFamily="34" charset="0"/>
-                <a:ea typeface="Calibri" pitchFamily="34" charset="-122"/>
-                <a:cs typeface="Calibri" pitchFamily="34" charset="-120"/>
-              </a:rPr>
-              <a:t>Just culture consoles human error, coaches at-risk behavior, and reserves discipline for recklessness.</a:t>
-            </a:r>
-            <a:endParaRPr lang="en-US" sz="1250" dirty="0"/>
           </a:p>
         </p:txBody>
       </p:sp>
@@ -9968,9 +9696,9 @@
               <a:buNone/>
             </a:pPr>
             <a:r>
-              <a:rPr lang="en-US" sz="1350" b="1" dirty="0">
-                <a:solidFill>
-                  <a:srgbClr val="2C3A41"/>
+              <a:rPr lang="en-US" sz="1350" b="0" dirty="0">
+                <a:solidFill>
+                  <a:srgbClr val="33444F"/>
                 </a:solidFill>
                 <a:latin typeface="Calibri" pitchFamily="34" charset="0"/>
                 <a:ea typeface="Calibri" pitchFamily="34" charset="-122"/>
@@ -10039,130 +9767,6 @@
               <a:t>E. Avoids corrective action</a:t>
             </a:r>
             <a:endParaRPr lang="en-US" sz="1350" dirty="0"/>
-          </a:p>
-        </p:txBody>
-      </p:sp>
-      <p:sp>
-        <p:nvSpPr>
-          <p:cNvPr id="6" name="Shape 4"/>
-          <p:cNvSpPr/>
-          <p:nvPr/>
-        </p:nvSpPr>
-        <p:spPr>
-          <a:xfrm>
-            <a:off x="7201632" y="2395728"/>
-            <a:ext cx="4423136" cy="3246120"/>
-          </a:xfrm>
-          <a:prstGeom prst="roundRect">
-            <a:avLst>
-              <a:gd name="adj" fmla="val 2535"/>
-            </a:avLst>
-          </a:prstGeom>
-          <a:solidFill>
-            <a:srgbClr val="ECEFF1"/>
-          </a:solidFill>
-          <a:ln/>
-          <a:effectLst>
-            <a:outerShdw sx="100000" sy="100000" kx="0" ky="0" algn="bl" rotWithShape="0" blurRad="88900" dist="25400" dir="5400000">
-              <a:srgbClr val="22303C">
-                <a:alpha val="12000"/>
-              </a:srgbClr>
-            </a:outerShdw>
-          </a:effectLst>
-        </p:spPr>
-      </p:sp>
-      <p:sp>
-        <p:nvSpPr>
-          <p:cNvPr id="7" name="Text 5"/>
-          <p:cNvSpPr/>
-          <p:nvPr/>
-        </p:nvSpPr>
-        <p:spPr>
-          <a:xfrm>
-            <a:off x="7439376" y="2578608"/>
-            <a:ext cx="3965936" cy="457200"/>
-          </a:xfrm>
-          <a:prstGeom prst="rect">
-            <a:avLst/>
-          </a:prstGeom>
-          <a:noFill/>
-          <a:ln/>
-        </p:spPr>
-        <p:txBody>
-          <a:bodyPr wrap="square" lIns="0" tIns="0" rIns="0" bIns="0" rtlCol="0" anchor="ctr"/>
-          <a:lstStyle/>
-          <a:p>
-            <a:pPr indent="0" marL="0">
-              <a:buNone/>
-            </a:pPr>
-            <a:r>
-              <a:rPr lang="en-US" sz="1500" b="1" dirty="0">
-                <a:solidFill>
-                  <a:srgbClr val="455A64"/>
-                </a:solidFill>
-                <a:latin typeface="Calibri" pitchFamily="34" charset="0"/>
-                <a:ea typeface="Calibri" pitchFamily="34" charset="-122"/>
-                <a:cs typeface="Calibri" pitchFamily="34" charset="-120"/>
-              </a:rPr>
-              <a:t>ANSWER  </a:t>
-            </a:r>
-            <a:pPr indent="0" marL="0">
-              <a:buNone/>
-            </a:pPr>
-            <a:r>
-              <a:rPr lang="en-US" sz="1500" b="1" dirty="0">
-                <a:solidFill>
-                  <a:srgbClr val="1B2A38"/>
-                </a:solidFill>
-                <a:latin typeface="Calibri" pitchFamily="34" charset="0"/>
-                <a:ea typeface="Calibri" pitchFamily="34" charset="-122"/>
-                <a:cs typeface="Calibri" pitchFamily="34" charset="-120"/>
-              </a:rPr>
-              <a:t>B — Reveals weaknesses without harm</a:t>
-            </a:r>
-            <a:endParaRPr lang="en-US" sz="1500" dirty="0"/>
-          </a:p>
-        </p:txBody>
-      </p:sp>
-      <p:sp>
-        <p:nvSpPr>
-          <p:cNvPr id="8" name="Text 6"/>
-          <p:cNvSpPr/>
-          <p:nvPr/>
-        </p:nvSpPr>
-        <p:spPr>
-          <a:xfrm>
-            <a:off x="7439376" y="3127248"/>
-            <a:ext cx="3947648" cy="2377440"/>
-          </a:xfrm>
-          <a:prstGeom prst="rect">
-            <a:avLst/>
-          </a:prstGeom>
-          <a:noFill/>
-          <a:ln/>
-        </p:spPr>
-        <p:txBody>
-          <a:bodyPr wrap="square" lIns="0" tIns="0" rIns="0" bIns="0" rtlCol="0" anchor="t"/>
-          <a:lstStyle/>
-          <a:p>
-            <a:pPr algn="l" indent="0" marL="0">
-              <a:lnSpc>
-                <a:spcPct val="108000"/>
-              </a:lnSpc>
-              <a:buNone/>
-            </a:pPr>
-            <a:r>
-              <a:rPr lang="en-US" sz="1250" dirty="0">
-                <a:solidFill>
-                  <a:srgbClr val="33444F"/>
-                </a:solidFill>
-                <a:latin typeface="Calibri" pitchFamily="34" charset="0"/>
-                <a:ea typeface="Calibri" pitchFamily="34" charset="-122"/>
-                <a:cs typeface="Calibri" pitchFamily="34" charset="-120"/>
-              </a:rPr>
-              <a:t>Near misses expose the same latent failures as adverse events but without harm, enabling proactive improvement.</a:t>
-            </a:r>
-            <a:endParaRPr lang="en-US" sz="1250" dirty="0"/>
           </a:p>
         </p:txBody>
       </p:sp>
@@ -10403,6 +10007,10 @@
           </a:solidFill>
           <a:ln/>
         </p:spPr>
+        <p:txBody>
+          <a:bodyPr/>
+          <a:p/>
+        </p:txBody>
       </p:sp>
       <p:sp>
         <p:nvSpPr>
@@ -10430,6 +10038,10 @@
             </a:outerShdw>
           </a:effectLst>
         </p:spPr>
+        <p:txBody>
+          <a:bodyPr/>
+          <a:p/>
+        </p:txBody>
       </p:sp>
       <p:sp>
         <p:nvSpPr>
@@ -10530,6 +10142,10 @@
           </a:solidFill>
           <a:ln/>
         </p:spPr>
+        <p:txBody>
+          <a:bodyPr/>
+          <a:p/>
+        </p:txBody>
       </p:sp>
       <p:sp>
         <p:nvSpPr>
@@ -10557,6 +10173,10 @@
             </a:outerShdw>
           </a:effectLst>
         </p:spPr>
+        <p:txBody>
+          <a:bodyPr/>
+          <a:p/>
+        </p:txBody>
       </p:sp>
       <p:sp>
         <p:nvSpPr>
@@ -10657,6 +10277,10 @@
           </a:solidFill>
           <a:ln/>
         </p:spPr>
+        <p:txBody>
+          <a:bodyPr/>
+          <a:p/>
+        </p:txBody>
       </p:sp>
       <p:sp>
         <p:nvSpPr>
@@ -10684,6 +10308,10 @@
             </a:outerShdw>
           </a:effectLst>
         </p:spPr>
+        <p:txBody>
+          <a:bodyPr/>
+          <a:p/>
+        </p:txBody>
       </p:sp>
       <p:sp>
         <p:nvSpPr>
@@ -10784,6 +10412,10 @@
           </a:solidFill>
           <a:ln/>
         </p:spPr>
+        <p:txBody>
+          <a:bodyPr/>
+          <a:p/>
+        </p:txBody>
       </p:sp>
       <p:sp>
         <p:nvSpPr>
@@ -10811,6 +10443,10 @@
             </a:outerShdw>
           </a:effectLst>
         </p:spPr>
+        <p:txBody>
+          <a:bodyPr/>
+          <a:p/>
+        </p:txBody>
       </p:sp>
       <p:sp>
         <p:nvSpPr>
@@ -10911,6 +10547,10 @@
           </a:solidFill>
           <a:ln/>
         </p:spPr>
+        <p:txBody>
+          <a:bodyPr/>
+          <a:p/>
+        </p:txBody>
       </p:sp>
       <p:sp>
         <p:nvSpPr>
@@ -10938,6 +10578,10 @@
             </a:outerShdw>
           </a:effectLst>
         </p:spPr>
+        <p:txBody>
+          <a:bodyPr/>
+          <a:p/>
+        </p:txBody>
       </p:sp>
       <p:sp>
         <p:nvSpPr>
@@ -11421,6 +11065,1982 @@
 </p:sld>
 </file>
 
+<file path=ppt/slides/slide26.xml><?xml version="1.0" encoding="utf-8"?>
+<p:sld xmlns:a="http://schemas.openxmlformats.org/drawingml/2006/main" xmlns:p="http://schemas.openxmlformats.org/presentationml/2006/main" xmlns:r="http://schemas.openxmlformats.org/officeDocument/2006/relationships">
+  <p:cSld>
+    <p:spTree>
+      <p:nvGrpSpPr>
+        <p:cNvPr id="1" name=""/>
+        <p:cNvGrpSpPr/>
+        <p:nvPr/>
+      </p:nvGrpSpPr>
+      <p:grpSpPr/>
+      <p:sp>
+        <p:nvSpPr>
+          <p:cNvPr id="2" name="Text 0"/>
+          <p:cNvSpPr/>
+          <p:nvPr/>
+        </p:nvSpPr>
+        <p:spPr>
+          <a:xfrm>
+            <a:off x="566928" y="329184"/>
+            <a:ext cx="10515600" cy="310896"/>
+          </a:xfrm>
+          <a:prstGeom prst="rect">
+            <a:avLst/>
+          </a:prstGeom>
+          <a:noFill/>
+          <a:ln/>
+        </p:spPr>
+        <p:txBody>
+          <a:bodyPr wrap="square" lIns="0" tIns="0" rIns="0" bIns="0" rtlCol="0" anchor="ctr"/>
+          <a:lstStyle/>
+          <a:p>
+            <a:pPr algn="l" indent="0" marL="0">
+              <a:buNone/>
+            </a:pPr>
+            <a:r>
+              <a:rPr lang="en-US" sz="1100" b="1" spc="150" kern="0" dirty="0">
+                <a:solidFill>
+                  <a:srgbClr val="455A64"/>
+                </a:solidFill>
+                <a:latin typeface="Calibri" pitchFamily="34" charset="0"/>
+                <a:ea typeface="Calibri" pitchFamily="34" charset="-122"/>
+                <a:cs typeface="Calibri" pitchFamily="34" charset="-120"/>
+              </a:rPr>
+              <a:t>LAB MANAGEMENT &amp; QUALITY   ·   BOARD REVIEW  ·  Q4</a:t>
+            </a:r>
+            <a:endParaRPr lang="en-US" sz="1100" dirty="0"/>
+          </a:p>
+        </p:txBody>
+      </p:sp>
+      <p:sp>
+        <p:nvSpPr>
+          <p:cNvPr id="3" name="Text 1"/>
+          <p:cNvSpPr/>
+          <p:nvPr/>
+        </p:nvSpPr>
+        <p:spPr>
+          <a:xfrm>
+            <a:off x="566928" y="713232"/>
+            <a:ext cx="11064240" cy="749808"/>
+          </a:xfrm>
+          <a:prstGeom prst="rect">
+            <a:avLst/>
+          </a:prstGeom>
+          <a:noFill/>
+          <a:ln/>
+        </p:spPr>
+        <p:txBody>
+          <a:bodyPr wrap="square" lIns="0" tIns="0" rIns="0" bIns="0" rtlCol="0" anchor="ctr"/>
+          <a:lstStyle/>
+          <a:p>
+            <a:pPr algn="l" indent="0" marL="0">
+              <a:buNone/>
+            </a:pPr>
+            <a:r>
+              <a:rPr lang="en-US" sz="2600" b="1" dirty="0">
+                <a:solidFill>
+                  <a:srgbClr val="0E3A5F"/>
+                </a:solidFill>
+                <a:latin typeface="Calibri" pitchFamily="34" charset="0"/>
+                <a:ea typeface="Calibri" pitchFamily="34" charset="-122"/>
+                <a:cs typeface="Calibri" pitchFamily="34" charset="-120"/>
+              </a:rPr>
+              <a:t>Board-Style Review</a:t>
+            </a:r>
+            <a:endParaRPr lang="en-US" sz="2600" dirty="0"/>
+          </a:p>
+        </p:txBody>
+      </p:sp>
+      <p:sp>
+        <p:nvSpPr>
+          <p:cNvPr id="4" name="Text 2"/>
+          <p:cNvSpPr/>
+          <p:nvPr/>
+        </p:nvSpPr>
+        <p:spPr>
+          <a:xfrm>
+            <a:off x="566928" y="1417320"/>
+            <a:ext cx="11057839" cy="914400"/>
+          </a:xfrm>
+          <a:prstGeom prst="rect">
+            <a:avLst/>
+          </a:prstGeom>
+          <a:noFill/>
+          <a:ln/>
+        </p:spPr>
+        <p:txBody>
+          <a:bodyPr wrap="square" lIns="0" tIns="0" rIns="0" bIns="0" rtlCol="0" anchor="t"/>
+          <a:lstStyle/>
+          <a:p>
+            <a:pPr algn="l" indent="0" marL="0">
+              <a:lnSpc>
+                <a:spcPct val="105000"/>
+              </a:lnSpc>
+              <a:buNone/>
+            </a:pPr>
+            <a:r>
+              <a:rPr lang="en-US" sz="1450" b="1" dirty="0">
+                <a:solidFill>
+                  <a:srgbClr val="1B2A38"/>
+                </a:solidFill>
+                <a:latin typeface="Calibri" pitchFamily="34" charset="0"/>
+                <a:ea typeface="Calibri" pitchFamily="34" charset="-122"/>
+                <a:cs typeface="Calibri" pitchFamily="34" charset="-120"/>
+              </a:rPr>
+              <a:t>Near-miss reporting is valuable primarily because it:</a:t>
+            </a:r>
+            <a:endParaRPr lang="en-US" sz="1450" dirty="0"/>
+          </a:p>
+        </p:txBody>
+      </p:sp>
+      <p:sp>
+        <p:nvSpPr>
+          <p:cNvPr id="5" name="Text 3"/>
+          <p:cNvSpPr/>
+          <p:nvPr/>
+        </p:nvSpPr>
+        <p:spPr>
+          <a:xfrm>
+            <a:off x="658368" y="2395728"/>
+            <a:ext cx="6192390" cy="3017520"/>
+          </a:xfrm>
+          <a:prstGeom prst="rect">
+            <a:avLst/>
+          </a:prstGeom>
+          <a:noFill/>
+          <a:ln/>
+        </p:spPr>
+        <p:txBody>
+          <a:bodyPr wrap="square" lIns="0" tIns="0" rIns="0" bIns="0" rtlCol="0" anchor="t"/>
+          <a:lstStyle/>
+          <a:p>
+            <a:pPr algn="l" indent="0" marL="0">
+              <a:spcAft>
+                <a:spcPts val="600"/>
+              </a:spcAft>
+              <a:buNone/>
+            </a:pPr>
+            <a:r>
+              <a:rPr lang="en-US" sz="1350" dirty="0">
+                <a:solidFill>
+                  <a:srgbClr val="33444F"/>
+                </a:solidFill>
+                <a:latin typeface="Calibri" pitchFamily="34" charset="0"/>
+                <a:ea typeface="Calibri" pitchFamily="34" charset="-122"/>
+                <a:cs typeface="Calibri" pitchFamily="34" charset="-120"/>
+              </a:rPr>
+              <a:t>A. Assigns blame efficiently</a:t>
+            </a:r>
+            <a:endParaRPr lang="en-US" sz="1350" dirty="0"/>
+          </a:p>
+          <a:p>
+            <a:pPr algn="l" indent="0" marL="0">
+              <a:spcAft>
+                <a:spcPts val="600"/>
+              </a:spcAft>
+              <a:buNone/>
+            </a:pPr>
+            <a:r>
+              <a:rPr lang="en-US" sz="1350" b="1" dirty="0">
+                <a:solidFill>
+                  <a:srgbClr val="2C3A41"/>
+                </a:solidFill>
+                <a:latin typeface="Calibri" pitchFamily="34" charset="0"/>
+                <a:ea typeface="Calibri" pitchFamily="34" charset="-122"/>
+                <a:cs typeface="Calibri" pitchFamily="34" charset="-120"/>
+              </a:rPr>
+              <a:t>B. Reveals system weaknesses without patient harm</a:t>
+            </a:r>
+            <a:endParaRPr lang="en-US" sz="1350" dirty="0"/>
+          </a:p>
+          <a:p>
+            <a:pPr algn="l" indent="0" marL="0">
+              <a:spcAft>
+                <a:spcPts val="600"/>
+              </a:spcAft>
+              <a:buNone/>
+            </a:pPr>
+            <a:r>
+              <a:rPr lang="en-US" sz="1350" dirty="0">
+                <a:solidFill>
+                  <a:srgbClr val="33444F"/>
+                </a:solidFill>
+                <a:latin typeface="Calibri" pitchFamily="34" charset="0"/>
+                <a:ea typeface="Calibri" pitchFamily="34" charset="-122"/>
+                <a:cs typeface="Calibri" pitchFamily="34" charset="-120"/>
+              </a:rPr>
+              <a:t>C. Replaces root-cause analysis</a:t>
+            </a:r>
+            <a:endParaRPr lang="en-US" sz="1350" dirty="0"/>
+          </a:p>
+          <a:p>
+            <a:pPr algn="l" indent="0" marL="0">
+              <a:spcAft>
+                <a:spcPts val="600"/>
+              </a:spcAft>
+              <a:buNone/>
+            </a:pPr>
+            <a:r>
+              <a:rPr lang="en-US" sz="1350" dirty="0">
+                <a:solidFill>
+                  <a:srgbClr val="33444F"/>
+                </a:solidFill>
+                <a:latin typeface="Calibri" pitchFamily="34" charset="0"/>
+                <a:ea typeface="Calibri" pitchFamily="34" charset="-122"/>
+                <a:cs typeface="Calibri" pitchFamily="34" charset="-120"/>
+              </a:rPr>
+              <a:t>D. Reduces documentation</a:t>
+            </a:r>
+            <a:endParaRPr lang="en-US" sz="1350" dirty="0"/>
+          </a:p>
+          <a:p>
+            <a:pPr algn="l" indent="0" marL="0">
+              <a:spcAft>
+                <a:spcPts val="600"/>
+              </a:spcAft>
+              <a:buNone/>
+            </a:pPr>
+            <a:r>
+              <a:rPr lang="en-US" sz="1350" dirty="0">
+                <a:solidFill>
+                  <a:srgbClr val="33444F"/>
+                </a:solidFill>
+                <a:latin typeface="Calibri" pitchFamily="34" charset="0"/>
+                <a:ea typeface="Calibri" pitchFamily="34" charset="-122"/>
+                <a:cs typeface="Calibri" pitchFamily="34" charset="-120"/>
+              </a:rPr>
+              <a:t>E. Avoids corrective action</a:t>
+            </a:r>
+            <a:endParaRPr lang="en-US" sz="1350" dirty="0"/>
+          </a:p>
+        </p:txBody>
+      </p:sp>
+      <p:sp>
+        <p:nvSpPr>
+          <p:cNvPr id="6" name="Shape 4"/>
+          <p:cNvSpPr/>
+          <p:nvPr/>
+        </p:nvSpPr>
+        <p:spPr>
+          <a:xfrm>
+            <a:off x="7201632" y="2395728"/>
+            <a:ext cx="4423136" cy="3246120"/>
+          </a:xfrm>
+          <a:prstGeom prst="roundRect">
+            <a:avLst>
+              <a:gd name="adj" fmla="val 2535"/>
+            </a:avLst>
+          </a:prstGeom>
+          <a:solidFill>
+            <a:srgbClr val="ECEFF1"/>
+          </a:solidFill>
+          <a:ln/>
+          <a:effectLst>
+            <a:outerShdw sx="100000" sy="100000" kx="0" ky="0" algn="bl" rotWithShape="0" blurRad="88900" dist="25400" dir="5400000">
+              <a:srgbClr val="22303C">
+                <a:alpha val="12000"/>
+              </a:srgbClr>
+            </a:outerShdw>
+          </a:effectLst>
+        </p:spPr>
+        <p:txBody>
+          <a:bodyPr/>
+          <a:p/>
+        </p:txBody>
+      </p:sp>
+      <p:sp>
+        <p:nvSpPr>
+          <p:cNvPr id="7" name="Text 5"/>
+          <p:cNvSpPr/>
+          <p:nvPr/>
+        </p:nvSpPr>
+        <p:spPr>
+          <a:xfrm>
+            <a:off x="7439376" y="2578608"/>
+            <a:ext cx="3965936" cy="457200"/>
+          </a:xfrm>
+          <a:prstGeom prst="rect">
+            <a:avLst/>
+          </a:prstGeom>
+          <a:noFill/>
+          <a:ln/>
+        </p:spPr>
+        <p:txBody>
+          <a:bodyPr wrap="square" lIns="0" tIns="0" rIns="0" bIns="0" rtlCol="0" anchor="ctr"/>
+          <a:lstStyle/>
+          <a:p>
+            <a:pPr indent="0" marL="0">
+              <a:buNone/>
+            </a:pPr>
+            <a:r>
+              <a:rPr lang="en-US" sz="1500" b="1" dirty="0">
+                <a:solidFill>
+                  <a:srgbClr val="455A64"/>
+                </a:solidFill>
+                <a:latin typeface="Calibri" pitchFamily="34" charset="0"/>
+                <a:ea typeface="Calibri" pitchFamily="34" charset="-122"/>
+                <a:cs typeface="Calibri" pitchFamily="34" charset="-120"/>
+              </a:rPr>
+              <a:t>ANSWER  </a:t>
+            </a:r>
+            <a:pPr indent="0" marL="0">
+              <a:buNone/>
+            </a:pPr>
+            <a:r>
+              <a:rPr lang="en-US" sz="1500" b="1" dirty="0">
+                <a:solidFill>
+                  <a:srgbClr val="1B2A38"/>
+                </a:solidFill>
+                <a:latin typeface="Calibri" pitchFamily="34" charset="0"/>
+                <a:ea typeface="Calibri" pitchFamily="34" charset="-122"/>
+                <a:cs typeface="Calibri" pitchFamily="34" charset="-120"/>
+              </a:rPr>
+              <a:t>B — Reveals weaknesses without harm</a:t>
+            </a:r>
+            <a:endParaRPr lang="en-US" sz="1500" dirty="0"/>
+          </a:p>
+        </p:txBody>
+      </p:sp>
+      <p:sp>
+        <p:nvSpPr>
+          <p:cNvPr id="8" name="Text 6"/>
+          <p:cNvSpPr/>
+          <p:nvPr/>
+        </p:nvSpPr>
+        <p:spPr>
+          <a:xfrm>
+            <a:off x="7439376" y="3127248"/>
+            <a:ext cx="3947648" cy="2377440"/>
+          </a:xfrm>
+          <a:prstGeom prst="rect">
+            <a:avLst/>
+          </a:prstGeom>
+          <a:noFill/>
+          <a:ln/>
+        </p:spPr>
+        <p:txBody>
+          <a:bodyPr wrap="square" lIns="0" tIns="0" rIns="0" bIns="0" rtlCol="0" anchor="t"/>
+          <a:lstStyle/>
+          <a:p>
+            <a:pPr algn="l" indent="0" marL="0">
+              <a:lnSpc>
+                <a:spcPct val="108000"/>
+              </a:lnSpc>
+              <a:buNone/>
+            </a:pPr>
+            <a:r>
+              <a:rPr lang="en-US" sz="1250" dirty="0">
+                <a:solidFill>
+                  <a:srgbClr val="33444F"/>
+                </a:solidFill>
+                <a:latin typeface="Calibri" pitchFamily="34" charset="0"/>
+                <a:ea typeface="Calibri" pitchFamily="34" charset="-122"/>
+                <a:cs typeface="Calibri" pitchFamily="34" charset="-120"/>
+              </a:rPr>
+              <a:t>Near misses expose the same latent failures as adverse events but without harm, enabling proactive improvement.</a:t>
+            </a:r>
+            <a:endParaRPr lang="en-US" sz="1250" dirty="0"/>
+          </a:p>
+        </p:txBody>
+      </p:sp>
+      <p:sp>
+        <p:nvSpPr>
+          <p:cNvPr id="9" name="Text 7"/>
+          <p:cNvSpPr/>
+          <p:nvPr/>
+        </p:nvSpPr>
+        <p:spPr>
+          <a:xfrm>
+            <a:off x="566928" y="6473952"/>
+            <a:ext cx="7772400" cy="274320"/>
+          </a:xfrm>
+          <a:prstGeom prst="rect">
+            <a:avLst/>
+          </a:prstGeom>
+          <a:noFill/>
+          <a:ln/>
+        </p:spPr>
+        <p:txBody>
+          <a:bodyPr wrap="square" lIns="0" tIns="0" rIns="0" bIns="0" rtlCol="0" anchor="ctr"/>
+          <a:lstStyle/>
+          <a:p>
+            <a:pPr algn="l" indent="0" marL="0">
+              <a:buNone/>
+            </a:pPr>
+            <a:r>
+              <a:rPr lang="en-US" sz="850" dirty="0">
+                <a:solidFill>
+                  <a:srgbClr val="9AA8B4"/>
+                </a:solidFill>
+                <a:latin typeface="Calibri" pitchFamily="34" charset="0"/>
+                <a:ea typeface="Calibri" pitchFamily="34" charset="-122"/>
+                <a:cs typeface="Calibri" pitchFamily="34" charset="-120"/>
+              </a:rPr>
+              <a:t>Makassed General Hospital  ·  Department of Laboratory Medicine</a:t>
+            </a:r>
+            <a:endParaRPr lang="en-US" sz="850" dirty="0"/>
+          </a:p>
+        </p:txBody>
+      </p:sp>
+      <p:sp>
+        <p:nvSpPr>
+          <p:cNvPr id="10" name="Text 8"/>
+          <p:cNvSpPr/>
+          <p:nvPr/>
+        </p:nvSpPr>
+        <p:spPr>
+          <a:xfrm>
+            <a:off x="9814255" y="6473952"/>
+            <a:ext cx="1828800" cy="274320"/>
+          </a:xfrm>
+          <a:prstGeom prst="rect">
+            <a:avLst/>
+          </a:prstGeom>
+          <a:noFill/>
+          <a:ln/>
+        </p:spPr>
+        <p:txBody>
+          <a:bodyPr wrap="square" lIns="0" tIns="0" rIns="0" bIns="0" rtlCol="0" anchor="ctr"/>
+          <a:lstStyle/>
+          <a:p>
+            <a:pPr algn="r" indent="0" marL="0">
+              <a:buNone/>
+            </a:pPr>
+            <a:r>
+              <a:rPr lang="en-US" sz="850" dirty="0">
+                <a:solidFill>
+                  <a:srgbClr val="9AA8B4"/>
+                </a:solidFill>
+                <a:latin typeface="Calibri" pitchFamily="34" charset="0"/>
+                <a:ea typeface="Calibri" pitchFamily="34" charset="-122"/>
+                <a:cs typeface="Calibri" pitchFamily="34" charset="-120"/>
+              </a:rPr>
+              <a:t>CP Lecture Series</a:t>
+            </a:r>
+            <a:pPr algn="r" indent="0" marL="0">
+              <a:buNone/>
+            </a:pPr>
+            <a:r>
+              <a:rPr lang="en-US" sz="850" dirty="0">
+                <a:solidFill>
+                  <a:srgbClr val="DCE4EC"/>
+                </a:solidFill>
+                <a:latin typeface="Calibri" pitchFamily="34" charset="0"/>
+                <a:ea typeface="Calibri" pitchFamily="34" charset="-122"/>
+                <a:cs typeface="Calibri" pitchFamily="34" charset="-120"/>
+              </a:rPr>
+              <a:t>   ·   </a:t>
+            </a:r>
+            <a:pPr algn="r" indent="0" marL="0">
+              <a:buNone/>
+            </a:pPr>
+            <a:r>
+              <a:rPr lang="en-US" sz="850" b="1" dirty="0">
+                <a:solidFill>
+                  <a:srgbClr val="455A64"/>
+                </a:solidFill>
+                <a:latin typeface="Calibri" pitchFamily="34" charset="0"/>
+                <a:ea typeface="Calibri" pitchFamily="34" charset="-122"/>
+                <a:cs typeface="Calibri" pitchFamily="34" charset="-120"/>
+              </a:rPr>
+              <a:t>20</a:t>
+            </a:r>
+            <a:endParaRPr lang="en-US" sz="850" dirty="0"/>
+          </a:p>
+        </p:txBody>
+      </p:sp>
+    </p:spTree>
+  </p:cSld>
+  <p:clrMapOvr>
+    <a:masterClrMapping/>
+  </p:clrMapOvr>
+</p:sld>
+</file>
+
+<file path=ppt/slides/slide27.xml><?xml version="1.0" encoding="utf-8"?>
+<p:sld xmlns:a="http://schemas.openxmlformats.org/drawingml/2006/main" xmlns:p="http://schemas.openxmlformats.org/presentationml/2006/main" xmlns:r="http://schemas.openxmlformats.org/officeDocument/2006/relationships">
+  <p:cSld>
+    <p:spTree>
+      <p:nvGrpSpPr>
+        <p:cNvPr id="1" name=""/>
+        <p:cNvGrpSpPr/>
+        <p:nvPr/>
+      </p:nvGrpSpPr>
+      <p:grpSpPr/>
+      <p:sp>
+        <p:nvSpPr>
+          <p:cNvPr id="2" name="Text 0"/>
+          <p:cNvSpPr/>
+          <p:nvPr/>
+        </p:nvSpPr>
+        <p:spPr>
+          <a:xfrm>
+            <a:off x="566928" y="329184"/>
+            <a:ext cx="10515600" cy="310896"/>
+          </a:xfrm>
+          <a:prstGeom prst="rect">
+            <a:avLst/>
+          </a:prstGeom>
+          <a:noFill/>
+          <a:ln/>
+        </p:spPr>
+        <p:txBody>
+          <a:bodyPr wrap="square" lIns="0" tIns="0" rIns="0" bIns="0" rtlCol="0" anchor="ctr"/>
+          <a:lstStyle/>
+          <a:p>
+            <a:pPr algn="l" indent="0" marL="0">
+              <a:buNone/>
+            </a:pPr>
+            <a:r>
+              <a:rPr lang="en-US" sz="1100" b="1" spc="150" kern="0" dirty="0">
+                <a:solidFill>
+                  <a:srgbClr val="455A64"/>
+                </a:solidFill>
+                <a:latin typeface="Calibri" pitchFamily="34" charset="0"/>
+                <a:ea typeface="Calibri" pitchFamily="34" charset="-122"/>
+                <a:cs typeface="Calibri" pitchFamily="34" charset="-120"/>
+              </a:rPr>
+              <a:t>LAB MANAGEMENT &amp; QUALITY   ·   BOARD REVIEW  ·  Q3</a:t>
+            </a:r>
+            <a:endParaRPr lang="en-US" sz="1100" dirty="0"/>
+          </a:p>
+        </p:txBody>
+      </p:sp>
+      <p:sp>
+        <p:nvSpPr>
+          <p:cNvPr id="3" name="Text 1"/>
+          <p:cNvSpPr/>
+          <p:nvPr/>
+        </p:nvSpPr>
+        <p:spPr>
+          <a:xfrm>
+            <a:off x="566928" y="713232"/>
+            <a:ext cx="11064240" cy="749808"/>
+          </a:xfrm>
+          <a:prstGeom prst="rect">
+            <a:avLst/>
+          </a:prstGeom>
+          <a:noFill/>
+          <a:ln/>
+        </p:spPr>
+        <p:txBody>
+          <a:bodyPr wrap="square" lIns="0" tIns="0" rIns="0" bIns="0" rtlCol="0" anchor="ctr"/>
+          <a:lstStyle/>
+          <a:p>
+            <a:pPr algn="l" indent="0" marL="0">
+              <a:buNone/>
+            </a:pPr>
+            <a:r>
+              <a:rPr lang="en-US" sz="2600" b="1" dirty="0">
+                <a:solidFill>
+                  <a:srgbClr val="0E3A5F"/>
+                </a:solidFill>
+                <a:latin typeface="Calibri" pitchFamily="34" charset="0"/>
+                <a:ea typeface="Calibri" pitchFamily="34" charset="-122"/>
+                <a:cs typeface="Calibri" pitchFamily="34" charset="-120"/>
+              </a:rPr>
+              <a:t>Board-Style Review</a:t>
+            </a:r>
+            <a:endParaRPr lang="en-US" sz="2600" dirty="0"/>
+          </a:p>
+        </p:txBody>
+      </p:sp>
+      <p:sp>
+        <p:nvSpPr>
+          <p:cNvPr id="4" name="Text 2"/>
+          <p:cNvSpPr/>
+          <p:nvPr/>
+        </p:nvSpPr>
+        <p:spPr>
+          <a:xfrm>
+            <a:off x="566928" y="1417320"/>
+            <a:ext cx="11057839" cy="914400"/>
+          </a:xfrm>
+          <a:prstGeom prst="rect">
+            <a:avLst/>
+          </a:prstGeom>
+          <a:noFill/>
+          <a:ln/>
+        </p:spPr>
+        <p:txBody>
+          <a:bodyPr wrap="square" lIns="0" tIns="0" rIns="0" bIns="0" rtlCol="0" anchor="t"/>
+          <a:lstStyle/>
+          <a:p>
+            <a:pPr algn="l" indent="0" marL="0">
+              <a:lnSpc>
+                <a:spcPct val="105000"/>
+              </a:lnSpc>
+              <a:buNone/>
+            </a:pPr>
+            <a:r>
+              <a:rPr lang="en-US" sz="1450" b="1" dirty="0">
+                <a:solidFill>
+                  <a:srgbClr val="1B2A38"/>
+                </a:solidFill>
+                <a:latin typeface="Calibri" pitchFamily="34" charset="0"/>
+                <a:ea typeface="Calibri" pitchFamily="34" charset="-122"/>
+                <a:cs typeface="Calibri" pitchFamily="34" charset="-120"/>
+              </a:rPr>
+              <a:t>Under just culture, an honest mistake by a competent person in a flawed system warrants:</a:t>
+            </a:r>
+            <a:endParaRPr lang="en-US" sz="1450" dirty="0"/>
+          </a:p>
+        </p:txBody>
+      </p:sp>
+      <p:sp>
+        <p:nvSpPr>
+          <p:cNvPr id="5" name="Text 3"/>
+          <p:cNvSpPr/>
+          <p:nvPr/>
+        </p:nvSpPr>
+        <p:spPr>
+          <a:xfrm>
+            <a:off x="658368" y="2395728"/>
+            <a:ext cx="6192390" cy="3017520"/>
+          </a:xfrm>
+          <a:prstGeom prst="rect">
+            <a:avLst/>
+          </a:prstGeom>
+          <a:noFill/>
+          <a:ln/>
+        </p:spPr>
+        <p:txBody>
+          <a:bodyPr wrap="square" lIns="0" tIns="0" rIns="0" bIns="0" rtlCol="0" anchor="t"/>
+          <a:lstStyle/>
+          <a:p>
+            <a:pPr algn="l" indent="0" marL="0">
+              <a:spcAft>
+                <a:spcPts val="600"/>
+              </a:spcAft>
+              <a:buNone/>
+            </a:pPr>
+            <a:r>
+              <a:rPr lang="en-US" sz="1350" dirty="0">
+                <a:solidFill>
+                  <a:srgbClr val="33444F"/>
+                </a:solidFill>
+                <a:latin typeface="Calibri" pitchFamily="34" charset="0"/>
+                <a:ea typeface="Calibri" pitchFamily="34" charset="-122"/>
+                <a:cs typeface="Calibri" pitchFamily="34" charset="-120"/>
+              </a:rPr>
+              <a:t>A. Discipline</a:t>
+            </a:r>
+            <a:endParaRPr lang="en-US" sz="1350" dirty="0"/>
+          </a:p>
+          <a:p>
+            <a:pPr algn="l" indent="0" marL="0">
+              <a:spcAft>
+                <a:spcPts val="600"/>
+              </a:spcAft>
+              <a:buNone/>
+            </a:pPr>
+            <a:r>
+              <a:rPr lang="en-US" sz="1350" b="1" dirty="0">
+                <a:solidFill>
+                  <a:srgbClr val="2C3A41"/>
+                </a:solidFill>
+                <a:latin typeface="Calibri" pitchFamily="34" charset="0"/>
+                <a:ea typeface="Calibri" pitchFamily="34" charset="-122"/>
+                <a:cs typeface="Calibri" pitchFamily="34" charset="-120"/>
+              </a:rPr>
+              <a:t>B. Consoling the individual and fixing the system</a:t>
+            </a:r>
+            <a:endParaRPr lang="en-US" sz="1350" dirty="0"/>
+          </a:p>
+          <a:p>
+            <a:pPr algn="l" indent="0" marL="0">
+              <a:spcAft>
+                <a:spcPts val="600"/>
+              </a:spcAft>
+              <a:buNone/>
+            </a:pPr>
+            <a:r>
+              <a:rPr lang="en-US" sz="1350" dirty="0">
+                <a:solidFill>
+                  <a:srgbClr val="33444F"/>
+                </a:solidFill>
+                <a:latin typeface="Calibri" pitchFamily="34" charset="0"/>
+                <a:ea typeface="Calibri" pitchFamily="34" charset="-122"/>
+                <a:cs typeface="Calibri" pitchFamily="34" charset="-120"/>
+              </a:rPr>
+              <a:t>C. Termination</a:t>
+            </a:r>
+            <a:endParaRPr lang="en-US" sz="1350" dirty="0"/>
+          </a:p>
+          <a:p>
+            <a:pPr algn="l" indent="0" marL="0">
+              <a:spcAft>
+                <a:spcPts val="600"/>
+              </a:spcAft>
+              <a:buNone/>
+            </a:pPr>
+            <a:r>
+              <a:rPr lang="en-US" sz="1350" dirty="0">
+                <a:solidFill>
+                  <a:srgbClr val="33444F"/>
+                </a:solidFill>
+                <a:latin typeface="Calibri" pitchFamily="34" charset="0"/>
+                <a:ea typeface="Calibri" pitchFamily="34" charset="-122"/>
+                <a:cs typeface="Calibri" pitchFamily="34" charset="-120"/>
+              </a:rPr>
+              <a:t>D. Ignoring it</a:t>
+            </a:r>
+            <a:endParaRPr lang="en-US" sz="1350" dirty="0"/>
+          </a:p>
+          <a:p>
+            <a:pPr algn="l" indent="0" marL="0">
+              <a:spcAft>
+                <a:spcPts val="600"/>
+              </a:spcAft>
+              <a:buNone/>
+            </a:pPr>
+            <a:r>
+              <a:rPr lang="en-US" sz="1350" dirty="0">
+                <a:solidFill>
+                  <a:srgbClr val="33444F"/>
+                </a:solidFill>
+                <a:latin typeface="Calibri" pitchFamily="34" charset="0"/>
+                <a:ea typeface="Calibri" pitchFamily="34" charset="-122"/>
+                <a:cs typeface="Calibri" pitchFamily="34" charset="-120"/>
+              </a:rPr>
+              <a:t>E. A public warning</a:t>
+            </a:r>
+            <a:endParaRPr lang="en-US" sz="1350" dirty="0"/>
+          </a:p>
+        </p:txBody>
+      </p:sp>
+      <p:sp>
+        <p:nvSpPr>
+          <p:cNvPr id="6" name="Shape 4"/>
+          <p:cNvSpPr/>
+          <p:nvPr/>
+        </p:nvSpPr>
+        <p:spPr>
+          <a:xfrm>
+            <a:off x="7201632" y="2395728"/>
+            <a:ext cx="4423136" cy="3246120"/>
+          </a:xfrm>
+          <a:prstGeom prst="roundRect">
+            <a:avLst>
+              <a:gd name="adj" fmla="val 2535"/>
+            </a:avLst>
+          </a:prstGeom>
+          <a:solidFill>
+            <a:srgbClr val="ECEFF1"/>
+          </a:solidFill>
+          <a:ln/>
+          <a:effectLst>
+            <a:outerShdw sx="100000" sy="100000" kx="0" ky="0" algn="bl" rotWithShape="0" blurRad="88900" dist="25400" dir="5400000">
+              <a:srgbClr val="22303C">
+                <a:alpha val="12000"/>
+              </a:srgbClr>
+            </a:outerShdw>
+          </a:effectLst>
+        </p:spPr>
+        <p:txBody>
+          <a:bodyPr/>
+          <a:p/>
+        </p:txBody>
+      </p:sp>
+      <p:sp>
+        <p:nvSpPr>
+          <p:cNvPr id="7" name="Text 5"/>
+          <p:cNvSpPr/>
+          <p:nvPr/>
+        </p:nvSpPr>
+        <p:spPr>
+          <a:xfrm>
+            <a:off x="7439376" y="2578608"/>
+            <a:ext cx="3965936" cy="457200"/>
+          </a:xfrm>
+          <a:prstGeom prst="rect">
+            <a:avLst/>
+          </a:prstGeom>
+          <a:noFill/>
+          <a:ln/>
+        </p:spPr>
+        <p:txBody>
+          <a:bodyPr wrap="square" lIns="0" tIns="0" rIns="0" bIns="0" rtlCol="0" anchor="ctr"/>
+          <a:lstStyle/>
+          <a:p>
+            <a:pPr indent="0" marL="0">
+              <a:buNone/>
+            </a:pPr>
+            <a:r>
+              <a:rPr lang="en-US" sz="1500" b="1" dirty="0">
+                <a:solidFill>
+                  <a:srgbClr val="455A64"/>
+                </a:solidFill>
+                <a:latin typeface="Calibri" pitchFamily="34" charset="0"/>
+                <a:ea typeface="Calibri" pitchFamily="34" charset="-122"/>
+                <a:cs typeface="Calibri" pitchFamily="34" charset="-120"/>
+              </a:rPr>
+              <a:t>ANSWER  </a:t>
+            </a:r>
+            <a:pPr indent="0" marL="0">
+              <a:buNone/>
+            </a:pPr>
+            <a:r>
+              <a:rPr lang="en-US" sz="1500" b="1" dirty="0">
+                <a:solidFill>
+                  <a:srgbClr val="1B2A38"/>
+                </a:solidFill>
+                <a:latin typeface="Calibri" pitchFamily="34" charset="0"/>
+                <a:ea typeface="Calibri" pitchFamily="34" charset="-122"/>
+                <a:cs typeface="Calibri" pitchFamily="34" charset="-120"/>
+              </a:rPr>
+              <a:t>B — Console + fix the system</a:t>
+            </a:r>
+            <a:endParaRPr lang="en-US" sz="1500" dirty="0"/>
+          </a:p>
+        </p:txBody>
+      </p:sp>
+      <p:sp>
+        <p:nvSpPr>
+          <p:cNvPr id="8" name="Text 6"/>
+          <p:cNvSpPr/>
+          <p:nvPr/>
+        </p:nvSpPr>
+        <p:spPr>
+          <a:xfrm>
+            <a:off x="7439376" y="3127248"/>
+            <a:ext cx="3947648" cy="2377440"/>
+          </a:xfrm>
+          <a:prstGeom prst="rect">
+            <a:avLst/>
+          </a:prstGeom>
+          <a:noFill/>
+          <a:ln/>
+        </p:spPr>
+        <p:txBody>
+          <a:bodyPr wrap="square" lIns="0" tIns="0" rIns="0" bIns="0" rtlCol="0" anchor="t"/>
+          <a:lstStyle/>
+          <a:p>
+            <a:pPr algn="l" indent="0" marL="0">
+              <a:lnSpc>
+                <a:spcPct val="108000"/>
+              </a:lnSpc>
+              <a:buNone/>
+            </a:pPr>
+            <a:r>
+              <a:rPr lang="en-US" sz="1250" dirty="0">
+                <a:solidFill>
+                  <a:srgbClr val="33444F"/>
+                </a:solidFill>
+                <a:latin typeface="Calibri" pitchFamily="34" charset="0"/>
+                <a:ea typeface="Calibri" pitchFamily="34" charset="-122"/>
+                <a:cs typeface="Calibri" pitchFamily="34" charset="-120"/>
+              </a:rPr>
+              <a:t>Just culture consoles human error, coaches at-risk behavior, and reserves discipline for recklessness.</a:t>
+            </a:r>
+            <a:endParaRPr lang="en-US" sz="1250" dirty="0"/>
+          </a:p>
+        </p:txBody>
+      </p:sp>
+      <p:sp>
+        <p:nvSpPr>
+          <p:cNvPr id="9" name="Text 7"/>
+          <p:cNvSpPr/>
+          <p:nvPr/>
+        </p:nvSpPr>
+        <p:spPr>
+          <a:xfrm>
+            <a:off x="566928" y="6473952"/>
+            <a:ext cx="7772400" cy="274320"/>
+          </a:xfrm>
+          <a:prstGeom prst="rect">
+            <a:avLst/>
+          </a:prstGeom>
+          <a:noFill/>
+          <a:ln/>
+        </p:spPr>
+        <p:txBody>
+          <a:bodyPr wrap="square" lIns="0" tIns="0" rIns="0" bIns="0" rtlCol="0" anchor="ctr"/>
+          <a:lstStyle/>
+          <a:p>
+            <a:pPr algn="l" indent="0" marL="0">
+              <a:buNone/>
+            </a:pPr>
+            <a:r>
+              <a:rPr lang="en-US" sz="850" dirty="0">
+                <a:solidFill>
+                  <a:srgbClr val="9AA8B4"/>
+                </a:solidFill>
+                <a:latin typeface="Calibri" pitchFamily="34" charset="0"/>
+                <a:ea typeface="Calibri" pitchFamily="34" charset="-122"/>
+                <a:cs typeface="Calibri" pitchFamily="34" charset="-120"/>
+              </a:rPr>
+              <a:t>Makassed General Hospital  ·  Department of Laboratory Medicine</a:t>
+            </a:r>
+            <a:endParaRPr lang="en-US" sz="850" dirty="0"/>
+          </a:p>
+        </p:txBody>
+      </p:sp>
+      <p:sp>
+        <p:nvSpPr>
+          <p:cNvPr id="10" name="Text 8"/>
+          <p:cNvSpPr/>
+          <p:nvPr/>
+        </p:nvSpPr>
+        <p:spPr>
+          <a:xfrm>
+            <a:off x="9814255" y="6473952"/>
+            <a:ext cx="1828800" cy="274320"/>
+          </a:xfrm>
+          <a:prstGeom prst="rect">
+            <a:avLst/>
+          </a:prstGeom>
+          <a:noFill/>
+          <a:ln/>
+        </p:spPr>
+        <p:txBody>
+          <a:bodyPr wrap="square" lIns="0" tIns="0" rIns="0" bIns="0" rtlCol="0" anchor="ctr"/>
+          <a:lstStyle/>
+          <a:p>
+            <a:pPr algn="r" indent="0" marL="0">
+              <a:buNone/>
+            </a:pPr>
+            <a:r>
+              <a:rPr lang="en-US" sz="850" dirty="0">
+                <a:solidFill>
+                  <a:srgbClr val="9AA8B4"/>
+                </a:solidFill>
+                <a:latin typeface="Calibri" pitchFamily="34" charset="0"/>
+                <a:ea typeface="Calibri" pitchFamily="34" charset="-122"/>
+                <a:cs typeface="Calibri" pitchFamily="34" charset="-120"/>
+              </a:rPr>
+              <a:t>CP Lecture Series</a:t>
+            </a:r>
+            <a:pPr algn="r" indent="0" marL="0">
+              <a:buNone/>
+            </a:pPr>
+            <a:r>
+              <a:rPr lang="en-US" sz="850" dirty="0">
+                <a:solidFill>
+                  <a:srgbClr val="DCE4EC"/>
+                </a:solidFill>
+                <a:latin typeface="Calibri" pitchFamily="34" charset="0"/>
+                <a:ea typeface="Calibri" pitchFamily="34" charset="-122"/>
+                <a:cs typeface="Calibri" pitchFamily="34" charset="-120"/>
+              </a:rPr>
+              <a:t>   ·   </a:t>
+            </a:r>
+            <a:pPr algn="r" indent="0" marL="0">
+              <a:buNone/>
+            </a:pPr>
+            <a:r>
+              <a:rPr lang="en-US" sz="850" b="1" dirty="0">
+                <a:solidFill>
+                  <a:srgbClr val="455A64"/>
+                </a:solidFill>
+                <a:latin typeface="Calibri" pitchFamily="34" charset="0"/>
+                <a:ea typeface="Calibri" pitchFamily="34" charset="-122"/>
+                <a:cs typeface="Calibri" pitchFamily="34" charset="-120"/>
+              </a:rPr>
+              <a:t>19</a:t>
+            </a:r>
+            <a:endParaRPr lang="en-US" sz="850" dirty="0"/>
+          </a:p>
+        </p:txBody>
+      </p:sp>
+    </p:spTree>
+  </p:cSld>
+  <p:clrMapOvr>
+    <a:masterClrMapping/>
+  </p:clrMapOvr>
+</p:sld>
+</file>
+
+<file path=ppt/slides/slide28.xml><?xml version="1.0" encoding="utf-8"?>
+<p:sld xmlns:a="http://schemas.openxmlformats.org/drawingml/2006/main" xmlns:p="http://schemas.openxmlformats.org/presentationml/2006/main" xmlns:r="http://schemas.openxmlformats.org/officeDocument/2006/relationships">
+  <p:cSld>
+    <p:spTree>
+      <p:nvGrpSpPr>
+        <p:cNvPr id="1" name=""/>
+        <p:cNvGrpSpPr/>
+        <p:nvPr/>
+      </p:nvGrpSpPr>
+      <p:grpSpPr/>
+      <p:sp>
+        <p:nvSpPr>
+          <p:cNvPr id="2" name="Text 0"/>
+          <p:cNvSpPr/>
+          <p:nvPr/>
+        </p:nvSpPr>
+        <p:spPr>
+          <a:xfrm>
+            <a:off x="566928" y="329184"/>
+            <a:ext cx="10515600" cy="310896"/>
+          </a:xfrm>
+          <a:prstGeom prst="rect">
+            <a:avLst/>
+          </a:prstGeom>
+          <a:noFill/>
+          <a:ln/>
+        </p:spPr>
+        <p:txBody>
+          <a:bodyPr wrap="square" lIns="0" tIns="0" rIns="0" bIns="0" rtlCol="0" anchor="ctr"/>
+          <a:lstStyle/>
+          <a:p>
+            <a:pPr algn="l" indent="0" marL="0">
+              <a:buNone/>
+            </a:pPr>
+            <a:r>
+              <a:rPr lang="en-US" sz="1100" b="1" spc="150" kern="0" dirty="0">
+                <a:solidFill>
+                  <a:srgbClr val="455A64"/>
+                </a:solidFill>
+                <a:latin typeface="Calibri" pitchFamily="34" charset="0"/>
+                <a:ea typeface="Calibri" pitchFamily="34" charset="-122"/>
+                <a:cs typeface="Calibri" pitchFamily="34" charset="-120"/>
+              </a:rPr>
+              <a:t>LAB MANAGEMENT &amp; QUALITY   ·   BOARD REVIEW  ·  Q2</a:t>
+            </a:r>
+            <a:endParaRPr lang="en-US" sz="1100" dirty="0"/>
+          </a:p>
+        </p:txBody>
+      </p:sp>
+      <p:sp>
+        <p:nvSpPr>
+          <p:cNvPr id="3" name="Text 1"/>
+          <p:cNvSpPr/>
+          <p:nvPr/>
+        </p:nvSpPr>
+        <p:spPr>
+          <a:xfrm>
+            <a:off x="566928" y="713232"/>
+            <a:ext cx="11064240" cy="749808"/>
+          </a:xfrm>
+          <a:prstGeom prst="rect">
+            <a:avLst/>
+          </a:prstGeom>
+          <a:noFill/>
+          <a:ln/>
+        </p:spPr>
+        <p:txBody>
+          <a:bodyPr wrap="square" lIns="0" tIns="0" rIns="0" bIns="0" rtlCol="0" anchor="ctr"/>
+          <a:lstStyle/>
+          <a:p>
+            <a:pPr algn="l" indent="0" marL="0">
+              <a:buNone/>
+            </a:pPr>
+            <a:r>
+              <a:rPr lang="en-US" sz="2600" b="1" dirty="0">
+                <a:solidFill>
+                  <a:srgbClr val="0E3A5F"/>
+                </a:solidFill>
+                <a:latin typeface="Calibri" pitchFamily="34" charset="0"/>
+                <a:ea typeface="Calibri" pitchFamily="34" charset="-122"/>
+                <a:cs typeface="Calibri" pitchFamily="34" charset="-120"/>
+              </a:rPr>
+              <a:t>Board-Style Review</a:t>
+            </a:r>
+            <a:endParaRPr lang="en-US" sz="2600" dirty="0"/>
+          </a:p>
+        </p:txBody>
+      </p:sp>
+      <p:sp>
+        <p:nvSpPr>
+          <p:cNvPr id="4" name="Text 2"/>
+          <p:cNvSpPr/>
+          <p:nvPr/>
+        </p:nvSpPr>
+        <p:spPr>
+          <a:xfrm>
+            <a:off x="566928" y="1417320"/>
+            <a:ext cx="11057839" cy="914400"/>
+          </a:xfrm>
+          <a:prstGeom prst="rect">
+            <a:avLst/>
+          </a:prstGeom>
+          <a:noFill/>
+          <a:ln/>
+        </p:spPr>
+        <p:txBody>
+          <a:bodyPr wrap="square" lIns="0" tIns="0" rIns="0" bIns="0" rtlCol="0" anchor="t"/>
+          <a:lstStyle/>
+          <a:p>
+            <a:pPr algn="l" indent="0" marL="0">
+              <a:lnSpc>
+                <a:spcPct val="105000"/>
+              </a:lnSpc>
+              <a:buNone/>
+            </a:pPr>
+            <a:r>
+              <a:rPr lang="en-US" sz="1450" b="1" dirty="0">
+                <a:solidFill>
+                  <a:srgbClr val="1B2A38"/>
+                </a:solidFill>
+                <a:latin typeface="Calibri" pitchFamily="34" charset="0"/>
+                <a:ea typeface="Calibri" pitchFamily="34" charset="-122"/>
+                <a:cs typeface="Calibri" pitchFamily="34" charset="-120"/>
+              </a:rPr>
+              <a:t>Which is the STRONGEST type of corrective action?</a:t>
+            </a:r>
+            <a:endParaRPr lang="en-US" sz="1450" dirty="0"/>
+          </a:p>
+        </p:txBody>
+      </p:sp>
+      <p:sp>
+        <p:nvSpPr>
+          <p:cNvPr id="5" name="Text 3"/>
+          <p:cNvSpPr/>
+          <p:nvPr/>
+        </p:nvSpPr>
+        <p:spPr>
+          <a:xfrm>
+            <a:off x="658368" y="2395728"/>
+            <a:ext cx="6192390" cy="3017520"/>
+          </a:xfrm>
+          <a:prstGeom prst="rect">
+            <a:avLst/>
+          </a:prstGeom>
+          <a:noFill/>
+          <a:ln/>
+        </p:spPr>
+        <p:txBody>
+          <a:bodyPr wrap="square" lIns="0" tIns="0" rIns="0" bIns="0" rtlCol="0" anchor="t"/>
+          <a:lstStyle/>
+          <a:p>
+            <a:pPr algn="l" indent="0" marL="0">
+              <a:spcAft>
+                <a:spcPts val="600"/>
+              </a:spcAft>
+              <a:buNone/>
+            </a:pPr>
+            <a:r>
+              <a:rPr lang="en-US" sz="1350" dirty="0">
+                <a:solidFill>
+                  <a:srgbClr val="33444F"/>
+                </a:solidFill>
+                <a:latin typeface="Calibri" pitchFamily="34" charset="0"/>
+                <a:ea typeface="Calibri" pitchFamily="34" charset="-122"/>
+                <a:cs typeface="Calibri" pitchFamily="34" charset="-120"/>
+              </a:rPr>
+              <a:t>A. Staff reminder</a:t>
+            </a:r>
+            <a:endParaRPr lang="en-US" sz="1350" dirty="0"/>
+          </a:p>
+          <a:p>
+            <a:pPr algn="l" indent="0" marL="0">
+              <a:spcAft>
+                <a:spcPts val="600"/>
+              </a:spcAft>
+              <a:buNone/>
+            </a:pPr>
+            <a:r>
+              <a:rPr lang="en-US" sz="1350" dirty="0">
+                <a:solidFill>
+                  <a:srgbClr val="33444F"/>
+                </a:solidFill>
+                <a:latin typeface="Calibri" pitchFamily="34" charset="0"/>
+                <a:ea typeface="Calibri" pitchFamily="34" charset="-122"/>
+                <a:cs typeface="Calibri" pitchFamily="34" charset="-120"/>
+              </a:rPr>
+              <a:t>B. Additional training</a:t>
+            </a:r>
+            <a:endParaRPr lang="en-US" sz="1350" dirty="0"/>
+          </a:p>
+          <a:p>
+            <a:pPr algn="l" indent="0" marL="0">
+              <a:spcAft>
+                <a:spcPts val="600"/>
+              </a:spcAft>
+              <a:buNone/>
+            </a:pPr>
+            <a:r>
+              <a:rPr lang="en-US" sz="1350" b="1" dirty="0">
+                <a:solidFill>
+                  <a:srgbClr val="2C3A41"/>
+                </a:solidFill>
+                <a:latin typeface="Calibri" pitchFamily="34" charset="0"/>
+                <a:ea typeface="Calibri" pitchFamily="34" charset="-122"/>
+                <a:cs typeface="Calibri" pitchFamily="34" charset="-120"/>
+              </a:rPr>
+              <a:t>C. A forcing function / automation</a:t>
+            </a:r>
+            <a:endParaRPr lang="en-US" sz="1350" dirty="0"/>
+          </a:p>
+          <a:p>
+            <a:pPr algn="l" indent="0" marL="0">
+              <a:spcAft>
+                <a:spcPts val="600"/>
+              </a:spcAft>
+              <a:buNone/>
+            </a:pPr>
+            <a:r>
+              <a:rPr lang="en-US" sz="1350" dirty="0">
+                <a:solidFill>
+                  <a:srgbClr val="33444F"/>
+                </a:solidFill>
+                <a:latin typeface="Calibri" pitchFamily="34" charset="0"/>
+                <a:ea typeface="Calibri" pitchFamily="34" charset="-122"/>
+                <a:cs typeface="Calibri" pitchFamily="34" charset="-120"/>
+              </a:rPr>
+              <a:t>D. A new policy memo</a:t>
+            </a:r>
+            <a:endParaRPr lang="en-US" sz="1350" dirty="0"/>
+          </a:p>
+          <a:p>
+            <a:pPr algn="l" indent="0" marL="0">
+              <a:spcAft>
+                <a:spcPts val="600"/>
+              </a:spcAft>
+              <a:buNone/>
+            </a:pPr>
+            <a:r>
+              <a:rPr lang="en-US" sz="1350" dirty="0">
+                <a:solidFill>
+                  <a:srgbClr val="33444F"/>
+                </a:solidFill>
+                <a:latin typeface="Calibri" pitchFamily="34" charset="0"/>
+                <a:ea typeface="Calibri" pitchFamily="34" charset="-122"/>
+                <a:cs typeface="Calibri" pitchFamily="34" charset="-120"/>
+              </a:rPr>
+              <a:t>E. Increased vigilance</a:t>
+            </a:r>
+            <a:endParaRPr lang="en-US" sz="1350" dirty="0"/>
+          </a:p>
+        </p:txBody>
+      </p:sp>
+      <p:sp>
+        <p:nvSpPr>
+          <p:cNvPr id="6" name="Shape 4"/>
+          <p:cNvSpPr/>
+          <p:nvPr/>
+        </p:nvSpPr>
+        <p:spPr>
+          <a:xfrm>
+            <a:off x="7201632" y="2395728"/>
+            <a:ext cx="4423136" cy="3246120"/>
+          </a:xfrm>
+          <a:prstGeom prst="roundRect">
+            <a:avLst>
+              <a:gd name="adj" fmla="val 2535"/>
+            </a:avLst>
+          </a:prstGeom>
+          <a:solidFill>
+            <a:srgbClr val="ECEFF1"/>
+          </a:solidFill>
+          <a:ln/>
+          <a:effectLst>
+            <a:outerShdw sx="100000" sy="100000" kx="0" ky="0" algn="bl" rotWithShape="0" blurRad="88900" dist="25400" dir="5400000">
+              <a:srgbClr val="22303C">
+                <a:alpha val="12000"/>
+              </a:srgbClr>
+            </a:outerShdw>
+          </a:effectLst>
+        </p:spPr>
+        <p:txBody>
+          <a:bodyPr/>
+          <a:p/>
+        </p:txBody>
+      </p:sp>
+      <p:sp>
+        <p:nvSpPr>
+          <p:cNvPr id="7" name="Text 5"/>
+          <p:cNvSpPr/>
+          <p:nvPr/>
+        </p:nvSpPr>
+        <p:spPr>
+          <a:xfrm>
+            <a:off x="7439376" y="2578608"/>
+            <a:ext cx="3965936" cy="457200"/>
+          </a:xfrm>
+          <a:prstGeom prst="rect">
+            <a:avLst/>
+          </a:prstGeom>
+          <a:noFill/>
+          <a:ln/>
+        </p:spPr>
+        <p:txBody>
+          <a:bodyPr wrap="square" lIns="0" tIns="0" rIns="0" bIns="0" rtlCol="0" anchor="ctr"/>
+          <a:lstStyle/>
+          <a:p>
+            <a:pPr indent="0" marL="0">
+              <a:buNone/>
+            </a:pPr>
+            <a:r>
+              <a:rPr lang="en-US" sz="1500" b="1" dirty="0">
+                <a:solidFill>
+                  <a:srgbClr val="455A64"/>
+                </a:solidFill>
+                <a:latin typeface="Calibri" pitchFamily="34" charset="0"/>
+                <a:ea typeface="Calibri" pitchFamily="34" charset="-122"/>
+                <a:cs typeface="Calibri" pitchFamily="34" charset="-120"/>
+              </a:rPr>
+              <a:t>ANSWER  </a:t>
+            </a:r>
+            <a:pPr indent="0" marL="0">
+              <a:buNone/>
+            </a:pPr>
+            <a:r>
+              <a:rPr lang="en-US" sz="1500" b="1" dirty="0">
+                <a:solidFill>
+                  <a:srgbClr val="1B2A38"/>
+                </a:solidFill>
+                <a:latin typeface="Calibri" pitchFamily="34" charset="0"/>
+                <a:ea typeface="Calibri" pitchFamily="34" charset="-122"/>
+                <a:cs typeface="Calibri" pitchFamily="34" charset="-120"/>
+              </a:rPr>
+              <a:t>C — Forcing function/automation</a:t>
+            </a:r>
+            <a:endParaRPr lang="en-US" sz="1500" dirty="0"/>
+          </a:p>
+        </p:txBody>
+      </p:sp>
+      <p:sp>
+        <p:nvSpPr>
+          <p:cNvPr id="8" name="Text 6"/>
+          <p:cNvSpPr/>
+          <p:nvPr/>
+        </p:nvSpPr>
+        <p:spPr>
+          <a:xfrm>
+            <a:off x="7439376" y="3127248"/>
+            <a:ext cx="3947648" cy="2377440"/>
+          </a:xfrm>
+          <a:prstGeom prst="rect">
+            <a:avLst/>
+          </a:prstGeom>
+          <a:noFill/>
+          <a:ln/>
+        </p:spPr>
+        <p:txBody>
+          <a:bodyPr wrap="square" lIns="0" tIns="0" rIns="0" bIns="0" rtlCol="0" anchor="t"/>
+          <a:lstStyle/>
+          <a:p>
+            <a:pPr algn="l" indent="0" marL="0">
+              <a:lnSpc>
+                <a:spcPct val="108000"/>
+              </a:lnSpc>
+              <a:buNone/>
+            </a:pPr>
+            <a:r>
+              <a:rPr lang="en-US" sz="1250" dirty="0">
+                <a:solidFill>
+                  <a:srgbClr val="33444F"/>
+                </a:solidFill>
+                <a:latin typeface="Calibri" pitchFamily="34" charset="0"/>
+                <a:ea typeface="Calibri" pitchFamily="34" charset="-122"/>
+                <a:cs typeface="Calibri" pitchFamily="34" charset="-120"/>
+              </a:rPr>
+              <a:t>Strong interventions remove reliance on memory and vigilance; reminders and training are weak by comparison.</a:t>
+            </a:r>
+            <a:endParaRPr lang="en-US" sz="1250" dirty="0"/>
+          </a:p>
+        </p:txBody>
+      </p:sp>
+      <p:sp>
+        <p:nvSpPr>
+          <p:cNvPr id="9" name="Text 7"/>
+          <p:cNvSpPr/>
+          <p:nvPr/>
+        </p:nvSpPr>
+        <p:spPr>
+          <a:xfrm>
+            <a:off x="566928" y="6473952"/>
+            <a:ext cx="7772400" cy="274320"/>
+          </a:xfrm>
+          <a:prstGeom prst="rect">
+            <a:avLst/>
+          </a:prstGeom>
+          <a:noFill/>
+          <a:ln/>
+        </p:spPr>
+        <p:txBody>
+          <a:bodyPr wrap="square" lIns="0" tIns="0" rIns="0" bIns="0" rtlCol="0" anchor="ctr"/>
+          <a:lstStyle/>
+          <a:p>
+            <a:pPr algn="l" indent="0" marL="0">
+              <a:buNone/>
+            </a:pPr>
+            <a:r>
+              <a:rPr lang="en-US" sz="850" dirty="0">
+                <a:solidFill>
+                  <a:srgbClr val="9AA8B4"/>
+                </a:solidFill>
+                <a:latin typeface="Calibri" pitchFamily="34" charset="0"/>
+                <a:ea typeface="Calibri" pitchFamily="34" charset="-122"/>
+                <a:cs typeface="Calibri" pitchFamily="34" charset="-120"/>
+              </a:rPr>
+              <a:t>Makassed General Hospital  ·  Department of Laboratory Medicine</a:t>
+            </a:r>
+            <a:endParaRPr lang="en-US" sz="850" dirty="0"/>
+          </a:p>
+        </p:txBody>
+      </p:sp>
+      <p:sp>
+        <p:nvSpPr>
+          <p:cNvPr id="10" name="Text 8"/>
+          <p:cNvSpPr/>
+          <p:nvPr/>
+        </p:nvSpPr>
+        <p:spPr>
+          <a:xfrm>
+            <a:off x="9814255" y="6473952"/>
+            <a:ext cx="1828800" cy="274320"/>
+          </a:xfrm>
+          <a:prstGeom prst="rect">
+            <a:avLst/>
+          </a:prstGeom>
+          <a:noFill/>
+          <a:ln/>
+        </p:spPr>
+        <p:txBody>
+          <a:bodyPr wrap="square" lIns="0" tIns="0" rIns="0" bIns="0" rtlCol="0" anchor="ctr"/>
+          <a:lstStyle/>
+          <a:p>
+            <a:pPr algn="r" indent="0" marL="0">
+              <a:buNone/>
+            </a:pPr>
+            <a:r>
+              <a:rPr lang="en-US" sz="850" dirty="0">
+                <a:solidFill>
+                  <a:srgbClr val="9AA8B4"/>
+                </a:solidFill>
+                <a:latin typeface="Calibri" pitchFamily="34" charset="0"/>
+                <a:ea typeface="Calibri" pitchFamily="34" charset="-122"/>
+                <a:cs typeface="Calibri" pitchFamily="34" charset="-120"/>
+              </a:rPr>
+              <a:t>CP Lecture Series</a:t>
+            </a:r>
+            <a:pPr algn="r" indent="0" marL="0">
+              <a:buNone/>
+            </a:pPr>
+            <a:r>
+              <a:rPr lang="en-US" sz="850" dirty="0">
+                <a:solidFill>
+                  <a:srgbClr val="DCE4EC"/>
+                </a:solidFill>
+                <a:latin typeface="Calibri" pitchFamily="34" charset="0"/>
+                <a:ea typeface="Calibri" pitchFamily="34" charset="-122"/>
+                <a:cs typeface="Calibri" pitchFamily="34" charset="-120"/>
+              </a:rPr>
+              <a:t>   ·   </a:t>
+            </a:r>
+            <a:pPr algn="r" indent="0" marL="0">
+              <a:buNone/>
+            </a:pPr>
+            <a:r>
+              <a:rPr lang="en-US" sz="850" b="1" dirty="0">
+                <a:solidFill>
+                  <a:srgbClr val="455A64"/>
+                </a:solidFill>
+                <a:latin typeface="Calibri" pitchFamily="34" charset="0"/>
+                <a:ea typeface="Calibri" pitchFamily="34" charset="-122"/>
+                <a:cs typeface="Calibri" pitchFamily="34" charset="-120"/>
+              </a:rPr>
+              <a:t>18</a:t>
+            </a:r>
+            <a:endParaRPr lang="en-US" sz="850" dirty="0"/>
+          </a:p>
+        </p:txBody>
+      </p:sp>
+    </p:spTree>
+  </p:cSld>
+  <p:clrMapOvr>
+    <a:masterClrMapping/>
+  </p:clrMapOvr>
+</p:sld>
+</file>
+
+<file path=ppt/slides/slide29.xml><?xml version="1.0" encoding="utf-8"?>
+<p:sld xmlns:a="http://schemas.openxmlformats.org/drawingml/2006/main" xmlns:p="http://schemas.openxmlformats.org/presentationml/2006/main" xmlns:r="http://schemas.openxmlformats.org/officeDocument/2006/relationships">
+  <p:cSld>
+    <p:spTree>
+      <p:nvGrpSpPr>
+        <p:cNvPr id="1" name=""/>
+        <p:cNvGrpSpPr/>
+        <p:nvPr/>
+      </p:nvGrpSpPr>
+      <p:grpSpPr/>
+      <p:sp>
+        <p:nvSpPr>
+          <p:cNvPr id="2" name="Text 0"/>
+          <p:cNvSpPr/>
+          <p:nvPr/>
+        </p:nvSpPr>
+        <p:spPr>
+          <a:xfrm>
+            <a:off x="566928" y="329184"/>
+            <a:ext cx="10515600" cy="310896"/>
+          </a:xfrm>
+          <a:prstGeom prst="rect">
+            <a:avLst/>
+          </a:prstGeom>
+          <a:noFill/>
+          <a:ln/>
+        </p:spPr>
+        <p:txBody>
+          <a:bodyPr wrap="square" lIns="0" tIns="0" rIns="0" bIns="0" rtlCol="0" anchor="ctr"/>
+          <a:lstStyle/>
+          <a:p>
+            <a:pPr algn="l" indent="0" marL="0">
+              <a:buNone/>
+            </a:pPr>
+            <a:r>
+              <a:rPr lang="en-US" sz="1100" b="1" spc="150" kern="0" dirty="0">
+                <a:solidFill>
+                  <a:srgbClr val="455A64"/>
+                </a:solidFill>
+                <a:latin typeface="Calibri" pitchFamily="34" charset="0"/>
+                <a:ea typeface="Calibri" pitchFamily="34" charset="-122"/>
+                <a:cs typeface="Calibri" pitchFamily="34" charset="-120"/>
+              </a:rPr>
+              <a:t>LAB MANAGEMENT &amp; QUALITY   ·   BOARD REVIEW  ·  Q1</a:t>
+            </a:r>
+            <a:endParaRPr lang="en-US" sz="1100" dirty="0"/>
+          </a:p>
+        </p:txBody>
+      </p:sp>
+      <p:sp>
+        <p:nvSpPr>
+          <p:cNvPr id="3" name="Text 1"/>
+          <p:cNvSpPr/>
+          <p:nvPr/>
+        </p:nvSpPr>
+        <p:spPr>
+          <a:xfrm>
+            <a:off x="566928" y="713232"/>
+            <a:ext cx="11064240" cy="749808"/>
+          </a:xfrm>
+          <a:prstGeom prst="rect">
+            <a:avLst/>
+          </a:prstGeom>
+          <a:noFill/>
+          <a:ln/>
+        </p:spPr>
+        <p:txBody>
+          <a:bodyPr wrap="square" lIns="0" tIns="0" rIns="0" bIns="0" rtlCol="0" anchor="ctr"/>
+          <a:lstStyle/>
+          <a:p>
+            <a:pPr algn="l" indent="0" marL="0">
+              <a:buNone/>
+            </a:pPr>
+            <a:r>
+              <a:rPr lang="en-US" sz="2600" b="1" dirty="0">
+                <a:solidFill>
+                  <a:srgbClr val="0E3A5F"/>
+                </a:solidFill>
+                <a:latin typeface="Calibri" pitchFamily="34" charset="0"/>
+                <a:ea typeface="Calibri" pitchFamily="34" charset="-122"/>
+                <a:cs typeface="Calibri" pitchFamily="34" charset="-120"/>
+              </a:rPr>
+              <a:t>Board-Style Review</a:t>
+            </a:r>
+            <a:endParaRPr lang="en-US" sz="2600" dirty="0"/>
+          </a:p>
+        </p:txBody>
+      </p:sp>
+      <p:sp>
+        <p:nvSpPr>
+          <p:cNvPr id="4" name="Text 2"/>
+          <p:cNvSpPr/>
+          <p:nvPr/>
+        </p:nvSpPr>
+        <p:spPr>
+          <a:xfrm>
+            <a:off x="566928" y="1417320"/>
+            <a:ext cx="11057839" cy="914400"/>
+          </a:xfrm>
+          <a:prstGeom prst="rect">
+            <a:avLst/>
+          </a:prstGeom>
+          <a:noFill/>
+          <a:ln/>
+        </p:spPr>
+        <p:txBody>
+          <a:bodyPr wrap="square" lIns="0" tIns="0" rIns="0" bIns="0" rtlCol="0" anchor="t"/>
+          <a:lstStyle/>
+          <a:p>
+            <a:pPr algn="l" indent="0" marL="0">
+              <a:lnSpc>
+                <a:spcPct val="105000"/>
+              </a:lnSpc>
+              <a:buNone/>
+            </a:pPr>
+            <a:r>
+              <a:rPr lang="en-US" sz="1450" b="1" dirty="0">
+                <a:solidFill>
+                  <a:srgbClr val="1B2A38"/>
+                </a:solidFill>
+                <a:latin typeface="Calibri" pitchFamily="34" charset="0"/>
+                <a:ea typeface="Calibri" pitchFamily="34" charset="-122"/>
+                <a:cs typeface="Calibri" pitchFamily="34" charset="-120"/>
+              </a:rPr>
+              <a:t>The Swiss-cheese model of error emphasizes that harm results from:</a:t>
+            </a:r>
+            <a:endParaRPr lang="en-US" sz="1450" dirty="0"/>
+          </a:p>
+        </p:txBody>
+      </p:sp>
+      <p:sp>
+        <p:nvSpPr>
+          <p:cNvPr id="5" name="Text 3"/>
+          <p:cNvSpPr/>
+          <p:nvPr/>
+        </p:nvSpPr>
+        <p:spPr>
+          <a:xfrm>
+            <a:off x="658368" y="2395728"/>
+            <a:ext cx="6192390" cy="3017520"/>
+          </a:xfrm>
+          <a:prstGeom prst="rect">
+            <a:avLst/>
+          </a:prstGeom>
+          <a:noFill/>
+          <a:ln/>
+        </p:spPr>
+        <p:txBody>
+          <a:bodyPr wrap="square" lIns="0" tIns="0" rIns="0" bIns="0" rtlCol="0" anchor="t"/>
+          <a:lstStyle/>
+          <a:p>
+            <a:pPr algn="l" indent="0" marL="0">
+              <a:spcAft>
+                <a:spcPts val="600"/>
+              </a:spcAft>
+              <a:buNone/>
+            </a:pPr>
+            <a:r>
+              <a:rPr lang="en-US" sz="1350" dirty="0">
+                <a:solidFill>
+                  <a:srgbClr val="33444F"/>
+                </a:solidFill>
+                <a:latin typeface="Calibri" pitchFamily="34" charset="0"/>
+                <a:ea typeface="Calibri" pitchFamily="34" charset="-122"/>
+                <a:cs typeface="Calibri" pitchFamily="34" charset="-120"/>
+              </a:rPr>
+              <a:t>A. A single careless person</a:t>
+            </a:r>
+            <a:endParaRPr lang="en-US" sz="1350" dirty="0"/>
+          </a:p>
+          <a:p>
+            <a:pPr algn="l" indent="0" marL="0">
+              <a:spcAft>
+                <a:spcPts val="600"/>
+              </a:spcAft>
+              <a:buNone/>
+            </a:pPr>
+            <a:r>
+              <a:rPr lang="en-US" sz="1350" b="1" dirty="0">
+                <a:solidFill>
+                  <a:srgbClr val="2C3A41"/>
+                </a:solidFill>
+                <a:latin typeface="Calibri" pitchFamily="34" charset="0"/>
+                <a:ea typeface="Calibri" pitchFamily="34" charset="-122"/>
+                <a:cs typeface="Calibri" pitchFamily="34" charset="-120"/>
+              </a:rPr>
+              <a:t>B. Alignment of multiple failed defenses</a:t>
+            </a:r>
+            <a:endParaRPr lang="en-US" sz="1350" dirty="0"/>
+          </a:p>
+          <a:p>
+            <a:pPr algn="l" indent="0" marL="0">
+              <a:spcAft>
+                <a:spcPts val="600"/>
+              </a:spcAft>
+              <a:buNone/>
+            </a:pPr>
+            <a:r>
+              <a:rPr lang="en-US" sz="1350" dirty="0">
+                <a:solidFill>
+                  <a:srgbClr val="33444F"/>
+                </a:solidFill>
+                <a:latin typeface="Calibri" pitchFamily="34" charset="0"/>
+                <a:ea typeface="Calibri" pitchFamily="34" charset="-122"/>
+                <a:cs typeface="Calibri" pitchFamily="34" charset="-120"/>
+              </a:rPr>
+              <a:t>C. Only analytic errors</a:t>
+            </a:r>
+            <a:endParaRPr lang="en-US" sz="1350" dirty="0"/>
+          </a:p>
+          <a:p>
+            <a:pPr algn="l" indent="0" marL="0">
+              <a:spcAft>
+                <a:spcPts val="600"/>
+              </a:spcAft>
+              <a:buNone/>
+            </a:pPr>
+            <a:r>
+              <a:rPr lang="en-US" sz="1350" dirty="0">
+                <a:solidFill>
+                  <a:srgbClr val="33444F"/>
+                </a:solidFill>
+                <a:latin typeface="Calibri" pitchFamily="34" charset="0"/>
+                <a:ea typeface="Calibri" pitchFamily="34" charset="-122"/>
+                <a:cs typeface="Calibri" pitchFamily="34" charset="-120"/>
+              </a:rPr>
+              <a:t>D. Random chance alone</a:t>
+            </a:r>
+            <a:endParaRPr lang="en-US" sz="1350" dirty="0"/>
+          </a:p>
+          <a:p>
+            <a:pPr algn="l" indent="0" marL="0">
+              <a:spcAft>
+                <a:spcPts val="600"/>
+              </a:spcAft>
+              <a:buNone/>
+            </a:pPr>
+            <a:r>
+              <a:rPr lang="en-US" sz="1350" dirty="0">
+                <a:solidFill>
+                  <a:srgbClr val="33444F"/>
+                </a:solidFill>
+                <a:latin typeface="Calibri" pitchFamily="34" charset="0"/>
+                <a:ea typeface="Calibri" pitchFamily="34" charset="-122"/>
+                <a:cs typeface="Calibri" pitchFamily="34" charset="-120"/>
+              </a:rPr>
+              <a:t>E. Inadequate discipline</a:t>
+            </a:r>
+            <a:endParaRPr lang="en-US" sz="1350" dirty="0"/>
+          </a:p>
+        </p:txBody>
+      </p:sp>
+      <p:sp>
+        <p:nvSpPr>
+          <p:cNvPr id="6" name="Shape 4"/>
+          <p:cNvSpPr/>
+          <p:nvPr/>
+        </p:nvSpPr>
+        <p:spPr>
+          <a:xfrm>
+            <a:off x="7201632" y="2395728"/>
+            <a:ext cx="4423136" cy="3246120"/>
+          </a:xfrm>
+          <a:prstGeom prst="roundRect">
+            <a:avLst>
+              <a:gd name="adj" fmla="val 2535"/>
+            </a:avLst>
+          </a:prstGeom>
+          <a:solidFill>
+            <a:srgbClr val="ECEFF1"/>
+          </a:solidFill>
+          <a:ln/>
+          <a:effectLst>
+            <a:outerShdw sx="100000" sy="100000" kx="0" ky="0" algn="bl" rotWithShape="0" blurRad="88900" dist="25400" dir="5400000">
+              <a:srgbClr val="22303C">
+                <a:alpha val="12000"/>
+              </a:srgbClr>
+            </a:outerShdw>
+          </a:effectLst>
+        </p:spPr>
+        <p:txBody>
+          <a:bodyPr/>
+          <a:p/>
+        </p:txBody>
+      </p:sp>
+      <p:sp>
+        <p:nvSpPr>
+          <p:cNvPr id="7" name="Text 5"/>
+          <p:cNvSpPr/>
+          <p:nvPr/>
+        </p:nvSpPr>
+        <p:spPr>
+          <a:xfrm>
+            <a:off x="7439376" y="2578608"/>
+            <a:ext cx="3965936" cy="457200"/>
+          </a:xfrm>
+          <a:prstGeom prst="rect">
+            <a:avLst/>
+          </a:prstGeom>
+          <a:noFill/>
+          <a:ln/>
+        </p:spPr>
+        <p:txBody>
+          <a:bodyPr wrap="square" lIns="0" tIns="0" rIns="0" bIns="0" rtlCol="0" anchor="ctr"/>
+          <a:lstStyle/>
+          <a:p>
+            <a:pPr indent="0" marL="0">
+              <a:buNone/>
+            </a:pPr>
+            <a:r>
+              <a:rPr lang="en-US" sz="1500" b="1" dirty="0">
+                <a:solidFill>
+                  <a:srgbClr val="455A64"/>
+                </a:solidFill>
+                <a:latin typeface="Calibri" pitchFamily="34" charset="0"/>
+                <a:ea typeface="Calibri" pitchFamily="34" charset="-122"/>
+                <a:cs typeface="Calibri" pitchFamily="34" charset="-120"/>
+              </a:rPr>
+              <a:t>ANSWER  </a:t>
+            </a:r>
+            <a:pPr indent="0" marL="0">
+              <a:buNone/>
+            </a:pPr>
+            <a:r>
+              <a:rPr lang="en-US" sz="1500" b="1" dirty="0">
+                <a:solidFill>
+                  <a:srgbClr val="1B2A38"/>
+                </a:solidFill>
+                <a:latin typeface="Calibri" pitchFamily="34" charset="0"/>
+                <a:ea typeface="Calibri" pitchFamily="34" charset="-122"/>
+                <a:cs typeface="Calibri" pitchFamily="34" charset="-120"/>
+              </a:rPr>
+              <a:t>B — Multiple failed defenses</a:t>
+            </a:r>
+            <a:endParaRPr lang="en-US" sz="1500" dirty="0"/>
+          </a:p>
+        </p:txBody>
+      </p:sp>
+      <p:sp>
+        <p:nvSpPr>
+          <p:cNvPr id="8" name="Text 6"/>
+          <p:cNvSpPr/>
+          <p:nvPr/>
+        </p:nvSpPr>
+        <p:spPr>
+          <a:xfrm>
+            <a:off x="7439376" y="3127248"/>
+            <a:ext cx="3947648" cy="2377440"/>
+          </a:xfrm>
+          <a:prstGeom prst="rect">
+            <a:avLst/>
+          </a:prstGeom>
+          <a:noFill/>
+          <a:ln/>
+        </p:spPr>
+        <p:txBody>
+          <a:bodyPr wrap="square" lIns="0" tIns="0" rIns="0" bIns="0" rtlCol="0" anchor="t"/>
+          <a:lstStyle/>
+          <a:p>
+            <a:pPr algn="l" indent="0" marL="0">
+              <a:lnSpc>
+                <a:spcPct val="108000"/>
+              </a:lnSpc>
+              <a:buNone/>
+            </a:pPr>
+            <a:r>
+              <a:rPr lang="en-US" sz="1250" dirty="0">
+                <a:solidFill>
+                  <a:srgbClr val="33444F"/>
+                </a:solidFill>
+                <a:latin typeface="Calibri" pitchFamily="34" charset="0"/>
+                <a:ea typeface="Calibri" pitchFamily="34" charset="-122"/>
+                <a:cs typeface="Calibri" pitchFamily="34" charset="-120"/>
+              </a:rPr>
+              <a:t>Harm occurs when latent and active failures line up through several weakened barriers.</a:t>
+            </a:r>
+            <a:endParaRPr lang="en-US" sz="1250" dirty="0"/>
+          </a:p>
+        </p:txBody>
+      </p:sp>
+      <p:sp>
+        <p:nvSpPr>
+          <p:cNvPr id="9" name="Text 7"/>
+          <p:cNvSpPr/>
+          <p:nvPr/>
+        </p:nvSpPr>
+        <p:spPr>
+          <a:xfrm>
+            <a:off x="566928" y="6473952"/>
+            <a:ext cx="7772400" cy="274320"/>
+          </a:xfrm>
+          <a:prstGeom prst="rect">
+            <a:avLst/>
+          </a:prstGeom>
+          <a:noFill/>
+          <a:ln/>
+        </p:spPr>
+        <p:txBody>
+          <a:bodyPr wrap="square" lIns="0" tIns="0" rIns="0" bIns="0" rtlCol="0" anchor="ctr"/>
+          <a:lstStyle/>
+          <a:p>
+            <a:pPr algn="l" indent="0" marL="0">
+              <a:buNone/>
+            </a:pPr>
+            <a:r>
+              <a:rPr lang="en-US" sz="850" dirty="0">
+                <a:solidFill>
+                  <a:srgbClr val="9AA8B4"/>
+                </a:solidFill>
+                <a:latin typeface="Calibri" pitchFamily="34" charset="0"/>
+                <a:ea typeface="Calibri" pitchFamily="34" charset="-122"/>
+                <a:cs typeface="Calibri" pitchFamily="34" charset="-120"/>
+              </a:rPr>
+              <a:t>Makassed General Hospital  ·  Department of Laboratory Medicine</a:t>
+            </a:r>
+            <a:endParaRPr lang="en-US" sz="850" dirty="0"/>
+          </a:p>
+        </p:txBody>
+      </p:sp>
+      <p:sp>
+        <p:nvSpPr>
+          <p:cNvPr id="10" name="Text 8"/>
+          <p:cNvSpPr/>
+          <p:nvPr/>
+        </p:nvSpPr>
+        <p:spPr>
+          <a:xfrm>
+            <a:off x="9814255" y="6473952"/>
+            <a:ext cx="1828800" cy="274320"/>
+          </a:xfrm>
+          <a:prstGeom prst="rect">
+            <a:avLst/>
+          </a:prstGeom>
+          <a:noFill/>
+          <a:ln/>
+        </p:spPr>
+        <p:txBody>
+          <a:bodyPr wrap="square" lIns="0" tIns="0" rIns="0" bIns="0" rtlCol="0" anchor="ctr"/>
+          <a:lstStyle/>
+          <a:p>
+            <a:pPr algn="r" indent="0" marL="0">
+              <a:buNone/>
+            </a:pPr>
+            <a:r>
+              <a:rPr lang="en-US" sz="850" dirty="0">
+                <a:solidFill>
+                  <a:srgbClr val="9AA8B4"/>
+                </a:solidFill>
+                <a:latin typeface="Calibri" pitchFamily="34" charset="0"/>
+                <a:ea typeface="Calibri" pitchFamily="34" charset="-122"/>
+                <a:cs typeface="Calibri" pitchFamily="34" charset="-120"/>
+              </a:rPr>
+              <a:t>CP Lecture Series</a:t>
+            </a:r>
+            <a:pPr algn="r" indent="0" marL="0">
+              <a:buNone/>
+            </a:pPr>
+            <a:r>
+              <a:rPr lang="en-US" sz="850" dirty="0">
+                <a:solidFill>
+                  <a:srgbClr val="DCE4EC"/>
+                </a:solidFill>
+                <a:latin typeface="Calibri" pitchFamily="34" charset="0"/>
+                <a:ea typeface="Calibri" pitchFamily="34" charset="-122"/>
+                <a:cs typeface="Calibri" pitchFamily="34" charset="-120"/>
+              </a:rPr>
+              <a:t>   ·   </a:t>
+            </a:r>
+            <a:pPr algn="r" indent="0" marL="0">
+              <a:buNone/>
+            </a:pPr>
+            <a:r>
+              <a:rPr lang="en-US" sz="850" b="1" dirty="0">
+                <a:solidFill>
+                  <a:srgbClr val="455A64"/>
+                </a:solidFill>
+                <a:latin typeface="Calibri" pitchFamily="34" charset="0"/>
+                <a:ea typeface="Calibri" pitchFamily="34" charset="-122"/>
+                <a:cs typeface="Calibri" pitchFamily="34" charset="-120"/>
+              </a:rPr>
+              <a:t>17</a:t>
+            </a:r>
+            <a:endParaRPr lang="en-US" sz="850" dirty="0"/>
+          </a:p>
+        </p:txBody>
+      </p:sp>
+    </p:spTree>
+  </p:cSld>
+  <p:clrMapOvr>
+    <a:masterClrMapping/>
+  </p:clrMapOvr>
+</p:sld>
+</file>
+
 <file path=ppt/slides/slide3.xml><?xml version="1.0" encoding="utf-8"?>
 <p:sld xmlns:a="http://schemas.openxmlformats.org/drawingml/2006/main" xmlns:r="http://schemas.openxmlformats.org/officeDocument/2006/relationships" xmlns:p="http://schemas.openxmlformats.org/presentationml/2006/main">
   <p:cSld name="Slide 3">
@@ -11551,6 +13171,10 @@
             </a:outerShdw>
           </a:effectLst>
         </p:spPr>
+        <p:txBody>
+          <a:bodyPr/>
+          <a:p/>
+        </p:txBody>
       </p:sp>
       <p:sp>
         <p:nvSpPr>
@@ -11578,6 +13202,10 @@
             </a:outerShdw>
           </a:effectLst>
         </p:spPr>
+        <p:txBody>
+          <a:bodyPr/>
+          <a:p/>
+        </p:txBody>
       </p:sp>
       <p:sp>
         <p:nvSpPr>
@@ -11685,6 +13313,10 @@
             </a:outerShdw>
           </a:effectLst>
         </p:spPr>
+        <p:txBody>
+          <a:bodyPr/>
+          <a:p/>
+        </p:txBody>
       </p:sp>
       <p:sp>
         <p:nvSpPr>
@@ -11712,6 +13344,10 @@
             </a:outerShdw>
           </a:effectLst>
         </p:spPr>
+        <p:txBody>
+          <a:bodyPr/>
+          <a:p/>
+        </p:txBody>
       </p:sp>
       <p:sp>
         <p:nvSpPr>
@@ -11819,6 +13455,10 @@
             </a:outerShdw>
           </a:effectLst>
         </p:spPr>
+        <p:txBody>
+          <a:bodyPr/>
+          <a:p/>
+        </p:txBody>
       </p:sp>
       <p:sp>
         <p:nvSpPr>
@@ -11846,6 +13486,10 @@
             </a:outerShdw>
           </a:effectLst>
         </p:spPr>
+        <p:txBody>
+          <a:bodyPr/>
+          <a:p/>
+        </p:txBody>
       </p:sp>
       <p:sp>
         <p:nvSpPr>
@@ -11953,6 +13597,10 @@
             </a:outerShdw>
           </a:effectLst>
         </p:spPr>
+        <p:txBody>
+          <a:bodyPr/>
+          <a:p/>
+        </p:txBody>
       </p:sp>
       <p:sp>
         <p:nvSpPr>
@@ -11980,6 +13628,10 @@
             </a:outerShdw>
           </a:effectLst>
         </p:spPr>
+        <p:txBody>
+          <a:bodyPr/>
+          <a:p/>
+        </p:txBody>
       </p:sp>
       <p:sp>
         <p:nvSpPr>
@@ -12087,6 +13739,10 @@
             </a:outerShdw>
           </a:effectLst>
         </p:spPr>
+        <p:txBody>
+          <a:bodyPr/>
+          <a:p/>
+        </p:txBody>
       </p:sp>
       <p:sp>
         <p:nvSpPr>
@@ -12114,6 +13770,10 @@
             </a:outerShdw>
           </a:effectLst>
         </p:spPr>
+        <p:txBody>
+          <a:bodyPr/>
+          <a:p/>
+        </p:txBody>
       </p:sp>
       <p:sp>
         <p:nvSpPr>
@@ -12221,6 +13881,10 @@
             </a:outerShdw>
           </a:effectLst>
         </p:spPr>
+        <p:txBody>
+          <a:bodyPr/>
+          <a:p/>
+        </p:txBody>
       </p:sp>
       <p:sp>
         <p:nvSpPr>
@@ -12248,6 +13912,10 @@
             </a:outerShdw>
           </a:effectLst>
         </p:spPr>
+        <p:txBody>
+          <a:bodyPr/>
+          <a:p/>
+        </p:txBody>
       </p:sp>
       <p:sp>
         <p:nvSpPr>
@@ -12571,6 +14239,10 @@
             </a:outerShdw>
           </a:effectLst>
         </p:spPr>
+        <p:txBody>
+          <a:bodyPr/>
+          <a:p/>
+        </p:txBody>
       </p:sp>
       <p:sp>
         <p:nvSpPr>
@@ -12598,6 +14270,10 @@
             </a:outerShdw>
           </a:effectLst>
         </p:spPr>
+        <p:txBody>
+          <a:bodyPr/>
+          <a:p/>
+        </p:txBody>
       </p:sp>
       <p:sp>
         <p:nvSpPr>
@@ -12712,6 +14388,10 @@
           </a:solidFill>
           <a:ln/>
         </p:spPr>
+        <p:txBody>
+          <a:bodyPr/>
+          <a:p/>
+        </p:txBody>
       </p:sp>
       <p:sp>
         <p:nvSpPr>
@@ -12739,6 +14419,10 @@
             </a:outerShdw>
           </a:effectLst>
         </p:spPr>
+        <p:txBody>
+          <a:bodyPr/>
+          <a:p/>
+        </p:txBody>
       </p:sp>
       <p:sp>
         <p:nvSpPr>
@@ -12860,6 +14544,10 @@
             </a:outerShdw>
           </a:effectLst>
         </p:spPr>
+        <p:txBody>
+          <a:bodyPr/>
+          <a:p/>
+        </p:txBody>
       </p:sp>
       <p:sp>
         <p:nvSpPr>
@@ -12887,6 +14575,10 @@
             </a:outerShdw>
           </a:effectLst>
         </p:spPr>
+        <p:txBody>
+          <a:bodyPr/>
+          <a:p/>
+        </p:txBody>
       </p:sp>
       <p:sp>
         <p:nvSpPr>
@@ -13001,6 +14693,10 @@
           </a:solidFill>
           <a:ln/>
         </p:spPr>
+        <p:txBody>
+          <a:bodyPr/>
+          <a:p/>
+        </p:txBody>
       </p:sp>
       <p:sp>
         <p:nvSpPr>
@@ -13028,6 +14724,10 @@
             </a:outerShdw>
           </a:effectLst>
         </p:spPr>
+        <p:txBody>
+          <a:bodyPr/>
+          <a:p/>
+        </p:txBody>
       </p:sp>
       <p:sp>
         <p:nvSpPr>
@@ -13149,6 +14849,10 @@
             </a:outerShdw>
           </a:effectLst>
         </p:spPr>
+        <p:txBody>
+          <a:bodyPr/>
+          <a:p/>
+        </p:txBody>
       </p:sp>
       <p:sp>
         <p:nvSpPr>
@@ -13176,6 +14880,10 @@
             </a:outerShdw>
           </a:effectLst>
         </p:spPr>
+        <p:txBody>
+          <a:bodyPr/>
+          <a:p/>
+        </p:txBody>
       </p:sp>
       <p:sp>
         <p:nvSpPr>
@@ -13414,6 +15122,10 @@
           </a:solidFill>
           <a:ln/>
         </p:spPr>
+        <p:txBody>
+          <a:bodyPr/>
+          <a:p/>
+        </p:txBody>
       </p:sp>
       <p:sp>
         <p:nvSpPr>
@@ -13436,6 +15148,10 @@
           </a:solidFill>
           <a:ln/>
         </p:spPr>
+        <p:txBody>
+          <a:bodyPr/>
+          <a:p/>
+        </p:txBody>
       </p:sp>
       <p:sp>
         <p:nvSpPr>
@@ -13697,6 +15413,10 @@
             </a:outerShdw>
           </a:effectLst>
         </p:spPr>
+        <p:txBody>
+          <a:bodyPr/>
+          <a:p/>
+        </p:txBody>
       </p:sp>
       <p:pic>
         <p:nvPicPr>
@@ -14005,6 +15725,10 @@
             </a:outerShdw>
           </a:effectLst>
         </p:spPr>
+        <p:txBody>
+          <a:bodyPr/>
+          <a:p/>
+        </p:txBody>
       </p:sp>
       <p:sp>
         <p:nvSpPr>
@@ -14179,6 +15903,10 @@
             </a:outerShdw>
           </a:effectLst>
         </p:spPr>
+        <p:txBody>
+          <a:bodyPr/>
+          <a:p/>
+        </p:txBody>
       </p:sp>
       <p:sp>
         <p:nvSpPr>
@@ -14569,6 +16297,10 @@
             </a:outerShdw>
           </a:effectLst>
         </p:spPr>
+        <p:txBody>
+          <a:bodyPr/>
+          <a:p/>
+        </p:txBody>
       </p:sp>
       <p:sp>
         <p:nvSpPr>
@@ -14743,6 +16475,10 @@
             </a:outerShdw>
           </a:effectLst>
         </p:spPr>
+        <p:txBody>
+          <a:bodyPr/>
+          <a:p/>
+        </p:txBody>
       </p:sp>
       <p:sp>
         <p:nvSpPr>
@@ -15048,6 +16784,10 @@
           </a:solidFill>
           <a:ln/>
         </p:spPr>
+        <p:txBody>
+          <a:bodyPr/>
+          <a:p/>
+        </p:txBody>
       </p:sp>
       <p:sp>
         <p:nvSpPr>
@@ -15070,6 +16810,10 @@
           </a:solidFill>
           <a:ln/>
         </p:spPr>
+        <p:txBody>
+          <a:bodyPr/>
+          <a:p/>
+        </p:txBody>
       </p:sp>
       <p:sp>
         <p:nvSpPr>
